--- a/Playa-Vista-ASC-Investor-Deck.pptx
+++ b/Playa-Vista-ASC-Investor-Deck.pptx
@@ -4,6 +4,9 @@
   <p:sldMasterIdLst>
     <p:sldMasterId id="2147483648" r:id="rId1"/>
   </p:sldMasterIdLst>
+  <p:notesMasterIdLst>
+    <p:notesMasterId r:id="rId19"/>
+  </p:notesMasterIdLst>
   <p:sldIdLst>
     <p:sldId id="256" r:id="rId2"/>
     <p:sldId id="257" r:id="rId3"/>
@@ -23,9 +26,6 @@
     <p:sldId id="271" r:id="rId17"/>
     <p:sldId id="272" r:id="rId18"/>
   </p:sldIdLst>
-  <p:notesMasterIdLst>
-    <p:notesMasterId r:id="rId19"/>
-  </p:notesMasterIdLst>
   <p:sldSz cx="12192000" cy="6858000"/>
   <p:notesSz cx="6858000" cy="12192000"/>
   <p:defaultTextStyle>
@@ -120,13 +120,20 @@
       </a:defRPr>
     </a:lvl9pPr>
   </p:defaultTextStyle>
+  <p:extLst>
+    <p:ext uri="{EFAFB233-063F-42B5-8137-9DF3F51BA10A}">
+      <p15:sldGuideLst xmlns:p15="http://schemas.microsoft.com/office/powerpoint/2012/main"/>
+    </p:ext>
+  </p:extLst>
 </p:presentation>
 </file>
 
 <file path=ppt/charts/chart1.xml><?xml version="1.0" encoding="utf-8"?>
-<c:chartSpace xmlns:c="http://schemas.openxmlformats.org/drawingml/2006/chart" xmlns:a="http://schemas.openxmlformats.org/drawingml/2006/main" xmlns:r="http://schemas.openxmlformats.org/officeDocument/2006/relationships">
+<c:chartSpace xmlns:c="http://schemas.openxmlformats.org/drawingml/2006/chart" xmlns:a="http://schemas.openxmlformats.org/drawingml/2006/main" xmlns:r="http://schemas.openxmlformats.org/officeDocument/2006/relationships" xmlns:c16r2="http://schemas.microsoft.com/office/drawing/2015/06/chart">
   <c:date1904 val="0"/>
+  <c:lang val="en-US"/>
   <c:roundedCorners val="1"/>
+  <c:style val="2"/>
   <c:chart>
     <c:autoTitleDeleted val="1"/>
     <c:plotArea>
@@ -157,19 +164,27 @@
           </c:spPr>
           <c:invertIfNegative val="0"/>
           <c:dLbls>
-            <c:numFmt formatCode="$#,##0&quot;K&quot;" sourceLinked="0"/>
+            <c:numFmt formatCode="\$#,##0&quot;K&quot;" sourceLinked="0"/>
+            <c:spPr>
+              <a:noFill/>
+              <a:ln>
+                <a:noFill/>
+              </a:ln>
+              <a:effectLst/>
+            </c:spPr>
             <c:txPr>
               <a:bodyPr/>
               <a:lstStyle/>
               <a:p>
                 <a:pPr>
-                  <a:defRPr b="0" i="0" strike="noStrike" sz="1000" u="none">
+                  <a:defRPr sz="1000" b="0" i="0" u="none" strike="noStrike">
                     <a:solidFill>
                       <a:srgbClr val="FFFFFF"/>
                     </a:solidFill>
                     <a:latin typeface="Calibri"/>
                   </a:defRPr>
                 </a:pPr>
+                <a:endParaRPr lang="en-US"/>
               </a:p>
             </c:txPr>
             <c:showLegendKey val="0"/>
@@ -179,37 +194,40 @@
             <c:showPercent val="0"/>
             <c:showBubbleSize val="0"/>
             <c:showLeaderLines val="0"/>
+            <c:extLst>
+              <c:ext xmlns:c15="http://schemas.microsoft.com/office/drawing/2012/chart" uri="{CE6537A1-D6FC-4f65-9D91-7224C49458BB}">
+                <c15:showLeaderLines val="0"/>
+              </c:ext>
+            </c:extLst>
           </c:dLbls>
           <c:cat>
-            <c:multiLvlStrRef>
+            <c:strRef>
               <c:f>Sheet1!$A$2:$A$8</c:f>
-              <c:multiLvlStrCache>
+              <c:strCache>
                 <c:ptCount val="7"/>
-                <c:lvl>
-                  <c:pt idx="0">
-                    <c:v>Mo 0–3</c:v>
-                  </c:pt>
-                  <c:pt idx="1">
-                    <c:v>Mo 3–6</c:v>
-                  </c:pt>
-                  <c:pt idx="2">
-                    <c:v>Mo 6–12</c:v>
-                  </c:pt>
-                  <c:pt idx="3">
-                    <c:v>Mo 12–16</c:v>
-                  </c:pt>
-                  <c:pt idx="4">
-                    <c:v>Mo 16–20</c:v>
-                  </c:pt>
-                  <c:pt idx="5">
-                    <c:v>Mo 20–28</c:v>
-                  </c:pt>
-                  <c:pt idx="6">
-                    <c:v>Mo 28–36</c:v>
-                  </c:pt>
-                </c:lvl>
-              </c:multiLvlStrCache>
-            </c:multiLvlStrRef>
+                <c:pt idx="0">
+                  <c:v>Mo 0–3</c:v>
+                </c:pt>
+                <c:pt idx="1">
+                  <c:v>Mo 3–6</c:v>
+                </c:pt>
+                <c:pt idx="2">
+                  <c:v>Mo 6–12</c:v>
+                </c:pt>
+                <c:pt idx="3">
+                  <c:v>Mo 12–16</c:v>
+                </c:pt>
+                <c:pt idx="4">
+                  <c:v>Mo 16–20</c:v>
+                </c:pt>
+                <c:pt idx="5">
+                  <c:v>Mo 20–28</c:v>
+                </c:pt>
+                <c:pt idx="6">
+                  <c:v>Mo 28–36</c:v>
+                </c:pt>
+              </c:strCache>
+            </c:strRef>
           </c:cat>
           <c:val>
             <c:numRef>
@@ -241,36 +259,23 @@
               </c:numCache>
             </c:numRef>
           </c:val>
+          <c:extLst>
+            <c:ext xmlns:c16="http://schemas.microsoft.com/office/drawing/2014/chart" uri="{C3380CC4-5D6E-409C-BE32-E72D297353CC}">
+              <c16:uniqueId val="{00000000-75B9-48BB-AC4A-07871EF5A334}"/>
+            </c:ext>
+          </c:extLst>
         </c:ser>
         <c:dLbls>
-          <c:numFmt formatCode="$#,##0&quot;K&quot;" sourceLinked="0"/>
-          <c:txPr>
-            <a:bodyPr/>
-            <a:lstStyle/>
-            <a:p>
-              <a:pPr>
-                <a:defRPr b="0" i="0" strike="noStrike" sz="1000" u="none">
-                  <a:solidFill>
-                    <a:srgbClr val="FFFFFF"/>
-                  </a:solidFill>
-                  <a:latin typeface="Calibri"/>
-                </a:defRPr>
-              </a:pPr>
-            </a:p>
-          </c:txPr>
           <c:showLegendKey val="0"/>
           <c:showVal val="1"/>
           <c:showCatName val="0"/>
           <c:showSerName val="0"/>
           <c:showPercent val="0"/>
           <c:showBubbleSize val="0"/>
-          <c:showLeaderLines val="0"/>
         </c:dLbls>
         <c:gapWidth val="55"/>
-        <c:overlap val="0"/>
         <c:axId val="2094734554"/>
         <c:axId val="2094734552"/>
-        <c:axId val="2094734556"/>
       </c:barChart>
       <c:catAx>
         <c:axId val="2094734554"/>
@@ -311,6 +316,7 @@
         <c:crosses val="autoZero"/>
         <c:auto val="1"/>
         <c:lblAlgn val="ctr"/>
+        <c:lblOffset val="100"/>
         <c:noMultiLvlLbl val="1"/>
       </c:catAx>
       <c:valAx>
@@ -331,7 +337,7 @@
             </a:ln>
           </c:spPr>
         </c:majorGridlines>
-        <c:numFmt formatCode="$#,##0&quot;K&quot;" sourceLinked="0"/>
+        <c:numFmt formatCode="\$#,##0&quot;K&quot;" sourceLinked="0"/>
         <c:majorTickMark val="out"/>
         <c:minorTickMark val="none"/>
         <c:tickLblPos val="nextTo"/>
@@ -375,6 +381,7 @@
     </c:plotArea>
     <c:plotVisOnly val="1"/>
     <c:dispBlanksAs val="span"/>
+    <c:showDLblsOverMax val="1"/>
   </c:chart>
   <c:spPr>
     <a:solidFill>
@@ -413,234 +420,10 @@
           <a:chExt cx="0" cy="0"/>
         </a:xfrm>
       </p:grpSpPr>
-      <p:sp>
-        <p:nvSpPr>
-          <p:cNvPr id="2" name="Header Placeholder 1"/>
-          <p:cNvSpPr>
-            <a:spLocks noGrp="1"/>
-          </p:cNvSpPr>
-          <p:nvPr>
-            <p:ph type="hdr" sz="quarter"/>
-          </p:nvPr>
-        </p:nvSpPr>
-        <p:spPr>
-          <a:xfrm>
-            <a:off x="0" y="0"/>
-            <a:ext cx="2971800" cy="458788"/>
-          </a:xfrm>
-          <a:prstGeom prst="rect">
-            <a:avLst/>
-          </a:prstGeom>
-        </p:spPr>
-        <p:txBody>
-          <a:bodyPr vert="horz" lIns="91440" tIns="45720" rIns="91440" bIns="45720" rtlCol="0"/>
-          <a:lstStyle>
-            <a:lvl1pPr algn="l">
-              <a:defRPr sz="1200"/>
-            </a:lvl1pPr>
-          </a:lstStyle>
-          <a:p>
-            <a:endParaRPr lang="en-US"/>
-          </a:p>
-        </p:txBody>
-      </p:sp>
-      <p:sp>
-        <p:nvSpPr>
-          <p:cNvPr id="3" name="Date Placeholder 2"/>
-          <p:cNvSpPr>
-            <a:spLocks noGrp="1"/>
-          </p:cNvSpPr>
-          <p:nvPr>
-            <p:ph type="dt" idx="1"/>
-          </p:nvPr>
-        </p:nvSpPr>
-        <p:spPr>
-          <a:xfrm>
-            <a:off x="3884613" y="0"/>
-            <a:ext cx="2971800" cy="458788"/>
-          </a:xfrm>
-          <a:prstGeom prst="rect">
-            <a:avLst/>
-          </a:prstGeom>
-        </p:spPr>
-        <p:txBody>
-          <a:bodyPr vert="horz" lIns="91440" tIns="45720" rIns="91440" bIns="45720" rtlCol="0"/>
-          <a:lstStyle>
-            <a:lvl1pPr algn="r">
-              <a:defRPr sz="1200"/>
-            </a:lvl1pPr>
-          </a:lstStyle>
-          <a:p>
-            <a:fld id="{5282F153-3F37-0F45-9E97-73ACFA13230C}" type="datetimeFigureOut">
-              <a:rPr lang="en-US"/>
-              <a:t>7/23/19</a:t>
-            </a:fld>
-            <a:endParaRPr lang="en-US"/>
-          </a:p>
-        </p:txBody>
-      </p:sp>
-      <p:sp>
-        <p:nvSpPr>
-          <p:cNvPr id="4" name="Slide Image Placeholder 3"/>
-          <p:cNvSpPr>
-            <a:spLocks noGrp="1" noRot="1" noChangeAspect="1"/>
-          </p:cNvSpPr>
-          <p:nvPr>
-            <p:ph type="sldImg" idx="2"/>
-          </p:nvPr>
-        </p:nvSpPr>
-        <p:spPr>
-          <a:xfrm>
-            <a:off x="685800" y="1143000"/>
-            <a:ext cx="5486400" cy="3086100"/>
-          </a:xfrm>
-          <a:prstGeom prst="rect">
-            <a:avLst/>
-          </a:prstGeom>
-          <a:noFill/>
-          <a:ln w="12700">
-            <a:solidFill>
-              <a:prstClr val="black"/>
-            </a:solidFill>
-          </a:ln>
-        </p:spPr>
-        <p:txBody>
-          <a:bodyPr vert="horz" lIns="91440" tIns="45720" rIns="91440" bIns="45720" rtlCol="0" anchor="ctr"/>
-          <a:lstStyle/>
-          <a:p>
-            <a:endParaRPr lang="en-US"/>
-          </a:p>
-        </p:txBody>
-      </p:sp>
-      <p:sp>
-        <p:nvSpPr>
-          <p:cNvPr id="5" name="Notes Placeholder 4"/>
-          <p:cNvSpPr>
-            <a:spLocks noGrp="1"/>
-          </p:cNvSpPr>
-          <p:nvPr>
-            <p:ph type="body" sz="quarter" idx="3"/>
-          </p:nvPr>
-        </p:nvSpPr>
-        <p:spPr>
-          <a:xfrm>
-            <a:off x="685800" y="4400550"/>
-            <a:ext cx="5486400" cy="3600450"/>
-          </a:xfrm>
-          <a:prstGeom prst="rect">
-            <a:avLst/>
-          </a:prstGeom>
-        </p:spPr>
-        <p:txBody>
-          <a:bodyPr vert="horz" lIns="91440" tIns="45720" rIns="91440" bIns="45720" rtlCol="0"/>
-          <a:lstStyle/>
-          <a:p>
-            <a:pPr lvl="0"/>
-            <a:r>
-              <a:rPr lang="en-US"/>
-              <a:t>Click to edit Master text styles</a:t>
-            </a:r>
-          </a:p>
-          <a:p>
-            <a:pPr lvl="1"/>
-            <a:r>
-              <a:rPr lang="en-US"/>
-              <a:t>Second level</a:t>
-            </a:r>
-          </a:p>
-          <a:p>
-            <a:pPr lvl="2"/>
-            <a:r>
-              <a:rPr lang="en-US"/>
-              <a:t>Third level</a:t>
-            </a:r>
-          </a:p>
-          <a:p>
-            <a:pPr lvl="3"/>
-            <a:r>
-              <a:rPr lang="en-US"/>
-              <a:t>Fourth level</a:t>
-            </a:r>
-          </a:p>
-          <a:p>
-            <a:pPr lvl="4"/>
-            <a:r>
-              <a:rPr lang="en-US"/>
-              <a:t>Fifth level</a:t>
-            </a:r>
-          </a:p>
-        </p:txBody>
-      </p:sp>
-      <p:sp>
-        <p:nvSpPr>
-          <p:cNvPr id="6" name="Footer Placeholder 5"/>
-          <p:cNvSpPr>
-            <a:spLocks noGrp="1"/>
-          </p:cNvSpPr>
-          <p:nvPr>
-            <p:ph type="ftr" sz="quarter" idx="4"/>
-          </p:nvPr>
-        </p:nvSpPr>
-        <p:spPr>
-          <a:xfrm>
-            <a:off x="0" y="8685213"/>
-            <a:ext cx="2971800" cy="458787"/>
-          </a:xfrm>
-          <a:prstGeom prst="rect">
-            <a:avLst/>
-          </a:prstGeom>
-        </p:spPr>
-        <p:txBody>
-          <a:bodyPr vert="horz" lIns="91440" tIns="45720" rIns="91440" bIns="45720" rtlCol="0" anchor="b"/>
-          <a:lstStyle>
-            <a:lvl1pPr algn="l">
-              <a:defRPr sz="1200"/>
-            </a:lvl1pPr>
-          </a:lstStyle>
-          <a:p>
-            <a:endParaRPr lang="en-US"/>
-          </a:p>
-        </p:txBody>
-      </p:sp>
-      <p:sp>
-        <p:nvSpPr>
-          <p:cNvPr id="7" name="Slide Number Placeholder 6"/>
-          <p:cNvSpPr>
-            <a:spLocks noGrp="1"/>
-          </p:cNvSpPr>
-          <p:nvPr>
-            <p:ph type="sldNum" sz="quarter" idx="5"/>
-          </p:nvPr>
-        </p:nvSpPr>
-        <p:spPr>
-          <a:xfrm>
-            <a:off x="3884613" y="8685213"/>
-            <a:ext cx="2971800" cy="458787"/>
-          </a:xfrm>
-          <a:prstGeom prst="rect">
-            <a:avLst/>
-          </a:prstGeom>
-        </p:spPr>
-        <p:txBody>
-          <a:bodyPr vert="horz" lIns="91440" tIns="45720" rIns="91440" bIns="45720" rtlCol="0" anchor="b"/>
-          <a:lstStyle>
-            <a:lvl1pPr algn="r">
-              <a:defRPr sz="1200"/>
-            </a:lvl1pPr>
-          </a:lstStyle>
-          <a:p>
-            <a:fld id="{CE5E9CC1-C706-0F49-92D6-E571CC5EEA8F}" type="slidenum">
-              <a:rPr lang="en-US"/>
-              <a:t>‹#›</a:t>
-            </a:fld>
-            <a:endParaRPr lang="en-US"/>
-          </a:p>
-        </p:txBody>
-      </p:sp>
     </p:spTree>
     <p:extLst>
       <p:ext uri="{BB962C8B-B14F-4D97-AF65-F5344CB8AC3E}">
-        <p14:creationId xmlns:p14="http://schemas.microsoft.com/office/powerpoint/2010/main" val="1024086991"/>
+        <p14:creationId xmlns:p14="http://schemas.microsoft.com/office/powerpoint/2010/main" val="3167112693"/>
       </p:ext>
     </p:extLst>
   </p:cSld>
@@ -784,10 +567,6 @@
           <a:bodyPr/>
           <a:lstStyle/>
           <a:p>
-            <a:r>
-              <a:rPr lang="en-US" dirty="0"/>
-              <a:t/>
-            </a:r>
             <a:endParaRPr lang="en-US" dirty="0"/>
           </a:p>
         </p:txBody>
@@ -872,10 +651,6 @@
           <a:bodyPr/>
           <a:lstStyle/>
           <a:p>
-            <a:r>
-              <a:rPr lang="en-US" dirty="0"/>
-              <a:t/>
-            </a:r>
             <a:endParaRPr lang="en-US" dirty="0"/>
           </a:p>
         </p:txBody>
@@ -960,10 +735,6 @@
           <a:bodyPr/>
           <a:lstStyle/>
           <a:p>
-            <a:r>
-              <a:rPr lang="en-US" dirty="0"/>
-              <a:t/>
-            </a:r>
             <a:endParaRPr lang="en-US" dirty="0"/>
           </a:p>
         </p:txBody>
@@ -1048,10 +819,6 @@
           <a:bodyPr/>
           <a:lstStyle/>
           <a:p>
-            <a:r>
-              <a:rPr lang="en-US" dirty="0"/>
-              <a:t/>
-            </a:r>
             <a:endParaRPr lang="en-US" dirty="0"/>
           </a:p>
         </p:txBody>
@@ -1136,10 +903,6 @@
           <a:bodyPr/>
           <a:lstStyle/>
           <a:p>
-            <a:r>
-              <a:rPr lang="en-US" dirty="0"/>
-              <a:t/>
-            </a:r>
             <a:endParaRPr lang="en-US" dirty="0"/>
           </a:p>
         </p:txBody>
@@ -1224,10 +987,6 @@
           <a:bodyPr/>
           <a:lstStyle/>
           <a:p>
-            <a:r>
-              <a:rPr lang="en-US" dirty="0"/>
-              <a:t/>
-            </a:r>
             <a:endParaRPr lang="en-US" dirty="0"/>
           </a:p>
         </p:txBody>
@@ -1312,10 +1071,6 @@
           <a:bodyPr/>
           <a:lstStyle/>
           <a:p>
-            <a:r>
-              <a:rPr lang="en-US" dirty="0"/>
-              <a:t/>
-            </a:r>
             <a:endParaRPr lang="en-US" dirty="0"/>
           </a:p>
         </p:txBody>
@@ -1400,10 +1155,6 @@
           <a:bodyPr/>
           <a:lstStyle/>
           <a:p>
-            <a:r>
-              <a:rPr lang="en-US" dirty="0"/>
-              <a:t/>
-            </a:r>
             <a:endParaRPr lang="en-US" dirty="0"/>
           </a:p>
         </p:txBody>
@@ -1488,10 +1239,6 @@
           <a:bodyPr/>
           <a:lstStyle/>
           <a:p>
-            <a:r>
-              <a:rPr lang="en-US" dirty="0"/>
-              <a:t/>
-            </a:r>
             <a:endParaRPr lang="en-US" dirty="0"/>
           </a:p>
         </p:txBody>
@@ -1576,10 +1323,6 @@
           <a:bodyPr/>
           <a:lstStyle/>
           <a:p>
-            <a:r>
-              <a:rPr lang="en-US" dirty="0"/>
-              <a:t/>
-            </a:r>
             <a:endParaRPr lang="en-US" dirty="0"/>
           </a:p>
         </p:txBody>
@@ -1664,10 +1407,6 @@
           <a:bodyPr/>
           <a:lstStyle/>
           <a:p>
-            <a:r>
-              <a:rPr lang="en-US" dirty="0"/>
-              <a:t/>
-            </a:r>
             <a:endParaRPr lang="en-US" dirty="0"/>
           </a:p>
         </p:txBody>
@@ -1752,10 +1491,6 @@
           <a:bodyPr/>
           <a:lstStyle/>
           <a:p>
-            <a:r>
-              <a:rPr lang="en-US" dirty="0"/>
-              <a:t/>
-            </a:r>
             <a:endParaRPr lang="en-US" dirty="0"/>
           </a:p>
         </p:txBody>
@@ -1840,10 +1575,6 @@
           <a:bodyPr/>
           <a:lstStyle/>
           <a:p>
-            <a:r>
-              <a:rPr lang="en-US" dirty="0"/>
-              <a:t/>
-            </a:r>
             <a:endParaRPr lang="en-US" dirty="0"/>
           </a:p>
         </p:txBody>
@@ -1928,10 +1659,6 @@
           <a:bodyPr/>
           <a:lstStyle/>
           <a:p>
-            <a:r>
-              <a:rPr lang="en-US" dirty="0"/>
-              <a:t/>
-            </a:r>
             <a:endParaRPr lang="en-US" dirty="0"/>
           </a:p>
         </p:txBody>
@@ -2016,10 +1743,6 @@
           <a:bodyPr/>
           <a:lstStyle/>
           <a:p>
-            <a:r>
-              <a:rPr lang="en-US" dirty="0"/>
-              <a:t/>
-            </a:r>
             <a:endParaRPr lang="en-US" dirty="0"/>
           </a:p>
         </p:txBody>
@@ -2104,10 +1827,6 @@
           <a:bodyPr/>
           <a:lstStyle/>
           <a:p>
-            <a:r>
-              <a:rPr lang="en-US" dirty="0"/>
-              <a:t/>
-            </a:r>
             <a:endParaRPr lang="en-US" dirty="0"/>
           </a:p>
         </p:txBody>
@@ -2192,10 +1911,6 @@
           <a:bodyPr/>
           <a:lstStyle/>
           <a:p>
-            <a:r>
-              <a:rPr lang="en-US" dirty="0"/>
-              <a:t/>
-            </a:r>
             <a:endParaRPr lang="en-US" dirty="0"/>
           </a:p>
         </p:txBody>
@@ -2269,6 +1984,11 @@
 <file path=ppt/slideMasters/slideMaster1.xml><?xml version="1.0" encoding="utf-8"?>
 <p:sldMaster xmlns:a="http://schemas.openxmlformats.org/drawingml/2006/main" xmlns:r="http://schemas.openxmlformats.org/officeDocument/2006/relationships" xmlns:p="http://schemas.openxmlformats.org/presentationml/2006/main">
   <p:cSld>
+    <p:bg>
+      <p:bgRef idx="1001">
+        <a:schemeClr val="bg1"/>
+      </p:bgRef>
+    </p:bg>
     <p:spTree>
       <p:nvGrpSpPr>
         <p:cNvPr id="1" name=""/>
@@ -2551,6 +2271,7 @@
         <a:solidFill>
           <a:srgbClr val="0A0A0F"/>
         </a:solidFill>
+        <a:effectLst/>
       </p:bgPr>
     </p:bg>
     <p:spTree>
@@ -2674,11 +2395,11 @@
           <a:bodyPr wrap="square" lIns="0" tIns="0" rIns="0" bIns="0" rtlCol="0" anchor="ctr"/>
           <a:lstStyle/>
           <a:p>
-            <a:pPr algn="l" indent="0" marL="0">
-              <a:buNone/>
-            </a:pPr>
-            <a:r>
-              <a:rPr lang="en-US" sz="1100" b="1" spc="300" kern="0" dirty="0">
+            <a:pPr marL="0" indent="0" algn="l">
+              <a:buNone/>
+            </a:pPr>
+            <a:r>
+              <a:rPr lang="en-US" sz="1100" b="1" kern="0" spc="300" dirty="0">
                 <a:solidFill>
                   <a:srgbClr val="B6C800"/>
                 </a:solidFill>
@@ -2713,7 +2434,7 @@
           <a:bodyPr wrap="square" lIns="0" tIns="0" rIns="0" bIns="0" rtlCol="0" anchor="ctr"/>
           <a:lstStyle/>
           <a:p>
-            <a:pPr indent="0" marL="0">
+            <a:pPr marL="0" indent="0">
               <a:lnSpc>
                 <a:spcPct val="98000"/>
               </a:lnSpc>
@@ -2730,7 +2451,21 @@
               </a:rPr>
               <a:t>PLAYA VISTA </a:t>
             </a:r>
-            <a:pPr indent="0" marL="0">
+            <a:r>
+              <a:rPr lang="en-US" sz="5000" b="1" dirty="0">
+                <a:solidFill>
+                  <a:srgbClr val="B6C800"/>
+                </a:solidFill>
+                <a:latin typeface="Georgia" pitchFamily="34" charset="0"/>
+                <a:ea typeface="Georgia" pitchFamily="34" charset="-122"/>
+                <a:cs typeface="Georgia" pitchFamily="34" charset="-120"/>
+              </a:rPr>
+              <a:t>ASC</a:t>
+            </a:r>
+            <a:endParaRPr lang="en-US" sz="5000" dirty="0"/>
+          </a:p>
+          <a:p>
+            <a:pPr marL="0" indent="0">
               <a:lnSpc>
                 <a:spcPct val="98000"/>
               </a:lnSpc>
@@ -2739,74 +2474,196 @@
             <a:r>
               <a:rPr lang="en-US" sz="5000" b="1" dirty="0">
                 <a:solidFill>
-                  <a:srgbClr val="B6C800"/>
+                  <a:srgbClr val="FFFFFF"/>
                 </a:solidFill>
                 <a:latin typeface="Georgia" pitchFamily="34" charset="0"/>
                 <a:ea typeface="Georgia" pitchFamily="34" charset="-122"/>
                 <a:cs typeface="Georgia" pitchFamily="34" charset="-120"/>
               </a:rPr>
-              <a:t>ASC</a:t>
-            </a:r>
-            <a:pPr indent="0" marL="0">
-              <a:lnSpc>
-                <a:spcPct val="98000"/>
-              </a:lnSpc>
-              <a:buNone/>
-            </a:pPr>
+              <a:t>&amp; REJUVENATION CLINIC</a:t>
+            </a:r>
             <a:endParaRPr lang="en-US" sz="5000" dirty="0"/>
           </a:p>
-          <a:p>
-            <a:pPr indent="0" marL="0">
-              <a:lnSpc>
-                <a:spcPct val="98000"/>
-              </a:lnSpc>
-              <a:buNone/>
-            </a:pPr>
-            <a:r>
-              <a:rPr lang="en-US" sz="5000" b="1" dirty="0">
+        </p:txBody>
+      </p:sp>
+      <p:sp>
+        <p:nvSpPr>
+          <p:cNvPr id="8" name="Shape 6"/>
+          <p:cNvSpPr/>
+          <p:nvPr/>
+        </p:nvSpPr>
+        <p:spPr>
+          <a:xfrm>
+            <a:off x="777240" y="3063240"/>
+            <a:ext cx="914400" cy="54864"/>
+          </a:xfrm>
+          <a:prstGeom prst="rect">
+            <a:avLst/>
+          </a:prstGeom>
+          <a:solidFill>
+            <a:srgbClr val="B6C800"/>
+          </a:solidFill>
+          <a:ln/>
+        </p:spPr>
+      </p:sp>
+      <p:sp>
+        <p:nvSpPr>
+          <p:cNvPr id="9" name="Text 7"/>
+          <p:cNvSpPr/>
+          <p:nvPr/>
+        </p:nvSpPr>
+        <p:spPr>
+          <a:xfrm>
+            <a:off x="777240" y="3310128"/>
+            <a:ext cx="10424160" cy="640080"/>
+          </a:xfrm>
+          <a:prstGeom prst="rect">
+            <a:avLst/>
+          </a:prstGeom>
+          <a:noFill/>
+          <a:ln/>
+        </p:spPr>
+        <p:txBody>
+          <a:bodyPr wrap="square" lIns="0" tIns="0" rIns="0" bIns="0" rtlCol="0" anchor="ctr"/>
+          <a:lstStyle/>
+          <a:p>
+            <a:pPr marL="0" indent="0">
+              <a:buNone/>
+            </a:pPr>
+            <a:r>
+              <a:rPr lang="en-US" sz="1900" b="1" dirty="0">
+                <a:solidFill>
+                  <a:srgbClr val="B6C800"/>
+                </a:solidFill>
+                <a:latin typeface="Calibri" pitchFamily="34" charset="0"/>
+                <a:ea typeface="Calibri" pitchFamily="34" charset="-122"/>
+                <a:cs typeface="Calibri" pitchFamily="34" charset="-120"/>
+              </a:rPr>
+              <a:t>Cash-flow positive on the clinic alone</a:t>
+            </a:r>
+            <a:r>
+              <a:rPr lang="en-US" sz="1900" b="1" dirty="0">
                 <a:solidFill>
                   <a:srgbClr val="FFFFFF"/>
+                </a:solidFill>
+                <a:latin typeface="Calibri" pitchFamily="34" charset="0"/>
+                <a:ea typeface="Calibri" pitchFamily="34" charset="-122"/>
+                <a:cs typeface="Calibri" pitchFamily="34" charset="-120"/>
+              </a:rPr>
+              <a:t> — 10+ months before the first OR ever opens.</a:t>
+            </a:r>
+            <a:endParaRPr lang="en-US" sz="1900" dirty="0"/>
+          </a:p>
+        </p:txBody>
+      </p:sp>
+      <p:sp>
+        <p:nvSpPr>
+          <p:cNvPr id="10" name="Text 8"/>
+          <p:cNvSpPr/>
+          <p:nvPr/>
+        </p:nvSpPr>
+        <p:spPr>
+          <a:xfrm>
+            <a:off x="777240" y="3950208"/>
+            <a:ext cx="9692640" cy="731520"/>
+          </a:xfrm>
+          <a:prstGeom prst="rect">
+            <a:avLst/>
+          </a:prstGeom>
+          <a:noFill/>
+          <a:ln/>
+        </p:spPr>
+        <p:txBody>
+          <a:bodyPr wrap="square" lIns="0" tIns="0" rIns="0" bIns="0" rtlCol="0" anchor="ctr"/>
+          <a:lstStyle/>
+          <a:p>
+            <a:pPr marL="0" indent="0">
+              <a:buNone/>
+            </a:pPr>
+            <a:r>
+              <a:rPr lang="en-US" sz="1350" dirty="0">
+                <a:solidFill>
+                  <a:srgbClr val="AEAEC2"/>
+                </a:solidFill>
+                <a:latin typeface="Calibri" pitchFamily="34" charset="0"/>
+                <a:ea typeface="Calibri" pitchFamily="34" charset="-122"/>
+                <a:cs typeface="Calibri" pitchFamily="34" charset="-120"/>
+              </a:rPr>
+              <a:t>A vertically integrated surgical and wellness destination — where longevity programming accelerates surgical outcomes and cash-pay wellness funds the buildout.</a:t>
+            </a:r>
+            <a:endParaRPr lang="en-US" sz="1350" dirty="0"/>
+          </a:p>
+        </p:txBody>
+      </p:sp>
+      <p:sp>
+        <p:nvSpPr>
+          <p:cNvPr id="11" name="Shape 9"/>
+          <p:cNvSpPr/>
+          <p:nvPr/>
+        </p:nvSpPr>
+        <p:spPr>
+          <a:xfrm>
+            <a:off x="777240" y="4818888"/>
+            <a:ext cx="10607040" cy="18288"/>
+          </a:xfrm>
+          <a:prstGeom prst="rect">
+            <a:avLst/>
+          </a:prstGeom>
+          <a:solidFill>
+            <a:srgbClr val="342F52"/>
+          </a:solidFill>
+          <a:ln/>
+        </p:spPr>
+      </p:sp>
+      <p:sp>
+        <p:nvSpPr>
+          <p:cNvPr id="12" name="Text 10"/>
+          <p:cNvSpPr/>
+          <p:nvPr/>
+        </p:nvSpPr>
+        <p:spPr>
+          <a:xfrm>
+            <a:off x="777240" y="4983480"/>
+            <a:ext cx="3383280" cy="548640"/>
+          </a:xfrm>
+          <a:prstGeom prst="rect">
+            <a:avLst/>
+          </a:prstGeom>
+          <a:noFill/>
+          <a:ln/>
+        </p:spPr>
+        <p:txBody>
+          <a:bodyPr wrap="square" lIns="0" tIns="0" rIns="0" bIns="0" rtlCol="0" anchor="ctr"/>
+          <a:lstStyle/>
+          <a:p>
+            <a:pPr marL="0" indent="0">
+              <a:buNone/>
+            </a:pPr>
+            <a:r>
+              <a:rPr lang="en-US" sz="3000" b="1" dirty="0">
+                <a:solidFill>
+                  <a:srgbClr val="B6C800"/>
                 </a:solidFill>
                 <a:latin typeface="Georgia" pitchFamily="34" charset="0"/>
                 <a:ea typeface="Georgia" pitchFamily="34" charset="-122"/>
                 <a:cs typeface="Georgia" pitchFamily="34" charset="-120"/>
               </a:rPr>
-              <a:t>&amp; REJUVENATION CLINIC</a:t>
-            </a:r>
-            <a:endParaRPr lang="en-US" sz="5000" dirty="0"/>
-          </a:p>
-        </p:txBody>
-      </p:sp>
-      <p:sp>
-        <p:nvSpPr>
-          <p:cNvPr id="8" name="Shape 6"/>
-          <p:cNvSpPr/>
-          <p:nvPr/>
-        </p:nvSpPr>
-        <p:spPr>
-          <a:xfrm>
-            <a:off x="777240" y="3063240"/>
-            <a:ext cx="914400" cy="54864"/>
-          </a:xfrm>
-          <a:prstGeom prst="rect">
-            <a:avLst/>
-          </a:prstGeom>
-          <a:solidFill>
-            <a:srgbClr val="B6C800"/>
-          </a:solidFill>
-          <a:ln/>
-        </p:spPr>
-      </p:sp>
-      <p:sp>
-        <p:nvSpPr>
-          <p:cNvPr id="9" name="Text 7"/>
-          <p:cNvSpPr/>
-          <p:nvPr/>
-        </p:nvSpPr>
-        <p:spPr>
-          <a:xfrm>
-            <a:off x="777240" y="3310128"/>
-            <a:ext cx="10424160" cy="640080"/>
+              <a:t>$43B+</a:t>
+            </a:r>
+            <a:endParaRPr lang="en-US" sz="3000" dirty="0"/>
+          </a:p>
+        </p:txBody>
+      </p:sp>
+      <p:sp>
+        <p:nvSpPr>
+          <p:cNvPr id="13" name="Text 11"/>
+          <p:cNvSpPr/>
+          <p:nvPr/>
+        </p:nvSpPr>
+        <p:spPr>
+          <a:xfrm>
+            <a:off x="777240" y="5550408"/>
+            <a:ext cx="3383280" cy="640080"/>
           </a:xfrm>
           <a:prstGeom prst="rect">
             <a:avLst/>
@@ -2818,48 +2675,112 @@
           <a:bodyPr wrap="square" lIns="0" tIns="0" rIns="0" bIns="0" rtlCol="0" anchor="ctr"/>
           <a:lstStyle/>
           <a:p>
-            <a:pPr indent="0" marL="0">
-              <a:buNone/>
-            </a:pPr>
-            <a:r>
-              <a:rPr lang="en-US" sz="1900" b="1" dirty="0">
-                <a:solidFill>
-                  <a:srgbClr val="B6C800"/>
+            <a:pPr marL="0" indent="0">
+              <a:buNone/>
+            </a:pPr>
+            <a:r>
+              <a:rPr lang="en-US" sz="1100" dirty="0">
+                <a:solidFill>
+                  <a:srgbClr val="AEAEC2"/>
                 </a:solidFill>
                 <a:latin typeface="Calibri" pitchFamily="34" charset="0"/>
                 <a:ea typeface="Calibri" pitchFamily="34" charset="-122"/>
                 <a:cs typeface="Calibri" pitchFamily="34" charset="-120"/>
               </a:rPr>
-              <a:t>Cash-flow positive on the clinic alone</a:t>
-            </a:r>
-            <a:pPr indent="0" marL="0">
-              <a:buNone/>
-            </a:pPr>
-            <a:r>
-              <a:rPr lang="en-US" sz="1900" b="1" dirty="0">
-                <a:solidFill>
-                  <a:srgbClr val="FFFFFF"/>
+              <a:t>U.S. ASC market</a:t>
+            </a:r>
+            <a:endParaRPr lang="en-US" sz="1100" dirty="0"/>
+          </a:p>
+        </p:txBody>
+      </p:sp>
+      <p:sp>
+        <p:nvSpPr>
+          <p:cNvPr id="14" name="Text 12"/>
+          <p:cNvSpPr/>
+          <p:nvPr/>
+        </p:nvSpPr>
+        <p:spPr>
+          <a:xfrm>
+            <a:off x="4480560" y="4983480"/>
+            <a:ext cx="3383280" cy="548640"/>
+          </a:xfrm>
+          <a:prstGeom prst="rect">
+            <a:avLst/>
+          </a:prstGeom>
+          <a:noFill/>
+          <a:ln/>
+        </p:spPr>
+        <p:txBody>
+          <a:bodyPr wrap="square" lIns="0" tIns="0" rIns="0" bIns="0" rtlCol="0" anchor="ctr"/>
+          <a:lstStyle/>
+          <a:p>
+            <a:pPr marL="0" indent="0">
+              <a:buNone/>
+            </a:pPr>
+            <a:r>
+              <a:rPr lang="en-US" sz="3000" b="1" dirty="0">
+                <a:solidFill>
+                  <a:srgbClr val="B6C800"/>
+                </a:solidFill>
+                <a:latin typeface="Georgia" pitchFamily="34" charset="0"/>
+                <a:ea typeface="Georgia" pitchFamily="34" charset="-122"/>
+                <a:cs typeface="Georgia" pitchFamily="34" charset="-120"/>
+              </a:rPr>
+              <a:t>~67%</a:t>
+            </a:r>
+            <a:endParaRPr lang="en-US" sz="3000" dirty="0"/>
+          </a:p>
+        </p:txBody>
+      </p:sp>
+      <p:sp>
+        <p:nvSpPr>
+          <p:cNvPr id="15" name="Text 13"/>
+          <p:cNvSpPr/>
+          <p:nvPr/>
+        </p:nvSpPr>
+        <p:spPr>
+          <a:xfrm>
+            <a:off x="4480560" y="5550408"/>
+            <a:ext cx="3383280" cy="640080"/>
+          </a:xfrm>
+          <a:prstGeom prst="rect">
+            <a:avLst/>
+          </a:prstGeom>
+          <a:noFill/>
+          <a:ln/>
+        </p:spPr>
+        <p:txBody>
+          <a:bodyPr wrap="square" lIns="0" tIns="0" rIns="0" bIns="0" rtlCol="0" anchor="ctr"/>
+          <a:lstStyle/>
+          <a:p>
+            <a:pPr marL="0" indent="0">
+              <a:buNone/>
+            </a:pPr>
+            <a:r>
+              <a:rPr lang="en-US" sz="1100" dirty="0">
+                <a:solidFill>
+                  <a:srgbClr val="AEAEC2"/>
                 </a:solidFill>
                 <a:latin typeface="Calibri" pitchFamily="34" charset="0"/>
                 <a:ea typeface="Calibri" pitchFamily="34" charset="-122"/>
                 <a:cs typeface="Calibri" pitchFamily="34" charset="-120"/>
               </a:rPr>
-              <a:t> — 10+ months before the first OR ever opens.</a:t>
-            </a:r>
-            <a:endParaRPr lang="en-US" sz="1900" dirty="0"/>
-          </a:p>
-        </p:txBody>
-      </p:sp>
-      <p:sp>
-        <p:nvSpPr>
-          <p:cNvPr id="10" name="Text 8"/>
-          <p:cNvSpPr/>
-          <p:nvPr/>
-        </p:nvSpPr>
-        <p:spPr>
-          <a:xfrm>
-            <a:off x="777240" y="3950208"/>
-            <a:ext cx="9692640" cy="731520"/>
+              <a:t>Blended margin at stabilization</a:t>
+            </a:r>
+            <a:endParaRPr lang="en-US" sz="1100" dirty="0"/>
+          </a:p>
+        </p:txBody>
+      </p:sp>
+      <p:sp>
+        <p:nvSpPr>
+          <p:cNvPr id="16" name="Text 14"/>
+          <p:cNvSpPr/>
+          <p:nvPr/>
+        </p:nvSpPr>
+        <p:spPr>
+          <a:xfrm>
+            <a:off x="8183880" y="4983480"/>
+            <a:ext cx="3383280" cy="548640"/>
           </a:xfrm>
           <a:prstGeom prst="rect">
             <a:avLst/>
@@ -2871,11 +2792,50 @@
           <a:bodyPr wrap="square" lIns="0" tIns="0" rIns="0" bIns="0" rtlCol="0" anchor="ctr"/>
           <a:lstStyle/>
           <a:p>
-            <a:pPr indent="0" marL="0">
-              <a:buNone/>
-            </a:pPr>
-            <a:r>
-              <a:rPr lang="en-US" sz="1350" dirty="0">
+            <a:pPr marL="0" indent="0">
+              <a:buNone/>
+            </a:pPr>
+            <a:r>
+              <a:rPr lang="en-US" sz="3000" b="1" dirty="0">
+                <a:solidFill>
+                  <a:srgbClr val="B6C800"/>
+                </a:solidFill>
+                <a:latin typeface="Georgia" pitchFamily="34" charset="0"/>
+                <a:ea typeface="Georgia" pitchFamily="34" charset="-122"/>
+                <a:cs typeface="Georgia" pitchFamily="34" charset="-120"/>
+              </a:rPr>
+              <a:t>~$6.3M</a:t>
+            </a:r>
+            <a:endParaRPr lang="en-US" sz="3000" dirty="0"/>
+          </a:p>
+        </p:txBody>
+      </p:sp>
+      <p:sp>
+        <p:nvSpPr>
+          <p:cNvPr id="17" name="Text 15"/>
+          <p:cNvSpPr/>
+          <p:nvPr/>
+        </p:nvSpPr>
+        <p:spPr>
+          <a:xfrm>
+            <a:off x="8183880" y="5550408"/>
+            <a:ext cx="3383280" cy="640080"/>
+          </a:xfrm>
+          <a:prstGeom prst="rect">
+            <a:avLst/>
+          </a:prstGeom>
+          <a:noFill/>
+          <a:ln/>
+        </p:spPr>
+        <p:txBody>
+          <a:bodyPr wrap="square" lIns="0" tIns="0" rIns="0" bIns="0" rtlCol="0" anchor="ctr"/>
+          <a:lstStyle/>
+          <a:p>
+            <a:pPr marL="0" indent="0">
+              <a:buNone/>
+            </a:pPr>
+            <a:r>
+              <a:rPr lang="en-US" sz="1100" dirty="0">
                 <a:solidFill>
                   <a:srgbClr val="AEAEC2"/>
                 </a:solidFill>
@@ -2883,93 +2843,12 @@
                 <a:ea typeface="Calibri" pitchFamily="34" charset="-122"/>
                 <a:cs typeface="Calibri" pitchFamily="34" charset="-120"/>
               </a:rPr>
-              <a:t>A vertically integrated surgical and wellness destination — where longevity programming accelerates surgical outcomes and cash-pay wellness funds the buildout.</a:t>
-            </a:r>
-            <a:endParaRPr lang="en-US" sz="1350" dirty="0"/>
-          </a:p>
-        </p:txBody>
-      </p:sp>
-      <p:sp>
-        <p:nvSpPr>
-          <p:cNvPr id="11" name="Shape 9"/>
-          <p:cNvSpPr/>
-          <p:nvPr/>
-        </p:nvSpPr>
-        <p:spPr>
-          <a:xfrm>
-            <a:off x="777240" y="4818888"/>
-            <a:ext cx="10607040" cy="18288"/>
-          </a:xfrm>
-          <a:prstGeom prst="rect">
-            <a:avLst/>
-          </a:prstGeom>
-          <a:solidFill>
-            <a:srgbClr val="342F52"/>
-          </a:solidFill>
-          <a:ln/>
-        </p:spPr>
-      </p:sp>
-      <p:sp>
-        <p:nvSpPr>
-          <p:cNvPr id="12" name="Text 10"/>
-          <p:cNvSpPr/>
-          <p:nvPr/>
-        </p:nvSpPr>
-        <p:spPr>
-          <a:xfrm>
-            <a:off x="777240" y="4983480"/>
-            <a:ext cx="3383280" cy="548640"/>
-          </a:xfrm>
-          <a:prstGeom prst="rect">
-            <a:avLst/>
-          </a:prstGeom>
-          <a:noFill/>
-          <a:ln/>
-        </p:spPr>
-        <p:txBody>
-          <a:bodyPr wrap="square" lIns="0" tIns="0" rIns="0" bIns="0" rtlCol="0" anchor="ctr"/>
-          <a:lstStyle/>
-          <a:p>
-            <a:pPr indent="0" marL="0">
-              <a:buNone/>
-            </a:pPr>
-            <a:r>
-              <a:rPr lang="en-US" sz="3000" b="1" dirty="0">
-                <a:solidFill>
-                  <a:srgbClr val="B6C800"/>
-                </a:solidFill>
-                <a:latin typeface="Georgia" pitchFamily="34" charset="0"/>
-                <a:ea typeface="Georgia" pitchFamily="34" charset="-122"/>
-                <a:cs typeface="Georgia" pitchFamily="34" charset="-120"/>
-              </a:rPr>
-              <a:t>$43B+</a:t>
-            </a:r>
-            <a:endParaRPr lang="en-US" sz="3000" dirty="0"/>
-          </a:p>
-        </p:txBody>
-      </p:sp>
-      <p:sp>
-        <p:nvSpPr>
-          <p:cNvPr id="13" name="Text 11"/>
-          <p:cNvSpPr/>
-          <p:nvPr/>
-        </p:nvSpPr>
-        <p:spPr>
-          <a:xfrm>
-            <a:off x="777240" y="5550408"/>
-            <a:ext cx="3383280" cy="640080"/>
-          </a:xfrm>
-          <a:prstGeom prst="rect">
-            <a:avLst/>
-          </a:prstGeom>
-          <a:noFill/>
-          <a:ln/>
-        </p:spPr>
-        <p:txBody>
-          <a:bodyPr wrap="square" lIns="0" tIns="0" rIns="0" bIns="0" rtlCol="0" anchor="ctr"/>
-          <a:lstStyle/>
-          <a:p>
-            <a:pPr indent="0" marL="0">
+              <a:t>Annual operating income</a:t>
+            </a:r>
+            <a:endParaRPr lang="en-US" sz="1100" dirty="0"/>
+          </a:p>
+          <a:p>
+            <a:pPr marL="0" indent="0">
               <a:buNone/>
             </a:pPr>
             <a:r>
@@ -2981,7 +2860,7 @@
                 <a:ea typeface="Calibri" pitchFamily="34" charset="-122"/>
                 <a:cs typeface="Calibri" pitchFamily="34" charset="-120"/>
               </a:rPr>
-              <a:t>U.S. ASC market</a:t>
+              <a:t>(Projected · Base Case)</a:t>
             </a:r>
             <a:endParaRPr lang="en-US" sz="1100" dirty="0"/>
           </a:p>
@@ -2989,14 +2868,14 @@
       </p:sp>
       <p:sp>
         <p:nvSpPr>
-          <p:cNvPr id="14" name="Text 12"/>
-          <p:cNvSpPr/>
-          <p:nvPr/>
-        </p:nvSpPr>
-        <p:spPr>
-          <a:xfrm>
-            <a:off x="4480560" y="4983480"/>
-            <a:ext cx="3383280" cy="548640"/>
+          <p:cNvPr id="18" name="Text 16"/>
+          <p:cNvSpPr/>
+          <p:nvPr/>
+        </p:nvSpPr>
+        <p:spPr>
+          <a:xfrm>
+            <a:off x="548640" y="6473952"/>
+            <a:ext cx="6400800" cy="274320"/>
           </a:xfrm>
           <a:prstGeom prst="rect">
             <a:avLst/>
@@ -3008,191 +2887,18 @@
           <a:bodyPr wrap="square" lIns="0" tIns="0" rIns="0" bIns="0" rtlCol="0" anchor="ctr"/>
           <a:lstStyle/>
           <a:p>
-            <a:pPr indent="0" marL="0">
-              <a:buNone/>
-            </a:pPr>
-            <a:r>
-              <a:rPr lang="en-US" sz="3000" b="1" dirty="0">
-                <a:solidFill>
-                  <a:srgbClr val="B6C800"/>
-                </a:solidFill>
-                <a:latin typeface="Georgia" pitchFamily="34" charset="0"/>
-                <a:ea typeface="Georgia" pitchFamily="34" charset="-122"/>
-                <a:cs typeface="Georgia" pitchFamily="34" charset="-120"/>
-              </a:rPr>
-              <a:t>~67%</a:t>
-            </a:r>
-            <a:endParaRPr lang="en-US" sz="3000" dirty="0"/>
-          </a:p>
-        </p:txBody>
-      </p:sp>
-      <p:sp>
-        <p:nvSpPr>
-          <p:cNvPr id="15" name="Text 13"/>
-          <p:cNvSpPr/>
-          <p:nvPr/>
-        </p:nvSpPr>
-        <p:spPr>
-          <a:xfrm>
-            <a:off x="4480560" y="5550408"/>
-            <a:ext cx="3383280" cy="640080"/>
-          </a:xfrm>
-          <a:prstGeom prst="rect">
-            <a:avLst/>
-          </a:prstGeom>
-          <a:noFill/>
-          <a:ln/>
-        </p:spPr>
-        <p:txBody>
-          <a:bodyPr wrap="square" lIns="0" tIns="0" rIns="0" bIns="0" rtlCol="0" anchor="ctr"/>
-          <a:lstStyle/>
-          <a:p>
-            <a:pPr indent="0" marL="0">
-              <a:buNone/>
-            </a:pPr>
-            <a:r>
-              <a:rPr lang="en-US" sz="1100" dirty="0">
-                <a:solidFill>
-                  <a:srgbClr val="AEAEC2"/>
+            <a:pPr marL="0" indent="0">
+              <a:buNone/>
+            </a:pPr>
+            <a:r>
+              <a:rPr lang="en-US" sz="850" kern="0" spc="100" dirty="0">
+                <a:solidFill>
+                  <a:srgbClr val="5A5570"/>
                 </a:solidFill>
                 <a:latin typeface="Calibri" pitchFamily="34" charset="0"/>
                 <a:ea typeface="Calibri" pitchFamily="34" charset="-122"/>
                 <a:cs typeface="Calibri" pitchFamily="34" charset="-120"/>
               </a:rPr>
-              <a:t>Blended margin at stabilization</a:t>
-            </a:r>
-            <a:endParaRPr lang="en-US" sz="1100" dirty="0"/>
-          </a:p>
-        </p:txBody>
-      </p:sp>
-      <p:sp>
-        <p:nvSpPr>
-          <p:cNvPr id="16" name="Text 14"/>
-          <p:cNvSpPr/>
-          <p:nvPr/>
-        </p:nvSpPr>
-        <p:spPr>
-          <a:xfrm>
-            <a:off x="8183880" y="4983480"/>
-            <a:ext cx="3383280" cy="548640"/>
-          </a:xfrm>
-          <a:prstGeom prst="rect">
-            <a:avLst/>
-          </a:prstGeom>
-          <a:noFill/>
-          <a:ln/>
-        </p:spPr>
-        <p:txBody>
-          <a:bodyPr wrap="square" lIns="0" tIns="0" rIns="0" bIns="0" rtlCol="0" anchor="ctr"/>
-          <a:lstStyle/>
-          <a:p>
-            <a:pPr indent="0" marL="0">
-              <a:buNone/>
-            </a:pPr>
-            <a:r>
-              <a:rPr lang="en-US" sz="3000" b="1" dirty="0">
-                <a:solidFill>
-                  <a:srgbClr val="B6C800"/>
-                </a:solidFill>
-                <a:latin typeface="Georgia" pitchFamily="34" charset="0"/>
-                <a:ea typeface="Georgia" pitchFamily="34" charset="-122"/>
-                <a:cs typeface="Georgia" pitchFamily="34" charset="-120"/>
-              </a:rPr>
-              <a:t>~$6.3M</a:t>
-            </a:r>
-            <a:endParaRPr lang="en-US" sz="3000" dirty="0"/>
-          </a:p>
-        </p:txBody>
-      </p:sp>
-      <p:sp>
-        <p:nvSpPr>
-          <p:cNvPr id="17" name="Text 15"/>
-          <p:cNvSpPr/>
-          <p:nvPr/>
-        </p:nvSpPr>
-        <p:spPr>
-          <a:xfrm>
-            <a:off x="8183880" y="5550408"/>
-            <a:ext cx="3383280" cy="640080"/>
-          </a:xfrm>
-          <a:prstGeom prst="rect">
-            <a:avLst/>
-          </a:prstGeom>
-          <a:noFill/>
-          <a:ln/>
-        </p:spPr>
-        <p:txBody>
-          <a:bodyPr wrap="square" lIns="0" tIns="0" rIns="0" bIns="0" rtlCol="0" anchor="ctr"/>
-          <a:lstStyle/>
-          <a:p>
-            <a:pPr indent="0" marL="0">
-              <a:buNone/>
-            </a:pPr>
-            <a:r>
-              <a:rPr lang="en-US" sz="1100" dirty="0">
-                <a:solidFill>
-                  <a:srgbClr val="AEAEC2"/>
-                </a:solidFill>
-                <a:latin typeface="Calibri" pitchFamily="34" charset="0"/>
-                <a:ea typeface="Calibri" pitchFamily="34" charset="-122"/>
-                <a:cs typeface="Calibri" pitchFamily="34" charset="-120"/>
-              </a:rPr>
-              <a:t>Annual operating income</a:t>
-            </a:r>
-            <a:endParaRPr lang="en-US" sz="1100" dirty="0"/>
-          </a:p>
-          <a:p>
-            <a:pPr indent="0" marL="0">
-              <a:buNone/>
-            </a:pPr>
-            <a:r>
-              <a:rPr lang="en-US" sz="1100" dirty="0">
-                <a:solidFill>
-                  <a:srgbClr val="AEAEC2"/>
-                </a:solidFill>
-                <a:latin typeface="Calibri" pitchFamily="34" charset="0"/>
-                <a:ea typeface="Calibri" pitchFamily="34" charset="-122"/>
-                <a:cs typeface="Calibri" pitchFamily="34" charset="-120"/>
-              </a:rPr>
-              <a:t>(Projected · Base Case)</a:t>
-            </a:r>
-            <a:endParaRPr lang="en-US" sz="1100" dirty="0"/>
-          </a:p>
-        </p:txBody>
-      </p:sp>
-      <p:sp>
-        <p:nvSpPr>
-          <p:cNvPr id="18" name="Text 16"/>
-          <p:cNvSpPr/>
-          <p:nvPr/>
-        </p:nvSpPr>
-        <p:spPr>
-          <a:xfrm>
-            <a:off x="548640" y="6473952"/>
-            <a:ext cx="6400800" cy="274320"/>
-          </a:xfrm>
-          <a:prstGeom prst="rect">
-            <a:avLst/>
-          </a:prstGeom>
-          <a:noFill/>
-          <a:ln/>
-        </p:spPr>
-        <p:txBody>
-          <a:bodyPr wrap="square" lIns="0" tIns="0" rIns="0" bIns="0" rtlCol="0" anchor="ctr"/>
-          <a:lstStyle/>
-          <a:p>
-            <a:pPr indent="0" marL="0">
-              <a:buNone/>
-            </a:pPr>
-            <a:r>
-              <a:rPr lang="en-US" sz="850" spc="100" kern="0" dirty="0">
-                <a:solidFill>
-                  <a:srgbClr val="5A5570"/>
-                </a:solidFill>
-                <a:latin typeface="Calibri" pitchFamily="34" charset="0"/>
-                <a:ea typeface="Calibri" pitchFamily="34" charset="-122"/>
-                <a:cs typeface="Calibri" pitchFamily="34" charset="-120"/>
-              </a:rPr>
               <a:t>PLAYA VISTA ASC &amp; REJUVENATION CLINIC</a:t>
             </a:r>
             <a:endParaRPr lang="en-US" sz="850" dirty="0"/>
@@ -3220,7 +2926,7 @@
           <a:bodyPr wrap="square" lIns="0" tIns="0" rIns="0" bIns="0" rtlCol="0" anchor="ctr"/>
           <a:lstStyle/>
           <a:p>
-            <a:pPr algn="r" indent="0" marL="0">
+            <a:pPr marL="0" indent="0" algn="r">
               <a:buNone/>
             </a:pPr>
             <a:r>
@@ -3254,6 +2960,7 @@
         <a:solidFill>
           <a:srgbClr val="0A0A0F"/>
         </a:solidFill>
+        <a:effectLst/>
       </p:bgPr>
     </p:bg>
     <p:spTree>
@@ -3355,11 +3062,11 @@
           <a:bodyPr wrap="square" lIns="0" tIns="0" rIns="0" bIns="0" rtlCol="0" anchor="ctr"/>
           <a:lstStyle/>
           <a:p>
-            <a:pPr algn="l" indent="0" marL="0">
-              <a:buNone/>
-            </a:pPr>
-            <a:r>
-              <a:rPr lang="en-US" sz="1100" b="1" spc="300" kern="0" dirty="0">
+            <a:pPr marL="0" indent="0" algn="l">
+              <a:buNone/>
+            </a:pPr>
+            <a:r>
+              <a:rPr lang="en-US" sz="1100" b="1" kern="0" spc="300" dirty="0">
                 <a:solidFill>
                   <a:srgbClr val="B6C800"/>
                 </a:solidFill>
@@ -3394,7 +3101,7 @@
           <a:bodyPr wrap="square" lIns="0" tIns="0" rIns="0" bIns="0" rtlCol="0" anchor="t"/>
           <a:lstStyle/>
           <a:p>
-            <a:pPr algn="l" indent="0" marL="0">
+            <a:pPr marL="0" indent="0" algn="l">
               <a:lnSpc>
                 <a:spcPct val="100000"/>
               </a:lnSpc>
@@ -3441,7 +3148,7 @@
             <a:prstDash val="solid"/>
           </a:ln>
           <a:effectLst>
-            <a:outerShdw sx="100000" sy="100000" kx="0" ky="0" algn="bl" rotWithShape="0" blurRad="177800" dist="63500" dir="5400000">
+            <a:outerShdw blurRad="177800" dist="63500" dir="5400000" algn="bl" rotWithShape="0">
               <a:srgbClr val="3E00DB">
                 <a:alpha val="55000"/>
               </a:srgbClr>
@@ -3470,7 +3177,7 @@
           <a:bodyPr wrap="square" lIns="0" tIns="0" rIns="0" bIns="0" rtlCol="0" anchor="ctr"/>
           <a:lstStyle/>
           <a:p>
-            <a:pPr indent="0" marL="0">
+            <a:pPr marL="0" indent="0">
               <a:buNone/>
             </a:pPr>
             <a:r>
@@ -3509,7 +3216,7 @@
           <a:bodyPr wrap="square" lIns="0" tIns="0" rIns="0" bIns="0" rtlCol="0" anchor="ctr"/>
           <a:lstStyle/>
           <a:p>
-            <a:pPr algn="r" indent="0" marL="0">
+            <a:pPr marL="0" indent="0" algn="r">
               <a:buNone/>
             </a:pPr>
             <a:r>
@@ -3548,7 +3255,7 @@
           <a:bodyPr wrap="square" lIns="0" tIns="0" rIns="0" bIns="0" rtlCol="0" anchor="ctr"/>
           <a:lstStyle/>
           <a:p>
-            <a:pPr algn="r" indent="0" marL="0">
+            <a:pPr marL="0" indent="0" algn="r">
               <a:buNone/>
             </a:pPr>
             <a:r>
@@ -3587,7 +3294,7 @@
           <a:bodyPr wrap="square" lIns="0" tIns="0" rIns="0" bIns="0" rtlCol="0" anchor="ctr"/>
           <a:lstStyle/>
           <a:p>
-            <a:pPr indent="0" marL="0">
+            <a:pPr marL="0" indent="0">
               <a:buNone/>
             </a:pPr>
             <a:r>
@@ -3626,7 +3333,7 @@
           <a:bodyPr wrap="square" lIns="0" tIns="0" rIns="0" bIns="0" rtlCol="0" anchor="ctr"/>
           <a:lstStyle/>
           <a:p>
-            <a:pPr algn="r" indent="0" marL="0">
+            <a:pPr marL="0" indent="0" algn="r">
               <a:buNone/>
             </a:pPr>
             <a:r>
@@ -3685,7 +3392,7 @@
           <a:bodyPr wrap="square" lIns="0" tIns="0" rIns="0" bIns="0" rtlCol="0" anchor="ctr"/>
           <a:lstStyle/>
           <a:p>
-            <a:pPr indent="0" marL="0">
+            <a:pPr marL="0" indent="0">
               <a:buNone/>
             </a:pPr>
             <a:r>
@@ -3724,7 +3431,7 @@
           <a:bodyPr wrap="square" lIns="0" tIns="0" rIns="0" bIns="0" rtlCol="0" anchor="ctr"/>
           <a:lstStyle/>
           <a:p>
-            <a:pPr algn="r" indent="0" marL="0">
+            <a:pPr marL="0" indent="0" algn="r">
               <a:buNone/>
             </a:pPr>
             <a:r>
@@ -3763,7 +3470,7 @@
           <a:bodyPr wrap="square" lIns="0" tIns="0" rIns="0" bIns="0" rtlCol="0" anchor="ctr"/>
           <a:lstStyle/>
           <a:p>
-            <a:pPr algn="r" indent="0" marL="0">
+            <a:pPr marL="0" indent="0" algn="r">
               <a:buNone/>
             </a:pPr>
             <a:r>
@@ -3802,7 +3509,7 @@
           <a:bodyPr wrap="square" lIns="0" tIns="0" rIns="0" bIns="0" rtlCol="0" anchor="ctr"/>
           <a:lstStyle/>
           <a:p>
-            <a:pPr indent="0" marL="0">
+            <a:pPr marL="0" indent="0">
               <a:buNone/>
             </a:pPr>
             <a:r>
@@ -3841,7 +3548,7 @@
           <a:bodyPr wrap="square" lIns="0" tIns="0" rIns="0" bIns="0" rtlCol="0" anchor="ctr"/>
           <a:lstStyle/>
           <a:p>
-            <a:pPr algn="r" indent="0" marL="0">
+            <a:pPr marL="0" indent="0" algn="r">
               <a:buNone/>
             </a:pPr>
             <a:r>
@@ -3880,7 +3587,7 @@
           <a:bodyPr wrap="square" lIns="0" tIns="0" rIns="0" bIns="0" rtlCol="0" anchor="ctr"/>
           <a:lstStyle/>
           <a:p>
-            <a:pPr indent="0" marL="0">
+            <a:pPr marL="0" indent="0">
               <a:buNone/>
             </a:pPr>
             <a:r>
@@ -3919,7 +3626,7 @@
           <a:bodyPr wrap="square" lIns="0" tIns="0" rIns="0" bIns="0" rtlCol="0" anchor="ctr"/>
           <a:lstStyle/>
           <a:p>
-            <a:pPr algn="r" indent="0" marL="0">
+            <a:pPr marL="0" indent="0" algn="r">
               <a:buNone/>
             </a:pPr>
             <a:r>
@@ -3958,7 +3665,7 @@
           <a:bodyPr wrap="square" lIns="0" tIns="0" rIns="0" bIns="0" rtlCol="0" anchor="ctr"/>
           <a:lstStyle/>
           <a:p>
-            <a:pPr indent="0" marL="0">
+            <a:pPr marL="0" indent="0">
               <a:buNone/>
             </a:pPr>
             <a:r>
@@ -3997,7 +3704,7 @@
           <a:bodyPr wrap="square" lIns="0" tIns="0" rIns="0" bIns="0" rtlCol="0" anchor="ctr"/>
           <a:lstStyle/>
           <a:p>
-            <a:pPr algn="r" indent="0" marL="0">
+            <a:pPr marL="0" indent="0" algn="r">
               <a:buNone/>
             </a:pPr>
             <a:r>
@@ -4036,7 +3743,7 @@
           <a:bodyPr wrap="square" lIns="0" tIns="0" rIns="0" bIns="0" rtlCol="0" anchor="ctr"/>
           <a:lstStyle/>
           <a:p>
-            <a:pPr indent="0" marL="0">
+            <a:pPr marL="0" indent="0">
               <a:buNone/>
             </a:pPr>
             <a:r>
@@ -4075,7 +3782,7 @@
           <a:bodyPr wrap="square" lIns="0" tIns="0" rIns="0" bIns="0" rtlCol="0" anchor="ctr"/>
           <a:lstStyle/>
           <a:p>
-            <a:pPr algn="r" indent="0" marL="0">
+            <a:pPr marL="0" indent="0" algn="r">
               <a:buNone/>
             </a:pPr>
             <a:r>
@@ -4114,7 +3821,7 @@
           <a:bodyPr wrap="square" lIns="0" tIns="0" rIns="0" bIns="0" rtlCol="0" anchor="ctr"/>
           <a:lstStyle/>
           <a:p>
-            <a:pPr indent="0" marL="0">
+            <a:pPr marL="0" indent="0">
               <a:buNone/>
             </a:pPr>
             <a:r>
@@ -4153,7 +3860,7 @@
           <a:bodyPr wrap="square" lIns="0" tIns="0" rIns="0" bIns="0" rtlCol="0" anchor="ctr"/>
           <a:lstStyle/>
           <a:p>
-            <a:pPr algn="r" indent="0" marL="0">
+            <a:pPr marL="0" indent="0" algn="r">
               <a:buNone/>
             </a:pPr>
             <a:r>
@@ -4192,7 +3899,7 @@
           <a:bodyPr wrap="square" lIns="0" tIns="0" rIns="0" bIns="0" rtlCol="0" anchor="ctr"/>
           <a:lstStyle/>
           <a:p>
-            <a:pPr indent="0" marL="0">
+            <a:pPr marL="0" indent="0">
               <a:buNone/>
             </a:pPr>
             <a:r>
@@ -4231,7 +3938,7 @@
           <a:bodyPr wrap="square" lIns="0" tIns="0" rIns="0" bIns="0" rtlCol="0" anchor="ctr"/>
           <a:lstStyle/>
           <a:p>
-            <a:pPr algn="r" indent="0" marL="0">
+            <a:pPr marL="0" indent="0" algn="r">
               <a:buNone/>
             </a:pPr>
             <a:r>
@@ -4270,7 +3977,7 @@
           <a:bodyPr wrap="square" lIns="0" tIns="0" rIns="0" bIns="0" rtlCol="0" anchor="ctr"/>
           <a:lstStyle/>
           <a:p>
-            <a:pPr indent="0" marL="0">
+            <a:pPr marL="0" indent="0">
               <a:buNone/>
             </a:pPr>
             <a:r>
@@ -4309,7 +4016,7 @@
           <a:bodyPr wrap="square" lIns="0" tIns="0" rIns="0" bIns="0" rtlCol="0" anchor="ctr"/>
           <a:lstStyle/>
           <a:p>
-            <a:pPr algn="r" indent="0" marL="0">
+            <a:pPr marL="0" indent="0" algn="r">
               <a:buNone/>
             </a:pPr>
             <a:r>
@@ -4348,7 +4055,7 @@
           <a:bodyPr wrap="square" lIns="0" tIns="0" rIns="0" bIns="0" rtlCol="0" anchor="ctr"/>
           <a:lstStyle/>
           <a:p>
-            <a:pPr indent="0" marL="0">
+            <a:pPr marL="0" indent="0">
               <a:buNone/>
             </a:pPr>
             <a:r>
@@ -4387,7 +4094,7 @@
           <a:bodyPr wrap="square" lIns="0" tIns="0" rIns="0" bIns="0" rtlCol="0" anchor="ctr"/>
           <a:lstStyle/>
           <a:p>
-            <a:pPr algn="r" indent="0" marL="0">
+            <a:pPr marL="0" indent="0" algn="r">
               <a:buNone/>
             </a:pPr>
             <a:r>
@@ -4446,7 +4153,7 @@
           <a:bodyPr wrap="square" lIns="0" tIns="0" rIns="0" bIns="0" rtlCol="0" anchor="ctr"/>
           <a:lstStyle/>
           <a:p>
-            <a:pPr indent="0" marL="0">
+            <a:pPr marL="0" indent="0">
               <a:buNone/>
             </a:pPr>
             <a:r>
@@ -4485,7 +4192,7 @@
           <a:bodyPr wrap="square" lIns="0" tIns="0" rIns="0" bIns="0" rtlCol="0" anchor="ctr"/>
           <a:lstStyle/>
           <a:p>
-            <a:pPr algn="r" indent="0" marL="0">
+            <a:pPr marL="0" indent="0" algn="r">
               <a:buNone/>
             </a:pPr>
             <a:r>
@@ -4524,7 +4231,7 @@
           <a:bodyPr wrap="square" lIns="0" tIns="0" rIns="0" bIns="0" rtlCol="0" anchor="ctr"/>
           <a:lstStyle/>
           <a:p>
-            <a:pPr algn="r" indent="0" marL="0">
+            <a:pPr marL="0" indent="0" algn="r">
               <a:buNone/>
             </a:pPr>
             <a:r>
@@ -4570,7 +4277,7 @@
         </p:nvSpPr>
         <p:spPr>
           <a:xfrm>
-            <a:off x="868680" y="6025896"/>
+            <a:off x="868680" y="5877306"/>
             <a:ext cx="4297680" cy="384048"/>
           </a:xfrm>
           <a:prstGeom prst="rect">
@@ -4583,7 +4290,7 @@
           <a:bodyPr wrap="square" lIns="0" tIns="0" rIns="0" bIns="0" rtlCol="0" anchor="ctr"/>
           <a:lstStyle/>
           <a:p>
-            <a:pPr indent="0" marL="0">
+            <a:pPr marL="0" indent="0">
               <a:buNone/>
             </a:pPr>
             <a:r>
@@ -4597,9 +4304,6 @@
               </a:rPr>
               <a:t>OPERATING INCOME / MO  </a:t>
             </a:r>
-            <a:pPr indent="0" marL="0">
-              <a:buNone/>
-            </a:pPr>
             <a:r>
               <a:rPr lang="en-US" sz="850" dirty="0">
                 <a:solidFill>
@@ -4623,7 +4327,7 @@
         </p:nvSpPr>
         <p:spPr>
           <a:xfrm>
-            <a:off x="4892040" y="6025896"/>
+            <a:off x="4892040" y="5877306"/>
             <a:ext cx="1463040" cy="384048"/>
           </a:xfrm>
           <a:prstGeom prst="rect">
@@ -4636,7 +4340,7 @@
           <a:bodyPr wrap="square" lIns="0" tIns="0" rIns="0" bIns="0" rtlCol="0" anchor="ctr"/>
           <a:lstStyle/>
           <a:p>
-            <a:pPr algn="r" indent="0" marL="0">
+            <a:pPr marL="0" indent="0" algn="r">
               <a:buNone/>
             </a:pPr>
             <a:r>
@@ -4662,7 +4366,7 @@
         </p:nvSpPr>
         <p:spPr>
           <a:xfrm>
-            <a:off x="6400800" y="6025896"/>
+            <a:off x="6400800" y="5900166"/>
             <a:ext cx="457200" cy="384048"/>
           </a:xfrm>
           <a:prstGeom prst="rect">
@@ -4675,7 +4379,7 @@
           <a:bodyPr wrap="square" lIns="0" tIns="0" rIns="0" bIns="0" rtlCol="0" anchor="ctr"/>
           <a:lstStyle/>
           <a:p>
-            <a:pPr algn="r" indent="0" marL="0">
+            <a:pPr marL="0" indent="0" algn="r">
               <a:buNone/>
             </a:pPr>
             <a:r>
@@ -4719,7 +4423,7 @@
             <a:prstDash val="solid"/>
           </a:ln>
           <a:effectLst>
-            <a:outerShdw sx="100000" sy="100000" kx="0" ky="0" algn="bl" rotWithShape="0" blurRad="177800" dist="63500" dir="5400000">
+            <a:outerShdw blurRad="177800" dist="63500" dir="5400000" algn="bl" rotWithShape="0">
               <a:srgbClr val="3E00DB">
                 <a:alpha val="55000"/>
               </a:srgbClr>
@@ -4768,7 +4472,7 @@
           <a:bodyPr wrap="square" lIns="0" tIns="0" rIns="0" bIns="0" rtlCol="0" anchor="ctr"/>
           <a:lstStyle/>
           <a:p>
-            <a:pPr indent="0" marL="0">
+            <a:pPr marL="0" indent="0">
               <a:buNone/>
             </a:pPr>
             <a:r>
@@ -4807,7 +4511,7 @@
           <a:bodyPr wrap="square" lIns="0" tIns="0" rIns="0" bIns="0" rtlCol="0" anchor="t"/>
           <a:lstStyle/>
           <a:p>
-            <a:pPr indent="0" marL="0">
+            <a:pPr marL="0" indent="0">
               <a:buNone/>
             </a:pPr>
             <a:r>
@@ -4851,7 +4555,7 @@
             <a:prstDash val="solid"/>
           </a:ln>
           <a:effectLst>
-            <a:outerShdw sx="100000" sy="100000" kx="0" ky="0" algn="bl" rotWithShape="0" blurRad="177800" dist="63500" dir="5400000">
+            <a:outerShdw blurRad="177800" dist="63500" dir="5400000" algn="bl" rotWithShape="0">
               <a:srgbClr val="3E00DB">
                 <a:alpha val="55000"/>
               </a:srgbClr>
@@ -4900,7 +4604,7 @@
           <a:bodyPr wrap="square" lIns="0" tIns="0" rIns="0" bIns="0" rtlCol="0" anchor="ctr"/>
           <a:lstStyle/>
           <a:p>
-            <a:pPr indent="0" marL="0">
+            <a:pPr marL="0" indent="0">
               <a:buNone/>
             </a:pPr>
             <a:r>
@@ -4939,7 +4643,7 @@
           <a:bodyPr wrap="square" lIns="0" tIns="0" rIns="0" bIns="0" rtlCol="0" anchor="t"/>
           <a:lstStyle/>
           <a:p>
-            <a:pPr indent="0" marL="0">
+            <a:pPr marL="0" indent="0">
               <a:buNone/>
             </a:pPr>
             <a:r>
@@ -4978,11 +4682,11 @@
           <a:bodyPr wrap="square" lIns="0" tIns="0" rIns="0" bIns="0" rtlCol="0" anchor="ctr"/>
           <a:lstStyle/>
           <a:p>
-            <a:pPr indent="0" marL="0">
-              <a:buNone/>
-            </a:pPr>
-            <a:r>
-              <a:rPr lang="en-US" sz="850" spc="100" kern="0" dirty="0">
+            <a:pPr marL="0" indent="0">
+              <a:buNone/>
+            </a:pPr>
+            <a:r>
+              <a:rPr lang="en-US" sz="850" kern="0" spc="100" dirty="0">
                 <a:solidFill>
                   <a:srgbClr val="5A5570"/>
                 </a:solidFill>
@@ -5017,7 +4721,7 @@
           <a:bodyPr wrap="square" lIns="0" tIns="0" rIns="0" bIns="0" rtlCol="0" anchor="ctr"/>
           <a:lstStyle/>
           <a:p>
-            <a:pPr algn="r" indent="0" marL="0">
+            <a:pPr marL="0" indent="0" algn="r">
               <a:buNone/>
             </a:pPr>
             <a:r>
@@ -5056,7 +4760,7 @@
           <a:bodyPr wrap="square" lIns="0" tIns="0" rIns="0" bIns="0" rtlCol="0" anchor="ctr"/>
           <a:lstStyle/>
           <a:p>
-            <a:pPr algn="r" indent="0" marL="0">
+            <a:pPr marL="0" indent="0" algn="r">
               <a:buNone/>
             </a:pPr>
             <a:r>
@@ -5090,6 +4794,7 @@
         <a:solidFill>
           <a:srgbClr val="0A0A0F"/>
         </a:solidFill>
+        <a:effectLst/>
       </p:bgPr>
     </p:bg>
     <p:spTree>
@@ -5191,11 +4896,11 @@
           <a:bodyPr wrap="square" lIns="0" tIns="0" rIns="0" bIns="0" rtlCol="0" anchor="ctr"/>
           <a:lstStyle/>
           <a:p>
-            <a:pPr algn="l" indent="0" marL="0">
-              <a:buNone/>
-            </a:pPr>
-            <a:r>
-              <a:rPr lang="en-US" sz="1100" b="1" spc="300" kern="0" dirty="0">
+            <a:pPr marL="0" indent="0" algn="l">
+              <a:buNone/>
+            </a:pPr>
+            <a:r>
+              <a:rPr lang="en-US" sz="1100" b="1" kern="0" spc="300" dirty="0">
                 <a:solidFill>
                   <a:srgbClr val="B6C800"/>
                 </a:solidFill>
@@ -5230,7 +4935,7 @@
           <a:bodyPr wrap="square" lIns="0" tIns="0" rIns="0" bIns="0" rtlCol="0" anchor="t"/>
           <a:lstStyle/>
           <a:p>
-            <a:pPr algn="l" indent="0" marL="0">
+            <a:pPr marL="0" indent="0" algn="l">
               <a:lnSpc>
                 <a:spcPct val="100000"/>
               </a:lnSpc>
@@ -5272,7 +4977,7 @@
           <a:bodyPr wrap="square" lIns="0" tIns="0" rIns="0" bIns="0" rtlCol="0" anchor="ctr"/>
           <a:lstStyle/>
           <a:p>
-            <a:pPr indent="0" marL="0">
+            <a:pPr marL="0" indent="0">
               <a:buNone/>
             </a:pPr>
             <a:r>
@@ -5316,7 +5021,7 @@
             <a:prstDash val="solid"/>
           </a:ln>
           <a:effectLst>
-            <a:outerShdw sx="100000" sy="100000" kx="0" ky="0" algn="bl" rotWithShape="0" blurRad="177800" dist="63500" dir="5400000">
+            <a:outerShdw blurRad="177800" dist="63500" dir="5400000" algn="bl" rotWithShape="0">
               <a:srgbClr val="3E00DB">
                 <a:alpha val="55000"/>
               </a:srgbClr>
@@ -5345,11 +5050,11 @@
           <a:bodyPr wrap="square" lIns="0" tIns="0" rIns="0" bIns="0" rtlCol="0" anchor="ctr"/>
           <a:lstStyle/>
           <a:p>
-            <a:pPr indent="0" marL="0">
-              <a:buNone/>
-            </a:pPr>
-            <a:r>
-              <a:rPr lang="en-US" sz="1100" b="1" spc="200" kern="0" dirty="0">
+            <a:pPr marL="0" indent="0">
+              <a:buNone/>
+            </a:pPr>
+            <a:r>
+              <a:rPr lang="en-US" sz="1100" b="1" kern="0" spc="200" dirty="0">
                 <a:solidFill>
                   <a:srgbClr val="AEAEC2"/>
                 </a:solidFill>
@@ -5384,7 +5089,7 @@
           <a:bodyPr wrap="square" lIns="0" tIns="0" rIns="0" bIns="0" rtlCol="0" anchor="ctr"/>
           <a:lstStyle/>
           <a:p>
-            <a:pPr indent="0" marL="0">
+            <a:pPr marL="0" indent="0">
               <a:buNone/>
             </a:pPr>
             <a:r>
@@ -5423,7 +5128,7 @@
           <a:bodyPr wrap="square" lIns="0" tIns="0" rIns="0" bIns="0" rtlCol="0" anchor="ctr"/>
           <a:lstStyle/>
           <a:p>
-            <a:pPr indent="0" marL="0">
+            <a:pPr marL="0" indent="0">
               <a:buNone/>
             </a:pPr>
             <a:r>
@@ -5462,7 +5167,7 @@
           <a:bodyPr wrap="square" lIns="0" tIns="0" rIns="0" bIns="0" rtlCol="0" anchor="ctr"/>
           <a:lstStyle/>
           <a:p>
-            <a:pPr indent="0" marL="0">
+            <a:pPr marL="0" indent="0">
               <a:buNone/>
             </a:pPr>
             <a:r>
@@ -5501,7 +5206,7 @@
           <a:bodyPr wrap="square" lIns="0" tIns="0" rIns="0" bIns="0" rtlCol="0" anchor="ctr"/>
           <a:lstStyle/>
           <a:p>
-            <a:pPr algn="r" indent="0" marL="0">
+            <a:pPr marL="0" indent="0" algn="r">
               <a:buNone/>
             </a:pPr>
             <a:r>
@@ -5560,7 +5265,7 @@
           <a:bodyPr wrap="square" lIns="0" tIns="0" rIns="0" bIns="0" rtlCol="0" anchor="ctr"/>
           <a:lstStyle/>
           <a:p>
-            <a:pPr indent="0" marL="0">
+            <a:pPr marL="0" indent="0">
               <a:buNone/>
             </a:pPr>
             <a:r>
@@ -5599,7 +5304,7 @@
           <a:bodyPr wrap="square" lIns="0" tIns="0" rIns="0" bIns="0" rtlCol="0" anchor="ctr"/>
           <a:lstStyle/>
           <a:p>
-            <a:pPr algn="r" indent="0" marL="0">
+            <a:pPr marL="0" indent="0" algn="r">
               <a:buNone/>
             </a:pPr>
             <a:r>
@@ -5658,7 +5363,7 @@
           <a:bodyPr wrap="square" lIns="0" tIns="0" rIns="0" bIns="0" rtlCol="0" anchor="ctr"/>
           <a:lstStyle/>
           <a:p>
-            <a:pPr indent="0" marL="0">
+            <a:pPr marL="0" indent="0">
               <a:buNone/>
             </a:pPr>
             <a:r>
@@ -5697,7 +5402,7 @@
           <a:bodyPr wrap="square" lIns="0" tIns="0" rIns="0" bIns="0" rtlCol="0" anchor="ctr"/>
           <a:lstStyle/>
           <a:p>
-            <a:pPr algn="r" indent="0" marL="0">
+            <a:pPr marL="0" indent="0" algn="r">
               <a:buNone/>
             </a:pPr>
             <a:r>
@@ -5761,7 +5466,7 @@
             <a:prstDash val="solid"/>
           </a:ln>
           <a:effectLst>
-            <a:outerShdw sx="100000" sy="100000" kx="0" ky="0" algn="bl" rotWithShape="0" blurRad="177800" dist="63500" dir="5400000">
+            <a:outerShdw blurRad="177800" dist="63500" dir="5400000" algn="bl" rotWithShape="0">
               <a:srgbClr val="3E00DB">
                 <a:alpha val="55000"/>
               </a:srgbClr>
@@ -5812,11 +5517,11 @@
           <a:bodyPr wrap="square" lIns="0" tIns="0" rIns="0" bIns="0" rtlCol="0" anchor="ctr"/>
           <a:lstStyle/>
           <a:p>
-            <a:pPr algn="ctr" indent="0" marL="0">
-              <a:buNone/>
-            </a:pPr>
-            <a:r>
-              <a:rPr lang="en-US" sz="900" b="1" spc="100" kern="0" dirty="0">
+            <a:pPr marL="0" indent="0" algn="ctr">
+              <a:buNone/>
+            </a:pPr>
+            <a:r>
+              <a:rPr lang="en-US" sz="900" b="1" kern="0" spc="100" dirty="0">
                 <a:solidFill>
                   <a:srgbClr val="0A0A0F"/>
                 </a:solidFill>
@@ -5851,11 +5556,11 @@
           <a:bodyPr wrap="square" lIns="0" tIns="0" rIns="0" bIns="0" rtlCol="0" anchor="ctr"/>
           <a:lstStyle/>
           <a:p>
-            <a:pPr indent="0" marL="0">
-              <a:buNone/>
-            </a:pPr>
-            <a:r>
-              <a:rPr lang="en-US" sz="1100" b="1" spc="200" kern="0" dirty="0">
+            <a:pPr marL="0" indent="0">
+              <a:buNone/>
+            </a:pPr>
+            <a:r>
+              <a:rPr lang="en-US" sz="1100" b="1" kern="0" spc="200" dirty="0">
                 <a:solidFill>
                   <a:srgbClr val="B6C800"/>
                 </a:solidFill>
@@ -5890,7 +5595,7 @@
           <a:bodyPr wrap="square" lIns="0" tIns="0" rIns="0" bIns="0" rtlCol="0" anchor="ctr"/>
           <a:lstStyle/>
           <a:p>
-            <a:pPr indent="0" marL="0">
+            <a:pPr marL="0" indent="0">
               <a:buNone/>
             </a:pPr>
             <a:r>
@@ -5929,7 +5634,7 @@
           <a:bodyPr wrap="square" lIns="0" tIns="0" rIns="0" bIns="0" rtlCol="0" anchor="ctr"/>
           <a:lstStyle/>
           <a:p>
-            <a:pPr indent="0" marL="0">
+            <a:pPr marL="0" indent="0">
               <a:buNone/>
             </a:pPr>
             <a:r>
@@ -5968,7 +5673,7 @@
           <a:bodyPr wrap="square" lIns="0" tIns="0" rIns="0" bIns="0" rtlCol="0" anchor="ctr"/>
           <a:lstStyle/>
           <a:p>
-            <a:pPr indent="0" marL="0">
+            <a:pPr marL="0" indent="0">
               <a:buNone/>
             </a:pPr>
             <a:r>
@@ -6007,7 +5712,7 @@
           <a:bodyPr wrap="square" lIns="0" tIns="0" rIns="0" bIns="0" rtlCol="0" anchor="ctr"/>
           <a:lstStyle/>
           <a:p>
-            <a:pPr algn="r" indent="0" marL="0">
+            <a:pPr marL="0" indent="0" algn="r">
               <a:buNone/>
             </a:pPr>
             <a:r>
@@ -6066,7 +5771,7 @@
           <a:bodyPr wrap="square" lIns="0" tIns="0" rIns="0" bIns="0" rtlCol="0" anchor="ctr"/>
           <a:lstStyle/>
           <a:p>
-            <a:pPr indent="0" marL="0">
+            <a:pPr marL="0" indent="0">
               <a:buNone/>
             </a:pPr>
             <a:r>
@@ -6105,7 +5810,7 @@
           <a:bodyPr wrap="square" lIns="0" tIns="0" rIns="0" bIns="0" rtlCol="0" anchor="ctr"/>
           <a:lstStyle/>
           <a:p>
-            <a:pPr algn="r" indent="0" marL="0">
+            <a:pPr marL="0" indent="0" algn="r">
               <a:buNone/>
             </a:pPr>
             <a:r>
@@ -6164,7 +5869,7 @@
           <a:bodyPr wrap="square" lIns="0" tIns="0" rIns="0" bIns="0" rtlCol="0" anchor="ctr"/>
           <a:lstStyle/>
           <a:p>
-            <a:pPr indent="0" marL="0">
+            <a:pPr marL="0" indent="0">
               <a:buNone/>
             </a:pPr>
             <a:r>
@@ -6203,7 +5908,7 @@
           <a:bodyPr wrap="square" lIns="0" tIns="0" rIns="0" bIns="0" rtlCol="0" anchor="ctr"/>
           <a:lstStyle/>
           <a:p>
-            <a:pPr algn="r" indent="0" marL="0">
+            <a:pPr marL="0" indent="0" algn="r">
               <a:buNone/>
             </a:pPr>
             <a:r>
@@ -6267,7 +5972,7 @@
             <a:prstDash val="solid"/>
           </a:ln>
           <a:effectLst>
-            <a:outerShdw sx="100000" sy="100000" kx="0" ky="0" algn="bl" rotWithShape="0" blurRad="177800" dist="63500" dir="5400000">
+            <a:outerShdw blurRad="177800" dist="63500" dir="5400000" algn="bl" rotWithShape="0">
               <a:srgbClr val="3E00DB">
                 <a:alpha val="55000"/>
               </a:srgbClr>
@@ -6296,11 +6001,11 @@
           <a:bodyPr wrap="square" lIns="0" tIns="0" rIns="0" bIns="0" rtlCol="0" anchor="ctr"/>
           <a:lstStyle/>
           <a:p>
-            <a:pPr indent="0" marL="0">
-              <a:buNone/>
-            </a:pPr>
-            <a:r>
-              <a:rPr lang="en-US" sz="1100" b="1" spc="200" kern="0" dirty="0">
+            <a:pPr marL="0" indent="0">
+              <a:buNone/>
+            </a:pPr>
+            <a:r>
+              <a:rPr lang="en-US" sz="1100" b="1" kern="0" spc="200" dirty="0">
                 <a:solidFill>
                   <a:srgbClr val="AEAEC2"/>
                 </a:solidFill>
@@ -6335,7 +6040,7 @@
           <a:bodyPr wrap="square" lIns="0" tIns="0" rIns="0" bIns="0" rtlCol="0" anchor="ctr"/>
           <a:lstStyle/>
           <a:p>
-            <a:pPr indent="0" marL="0">
+            <a:pPr marL="0" indent="0">
               <a:buNone/>
             </a:pPr>
             <a:r>
@@ -6374,7 +6079,7 @@
           <a:bodyPr wrap="square" lIns="0" tIns="0" rIns="0" bIns="0" rtlCol="0" anchor="ctr"/>
           <a:lstStyle/>
           <a:p>
-            <a:pPr indent="0" marL="0">
+            <a:pPr marL="0" indent="0">
               <a:buNone/>
             </a:pPr>
             <a:r>
@@ -6413,7 +6118,7 @@
           <a:bodyPr wrap="square" lIns="0" tIns="0" rIns="0" bIns="0" rtlCol="0" anchor="ctr"/>
           <a:lstStyle/>
           <a:p>
-            <a:pPr indent="0" marL="0">
+            <a:pPr marL="0" indent="0">
               <a:buNone/>
             </a:pPr>
             <a:r>
@@ -6452,7 +6157,7 @@
           <a:bodyPr wrap="square" lIns="0" tIns="0" rIns="0" bIns="0" rtlCol="0" anchor="ctr"/>
           <a:lstStyle/>
           <a:p>
-            <a:pPr algn="r" indent="0" marL="0">
+            <a:pPr marL="0" indent="0" algn="r">
               <a:buNone/>
             </a:pPr>
             <a:r>
@@ -6511,7 +6216,7 @@
           <a:bodyPr wrap="square" lIns="0" tIns="0" rIns="0" bIns="0" rtlCol="0" anchor="ctr"/>
           <a:lstStyle/>
           <a:p>
-            <a:pPr indent="0" marL="0">
+            <a:pPr marL="0" indent="0">
               <a:buNone/>
             </a:pPr>
             <a:r>
@@ -6550,7 +6255,7 @@
           <a:bodyPr wrap="square" lIns="0" tIns="0" rIns="0" bIns="0" rtlCol="0" anchor="ctr"/>
           <a:lstStyle/>
           <a:p>
-            <a:pPr algn="r" indent="0" marL="0">
+            <a:pPr marL="0" indent="0" algn="r">
               <a:buNone/>
             </a:pPr>
             <a:r>
@@ -6609,7 +6314,7 @@
           <a:bodyPr wrap="square" lIns="0" tIns="0" rIns="0" bIns="0" rtlCol="0" anchor="ctr"/>
           <a:lstStyle/>
           <a:p>
-            <a:pPr indent="0" marL="0">
+            <a:pPr marL="0" indent="0">
               <a:buNone/>
             </a:pPr>
             <a:r>
@@ -6648,7 +6353,7 @@
           <a:bodyPr wrap="square" lIns="0" tIns="0" rIns="0" bIns="0" rtlCol="0" anchor="ctr"/>
           <a:lstStyle/>
           <a:p>
-            <a:pPr algn="r" indent="0" marL="0">
+            <a:pPr marL="0" indent="0" algn="r">
               <a:buNone/>
             </a:pPr>
             <a:r>
@@ -6707,11 +6412,11 @@
           <a:bodyPr wrap="square" lIns="0" tIns="0" rIns="0" bIns="0" rtlCol="0" anchor="ctr"/>
           <a:lstStyle/>
           <a:p>
-            <a:pPr indent="0" marL="0">
-              <a:buNone/>
-            </a:pPr>
-            <a:r>
-              <a:rPr lang="en-US" sz="850" spc="100" kern="0" dirty="0">
+            <a:pPr marL="0" indent="0">
+              <a:buNone/>
+            </a:pPr>
+            <a:r>
+              <a:rPr lang="en-US" sz="850" kern="0" spc="100" dirty="0">
                 <a:solidFill>
                   <a:srgbClr val="5A5570"/>
                 </a:solidFill>
@@ -6746,7 +6451,7 @@
           <a:bodyPr wrap="square" lIns="0" tIns="0" rIns="0" bIns="0" rtlCol="0" anchor="ctr"/>
           <a:lstStyle/>
           <a:p>
-            <a:pPr algn="r" indent="0" marL="0">
+            <a:pPr marL="0" indent="0" algn="r">
               <a:buNone/>
             </a:pPr>
             <a:r>
@@ -6785,7 +6490,7 @@
           <a:bodyPr wrap="square" lIns="0" tIns="0" rIns="0" bIns="0" rtlCol="0" anchor="ctr"/>
           <a:lstStyle/>
           <a:p>
-            <a:pPr algn="r" indent="0" marL="0">
+            <a:pPr marL="0" indent="0" algn="r">
               <a:buNone/>
             </a:pPr>
             <a:r>
@@ -6819,6 +6524,7 @@
         <a:solidFill>
           <a:srgbClr val="0A0A0F"/>
         </a:solidFill>
+        <a:effectLst/>
       </p:bgPr>
     </p:bg>
     <p:spTree>
@@ -6920,11 +6626,11 @@
           <a:bodyPr wrap="square" lIns="0" tIns="0" rIns="0" bIns="0" rtlCol="0" anchor="ctr"/>
           <a:lstStyle/>
           <a:p>
-            <a:pPr algn="l" indent="0" marL="0">
-              <a:buNone/>
-            </a:pPr>
-            <a:r>
-              <a:rPr lang="en-US" sz="1100" b="1" spc="300" kern="0" dirty="0">
+            <a:pPr marL="0" indent="0" algn="l">
+              <a:buNone/>
+            </a:pPr>
+            <a:r>
+              <a:rPr lang="en-US" sz="1100" b="1" kern="0" spc="300" dirty="0">
                 <a:solidFill>
                   <a:srgbClr val="B6C800"/>
                 </a:solidFill>
@@ -6959,7 +6665,7 @@
           <a:bodyPr wrap="square" lIns="0" tIns="0" rIns="0" bIns="0" rtlCol="0" anchor="t"/>
           <a:lstStyle/>
           <a:p>
-            <a:pPr algn="l" indent="0" marL="0">
+            <a:pPr marL="0" indent="0" algn="l">
               <a:lnSpc>
                 <a:spcPct val="100000"/>
               </a:lnSpc>
@@ -7046,7 +6752,7 @@
           <a:bodyPr wrap="square" lIns="0" tIns="0" rIns="0" bIns="0" rtlCol="0" anchor="ctr"/>
           <a:lstStyle/>
           <a:p>
-            <a:pPr indent="0" marL="0">
+            <a:pPr marL="0" indent="0">
               <a:buNone/>
             </a:pPr>
             <a:r>
@@ -7085,7 +6791,7 @@
           <a:bodyPr wrap="square" lIns="0" tIns="0" rIns="0" bIns="0" rtlCol="0" anchor="t"/>
           <a:lstStyle/>
           <a:p>
-            <a:pPr indent="0" marL="0">
+            <a:pPr marL="0" indent="0">
               <a:buNone/>
             </a:pPr>
             <a:r>
@@ -7124,7 +6830,7 @@
           <a:bodyPr wrap="square" lIns="0" tIns="0" rIns="0" bIns="0" rtlCol="0" anchor="t"/>
           <a:lstStyle/>
           <a:p>
-            <a:pPr indent="0" marL="0">
+            <a:pPr marL="0" indent="0">
               <a:lnSpc>
                 <a:spcPct val="105000"/>
               </a:lnSpc>
@@ -7191,7 +6897,7 @@
           <a:bodyPr wrap="square" lIns="0" tIns="0" rIns="0" bIns="0" rtlCol="0" anchor="ctr"/>
           <a:lstStyle/>
           <a:p>
-            <a:pPr indent="0" marL="0">
+            <a:pPr marL="0" indent="0">
               <a:buNone/>
             </a:pPr>
             <a:r>
@@ -7230,7 +6936,7 @@
           <a:bodyPr wrap="square" lIns="0" tIns="0" rIns="0" bIns="0" rtlCol="0" anchor="t"/>
           <a:lstStyle/>
           <a:p>
-            <a:pPr indent="0" marL="0">
+            <a:pPr marL="0" indent="0">
               <a:buNone/>
             </a:pPr>
             <a:r>
@@ -7269,7 +6975,7 @@
           <a:bodyPr wrap="square" lIns="0" tIns="0" rIns="0" bIns="0" rtlCol="0" anchor="t"/>
           <a:lstStyle/>
           <a:p>
-            <a:pPr indent="0" marL="0">
+            <a:pPr marL="0" indent="0">
               <a:lnSpc>
                 <a:spcPct val="105000"/>
               </a:lnSpc>
@@ -7336,7 +7042,7 @@
           <a:bodyPr wrap="square" lIns="0" tIns="0" rIns="0" bIns="0" rtlCol="0" anchor="ctr"/>
           <a:lstStyle/>
           <a:p>
-            <a:pPr indent="0" marL="0">
+            <a:pPr marL="0" indent="0">
               <a:buNone/>
             </a:pPr>
             <a:r>
@@ -7375,7 +7081,7 @@
           <a:bodyPr wrap="square" lIns="0" tIns="0" rIns="0" bIns="0" rtlCol="0" anchor="t"/>
           <a:lstStyle/>
           <a:p>
-            <a:pPr indent="0" marL="0">
+            <a:pPr marL="0" indent="0">
               <a:buNone/>
             </a:pPr>
             <a:r>
@@ -7414,7 +7120,7 @@
           <a:bodyPr wrap="square" lIns="0" tIns="0" rIns="0" bIns="0" rtlCol="0" anchor="t"/>
           <a:lstStyle/>
           <a:p>
-            <a:pPr indent="0" marL="0">
+            <a:pPr marL="0" indent="0">
               <a:lnSpc>
                 <a:spcPct val="105000"/>
               </a:lnSpc>
@@ -7481,7 +7187,7 @@
           <a:bodyPr wrap="square" lIns="0" tIns="0" rIns="0" bIns="0" rtlCol="0" anchor="ctr"/>
           <a:lstStyle/>
           <a:p>
-            <a:pPr indent="0" marL="0">
+            <a:pPr marL="0" indent="0">
               <a:buNone/>
             </a:pPr>
             <a:r>
@@ -7520,7 +7226,7 @@
           <a:bodyPr wrap="square" lIns="0" tIns="0" rIns="0" bIns="0" rtlCol="0" anchor="t"/>
           <a:lstStyle/>
           <a:p>
-            <a:pPr indent="0" marL="0">
+            <a:pPr marL="0" indent="0">
               <a:buNone/>
             </a:pPr>
             <a:r>
@@ -7559,7 +7265,7 @@
           <a:bodyPr wrap="square" lIns="0" tIns="0" rIns="0" bIns="0" rtlCol="0" anchor="t"/>
           <a:lstStyle/>
           <a:p>
-            <a:pPr indent="0" marL="0">
+            <a:pPr marL="0" indent="0">
               <a:lnSpc>
                 <a:spcPct val="105000"/>
               </a:lnSpc>
@@ -7626,7 +7332,7 @@
           <a:bodyPr wrap="square" lIns="0" tIns="0" rIns="0" bIns="0" rtlCol="0" anchor="ctr"/>
           <a:lstStyle/>
           <a:p>
-            <a:pPr indent="0" marL="0">
+            <a:pPr marL="0" indent="0">
               <a:buNone/>
             </a:pPr>
             <a:r>
@@ -7665,7 +7371,7 @@
           <a:bodyPr wrap="square" lIns="0" tIns="0" rIns="0" bIns="0" rtlCol="0" anchor="t"/>
           <a:lstStyle/>
           <a:p>
-            <a:pPr indent="0" marL="0">
+            <a:pPr marL="0" indent="0">
               <a:buNone/>
             </a:pPr>
             <a:r>
@@ -7704,7 +7410,7 @@
           <a:bodyPr wrap="square" lIns="0" tIns="0" rIns="0" bIns="0" rtlCol="0" anchor="t"/>
           <a:lstStyle/>
           <a:p>
-            <a:pPr indent="0" marL="0">
+            <a:pPr marL="0" indent="0">
               <a:lnSpc>
                 <a:spcPct val="105000"/>
               </a:lnSpc>
@@ -7746,11 +7452,11 @@
           <a:bodyPr wrap="square" lIns="0" tIns="0" rIns="0" bIns="0" rtlCol="0" anchor="ctr"/>
           <a:lstStyle/>
           <a:p>
-            <a:pPr indent="0" marL="0">
-              <a:buNone/>
-            </a:pPr>
-            <a:r>
-              <a:rPr lang="en-US" sz="850" spc="100" kern="0" dirty="0">
+            <a:pPr marL="0" indent="0">
+              <a:buNone/>
+            </a:pPr>
+            <a:r>
+              <a:rPr lang="en-US" sz="850" kern="0" spc="100" dirty="0">
                 <a:solidFill>
                   <a:srgbClr val="5A5570"/>
                 </a:solidFill>
@@ -7785,7 +7491,7 @@
           <a:bodyPr wrap="square" lIns="0" tIns="0" rIns="0" bIns="0" rtlCol="0" anchor="ctr"/>
           <a:lstStyle/>
           <a:p>
-            <a:pPr algn="r" indent="0" marL="0">
+            <a:pPr marL="0" indent="0" algn="r">
               <a:buNone/>
             </a:pPr>
             <a:r>
@@ -7824,7 +7530,7 @@
           <a:bodyPr wrap="square" lIns="0" tIns="0" rIns="0" bIns="0" rtlCol="0" anchor="ctr"/>
           <a:lstStyle/>
           <a:p>
-            <a:pPr algn="r" indent="0" marL="0">
+            <a:pPr marL="0" indent="0" algn="r">
               <a:buNone/>
             </a:pPr>
             <a:r>
@@ -7858,6 +7564,7 @@
         <a:solidFill>
           <a:srgbClr val="0A0A0F"/>
         </a:solidFill>
+        <a:effectLst/>
       </p:bgPr>
     </p:bg>
     <p:spTree>
@@ -7959,11 +7666,11 @@
           <a:bodyPr wrap="square" lIns="0" tIns="0" rIns="0" bIns="0" rtlCol="0" anchor="ctr"/>
           <a:lstStyle/>
           <a:p>
-            <a:pPr algn="l" indent="0" marL="0">
-              <a:buNone/>
-            </a:pPr>
-            <a:r>
-              <a:rPr lang="en-US" sz="1100" b="1" spc="300" kern="0" dirty="0">
+            <a:pPr marL="0" indent="0" algn="l">
+              <a:buNone/>
+            </a:pPr>
+            <a:r>
+              <a:rPr lang="en-US" sz="1100" b="1" kern="0" spc="300" dirty="0">
                 <a:solidFill>
                   <a:srgbClr val="B6C800"/>
                 </a:solidFill>
@@ -7998,7 +7705,7 @@
           <a:bodyPr wrap="square" lIns="0" tIns="0" rIns="0" bIns="0" rtlCol="0" anchor="t"/>
           <a:lstStyle/>
           <a:p>
-            <a:pPr algn="l" indent="0" marL="0">
+            <a:pPr marL="0" indent="0" algn="l">
               <a:lnSpc>
                 <a:spcPct val="100000"/>
               </a:lnSpc>
@@ -8045,7 +7752,7 @@
             <a:prstDash val="solid"/>
           </a:ln>
           <a:effectLst>
-            <a:outerShdw sx="100000" sy="100000" kx="0" ky="0" algn="bl" rotWithShape="0" blurRad="177800" dist="63500" dir="5400000">
+            <a:outerShdw blurRad="177800" dist="63500" dir="5400000" algn="bl" rotWithShape="0">
               <a:srgbClr val="3E00DB">
                 <a:alpha val="55000"/>
               </a:srgbClr>
@@ -8094,7 +7801,7 @@
           <a:bodyPr wrap="square" lIns="0" tIns="0" rIns="0" bIns="0" rtlCol="0" anchor="t"/>
           <a:lstStyle/>
           <a:p>
-            <a:pPr indent="0" marL="0">
+            <a:pPr marL="0" indent="0">
               <a:buNone/>
             </a:pPr>
             <a:r>
@@ -8133,7 +7840,7 @@
           <a:bodyPr wrap="square" lIns="0" tIns="0" rIns="0" bIns="0" rtlCol="0" anchor="t"/>
           <a:lstStyle/>
           <a:p>
-            <a:pPr indent="0" marL="0">
+            <a:pPr marL="0" indent="0">
               <a:lnSpc>
                 <a:spcPct val="100000"/>
               </a:lnSpc>
@@ -8180,7 +7887,7 @@
             <a:prstDash val="solid"/>
           </a:ln>
           <a:effectLst>
-            <a:outerShdw sx="100000" sy="100000" kx="0" ky="0" algn="bl" rotWithShape="0" blurRad="177800" dist="63500" dir="5400000">
+            <a:outerShdw blurRad="177800" dist="63500" dir="5400000" algn="bl" rotWithShape="0">
               <a:srgbClr val="3E00DB">
                 <a:alpha val="55000"/>
               </a:srgbClr>
@@ -8229,7 +7936,7 @@
           <a:bodyPr wrap="square" lIns="0" tIns="0" rIns="0" bIns="0" rtlCol="0" anchor="t"/>
           <a:lstStyle/>
           <a:p>
-            <a:pPr indent="0" marL="0">
+            <a:pPr marL="0" indent="0">
               <a:buNone/>
             </a:pPr>
             <a:r>
@@ -8268,7 +7975,7 @@
           <a:bodyPr wrap="square" lIns="0" tIns="0" rIns="0" bIns="0" rtlCol="0" anchor="t"/>
           <a:lstStyle/>
           <a:p>
-            <a:pPr indent="0" marL="0">
+            <a:pPr marL="0" indent="0">
               <a:lnSpc>
                 <a:spcPct val="100000"/>
               </a:lnSpc>
@@ -8315,7 +8022,7 @@
             <a:prstDash val="solid"/>
           </a:ln>
           <a:effectLst>
-            <a:outerShdw sx="100000" sy="100000" kx="0" ky="0" algn="bl" rotWithShape="0" blurRad="177800" dist="63500" dir="5400000">
+            <a:outerShdw blurRad="177800" dist="63500" dir="5400000" algn="bl" rotWithShape="0">
               <a:srgbClr val="3E00DB">
                 <a:alpha val="55000"/>
               </a:srgbClr>
@@ -8364,7 +8071,7 @@
           <a:bodyPr wrap="square" lIns="0" tIns="0" rIns="0" bIns="0" rtlCol="0" anchor="t"/>
           <a:lstStyle/>
           <a:p>
-            <a:pPr indent="0" marL="0">
+            <a:pPr marL="0" indent="0">
               <a:buNone/>
             </a:pPr>
             <a:r>
@@ -8403,7 +8110,7 @@
           <a:bodyPr wrap="square" lIns="0" tIns="0" rIns="0" bIns="0" rtlCol="0" anchor="t"/>
           <a:lstStyle/>
           <a:p>
-            <a:pPr indent="0" marL="0">
+            <a:pPr marL="0" indent="0">
               <a:lnSpc>
                 <a:spcPct val="100000"/>
               </a:lnSpc>
@@ -8450,7 +8157,7 @@
             <a:prstDash val="solid"/>
           </a:ln>
           <a:effectLst>
-            <a:outerShdw sx="100000" sy="100000" kx="0" ky="0" algn="bl" rotWithShape="0" blurRad="177800" dist="63500" dir="5400000">
+            <a:outerShdw blurRad="177800" dist="63500" dir="5400000" algn="bl" rotWithShape="0">
               <a:srgbClr val="3E00DB">
                 <a:alpha val="55000"/>
               </a:srgbClr>
@@ -8499,7 +8206,7 @@
           <a:bodyPr wrap="square" lIns="0" tIns="0" rIns="0" bIns="0" rtlCol="0" anchor="t"/>
           <a:lstStyle/>
           <a:p>
-            <a:pPr indent="0" marL="0">
+            <a:pPr marL="0" indent="0">
               <a:buNone/>
             </a:pPr>
             <a:r>
@@ -8538,7 +8245,7 @@
           <a:bodyPr wrap="square" lIns="0" tIns="0" rIns="0" bIns="0" rtlCol="0" anchor="t"/>
           <a:lstStyle/>
           <a:p>
-            <a:pPr indent="0" marL="0">
+            <a:pPr marL="0" indent="0">
               <a:lnSpc>
                 <a:spcPct val="100000"/>
               </a:lnSpc>
@@ -8585,7 +8292,7 @@
             <a:prstDash val="solid"/>
           </a:ln>
           <a:effectLst>
-            <a:outerShdw sx="100000" sy="100000" kx="0" ky="0" algn="bl" rotWithShape="0" blurRad="177800" dist="63500" dir="5400000">
+            <a:outerShdw blurRad="177800" dist="63500" dir="5400000" algn="bl" rotWithShape="0">
               <a:srgbClr val="3E00DB">
                 <a:alpha val="55000"/>
               </a:srgbClr>
@@ -8634,7 +8341,7 @@
           <a:bodyPr wrap="square" lIns="0" tIns="0" rIns="0" bIns="0" rtlCol="0" anchor="t"/>
           <a:lstStyle/>
           <a:p>
-            <a:pPr indent="0" marL="0">
+            <a:pPr marL="0" indent="0">
               <a:buNone/>
             </a:pPr>
             <a:r>
@@ -8673,7 +8380,7 @@
           <a:bodyPr wrap="square" lIns="0" tIns="0" rIns="0" bIns="0" rtlCol="0" anchor="t"/>
           <a:lstStyle/>
           <a:p>
-            <a:pPr indent="0" marL="0">
+            <a:pPr marL="0" indent="0">
               <a:lnSpc>
                 <a:spcPct val="100000"/>
               </a:lnSpc>
@@ -8720,7 +8427,7 @@
             <a:prstDash val="solid"/>
           </a:ln>
           <a:effectLst>
-            <a:outerShdw sx="100000" sy="100000" kx="0" ky="0" algn="bl" rotWithShape="0" blurRad="177800" dist="63500" dir="5400000">
+            <a:outerShdw blurRad="177800" dist="63500" dir="5400000" algn="bl" rotWithShape="0">
               <a:srgbClr val="3E00DB">
                 <a:alpha val="55000"/>
               </a:srgbClr>
@@ -8769,7 +8476,7 @@
           <a:bodyPr wrap="square" lIns="0" tIns="0" rIns="0" bIns="0" rtlCol="0" anchor="t"/>
           <a:lstStyle/>
           <a:p>
-            <a:pPr indent="0" marL="0">
+            <a:pPr marL="0" indent="0">
               <a:buNone/>
             </a:pPr>
             <a:r>
@@ -8808,7 +8515,7 @@
           <a:bodyPr wrap="square" lIns="0" tIns="0" rIns="0" bIns="0" rtlCol="0" anchor="t"/>
           <a:lstStyle/>
           <a:p>
-            <a:pPr indent="0" marL="0">
+            <a:pPr marL="0" indent="0">
               <a:lnSpc>
                 <a:spcPct val="100000"/>
               </a:lnSpc>
@@ -8855,7 +8562,7 @@
             <a:prstDash val="solid"/>
           </a:ln>
           <a:effectLst>
-            <a:outerShdw sx="100000" sy="100000" kx="0" ky="0" algn="bl" rotWithShape="0" blurRad="177800" dist="63500" dir="5400000">
+            <a:outerShdw blurRad="177800" dist="63500" dir="5400000" algn="bl" rotWithShape="0">
               <a:srgbClr val="3E00DB">
                 <a:alpha val="55000"/>
               </a:srgbClr>
@@ -8904,7 +8611,7 @@
           <a:bodyPr wrap="square" lIns="0" tIns="0" rIns="0" bIns="0" rtlCol="0" anchor="t"/>
           <a:lstStyle/>
           <a:p>
-            <a:pPr indent="0" marL="0">
+            <a:pPr marL="0" indent="0">
               <a:buNone/>
             </a:pPr>
             <a:r>
@@ -8943,7 +8650,7 @@
           <a:bodyPr wrap="square" lIns="0" tIns="0" rIns="0" bIns="0" rtlCol="0" anchor="t"/>
           <a:lstStyle/>
           <a:p>
-            <a:pPr indent="0" marL="0">
+            <a:pPr marL="0" indent="0">
               <a:lnSpc>
                 <a:spcPct val="100000"/>
               </a:lnSpc>
@@ -8990,7 +8697,7 @@
             <a:prstDash val="solid"/>
           </a:ln>
           <a:effectLst>
-            <a:outerShdw sx="100000" sy="100000" kx="0" ky="0" algn="bl" rotWithShape="0" blurRad="177800" dist="63500" dir="5400000">
+            <a:outerShdw blurRad="177800" dist="63500" dir="5400000" algn="bl" rotWithShape="0">
               <a:srgbClr val="3E00DB">
                 <a:alpha val="55000"/>
               </a:srgbClr>
@@ -9039,7 +8746,7 @@
           <a:bodyPr wrap="square" lIns="0" tIns="0" rIns="0" bIns="0" rtlCol="0" anchor="t"/>
           <a:lstStyle/>
           <a:p>
-            <a:pPr indent="0" marL="0">
+            <a:pPr marL="0" indent="0">
               <a:buNone/>
             </a:pPr>
             <a:r>
@@ -9078,7 +8785,7 @@
           <a:bodyPr wrap="square" lIns="0" tIns="0" rIns="0" bIns="0" rtlCol="0" anchor="t"/>
           <a:lstStyle/>
           <a:p>
-            <a:pPr indent="0" marL="0">
+            <a:pPr marL="0" indent="0">
               <a:lnSpc>
                 <a:spcPct val="100000"/>
               </a:lnSpc>
@@ -9120,11 +8827,11 @@
           <a:bodyPr wrap="square" lIns="0" tIns="0" rIns="0" bIns="0" rtlCol="0" anchor="ctr"/>
           <a:lstStyle/>
           <a:p>
-            <a:pPr indent="0" marL="0">
-              <a:buNone/>
-            </a:pPr>
-            <a:r>
-              <a:rPr lang="en-US" sz="850" spc="100" kern="0" dirty="0">
+            <a:pPr marL="0" indent="0">
+              <a:buNone/>
+            </a:pPr>
+            <a:r>
+              <a:rPr lang="en-US" sz="850" kern="0" spc="100" dirty="0">
                 <a:solidFill>
                   <a:srgbClr val="5A5570"/>
                 </a:solidFill>
@@ -9159,7 +8866,7 @@
           <a:bodyPr wrap="square" lIns="0" tIns="0" rIns="0" bIns="0" rtlCol="0" anchor="ctr"/>
           <a:lstStyle/>
           <a:p>
-            <a:pPr algn="r" indent="0" marL="0">
+            <a:pPr marL="0" indent="0" algn="r">
               <a:buNone/>
             </a:pPr>
             <a:r>
@@ -9198,7 +8905,7 @@
           <a:bodyPr wrap="square" lIns="0" tIns="0" rIns="0" bIns="0" rtlCol="0" anchor="ctr"/>
           <a:lstStyle/>
           <a:p>
-            <a:pPr algn="r" indent="0" marL="0">
+            <a:pPr marL="0" indent="0" algn="r">
               <a:buNone/>
             </a:pPr>
             <a:r>
@@ -9232,6 +8939,7 @@
         <a:solidFill>
           <a:srgbClr val="0A0A0F"/>
         </a:solidFill>
+        <a:effectLst/>
       </p:bgPr>
     </p:bg>
     <p:spTree>
@@ -9333,11 +9041,11 @@
           <a:bodyPr wrap="square" lIns="0" tIns="0" rIns="0" bIns="0" rtlCol="0" anchor="ctr"/>
           <a:lstStyle/>
           <a:p>
-            <a:pPr algn="l" indent="0" marL="0">
-              <a:buNone/>
-            </a:pPr>
-            <a:r>
-              <a:rPr lang="en-US" sz="1100" b="1" spc="300" kern="0" dirty="0">
+            <a:pPr marL="0" indent="0" algn="l">
+              <a:buNone/>
+            </a:pPr>
+            <a:r>
+              <a:rPr lang="en-US" sz="1100" b="1" kern="0" spc="300" dirty="0">
                 <a:solidFill>
                   <a:srgbClr val="B6C800"/>
                 </a:solidFill>
@@ -9377,7 +9085,7 @@
             <a:prstDash val="solid"/>
           </a:ln>
           <a:effectLst>
-            <a:outerShdw sx="100000" sy="100000" kx="0" ky="0" algn="bl" rotWithShape="0" blurRad="177800" dist="63500" dir="5400000">
+            <a:outerShdw blurRad="177800" dist="63500" dir="5400000" algn="bl" rotWithShape="0">
               <a:srgbClr val="3E00DB">
                 <a:alpha val="55000"/>
               </a:srgbClr>
@@ -9406,11 +9114,11 @@
           <a:bodyPr wrap="square" lIns="0" tIns="0" rIns="0" bIns="0" rtlCol="0" anchor="ctr"/>
           <a:lstStyle/>
           <a:p>
-            <a:pPr indent="0" marL="0">
-              <a:buNone/>
-            </a:pPr>
-            <a:r>
-              <a:rPr lang="en-US" sz="1200" b="1" spc="300" kern="0" dirty="0">
+            <a:pPr marL="0" indent="0">
+              <a:buNone/>
+            </a:pPr>
+            <a:r>
+              <a:rPr lang="en-US" sz="1200" b="1" kern="0" spc="300" dirty="0">
                 <a:solidFill>
                   <a:srgbClr val="B6C800"/>
                 </a:solidFill>
@@ -9445,7 +9153,7 @@
           <a:bodyPr wrap="square" lIns="0" tIns="0" rIns="0" bIns="0" rtlCol="0" anchor="ctr"/>
           <a:lstStyle/>
           <a:p>
-            <a:pPr indent="0" marL="0">
+            <a:pPr marL="0" indent="0">
               <a:buNone/>
             </a:pPr>
             <a:r>
@@ -9484,7 +9192,7 @@
           <a:bodyPr wrap="square" lIns="0" tIns="0" rIns="0" bIns="0" rtlCol="0" anchor="t"/>
           <a:lstStyle/>
           <a:p>
-            <a:pPr indent="0" marL="0">
+            <a:pPr marL="0" indent="0">
               <a:lnSpc>
                 <a:spcPct val="105000"/>
               </a:lnSpc>
@@ -9546,11 +9254,11 @@
           <a:bodyPr wrap="square" lIns="0" tIns="0" rIns="0" bIns="0" rtlCol="0" anchor="ctr"/>
           <a:lstStyle/>
           <a:p>
-            <a:pPr indent="0" marL="0">
-              <a:buNone/>
-            </a:pPr>
-            <a:r>
-              <a:rPr lang="en-US" sz="950" b="1" spc="150" kern="0" dirty="0">
+            <a:pPr marL="0" indent="0">
+              <a:buNone/>
+            </a:pPr>
+            <a:r>
+              <a:rPr lang="en-US" sz="950" b="1" kern="0" spc="150" dirty="0">
                 <a:solidFill>
                   <a:srgbClr val="AEAEC2"/>
                 </a:solidFill>
@@ -9585,7 +9293,7 @@
           <a:bodyPr wrap="square" lIns="0" tIns="0" rIns="0" bIns="0" rtlCol="0" anchor="t"/>
           <a:lstStyle/>
           <a:p>
-            <a:pPr indent="0" marL="0">
+            <a:pPr marL="0" indent="0">
               <a:buNone/>
             </a:pPr>
             <a:r>
@@ -9624,11 +9332,11 @@
           <a:bodyPr wrap="square" lIns="0" tIns="0" rIns="0" bIns="0" rtlCol="0" anchor="ctr"/>
           <a:lstStyle/>
           <a:p>
-            <a:pPr indent="0" marL="0">
-              <a:buNone/>
-            </a:pPr>
-            <a:r>
-              <a:rPr lang="en-US" sz="950" b="1" spc="150" kern="0" dirty="0">
+            <a:pPr marL="0" indent="0">
+              <a:buNone/>
+            </a:pPr>
+            <a:r>
+              <a:rPr lang="en-US" sz="950" b="1" kern="0" spc="150" dirty="0">
                 <a:solidFill>
                   <a:srgbClr val="AEAEC2"/>
                 </a:solidFill>
@@ -9663,7 +9371,7 @@
           <a:bodyPr wrap="square" lIns="0" tIns="0" rIns="0" bIns="0" rtlCol="0" anchor="t"/>
           <a:lstStyle/>
           <a:p>
-            <a:pPr indent="0" marL="0">
+            <a:pPr marL="0" indent="0">
               <a:buNone/>
             </a:pPr>
             <a:r>
@@ -9702,11 +9410,11 @@
           <a:bodyPr wrap="square" lIns="0" tIns="0" rIns="0" bIns="0" rtlCol="0" anchor="ctr"/>
           <a:lstStyle/>
           <a:p>
-            <a:pPr indent="0" marL="0">
-              <a:buNone/>
-            </a:pPr>
-            <a:r>
-              <a:rPr lang="en-US" sz="950" b="1" spc="150" kern="0" dirty="0">
+            <a:pPr marL="0" indent="0">
+              <a:buNone/>
+            </a:pPr>
+            <a:r>
+              <a:rPr lang="en-US" sz="950" b="1" kern="0" spc="150" dirty="0">
                 <a:solidFill>
                   <a:srgbClr val="AEAEC2"/>
                 </a:solidFill>
@@ -9741,7 +9449,7 @@
           <a:bodyPr wrap="square" lIns="0" tIns="0" rIns="0" bIns="0" rtlCol="0" anchor="t"/>
           <a:lstStyle/>
           <a:p>
-            <a:pPr indent="0" marL="0">
+            <a:pPr marL="0" indent="0">
               <a:buNone/>
             </a:pPr>
             <a:r>
@@ -9780,7 +9488,7 @@
           <a:bodyPr wrap="square" lIns="0" tIns="0" rIns="0" bIns="0" rtlCol="0" anchor="ctr"/>
           <a:lstStyle/>
           <a:p>
-            <a:pPr indent="0" marL="0">
+            <a:pPr marL="0" indent="0">
               <a:buNone/>
             </a:pPr>
             <a:r>
@@ -9839,11 +9547,11 @@
           <a:bodyPr wrap="square" lIns="0" tIns="0" rIns="0" bIns="0" rtlCol="0" anchor="ctr"/>
           <a:lstStyle/>
           <a:p>
-            <a:pPr algn="l" indent="0" marL="0">
-              <a:buNone/>
-            </a:pPr>
-            <a:r>
-              <a:rPr lang="en-US" sz="1100" b="1" spc="300" kern="0" dirty="0">
+            <a:pPr marL="0" indent="0" algn="l">
+              <a:buNone/>
+            </a:pPr>
+            <a:r>
+              <a:rPr lang="en-US" sz="1100" b="1" kern="0" spc="300" dirty="0">
                 <a:solidFill>
                   <a:srgbClr val="B6C800"/>
                 </a:solidFill>
@@ -9905,7 +9613,7 @@
           <a:bodyPr wrap="square" lIns="0" tIns="0" rIns="0" bIns="0" rtlCol="0" anchor="ctr"/>
           <a:lstStyle/>
           <a:p>
-            <a:pPr indent="0" marL="0">
+            <a:pPr marL="0" indent="0">
               <a:buNone/>
             </a:pPr>
             <a:r>
@@ -9944,7 +9652,7 @@
           <a:bodyPr wrap="square" lIns="0" tIns="0" rIns="0" bIns="0" rtlCol="0" anchor="ctr"/>
           <a:lstStyle/>
           <a:p>
-            <a:pPr algn="r" indent="0" marL="0">
+            <a:pPr marL="0" indent="0" algn="r">
               <a:buNone/>
             </a:pPr>
             <a:r>
@@ -10010,7 +9718,7 @@
           <a:bodyPr wrap="square" lIns="0" tIns="0" rIns="0" bIns="0" rtlCol="0" anchor="ctr"/>
           <a:lstStyle/>
           <a:p>
-            <a:pPr indent="0" marL="0">
+            <a:pPr marL="0" indent="0">
               <a:buNone/>
             </a:pPr>
             <a:r>
@@ -10049,7 +9757,7 @@
           <a:bodyPr wrap="square" lIns="0" tIns="0" rIns="0" bIns="0" rtlCol="0" anchor="ctr"/>
           <a:lstStyle/>
           <a:p>
-            <a:pPr algn="r" indent="0" marL="0">
+            <a:pPr marL="0" indent="0" algn="r">
               <a:buNone/>
             </a:pPr>
             <a:r>
@@ -10115,7 +9823,7 @@
           <a:bodyPr wrap="square" lIns="0" tIns="0" rIns="0" bIns="0" rtlCol="0" anchor="ctr"/>
           <a:lstStyle/>
           <a:p>
-            <a:pPr indent="0" marL="0">
+            <a:pPr marL="0" indent="0">
               <a:buNone/>
             </a:pPr>
             <a:r>
@@ -10154,7 +9862,7 @@
           <a:bodyPr wrap="square" lIns="0" tIns="0" rIns="0" bIns="0" rtlCol="0" anchor="ctr"/>
           <a:lstStyle/>
           <a:p>
-            <a:pPr algn="r" indent="0" marL="0">
+            <a:pPr marL="0" indent="0" algn="r">
               <a:buNone/>
             </a:pPr>
             <a:r>
@@ -10220,7 +9928,7 @@
           <a:bodyPr wrap="square" lIns="0" tIns="0" rIns="0" bIns="0" rtlCol="0" anchor="ctr"/>
           <a:lstStyle/>
           <a:p>
-            <a:pPr indent="0" marL="0">
+            <a:pPr marL="0" indent="0">
               <a:buNone/>
             </a:pPr>
             <a:r>
@@ -10259,7 +9967,7 @@
           <a:bodyPr wrap="square" lIns="0" tIns="0" rIns="0" bIns="0" rtlCol="0" anchor="ctr"/>
           <a:lstStyle/>
           <a:p>
-            <a:pPr algn="r" indent="0" marL="0">
+            <a:pPr marL="0" indent="0" algn="r">
               <a:buNone/>
             </a:pPr>
             <a:r>
@@ -10325,7 +10033,7 @@
           <a:bodyPr wrap="square" lIns="0" tIns="0" rIns="0" bIns="0" rtlCol="0" anchor="ctr"/>
           <a:lstStyle/>
           <a:p>
-            <a:pPr indent="0" marL="0">
+            <a:pPr marL="0" indent="0">
               <a:buNone/>
             </a:pPr>
             <a:r>
@@ -10364,7 +10072,7 @@
           <a:bodyPr wrap="square" lIns="0" tIns="0" rIns="0" bIns="0" rtlCol="0" anchor="ctr"/>
           <a:lstStyle/>
           <a:p>
-            <a:pPr algn="r" indent="0" marL="0">
+            <a:pPr marL="0" indent="0" algn="r">
               <a:buNone/>
             </a:pPr>
             <a:r>
@@ -10430,11 +10138,11 @@
           <a:bodyPr wrap="square" lIns="0" tIns="0" rIns="0" bIns="0" rtlCol="0" anchor="ctr"/>
           <a:lstStyle/>
           <a:p>
-            <a:pPr indent="0" marL="0">
-              <a:buNone/>
-            </a:pPr>
-            <a:r>
-              <a:rPr lang="en-US" sz="1100" b="1" spc="100" kern="0" dirty="0">
+            <a:pPr marL="0" indent="0">
+              <a:buNone/>
+            </a:pPr>
+            <a:r>
+              <a:rPr lang="en-US" sz="1100" b="1" kern="0" spc="100" dirty="0">
                 <a:solidFill>
                   <a:srgbClr val="FFFFFF"/>
                 </a:solidFill>
@@ -10469,7 +10177,7 @@
           <a:bodyPr wrap="square" lIns="0" tIns="0" rIns="0" bIns="0" rtlCol="0" anchor="ctr"/>
           <a:lstStyle/>
           <a:p>
-            <a:pPr algn="r" indent="0" marL="0">
+            <a:pPr marL="0" indent="0" algn="r">
               <a:buNone/>
             </a:pPr>
             <a:r>
@@ -10508,11 +10216,11 @@
           <a:bodyPr wrap="square" lIns="0" tIns="0" rIns="0" bIns="0" rtlCol="0" anchor="ctr"/>
           <a:lstStyle/>
           <a:p>
-            <a:pPr indent="0" marL="0">
-              <a:buNone/>
-            </a:pPr>
-            <a:r>
-              <a:rPr lang="en-US" sz="850" spc="100" kern="0" dirty="0">
+            <a:pPr marL="0" indent="0">
+              <a:buNone/>
+            </a:pPr>
+            <a:r>
+              <a:rPr lang="en-US" sz="850" kern="0" spc="100" dirty="0">
                 <a:solidFill>
                   <a:srgbClr val="5A5570"/>
                 </a:solidFill>
@@ -10547,7 +10255,7 @@
           <a:bodyPr wrap="square" lIns="0" tIns="0" rIns="0" bIns="0" rtlCol="0" anchor="ctr"/>
           <a:lstStyle/>
           <a:p>
-            <a:pPr algn="r" indent="0" marL="0">
+            <a:pPr marL="0" indent="0" algn="r">
               <a:buNone/>
             </a:pPr>
             <a:r>
@@ -10586,7 +10294,7 @@
           <a:bodyPr wrap="square" lIns="0" tIns="0" rIns="0" bIns="0" rtlCol="0" anchor="ctr"/>
           <a:lstStyle/>
           <a:p>
-            <a:pPr algn="r" indent="0" marL="0">
+            <a:pPr marL="0" indent="0" algn="r">
               <a:buNone/>
             </a:pPr>
             <a:r>
@@ -10620,6 +10328,7 @@
         <a:solidFill>
           <a:srgbClr val="0A0A0F"/>
         </a:solidFill>
+        <a:effectLst/>
       </p:bgPr>
     </p:bg>
     <p:spTree>
@@ -10721,11 +10430,11 @@
           <a:bodyPr wrap="square" lIns="0" tIns="0" rIns="0" bIns="0" rtlCol="0" anchor="ctr"/>
           <a:lstStyle/>
           <a:p>
-            <a:pPr algn="l" indent="0" marL="0">
-              <a:buNone/>
-            </a:pPr>
-            <a:r>
-              <a:rPr lang="en-US" sz="1100" b="1" spc="300" kern="0" dirty="0">
+            <a:pPr marL="0" indent="0" algn="l">
+              <a:buNone/>
+            </a:pPr>
+            <a:r>
+              <a:rPr lang="en-US" sz="1100" b="1" kern="0" spc="300" dirty="0">
                 <a:solidFill>
                   <a:srgbClr val="B6C800"/>
                 </a:solidFill>
@@ -10760,7 +10469,7 @@
           <a:bodyPr wrap="square" lIns="0" tIns="0" rIns="0" bIns="0" rtlCol="0" anchor="t"/>
           <a:lstStyle/>
           <a:p>
-            <a:pPr algn="l" indent="0" marL="0">
+            <a:pPr marL="0" indent="0" algn="l">
               <a:lnSpc>
                 <a:spcPct val="100000"/>
               </a:lnSpc>
@@ -10802,7 +10511,7 @@
           <a:bodyPr wrap="square" lIns="0" tIns="0" rIns="0" bIns="0" rtlCol="0" anchor="ctr"/>
           <a:lstStyle/>
           <a:p>
-            <a:pPr indent="0" marL="0">
+            <a:pPr marL="0" indent="0">
               <a:lnSpc>
                 <a:spcPct val="105000"/>
               </a:lnSpc>
@@ -10849,7 +10558,7 @@
             <a:prstDash val="solid"/>
           </a:ln>
           <a:effectLst>
-            <a:outerShdw sx="100000" sy="100000" kx="0" ky="0" algn="bl" rotWithShape="0" blurRad="177800" dist="63500" dir="5400000">
+            <a:outerShdw blurRad="177800" dist="63500" dir="5400000" algn="bl" rotWithShape="0">
               <a:srgbClr val="3E00DB">
                 <a:alpha val="55000"/>
               </a:srgbClr>
@@ -10898,7 +10607,7 @@
           <a:bodyPr wrap="square" lIns="0" tIns="0" rIns="0" bIns="0" rtlCol="0" anchor="ctr"/>
           <a:lstStyle/>
           <a:p>
-            <a:pPr indent="0" marL="0">
+            <a:pPr marL="0" indent="0">
               <a:buNone/>
             </a:pPr>
             <a:r>
@@ -10937,7 +10646,7 @@
           <a:bodyPr wrap="square" lIns="0" tIns="0" rIns="0" bIns="0" rtlCol="0" anchor="t"/>
           <a:lstStyle/>
           <a:p>
-            <a:pPr indent="0" marL="0">
+            <a:pPr marL="0" indent="0">
               <a:lnSpc>
                 <a:spcPct val="105000"/>
               </a:lnSpc>
@@ -10984,7 +10693,7 @@
             <a:prstDash val="solid"/>
           </a:ln>
           <a:effectLst>
-            <a:outerShdw sx="100000" sy="100000" kx="0" ky="0" algn="bl" rotWithShape="0" blurRad="177800" dist="63500" dir="5400000">
+            <a:outerShdw blurRad="177800" dist="63500" dir="5400000" algn="bl" rotWithShape="0">
               <a:srgbClr val="3E00DB">
                 <a:alpha val="55000"/>
               </a:srgbClr>
@@ -11033,7 +10742,7 @@
           <a:bodyPr wrap="square" lIns="0" tIns="0" rIns="0" bIns="0" rtlCol="0" anchor="ctr"/>
           <a:lstStyle/>
           <a:p>
-            <a:pPr indent="0" marL="0">
+            <a:pPr marL="0" indent="0">
               <a:buNone/>
             </a:pPr>
             <a:r>
@@ -11072,7 +10781,7 @@
           <a:bodyPr wrap="square" lIns="0" tIns="0" rIns="0" bIns="0" rtlCol="0" anchor="t"/>
           <a:lstStyle/>
           <a:p>
-            <a:pPr indent="0" marL="0">
+            <a:pPr marL="0" indent="0">
               <a:lnSpc>
                 <a:spcPct val="105000"/>
               </a:lnSpc>
@@ -11119,7 +10828,7 @@
             <a:prstDash val="solid"/>
           </a:ln>
           <a:effectLst>
-            <a:outerShdw sx="100000" sy="100000" kx="0" ky="0" algn="bl" rotWithShape="0" blurRad="177800" dist="63500" dir="5400000">
+            <a:outerShdw blurRad="177800" dist="63500" dir="5400000" algn="bl" rotWithShape="0">
               <a:srgbClr val="3E00DB">
                 <a:alpha val="55000"/>
               </a:srgbClr>
@@ -11148,7 +10857,7 @@
           <a:bodyPr wrap="square" lIns="0" tIns="0" rIns="0" bIns="0" rtlCol="0" anchor="t"/>
           <a:lstStyle/>
           <a:p>
-            <a:pPr indent="0" marL="0">
+            <a:pPr marL="0" indent="0">
               <a:buNone/>
             </a:pPr>
             <a:r>
@@ -11187,7 +10896,7 @@
           <a:bodyPr wrap="square" lIns="0" tIns="0" rIns="0" bIns="0" rtlCol="0" anchor="t"/>
           <a:lstStyle/>
           <a:p>
-            <a:pPr indent="0" marL="0">
+            <a:pPr marL="0" indent="0">
               <a:lnSpc>
                 <a:spcPct val="100000"/>
               </a:lnSpc>
@@ -11234,7 +10943,7 @@
             <a:prstDash val="solid"/>
           </a:ln>
           <a:effectLst>
-            <a:outerShdw sx="100000" sy="100000" kx="0" ky="0" algn="bl" rotWithShape="0" blurRad="177800" dist="63500" dir="5400000">
+            <a:outerShdw blurRad="177800" dist="63500" dir="5400000" algn="bl" rotWithShape="0">
               <a:srgbClr val="3E00DB">
                 <a:alpha val="55000"/>
               </a:srgbClr>
@@ -11263,7 +10972,7 @@
           <a:bodyPr wrap="square" lIns="0" tIns="0" rIns="0" bIns="0" rtlCol="0" anchor="t"/>
           <a:lstStyle/>
           <a:p>
-            <a:pPr indent="0" marL="0">
+            <a:pPr marL="0" indent="0">
               <a:buNone/>
             </a:pPr>
             <a:r>
@@ -11302,7 +11011,7 @@
           <a:bodyPr wrap="square" lIns="0" tIns="0" rIns="0" bIns="0" rtlCol="0" anchor="t"/>
           <a:lstStyle/>
           <a:p>
-            <a:pPr indent="0" marL="0">
+            <a:pPr marL="0" indent="0">
               <a:lnSpc>
                 <a:spcPct val="100000"/>
               </a:lnSpc>
@@ -11349,7 +11058,7 @@
             <a:prstDash val="solid"/>
           </a:ln>
           <a:effectLst>
-            <a:outerShdw sx="100000" sy="100000" kx="0" ky="0" algn="bl" rotWithShape="0" blurRad="177800" dist="63500" dir="5400000">
+            <a:outerShdw blurRad="177800" dist="63500" dir="5400000" algn="bl" rotWithShape="0">
               <a:srgbClr val="3E00DB">
                 <a:alpha val="55000"/>
               </a:srgbClr>
@@ -11378,7 +11087,7 @@
           <a:bodyPr wrap="square" lIns="0" tIns="0" rIns="0" bIns="0" rtlCol="0" anchor="t"/>
           <a:lstStyle/>
           <a:p>
-            <a:pPr indent="0" marL="0">
+            <a:pPr marL="0" indent="0">
               <a:buNone/>
             </a:pPr>
             <a:r>
@@ -11417,7 +11126,7 @@
           <a:bodyPr wrap="square" lIns="0" tIns="0" rIns="0" bIns="0" rtlCol="0" anchor="t"/>
           <a:lstStyle/>
           <a:p>
-            <a:pPr indent="0" marL="0">
+            <a:pPr marL="0" indent="0">
               <a:lnSpc>
                 <a:spcPct val="100000"/>
               </a:lnSpc>
@@ -11459,7 +11168,7 @@
           <a:bodyPr wrap="square" lIns="0" tIns="0" rIns="0" bIns="0" rtlCol="0" anchor="ctr"/>
           <a:lstStyle/>
           <a:p>
-            <a:pPr indent="0" marL="0">
+            <a:pPr marL="0" indent="0">
               <a:buNone/>
             </a:pPr>
             <a:r>
@@ -11498,11 +11207,11 @@
           <a:bodyPr wrap="square" lIns="0" tIns="0" rIns="0" bIns="0" rtlCol="0" anchor="ctr"/>
           <a:lstStyle/>
           <a:p>
-            <a:pPr indent="0" marL="0">
-              <a:buNone/>
-            </a:pPr>
-            <a:r>
-              <a:rPr lang="en-US" sz="850" spc="100" kern="0" dirty="0">
+            <a:pPr marL="0" indent="0">
+              <a:buNone/>
+            </a:pPr>
+            <a:r>
+              <a:rPr lang="en-US" sz="850" kern="0" spc="100" dirty="0">
                 <a:solidFill>
                   <a:srgbClr val="5A5570"/>
                 </a:solidFill>
@@ -11537,7 +11246,7 @@
           <a:bodyPr wrap="square" lIns="0" tIns="0" rIns="0" bIns="0" rtlCol="0" anchor="ctr"/>
           <a:lstStyle/>
           <a:p>
-            <a:pPr algn="r" indent="0" marL="0">
+            <a:pPr marL="0" indent="0" algn="r">
               <a:buNone/>
             </a:pPr>
             <a:r>
@@ -11576,7 +11285,7 @@
           <a:bodyPr wrap="square" lIns="0" tIns="0" rIns="0" bIns="0" rtlCol="0" anchor="ctr"/>
           <a:lstStyle/>
           <a:p>
-            <a:pPr algn="r" indent="0" marL="0">
+            <a:pPr marL="0" indent="0" algn="r">
               <a:buNone/>
             </a:pPr>
             <a:r>
@@ -11610,6 +11319,7 @@
         <a:solidFill>
           <a:srgbClr val="0A0A0F"/>
         </a:solidFill>
+        <a:effectLst/>
       </p:bgPr>
     </p:bg>
     <p:spTree>
@@ -11711,11 +11421,11 @@
           <a:bodyPr wrap="square" lIns="0" tIns="0" rIns="0" bIns="0" rtlCol="0" anchor="ctr"/>
           <a:lstStyle/>
           <a:p>
-            <a:pPr algn="l" indent="0" marL="0">
-              <a:buNone/>
-            </a:pPr>
-            <a:r>
-              <a:rPr lang="en-US" sz="1100" b="1" spc="300" kern="0" dirty="0">
+            <a:pPr marL="0" indent="0" algn="l">
+              <a:buNone/>
+            </a:pPr>
+            <a:r>
+              <a:rPr lang="en-US" sz="1100" b="1" kern="0" spc="300" dirty="0">
                 <a:solidFill>
                   <a:srgbClr val="B6C800"/>
                 </a:solidFill>
@@ -11750,7 +11460,7 @@
           <a:bodyPr wrap="square" lIns="0" tIns="0" rIns="0" bIns="0" rtlCol="0" anchor="t"/>
           <a:lstStyle/>
           <a:p>
-            <a:pPr algn="l" indent="0" marL="0">
+            <a:pPr marL="0" indent="0" algn="l">
               <a:lnSpc>
                 <a:spcPct val="100000"/>
               </a:lnSpc>
@@ -11792,7 +11502,7 @@
           <a:bodyPr wrap="square" lIns="0" tIns="0" rIns="0" bIns="0" rtlCol="0" anchor="ctr"/>
           <a:lstStyle/>
           <a:p>
-            <a:pPr indent="0" marL="0">
+            <a:pPr marL="0" indent="0">
               <a:lnSpc>
                 <a:spcPct val="105000"/>
               </a:lnSpc>
@@ -11839,7 +11549,7 @@
             <a:prstDash val="solid"/>
           </a:ln>
           <a:effectLst>
-            <a:outerShdw sx="100000" sy="100000" kx="0" ky="0" algn="bl" rotWithShape="0" blurRad="177800" dist="63500" dir="5400000">
+            <a:outerShdw blurRad="177800" dist="63500" dir="5400000" algn="bl" rotWithShape="0">
               <a:srgbClr val="3E00DB">
                 <a:alpha val="55000"/>
               </a:srgbClr>
@@ -11888,11 +11598,11 @@
           <a:bodyPr wrap="square" lIns="0" tIns="0" rIns="0" bIns="0" rtlCol="0" anchor="ctr"/>
           <a:lstStyle/>
           <a:p>
-            <a:pPr indent="0" marL="0">
-              <a:buNone/>
-            </a:pPr>
-            <a:r>
-              <a:rPr lang="en-US" sz="900" b="1" spc="150" kern="0" dirty="0">
+            <a:pPr marL="0" indent="0">
+              <a:buNone/>
+            </a:pPr>
+            <a:r>
+              <a:rPr lang="en-US" sz="900" b="1" kern="0" spc="150" dirty="0">
                 <a:solidFill>
                   <a:srgbClr val="AEAEC2"/>
                 </a:solidFill>
@@ -11927,7 +11637,7 @@
           <a:bodyPr wrap="square" lIns="0" tIns="0" rIns="0" bIns="0" rtlCol="0" anchor="t"/>
           <a:lstStyle/>
           <a:p>
-            <a:pPr indent="0" marL="0">
+            <a:pPr marL="0" indent="0">
               <a:buNone/>
             </a:pPr>
             <a:r>
@@ -11966,7 +11676,7 @@
           <a:bodyPr wrap="square" lIns="0" tIns="0" rIns="0" bIns="0" rtlCol="0" anchor="t"/>
           <a:lstStyle/>
           <a:p>
-            <a:pPr indent="0" marL="0">
+            <a:pPr marL="0" indent="0">
               <a:lnSpc>
                 <a:spcPct val="100000"/>
               </a:lnSpc>
@@ -12013,7 +11723,7 @@
             <a:prstDash val="solid"/>
           </a:ln>
           <a:effectLst>
-            <a:outerShdw sx="100000" sy="100000" kx="0" ky="0" algn="bl" rotWithShape="0" blurRad="177800" dist="63500" dir="5400000">
+            <a:outerShdw blurRad="177800" dist="63500" dir="5400000" algn="bl" rotWithShape="0">
               <a:srgbClr val="3E00DB">
                 <a:alpha val="55000"/>
               </a:srgbClr>
@@ -12062,11 +11772,11 @@
           <a:bodyPr wrap="square" lIns="0" tIns="0" rIns="0" bIns="0" rtlCol="0" anchor="ctr"/>
           <a:lstStyle/>
           <a:p>
-            <a:pPr indent="0" marL="0">
-              <a:buNone/>
-            </a:pPr>
-            <a:r>
-              <a:rPr lang="en-US" sz="900" b="1" spc="150" kern="0" dirty="0">
+            <a:pPr marL="0" indent="0">
+              <a:buNone/>
+            </a:pPr>
+            <a:r>
+              <a:rPr lang="en-US" sz="900" b="1" kern="0" spc="150" dirty="0">
                 <a:solidFill>
                   <a:srgbClr val="CDD6FF"/>
                 </a:solidFill>
@@ -12101,7 +11811,7 @@
           <a:bodyPr wrap="square" lIns="0" tIns="0" rIns="0" bIns="0" rtlCol="0" anchor="t"/>
           <a:lstStyle/>
           <a:p>
-            <a:pPr indent="0" marL="0">
+            <a:pPr marL="0" indent="0">
               <a:buNone/>
             </a:pPr>
             <a:r>
@@ -12140,7 +11850,7 @@
           <a:bodyPr wrap="square" lIns="0" tIns="0" rIns="0" bIns="0" rtlCol="0" anchor="t"/>
           <a:lstStyle/>
           <a:p>
-            <a:pPr indent="0" marL="0">
+            <a:pPr marL="0" indent="0">
               <a:lnSpc>
                 <a:spcPct val="100000"/>
               </a:lnSpc>
@@ -12187,7 +11897,7 @@
             <a:prstDash val="solid"/>
           </a:ln>
           <a:effectLst>
-            <a:outerShdw sx="100000" sy="100000" kx="0" ky="0" algn="bl" rotWithShape="0" blurRad="177800" dist="63500" dir="5400000">
+            <a:outerShdw blurRad="177800" dist="63500" dir="5400000" algn="bl" rotWithShape="0">
               <a:srgbClr val="3E00DB">
                 <a:alpha val="55000"/>
               </a:srgbClr>
@@ -12236,11 +11946,11 @@
           <a:bodyPr wrap="square" lIns="0" tIns="0" rIns="0" bIns="0" rtlCol="0" anchor="ctr"/>
           <a:lstStyle/>
           <a:p>
-            <a:pPr indent="0" marL="0">
-              <a:buNone/>
-            </a:pPr>
-            <a:r>
-              <a:rPr lang="en-US" sz="900" b="1" spc="150" kern="0" dirty="0">
+            <a:pPr marL="0" indent="0">
+              <a:buNone/>
+            </a:pPr>
+            <a:r>
+              <a:rPr lang="en-US" sz="900" b="1" kern="0" spc="150" dirty="0">
                 <a:solidFill>
                   <a:srgbClr val="AEAEC2"/>
                 </a:solidFill>
@@ -12275,7 +11985,7 @@
           <a:bodyPr wrap="square" lIns="0" tIns="0" rIns="0" bIns="0" rtlCol="0" anchor="t"/>
           <a:lstStyle/>
           <a:p>
-            <a:pPr indent="0" marL="0">
+            <a:pPr marL="0" indent="0">
               <a:buNone/>
             </a:pPr>
             <a:r>
@@ -12314,7 +12024,7 @@
           <a:bodyPr wrap="square" lIns="0" tIns="0" rIns="0" bIns="0" rtlCol="0" anchor="t"/>
           <a:lstStyle/>
           <a:p>
-            <a:pPr indent="0" marL="0">
+            <a:pPr marL="0" indent="0">
               <a:lnSpc>
                 <a:spcPct val="100000"/>
               </a:lnSpc>
@@ -12361,7 +12071,7 @@
             <a:prstDash val="solid"/>
           </a:ln>
           <a:effectLst>
-            <a:outerShdw sx="100000" sy="100000" kx="0" ky="0" algn="bl" rotWithShape="0" blurRad="177800" dist="63500" dir="5400000">
+            <a:outerShdw blurRad="177800" dist="63500" dir="5400000" algn="bl" rotWithShape="0">
               <a:srgbClr val="3E00DB">
                 <a:alpha val="55000"/>
               </a:srgbClr>
@@ -12410,11 +12120,11 @@
           <a:bodyPr wrap="square" lIns="0" tIns="0" rIns="0" bIns="0" rtlCol="0" anchor="ctr"/>
           <a:lstStyle/>
           <a:p>
-            <a:pPr indent="0" marL="0">
-              <a:buNone/>
-            </a:pPr>
-            <a:r>
-              <a:rPr lang="en-US" sz="900" b="1" spc="150" kern="0" dirty="0">
+            <a:pPr marL="0" indent="0">
+              <a:buNone/>
+            </a:pPr>
+            <a:r>
+              <a:rPr lang="en-US" sz="900" b="1" kern="0" spc="150" dirty="0">
                 <a:solidFill>
                   <a:srgbClr val="CDD6FF"/>
                 </a:solidFill>
@@ -12449,7 +12159,7 @@
           <a:bodyPr wrap="square" lIns="0" tIns="0" rIns="0" bIns="0" rtlCol="0" anchor="t"/>
           <a:lstStyle/>
           <a:p>
-            <a:pPr indent="0" marL="0">
+            <a:pPr marL="0" indent="0">
               <a:buNone/>
             </a:pPr>
             <a:r>
@@ -12488,7 +12198,7 @@
           <a:bodyPr wrap="square" lIns="0" tIns="0" rIns="0" bIns="0" rtlCol="0" anchor="t"/>
           <a:lstStyle/>
           <a:p>
-            <a:pPr indent="0" marL="0">
+            <a:pPr marL="0" indent="0">
               <a:lnSpc>
                 <a:spcPct val="100000"/>
               </a:lnSpc>
@@ -12535,7 +12245,7 @@
             <a:prstDash val="solid"/>
           </a:ln>
           <a:effectLst>
-            <a:outerShdw sx="100000" sy="100000" kx="0" ky="0" algn="bl" rotWithShape="0" blurRad="177800" dist="63500" dir="5400000">
+            <a:outerShdw blurRad="177800" dist="63500" dir="5400000" algn="bl" rotWithShape="0">
               <a:srgbClr val="3E00DB">
                 <a:alpha val="55000"/>
               </a:srgbClr>
@@ -12584,11 +12294,11 @@
           <a:bodyPr wrap="square" lIns="0" tIns="0" rIns="0" bIns="0" rtlCol="0" anchor="ctr"/>
           <a:lstStyle/>
           <a:p>
-            <a:pPr indent="0" marL="0">
-              <a:buNone/>
-            </a:pPr>
-            <a:r>
-              <a:rPr lang="en-US" sz="900" b="1" spc="150" kern="0" dirty="0">
+            <a:pPr marL="0" indent="0">
+              <a:buNone/>
+            </a:pPr>
+            <a:r>
+              <a:rPr lang="en-US" sz="900" b="1" kern="0" spc="150" dirty="0">
                 <a:solidFill>
                   <a:srgbClr val="AEAEC2"/>
                 </a:solidFill>
@@ -12623,7 +12333,7 @@
           <a:bodyPr wrap="square" lIns="0" tIns="0" rIns="0" bIns="0" rtlCol="0" anchor="t"/>
           <a:lstStyle/>
           <a:p>
-            <a:pPr indent="0" marL="0">
+            <a:pPr marL="0" indent="0">
               <a:buNone/>
             </a:pPr>
             <a:r>
@@ -12662,7 +12372,7 @@
           <a:bodyPr wrap="square" lIns="0" tIns="0" rIns="0" bIns="0" rtlCol="0" anchor="t"/>
           <a:lstStyle/>
           <a:p>
-            <a:pPr indent="0" marL="0">
+            <a:pPr marL="0" indent="0">
               <a:lnSpc>
                 <a:spcPct val="100000"/>
               </a:lnSpc>
@@ -12709,7 +12419,7 @@
             <a:prstDash val="solid"/>
           </a:ln>
           <a:effectLst>
-            <a:outerShdw sx="100000" sy="100000" kx="0" ky="0" algn="bl" rotWithShape="0" blurRad="177800" dist="63500" dir="5400000">
+            <a:outerShdw blurRad="177800" dist="63500" dir="5400000" algn="bl" rotWithShape="0">
               <a:srgbClr val="3E00DB">
                 <a:alpha val="55000"/>
               </a:srgbClr>
@@ -12758,11 +12468,11 @@
           <a:bodyPr wrap="square" lIns="0" tIns="0" rIns="0" bIns="0" rtlCol="0" anchor="ctr"/>
           <a:lstStyle/>
           <a:p>
-            <a:pPr indent="0" marL="0">
-              <a:buNone/>
-            </a:pPr>
-            <a:r>
-              <a:rPr lang="en-US" sz="900" b="1" spc="150" kern="0" dirty="0">
+            <a:pPr marL="0" indent="0">
+              <a:buNone/>
+            </a:pPr>
+            <a:r>
+              <a:rPr lang="en-US" sz="900" b="1" kern="0" spc="150" dirty="0">
                 <a:solidFill>
                   <a:srgbClr val="CDD6FF"/>
                 </a:solidFill>
@@ -12797,7 +12507,7 @@
           <a:bodyPr wrap="square" lIns="0" tIns="0" rIns="0" bIns="0" rtlCol="0" anchor="t"/>
           <a:lstStyle/>
           <a:p>
-            <a:pPr indent="0" marL="0">
+            <a:pPr marL="0" indent="0">
               <a:buNone/>
             </a:pPr>
             <a:r>
@@ -12836,7 +12546,7 @@
           <a:bodyPr wrap="square" lIns="0" tIns="0" rIns="0" bIns="0" rtlCol="0" anchor="t"/>
           <a:lstStyle/>
           <a:p>
-            <a:pPr indent="0" marL="0">
+            <a:pPr marL="0" indent="0">
               <a:lnSpc>
                 <a:spcPct val="100000"/>
               </a:lnSpc>
@@ -12878,11 +12588,11 @@
           <a:bodyPr wrap="square" lIns="0" tIns="0" rIns="0" bIns="0" rtlCol="0" anchor="ctr"/>
           <a:lstStyle/>
           <a:p>
-            <a:pPr indent="0" marL="0">
-              <a:buNone/>
-            </a:pPr>
-            <a:r>
-              <a:rPr lang="en-US" sz="850" spc="100" kern="0" dirty="0">
+            <a:pPr marL="0" indent="0">
+              <a:buNone/>
+            </a:pPr>
+            <a:r>
+              <a:rPr lang="en-US" sz="850" kern="0" spc="100" dirty="0">
                 <a:solidFill>
                   <a:srgbClr val="5A5570"/>
                 </a:solidFill>
@@ -12917,7 +12627,7 @@
           <a:bodyPr wrap="square" lIns="0" tIns="0" rIns="0" bIns="0" rtlCol="0" anchor="ctr"/>
           <a:lstStyle/>
           <a:p>
-            <a:pPr algn="r" indent="0" marL="0">
+            <a:pPr marL="0" indent="0" algn="r">
               <a:buNone/>
             </a:pPr>
             <a:r>
@@ -12956,7 +12666,7 @@
           <a:bodyPr wrap="square" lIns="0" tIns="0" rIns="0" bIns="0" rtlCol="0" anchor="ctr"/>
           <a:lstStyle/>
           <a:p>
-            <a:pPr algn="r" indent="0" marL="0">
+            <a:pPr marL="0" indent="0" algn="r">
               <a:buNone/>
             </a:pPr>
             <a:r>
@@ -12990,6 +12700,7 @@
         <a:solidFill>
           <a:srgbClr val="0A0A0F"/>
         </a:solidFill>
+        <a:effectLst/>
       </p:bgPr>
     </p:bg>
     <p:spTree>
@@ -13091,11 +12802,11 @@
           <a:bodyPr wrap="square" lIns="0" tIns="0" rIns="0" bIns="0" rtlCol="0" anchor="ctr"/>
           <a:lstStyle/>
           <a:p>
-            <a:pPr algn="l" indent="0" marL="0">
-              <a:buNone/>
-            </a:pPr>
-            <a:r>
-              <a:rPr lang="en-US" sz="1100" b="1" spc="300" kern="0" dirty="0">
+            <a:pPr marL="0" indent="0" algn="l">
+              <a:buNone/>
+            </a:pPr>
+            <a:r>
+              <a:rPr lang="en-US" sz="1100" b="1" kern="0" spc="300" dirty="0">
                 <a:solidFill>
                   <a:srgbClr val="B6C800"/>
                 </a:solidFill>
@@ -13130,7 +12841,7 @@
           <a:bodyPr wrap="square" lIns="0" tIns="0" rIns="0" bIns="0" rtlCol="0" anchor="t"/>
           <a:lstStyle/>
           <a:p>
-            <a:pPr algn="l" indent="0" marL="0">
+            <a:pPr marL="0" indent="0" algn="l">
               <a:lnSpc>
                 <a:spcPct val="100000"/>
               </a:lnSpc>
@@ -13199,7 +12910,7 @@
           <a:bodyPr wrap="square" lIns="0" tIns="0" rIns="0" bIns="0" rtlCol="0" anchor="ctr"/>
           <a:lstStyle/>
           <a:p>
-            <a:pPr indent="0" marL="0">
+            <a:pPr marL="0" indent="0">
               <a:buNone/>
             </a:pPr>
             <a:r>
@@ -13260,11 +12971,11 @@
           <a:bodyPr wrap="square" lIns="0" tIns="0" rIns="0" bIns="0" rtlCol="0" anchor="ctr"/>
           <a:lstStyle/>
           <a:p>
-            <a:pPr algn="ctr" indent="0" marL="0">
-              <a:buNone/>
-            </a:pPr>
-            <a:r>
-              <a:rPr lang="en-US" sz="900" b="1" spc="100" kern="0" dirty="0">
+            <a:pPr marL="0" indent="0" algn="ctr">
+              <a:buNone/>
+            </a:pPr>
+            <a:r>
+              <a:rPr lang="en-US" sz="900" b="1" kern="0" spc="100" dirty="0">
                 <a:solidFill>
                   <a:srgbClr val="0A0A0F"/>
                 </a:solidFill>
@@ -13326,7 +13037,7 @@
           <a:bodyPr wrap="square" lIns="0" tIns="0" rIns="0" bIns="0" rtlCol="0" anchor="ctr"/>
           <a:lstStyle/>
           <a:p>
-            <a:pPr indent="0" marL="0">
+            <a:pPr marL="0" indent="0">
               <a:buNone/>
             </a:pPr>
             <a:r>
@@ -13387,11 +13098,11 @@
           <a:bodyPr wrap="square" lIns="0" tIns="0" rIns="0" bIns="0" rtlCol="0" anchor="ctr"/>
           <a:lstStyle/>
           <a:p>
-            <a:pPr algn="ctr" indent="0" marL="0">
-              <a:buNone/>
-            </a:pPr>
-            <a:r>
-              <a:rPr lang="en-US" sz="900" b="1" spc="100" kern="0" dirty="0">
+            <a:pPr marL="0" indent="0" algn="ctr">
+              <a:buNone/>
+            </a:pPr>
+            <a:r>
+              <a:rPr lang="en-US" sz="900" b="1" kern="0" spc="100" dirty="0">
                 <a:solidFill>
                   <a:srgbClr val="FFFFFF"/>
                 </a:solidFill>
@@ -13453,7 +13164,7 @@
           <a:bodyPr wrap="square" lIns="0" tIns="0" rIns="0" bIns="0" rtlCol="0" anchor="ctr"/>
           <a:lstStyle/>
           <a:p>
-            <a:pPr indent="0" marL="0">
+            <a:pPr marL="0" indent="0">
               <a:buNone/>
             </a:pPr>
             <a:r>
@@ -13514,11 +13225,11 @@
           <a:bodyPr wrap="square" lIns="0" tIns="0" rIns="0" bIns="0" rtlCol="0" anchor="ctr"/>
           <a:lstStyle/>
           <a:p>
-            <a:pPr algn="ctr" indent="0" marL="0">
-              <a:buNone/>
-            </a:pPr>
-            <a:r>
-              <a:rPr lang="en-US" sz="900" b="1" spc="100" kern="0" dirty="0">
+            <a:pPr marL="0" indent="0" algn="ctr">
+              <a:buNone/>
+            </a:pPr>
+            <a:r>
+              <a:rPr lang="en-US" sz="900" b="1" kern="0" spc="100" dirty="0">
                 <a:solidFill>
                   <a:srgbClr val="FFFFFF"/>
                 </a:solidFill>
@@ -13580,7 +13291,7 @@
           <a:bodyPr wrap="square" lIns="0" tIns="0" rIns="0" bIns="0" rtlCol="0" anchor="ctr"/>
           <a:lstStyle/>
           <a:p>
-            <a:pPr indent="0" marL="0">
+            <a:pPr marL="0" indent="0">
               <a:buNone/>
             </a:pPr>
             <a:r>
@@ -13641,11 +13352,11 @@
           <a:bodyPr wrap="square" lIns="0" tIns="0" rIns="0" bIns="0" rtlCol="0" anchor="ctr"/>
           <a:lstStyle/>
           <a:p>
-            <a:pPr algn="ctr" indent="0" marL="0">
-              <a:buNone/>
-            </a:pPr>
-            <a:r>
-              <a:rPr lang="en-US" sz="900" b="1" spc="100" kern="0" dirty="0">
+            <a:pPr marL="0" indent="0" algn="ctr">
+              <a:buNone/>
+            </a:pPr>
+            <a:r>
+              <a:rPr lang="en-US" sz="900" b="1" kern="0" spc="100" dirty="0">
                 <a:solidFill>
                   <a:srgbClr val="FFFFFF"/>
                 </a:solidFill>
@@ -13707,7 +13418,7 @@
           <a:bodyPr wrap="square" lIns="0" tIns="0" rIns="0" bIns="0" rtlCol="0" anchor="ctr"/>
           <a:lstStyle/>
           <a:p>
-            <a:pPr indent="0" marL="0">
+            <a:pPr marL="0" indent="0">
               <a:buNone/>
             </a:pPr>
             <a:r>
@@ -13768,11 +13479,11 @@
           <a:bodyPr wrap="square" lIns="0" tIns="0" rIns="0" bIns="0" rtlCol="0" anchor="ctr"/>
           <a:lstStyle/>
           <a:p>
-            <a:pPr algn="ctr" indent="0" marL="0">
-              <a:buNone/>
-            </a:pPr>
-            <a:r>
-              <a:rPr lang="en-US" sz="900" b="1" spc="100" kern="0" dirty="0">
+            <a:pPr marL="0" indent="0" algn="ctr">
+              <a:buNone/>
+            </a:pPr>
+            <a:r>
+              <a:rPr lang="en-US" sz="900" b="1" kern="0" spc="100" dirty="0">
                 <a:solidFill>
                   <a:srgbClr val="FFFFFF"/>
                 </a:solidFill>
@@ -13834,7 +13545,7 @@
           <a:bodyPr wrap="square" lIns="0" tIns="0" rIns="0" bIns="0" rtlCol="0" anchor="ctr"/>
           <a:lstStyle/>
           <a:p>
-            <a:pPr indent="0" marL="0">
+            <a:pPr marL="0" indent="0">
               <a:buNone/>
             </a:pPr>
             <a:r>
@@ -13895,11 +13606,11 @@
           <a:bodyPr wrap="square" lIns="0" tIns="0" rIns="0" bIns="0" rtlCol="0" anchor="ctr"/>
           <a:lstStyle/>
           <a:p>
-            <a:pPr algn="ctr" indent="0" marL="0">
-              <a:buNone/>
-            </a:pPr>
-            <a:r>
-              <a:rPr lang="en-US" sz="900" b="1" spc="100" kern="0" dirty="0">
+            <a:pPr marL="0" indent="0" algn="ctr">
+              <a:buNone/>
+            </a:pPr>
+            <a:r>
+              <a:rPr lang="en-US" sz="900" b="1" kern="0" spc="100" dirty="0">
                 <a:solidFill>
                   <a:srgbClr val="FFFFFF"/>
                 </a:solidFill>
@@ -13961,7 +13672,7 @@
           <a:bodyPr wrap="square" lIns="0" tIns="0" rIns="0" bIns="0" rtlCol="0" anchor="ctr"/>
           <a:lstStyle/>
           <a:p>
-            <a:pPr indent="0" marL="0">
+            <a:pPr marL="0" indent="0">
               <a:buNone/>
             </a:pPr>
             <a:r>
@@ -14022,11 +13733,11 @@
           <a:bodyPr wrap="square" lIns="0" tIns="0" rIns="0" bIns="0" rtlCol="0" anchor="ctr"/>
           <a:lstStyle/>
           <a:p>
-            <a:pPr algn="ctr" indent="0" marL="0">
-              <a:buNone/>
-            </a:pPr>
-            <a:r>
-              <a:rPr lang="en-US" sz="900" b="1" spc="100" kern="0" dirty="0">
+            <a:pPr marL="0" indent="0" algn="ctr">
+              <a:buNone/>
+            </a:pPr>
+            <a:r>
+              <a:rPr lang="en-US" sz="900" b="1" kern="0" spc="100" dirty="0">
                 <a:solidFill>
                   <a:srgbClr val="AEAEC2"/>
                 </a:solidFill>
@@ -14081,11 +13792,11 @@
           <a:bodyPr wrap="square" lIns="0" tIns="0" rIns="0" bIns="0" rtlCol="0" anchor="ctr"/>
           <a:lstStyle/>
           <a:p>
-            <a:pPr algn="l" indent="0" marL="0">
-              <a:buNone/>
-            </a:pPr>
-            <a:r>
-              <a:rPr lang="en-US" sz="1100" b="1" spc="300" kern="0" dirty="0">
+            <a:pPr marL="0" indent="0" algn="l">
+              <a:buNone/>
+            </a:pPr>
+            <a:r>
+              <a:rPr lang="en-US" sz="1100" b="1" kern="0" spc="300" dirty="0">
                 <a:solidFill>
                   <a:srgbClr val="B6C800"/>
                 </a:solidFill>
@@ -14120,7 +13831,7 @@
           <a:bodyPr wrap="square" lIns="0" tIns="0" rIns="0" bIns="0" rtlCol="0" anchor="ctr"/>
           <a:lstStyle/>
           <a:p>
-            <a:pPr indent="0" marL="0">
+            <a:pPr marL="0" indent="0">
               <a:buNone/>
             </a:pPr>
             <a:r>
@@ -14159,7 +13870,7 @@
           <a:bodyPr wrap="square" lIns="0" tIns="0" rIns="0" bIns="0" rtlCol="0" anchor="ctr"/>
           <a:lstStyle/>
           <a:p>
-            <a:pPr indent="0" marL="0">
+            <a:pPr marL="0" indent="0">
               <a:buNone/>
             </a:pPr>
             <a:r>
@@ -14198,7 +13909,7 @@
           <a:bodyPr wrap="square" lIns="0" tIns="0" rIns="0" bIns="0" rtlCol="0" anchor="ctr"/>
           <a:lstStyle/>
           <a:p>
-            <a:pPr indent="0" marL="0">
+            <a:pPr marL="0" indent="0">
               <a:buNone/>
             </a:pPr>
             <a:r>
@@ -14237,7 +13948,7 @@
           <a:bodyPr wrap="square" lIns="0" tIns="0" rIns="0" bIns="0" rtlCol="0" anchor="ctr"/>
           <a:lstStyle/>
           <a:p>
-            <a:pPr indent="0" marL="0">
+            <a:pPr marL="0" indent="0">
               <a:buNone/>
             </a:pPr>
             <a:r>
@@ -14276,7 +13987,7 @@
           <a:bodyPr wrap="square" lIns="0" tIns="0" rIns="0" bIns="0" rtlCol="0" anchor="ctr"/>
           <a:lstStyle/>
           <a:p>
-            <a:pPr indent="0" marL="0">
+            <a:pPr marL="0" indent="0">
               <a:buNone/>
             </a:pPr>
             <a:r>
@@ -14315,7 +14026,7 @@
           <a:bodyPr wrap="square" lIns="0" tIns="0" rIns="0" bIns="0" rtlCol="0" anchor="ctr"/>
           <a:lstStyle/>
           <a:p>
-            <a:pPr indent="0" marL="0">
+            <a:pPr marL="0" indent="0">
               <a:buNone/>
             </a:pPr>
             <a:r>
@@ -14354,7 +14065,7 @@
           <a:bodyPr wrap="square" lIns="0" tIns="0" rIns="0" bIns="0" rtlCol="0" anchor="ctr"/>
           <a:lstStyle/>
           <a:p>
-            <a:pPr indent="0" marL="0">
+            <a:pPr marL="0" indent="0">
               <a:buNone/>
             </a:pPr>
             <a:r>
@@ -14393,7 +14104,7 @@
           <a:bodyPr wrap="square" lIns="0" tIns="0" rIns="0" bIns="0" rtlCol="0" anchor="ctr"/>
           <a:lstStyle/>
           <a:p>
-            <a:pPr indent="0" marL="0">
+            <a:pPr marL="0" indent="0">
               <a:buNone/>
             </a:pPr>
             <a:r>
@@ -14432,7 +14143,7 @@
           <a:bodyPr wrap="square" lIns="0" tIns="0" rIns="0" bIns="0" rtlCol="0" anchor="ctr"/>
           <a:lstStyle/>
           <a:p>
-            <a:pPr indent="0" marL="0">
+            <a:pPr marL="0" indent="0">
               <a:buNone/>
             </a:pPr>
             <a:r>
@@ -14471,7 +14182,7 @@
           <a:bodyPr wrap="square" lIns="0" tIns="0" rIns="0" bIns="0" rtlCol="0" anchor="ctr"/>
           <a:lstStyle/>
           <a:p>
-            <a:pPr indent="0" marL="0">
+            <a:pPr marL="0" indent="0">
               <a:buNone/>
             </a:pPr>
             <a:r>
@@ -14510,7 +14221,7 @@
           <a:bodyPr wrap="square" lIns="0" tIns="0" rIns="0" bIns="0" rtlCol="0" anchor="ctr"/>
           <a:lstStyle/>
           <a:p>
-            <a:pPr indent="0" marL="0">
+            <a:pPr marL="0" indent="0">
               <a:buNone/>
             </a:pPr>
             <a:r>
@@ -14549,7 +14260,7 @@
           <a:bodyPr wrap="square" lIns="0" tIns="0" rIns="0" bIns="0" rtlCol="0" anchor="ctr"/>
           <a:lstStyle/>
           <a:p>
-            <a:pPr indent="0" marL="0">
+            <a:pPr marL="0" indent="0">
               <a:buNone/>
             </a:pPr>
             <a:r>
@@ -14588,7 +14299,7 @@
           <a:bodyPr wrap="square" lIns="0" tIns="0" rIns="0" bIns="0" rtlCol="0" anchor="ctr"/>
           <a:lstStyle/>
           <a:p>
-            <a:pPr indent="0" marL="0">
+            <a:pPr marL="0" indent="0">
               <a:buNone/>
             </a:pPr>
             <a:r>
@@ -14627,7 +14338,7 @@
           <a:bodyPr wrap="square" lIns="0" tIns="0" rIns="0" bIns="0" rtlCol="0" anchor="ctr"/>
           <a:lstStyle/>
           <a:p>
-            <a:pPr indent="0" marL="0">
+            <a:pPr marL="0" indent="0">
               <a:buNone/>
             </a:pPr>
             <a:r>
@@ -14666,7 +14377,7 @@
           <a:bodyPr wrap="square" lIns="0" tIns="0" rIns="0" bIns="0" rtlCol="0" anchor="ctr"/>
           <a:lstStyle/>
           <a:p>
-            <a:pPr indent="0" marL="0">
+            <a:pPr marL="0" indent="0">
               <a:buNone/>
             </a:pPr>
             <a:r>
@@ -14705,7 +14416,7 @@
           <a:bodyPr wrap="square" lIns="0" tIns="0" rIns="0" bIns="0" rtlCol="0" anchor="ctr"/>
           <a:lstStyle/>
           <a:p>
-            <a:pPr indent="0" marL="0">
+            <a:pPr marL="0" indent="0">
               <a:buNone/>
             </a:pPr>
             <a:r>
@@ -14749,7 +14460,7 @@
             <a:prstDash val="solid"/>
           </a:ln>
           <a:effectLst>
-            <a:outerShdw sx="100000" sy="100000" kx="0" ky="0" algn="bl" rotWithShape="0" blurRad="177800" dist="63500" dir="5400000">
+            <a:outerShdw blurRad="177800" dist="63500" dir="5400000" algn="bl" rotWithShape="0">
               <a:srgbClr val="3E00DB">
                 <a:alpha val="55000"/>
               </a:srgbClr>
@@ -14778,7 +14489,7 @@
           <a:bodyPr wrap="square" lIns="0" tIns="0" rIns="0" bIns="0" rtlCol="0" anchor="ctr"/>
           <a:lstStyle/>
           <a:p>
-            <a:pPr indent="0" marL="0">
+            <a:pPr marL="0" indent="0">
               <a:buNone/>
             </a:pPr>
             <a:r>
@@ -14817,7 +14528,7 @@
           <a:bodyPr wrap="square" lIns="0" tIns="0" rIns="0" bIns="0" rtlCol="0" anchor="ctr"/>
           <a:lstStyle/>
           <a:p>
-            <a:pPr indent="0" marL="0">
+            <a:pPr marL="0" indent="0">
               <a:buNone/>
             </a:pPr>
             <a:r>
@@ -14878,7 +14589,7 @@
           <a:bodyPr wrap="square" lIns="0" tIns="0" rIns="0" bIns="0" rtlCol="0" anchor="ctr"/>
           <a:lstStyle/>
           <a:p>
-            <a:pPr algn="ctr" indent="0" marL="0">
+            <a:pPr marL="0" indent="0" algn="ctr">
               <a:buNone/>
             </a:pPr>
             <a:r>
@@ -14917,11 +14628,11 @@
           <a:bodyPr wrap="square" lIns="0" tIns="0" rIns="0" bIns="0" rtlCol="0" anchor="ctr"/>
           <a:lstStyle/>
           <a:p>
-            <a:pPr indent="0" marL="0">
-              <a:buNone/>
-            </a:pPr>
-            <a:r>
-              <a:rPr lang="en-US" sz="850" spc="100" kern="0" dirty="0">
+            <a:pPr marL="0" indent="0">
+              <a:buNone/>
+            </a:pPr>
+            <a:r>
+              <a:rPr lang="en-US" sz="850" kern="0" spc="100" dirty="0">
                 <a:solidFill>
                   <a:srgbClr val="5A5570"/>
                 </a:solidFill>
@@ -14956,7 +14667,7 @@
           <a:bodyPr wrap="square" lIns="0" tIns="0" rIns="0" bIns="0" rtlCol="0" anchor="ctr"/>
           <a:lstStyle/>
           <a:p>
-            <a:pPr algn="r" indent="0" marL="0">
+            <a:pPr marL="0" indent="0" algn="r">
               <a:buNone/>
             </a:pPr>
             <a:r>
@@ -14995,7 +14706,7 @@
           <a:bodyPr wrap="square" lIns="0" tIns="0" rIns="0" bIns="0" rtlCol="0" anchor="ctr"/>
           <a:lstStyle/>
           <a:p>
-            <a:pPr algn="r" indent="0" marL="0">
+            <a:pPr marL="0" indent="0" algn="r">
               <a:buNone/>
             </a:pPr>
             <a:r>
@@ -15029,6 +14740,7 @@
         <a:solidFill>
           <a:srgbClr val="0A0A0F"/>
         </a:solidFill>
+        <a:effectLst/>
       </p:bgPr>
     </p:bg>
     <p:spTree>
@@ -15130,11 +14842,11 @@
           <a:bodyPr wrap="square" lIns="0" tIns="0" rIns="0" bIns="0" rtlCol="0" anchor="ctr"/>
           <a:lstStyle/>
           <a:p>
-            <a:pPr algn="l" indent="0" marL="0">
-              <a:buNone/>
-            </a:pPr>
-            <a:r>
-              <a:rPr lang="en-US" sz="1100" b="1" spc="300" kern="0" dirty="0">
+            <a:pPr marL="0" indent="0" algn="l">
+              <a:buNone/>
+            </a:pPr>
+            <a:r>
+              <a:rPr lang="en-US" sz="1100" b="1" kern="0" spc="300" dirty="0">
                 <a:solidFill>
                   <a:srgbClr val="B6C800"/>
                 </a:solidFill>
@@ -15169,7 +14881,7 @@
           <a:bodyPr wrap="square" lIns="0" tIns="0" rIns="0" bIns="0" rtlCol="0" anchor="t"/>
           <a:lstStyle/>
           <a:p>
-            <a:pPr algn="l" indent="0" marL="0">
+            <a:pPr marL="0" indent="0" algn="l">
               <a:lnSpc>
                 <a:spcPct val="100000"/>
               </a:lnSpc>
@@ -15216,7 +14928,7 @@
             <a:prstDash val="solid"/>
           </a:ln>
           <a:effectLst>
-            <a:outerShdw sx="100000" sy="100000" kx="0" ky="0" algn="bl" rotWithShape="0" blurRad="177800" dist="63500" dir="5400000">
+            <a:outerShdw blurRad="177800" dist="63500" dir="5400000" algn="bl" rotWithShape="0">
               <a:srgbClr val="3E00DB">
                 <a:alpha val="55000"/>
               </a:srgbClr>
@@ -15245,7 +14957,7 @@
           <a:bodyPr wrap="square" lIns="0" tIns="0" rIns="0" bIns="0" rtlCol="0" anchor="ctr"/>
           <a:lstStyle/>
           <a:p>
-            <a:pPr indent="0" marL="0">
+            <a:pPr marL="0" indent="0">
               <a:buNone/>
             </a:pPr>
             <a:r>
@@ -15284,7 +14996,7 @@
           <a:bodyPr wrap="square" lIns="0" tIns="0" rIns="0" bIns="0" rtlCol="0" anchor="t"/>
           <a:lstStyle/>
           <a:p>
-            <a:pPr indent="0" marL="0">
+            <a:pPr marL="0" indent="0">
               <a:buNone/>
             </a:pPr>
             <a:r>
@@ -15328,7 +15040,7 @@
             <a:prstDash val="solid"/>
           </a:ln>
           <a:effectLst>
-            <a:outerShdw sx="100000" sy="100000" kx="0" ky="0" algn="bl" rotWithShape="0" blurRad="177800" dist="63500" dir="5400000">
+            <a:outerShdw blurRad="177800" dist="63500" dir="5400000" algn="bl" rotWithShape="0">
               <a:srgbClr val="3E00DB">
                 <a:alpha val="55000"/>
               </a:srgbClr>
@@ -15357,7 +15069,7 @@
           <a:bodyPr wrap="square" lIns="0" tIns="0" rIns="0" bIns="0" rtlCol="0" anchor="ctr"/>
           <a:lstStyle/>
           <a:p>
-            <a:pPr indent="0" marL="0">
+            <a:pPr marL="0" indent="0">
               <a:buNone/>
             </a:pPr>
             <a:r>
@@ -15396,7 +15108,7 @@
           <a:bodyPr wrap="square" lIns="0" tIns="0" rIns="0" bIns="0" rtlCol="0" anchor="t"/>
           <a:lstStyle/>
           <a:p>
-            <a:pPr indent="0" marL="0">
+            <a:pPr marL="0" indent="0">
               <a:buNone/>
             </a:pPr>
             <a:r>
@@ -15440,7 +15152,7 @@
             <a:prstDash val="solid"/>
           </a:ln>
           <a:effectLst>
-            <a:outerShdw sx="100000" sy="100000" kx="0" ky="0" algn="bl" rotWithShape="0" blurRad="177800" dist="63500" dir="5400000">
+            <a:outerShdw blurRad="177800" dist="63500" dir="5400000" algn="bl" rotWithShape="0">
               <a:srgbClr val="3E00DB">
                 <a:alpha val="55000"/>
               </a:srgbClr>
@@ -15469,7 +15181,7 @@
           <a:bodyPr wrap="square" lIns="0" tIns="0" rIns="0" bIns="0" rtlCol="0" anchor="ctr"/>
           <a:lstStyle/>
           <a:p>
-            <a:pPr indent="0" marL="0">
+            <a:pPr marL="0" indent="0">
               <a:buNone/>
             </a:pPr>
             <a:r>
@@ -15508,7 +15220,7 @@
           <a:bodyPr wrap="square" lIns="0" tIns="0" rIns="0" bIns="0" rtlCol="0" anchor="t"/>
           <a:lstStyle/>
           <a:p>
-            <a:pPr indent="0" marL="0">
+            <a:pPr marL="0" indent="0">
               <a:buNone/>
             </a:pPr>
             <a:r>
@@ -15547,11 +15259,11 @@
           <a:bodyPr wrap="square" lIns="0" tIns="0" rIns="0" bIns="0" rtlCol="0" anchor="ctr"/>
           <a:lstStyle/>
           <a:p>
-            <a:pPr indent="0" marL="0">
-              <a:buNone/>
-            </a:pPr>
-            <a:r>
-              <a:rPr lang="en-US" sz="850" spc="100" kern="0" dirty="0">
+            <a:pPr marL="0" indent="0">
+              <a:buNone/>
+            </a:pPr>
+            <a:r>
+              <a:rPr lang="en-US" sz="850" kern="0" spc="100" dirty="0">
                 <a:solidFill>
                   <a:srgbClr val="5A5570"/>
                 </a:solidFill>
@@ -15586,7 +15298,7 @@
           <a:bodyPr wrap="square" lIns="0" tIns="0" rIns="0" bIns="0" rtlCol="0" anchor="ctr"/>
           <a:lstStyle/>
           <a:p>
-            <a:pPr algn="r" indent="0" marL="0">
+            <a:pPr marL="0" indent="0" algn="r">
               <a:buNone/>
             </a:pPr>
             <a:r>
@@ -15625,7 +15337,7 @@
           <a:bodyPr wrap="square" lIns="0" tIns="0" rIns="0" bIns="0" rtlCol="0" anchor="ctr"/>
           <a:lstStyle/>
           <a:p>
-            <a:pPr algn="r" indent="0" marL="0">
+            <a:pPr marL="0" indent="0" algn="r">
               <a:buNone/>
             </a:pPr>
             <a:r>
@@ -15659,6 +15371,7 @@
         <a:solidFill>
           <a:srgbClr val="0A0A0F"/>
         </a:solidFill>
+        <a:effectLst/>
       </p:bgPr>
     </p:bg>
     <p:spTree>
@@ -15760,11 +15473,11 @@
           <a:bodyPr wrap="square" lIns="0" tIns="0" rIns="0" bIns="0" rtlCol="0" anchor="ctr"/>
           <a:lstStyle/>
           <a:p>
-            <a:pPr algn="l" indent="0" marL="0">
-              <a:buNone/>
-            </a:pPr>
-            <a:r>
-              <a:rPr lang="en-US" sz="1100" b="1" spc="300" kern="0" dirty="0">
+            <a:pPr marL="0" indent="0" algn="l">
+              <a:buNone/>
+            </a:pPr>
+            <a:r>
+              <a:rPr lang="en-US" sz="1100" b="1" kern="0" spc="300" dirty="0">
                 <a:solidFill>
                   <a:srgbClr val="B6C800"/>
                 </a:solidFill>
@@ -15799,7 +15512,7 @@
           <a:bodyPr wrap="square" lIns="0" tIns="0" rIns="0" bIns="0" rtlCol="0" anchor="t"/>
           <a:lstStyle/>
           <a:p>
-            <a:pPr algn="l" indent="0" marL="0">
+            <a:pPr marL="0" indent="0" algn="l">
               <a:lnSpc>
                 <a:spcPct val="100000"/>
               </a:lnSpc>
@@ -15846,7 +15559,7 @@
             <a:prstDash val="solid"/>
           </a:ln>
           <a:effectLst>
-            <a:outerShdw sx="100000" sy="100000" kx="0" ky="0" algn="bl" rotWithShape="0" blurRad="177800" dist="63500" dir="5400000">
+            <a:outerShdw blurRad="177800" dist="63500" dir="5400000" algn="bl" rotWithShape="0">
               <a:srgbClr val="3E00DB">
                 <a:alpha val="55000"/>
               </a:srgbClr>
@@ -15895,7 +15608,7 @@
           <a:bodyPr wrap="square" lIns="0" tIns="0" rIns="0" bIns="0" rtlCol="0" anchor="ctr"/>
           <a:lstStyle/>
           <a:p>
-            <a:pPr indent="0" marL="0">
+            <a:pPr marL="0" indent="0">
               <a:buNone/>
             </a:pPr>
             <a:r>
@@ -15934,7 +15647,7 @@
           <a:bodyPr wrap="square" lIns="0" tIns="0" rIns="0" bIns="0" rtlCol="0" anchor="t"/>
           <a:lstStyle/>
           <a:p>
-            <a:pPr indent="0" marL="0">
+            <a:pPr marL="0" indent="0">
               <a:lnSpc>
                 <a:spcPct val="105000"/>
               </a:lnSpc>
@@ -15981,7 +15694,7 @@
             <a:prstDash val="solid"/>
           </a:ln>
           <a:effectLst>
-            <a:outerShdw sx="100000" sy="100000" kx="0" ky="0" algn="bl" rotWithShape="0" blurRad="177800" dist="63500" dir="5400000">
+            <a:outerShdw blurRad="177800" dist="63500" dir="5400000" algn="bl" rotWithShape="0">
               <a:srgbClr val="3E00DB">
                 <a:alpha val="55000"/>
               </a:srgbClr>
@@ -16030,7 +15743,7 @@
           <a:bodyPr wrap="square" lIns="0" tIns="0" rIns="0" bIns="0" rtlCol="0" anchor="ctr"/>
           <a:lstStyle/>
           <a:p>
-            <a:pPr indent="0" marL="0">
+            <a:pPr marL="0" indent="0">
               <a:buNone/>
             </a:pPr>
             <a:r>
@@ -16069,7 +15782,7 @@
           <a:bodyPr wrap="square" lIns="0" tIns="0" rIns="0" bIns="0" rtlCol="0" anchor="t"/>
           <a:lstStyle/>
           <a:p>
-            <a:pPr indent="0" marL="0">
+            <a:pPr marL="0" indent="0">
               <a:lnSpc>
                 <a:spcPct val="105000"/>
               </a:lnSpc>
@@ -16116,7 +15829,7 @@
             <a:prstDash val="solid"/>
           </a:ln>
           <a:effectLst>
-            <a:outerShdw sx="100000" sy="100000" kx="0" ky="0" algn="bl" rotWithShape="0" blurRad="177800" dist="63500" dir="5400000">
+            <a:outerShdw blurRad="177800" dist="63500" dir="5400000" algn="bl" rotWithShape="0">
               <a:srgbClr val="3E00DB">
                 <a:alpha val="55000"/>
               </a:srgbClr>
@@ -16165,7 +15878,7 @@
           <a:bodyPr wrap="square" lIns="0" tIns="0" rIns="0" bIns="0" rtlCol="0" anchor="ctr"/>
           <a:lstStyle/>
           <a:p>
-            <a:pPr indent="0" marL="0">
+            <a:pPr marL="0" indent="0">
               <a:buNone/>
             </a:pPr>
             <a:r>
@@ -16204,7 +15917,7 @@
           <a:bodyPr wrap="square" lIns="0" tIns="0" rIns="0" bIns="0" rtlCol="0" anchor="t"/>
           <a:lstStyle/>
           <a:p>
-            <a:pPr indent="0" marL="0">
+            <a:pPr marL="0" indent="0">
               <a:lnSpc>
                 <a:spcPct val="105000"/>
               </a:lnSpc>
@@ -16246,11 +15959,11 @@
           <a:bodyPr wrap="square" lIns="0" tIns="0" rIns="0" bIns="0" rtlCol="0" anchor="ctr"/>
           <a:lstStyle/>
           <a:p>
-            <a:pPr indent="0" marL="0">
-              <a:buNone/>
-            </a:pPr>
-            <a:r>
-              <a:rPr lang="en-US" sz="850" spc="100" kern="0" dirty="0">
+            <a:pPr marL="0" indent="0">
+              <a:buNone/>
+            </a:pPr>
+            <a:r>
+              <a:rPr lang="en-US" sz="850" kern="0" spc="100" dirty="0">
                 <a:solidFill>
                   <a:srgbClr val="5A5570"/>
                 </a:solidFill>
@@ -16285,7 +15998,7 @@
           <a:bodyPr wrap="square" lIns="0" tIns="0" rIns="0" bIns="0" rtlCol="0" anchor="ctr"/>
           <a:lstStyle/>
           <a:p>
-            <a:pPr algn="r" indent="0" marL="0">
+            <a:pPr marL="0" indent="0" algn="r">
               <a:buNone/>
             </a:pPr>
             <a:r>
@@ -16324,7 +16037,7 @@
           <a:bodyPr wrap="square" lIns="0" tIns="0" rIns="0" bIns="0" rtlCol="0" anchor="ctr"/>
           <a:lstStyle/>
           <a:p>
-            <a:pPr algn="r" indent="0" marL="0">
+            <a:pPr marL="0" indent="0" algn="r">
               <a:buNone/>
             </a:pPr>
             <a:r>
@@ -16358,6 +16071,7 @@
         <a:solidFill>
           <a:srgbClr val="0A0A0F"/>
         </a:solidFill>
+        <a:effectLst/>
       </p:bgPr>
     </p:bg>
     <p:spTree>
@@ -16459,11 +16173,11 @@
           <a:bodyPr wrap="square" lIns="0" tIns="0" rIns="0" bIns="0" rtlCol="0" anchor="ctr"/>
           <a:lstStyle/>
           <a:p>
-            <a:pPr algn="l" indent="0" marL="0">
-              <a:buNone/>
-            </a:pPr>
-            <a:r>
-              <a:rPr lang="en-US" sz="1100" b="1" spc="300" kern="0" dirty="0">
+            <a:pPr marL="0" indent="0" algn="l">
+              <a:buNone/>
+            </a:pPr>
+            <a:r>
+              <a:rPr lang="en-US" sz="1100" b="1" kern="0" spc="300" dirty="0">
                 <a:solidFill>
                   <a:srgbClr val="B6C800"/>
                 </a:solidFill>
@@ -16498,7 +16212,7 @@
           <a:bodyPr wrap="square" lIns="0" tIns="0" rIns="0" bIns="0" rtlCol="0" anchor="t"/>
           <a:lstStyle/>
           <a:p>
-            <a:pPr algn="l" indent="0" marL="0">
+            <a:pPr marL="0" indent="0" algn="l">
               <a:lnSpc>
                 <a:spcPct val="100000"/>
               </a:lnSpc>
@@ -16545,7 +16259,7 @@
             <a:prstDash val="solid"/>
           </a:ln>
           <a:effectLst>
-            <a:outerShdw sx="100000" sy="100000" kx="0" ky="0" algn="bl" rotWithShape="0" blurRad="177800" dist="63500" dir="5400000">
+            <a:outerShdw blurRad="177800" dist="63500" dir="5400000" algn="bl" rotWithShape="0">
               <a:srgbClr val="3E00DB">
                 <a:alpha val="55000"/>
               </a:srgbClr>
@@ -16594,7 +16308,7 @@
           <a:bodyPr wrap="square" lIns="0" tIns="0" rIns="0" bIns="0" rtlCol="0" anchor="ctr"/>
           <a:lstStyle/>
           <a:p>
-            <a:pPr indent="0" marL="0">
+            <a:pPr marL="0" indent="0">
               <a:buNone/>
             </a:pPr>
             <a:r>
@@ -16633,7 +16347,7 @@
           <a:bodyPr wrap="square" lIns="0" tIns="0" rIns="0" bIns="0" rtlCol="0" anchor="t"/>
           <a:lstStyle/>
           <a:p>
-            <a:pPr indent="0" marL="0">
+            <a:pPr marL="0" indent="0">
               <a:lnSpc>
                 <a:spcPct val="105000"/>
               </a:lnSpc>
@@ -16680,7 +16394,7 @@
             <a:prstDash val="solid"/>
           </a:ln>
           <a:effectLst>
-            <a:outerShdw sx="100000" sy="100000" kx="0" ky="0" algn="bl" rotWithShape="0" blurRad="177800" dist="63500" dir="5400000">
+            <a:outerShdw blurRad="177800" dist="63500" dir="5400000" algn="bl" rotWithShape="0">
               <a:srgbClr val="3E00DB">
                 <a:alpha val="55000"/>
               </a:srgbClr>
@@ -16729,7 +16443,7 @@
           <a:bodyPr wrap="square" lIns="0" tIns="0" rIns="0" bIns="0" rtlCol="0" anchor="ctr"/>
           <a:lstStyle/>
           <a:p>
-            <a:pPr indent="0" marL="0">
+            <a:pPr marL="0" indent="0">
               <a:buNone/>
             </a:pPr>
             <a:r>
@@ -16768,7 +16482,7 @@
           <a:bodyPr wrap="square" lIns="0" tIns="0" rIns="0" bIns="0" rtlCol="0" anchor="t"/>
           <a:lstStyle/>
           <a:p>
-            <a:pPr indent="0" marL="0">
+            <a:pPr marL="0" indent="0">
               <a:lnSpc>
                 <a:spcPct val="105000"/>
               </a:lnSpc>
@@ -16815,7 +16529,7 @@
             <a:prstDash val="solid"/>
           </a:ln>
           <a:effectLst>
-            <a:outerShdw sx="100000" sy="100000" kx="0" ky="0" algn="bl" rotWithShape="0" blurRad="177800" dist="63500" dir="5400000">
+            <a:outerShdw blurRad="177800" dist="63500" dir="5400000" algn="bl" rotWithShape="0">
               <a:srgbClr val="3E00DB">
                 <a:alpha val="55000"/>
               </a:srgbClr>
@@ -16864,7 +16578,7 @@
           <a:bodyPr wrap="square" lIns="0" tIns="0" rIns="0" bIns="0" rtlCol="0" anchor="ctr"/>
           <a:lstStyle/>
           <a:p>
-            <a:pPr indent="0" marL="0">
+            <a:pPr marL="0" indent="0">
               <a:buNone/>
             </a:pPr>
             <a:r>
@@ -16903,7 +16617,7 @@
           <a:bodyPr wrap="square" lIns="0" tIns="0" rIns="0" bIns="0" rtlCol="0" anchor="t"/>
           <a:lstStyle/>
           <a:p>
-            <a:pPr indent="0" marL="0">
+            <a:pPr marL="0" indent="0">
               <a:lnSpc>
                 <a:spcPct val="105000"/>
               </a:lnSpc>
@@ -16965,11 +16679,11 @@
           <a:bodyPr wrap="square" lIns="0" tIns="0" rIns="0" bIns="0" rtlCol="0" anchor="ctr"/>
           <a:lstStyle/>
           <a:p>
-            <a:pPr algn="l" indent="0" marL="0">
-              <a:buNone/>
-            </a:pPr>
-            <a:r>
-              <a:rPr lang="en-US" sz="1100" b="1" spc="300" kern="0" dirty="0">
+            <a:pPr marL="0" indent="0" algn="l">
+              <a:buNone/>
+            </a:pPr>
+            <a:r>
+              <a:rPr lang="en-US" sz="1100" b="1" kern="0" spc="300" dirty="0">
                 <a:solidFill>
                   <a:srgbClr val="B6C800"/>
                 </a:solidFill>
@@ -17031,7 +16745,7 @@
           <a:bodyPr wrap="square" lIns="0" tIns="0" rIns="0" bIns="0" rtlCol="0" anchor="ctr"/>
           <a:lstStyle/>
           <a:p>
-            <a:pPr algn="ctr" indent="0" marL="0">
+            <a:pPr marL="0" indent="0" algn="ctr">
               <a:buNone/>
             </a:pPr>
             <a:r>
@@ -17097,7 +16811,7 @@
           <a:bodyPr wrap="square" lIns="0" tIns="0" rIns="0" bIns="0" rtlCol="0" anchor="ctr"/>
           <a:lstStyle/>
           <a:p>
-            <a:pPr algn="ctr" indent="0" marL="0">
+            <a:pPr marL="0" indent="0" algn="ctr">
               <a:buNone/>
             </a:pPr>
             <a:r>
@@ -17163,7 +16877,7 @@
           <a:bodyPr wrap="square" lIns="0" tIns="0" rIns="0" bIns="0" rtlCol="0" anchor="ctr"/>
           <a:lstStyle/>
           <a:p>
-            <a:pPr algn="ctr" indent="0" marL="0">
+            <a:pPr marL="0" indent="0" algn="ctr">
               <a:buNone/>
             </a:pPr>
             <a:r>
@@ -17229,7 +16943,7 @@
           <a:bodyPr wrap="square" lIns="0" tIns="0" rIns="0" bIns="0" rtlCol="0" anchor="ctr"/>
           <a:lstStyle/>
           <a:p>
-            <a:pPr algn="ctr" indent="0" marL="0">
+            <a:pPr marL="0" indent="0" algn="ctr">
               <a:buNone/>
             </a:pPr>
             <a:r>
@@ -17268,11 +16982,11 @@
           <a:bodyPr wrap="square" lIns="0" tIns="0" rIns="0" bIns="0" rtlCol="0" anchor="ctr"/>
           <a:lstStyle/>
           <a:p>
-            <a:pPr indent="0" marL="0">
-              <a:buNone/>
-            </a:pPr>
-            <a:r>
-              <a:rPr lang="en-US" sz="850" spc="100" kern="0" dirty="0">
+            <a:pPr marL="0" indent="0">
+              <a:buNone/>
+            </a:pPr>
+            <a:r>
+              <a:rPr lang="en-US" sz="850" kern="0" spc="100" dirty="0">
                 <a:solidFill>
                   <a:srgbClr val="5A5570"/>
                 </a:solidFill>
@@ -17307,7 +17021,7 @@
           <a:bodyPr wrap="square" lIns="0" tIns="0" rIns="0" bIns="0" rtlCol="0" anchor="ctr"/>
           <a:lstStyle/>
           <a:p>
-            <a:pPr algn="r" indent="0" marL="0">
+            <a:pPr marL="0" indent="0" algn="r">
               <a:buNone/>
             </a:pPr>
             <a:r>
@@ -17346,7 +17060,7 @@
           <a:bodyPr wrap="square" lIns="0" tIns="0" rIns="0" bIns="0" rtlCol="0" anchor="ctr"/>
           <a:lstStyle/>
           <a:p>
-            <a:pPr algn="r" indent="0" marL="0">
+            <a:pPr marL="0" indent="0" algn="r">
               <a:buNone/>
             </a:pPr>
             <a:r>
@@ -17380,6 +17094,7 @@
         <a:solidFill>
           <a:srgbClr val="0A0A0F"/>
         </a:solidFill>
+        <a:effectLst/>
       </p:bgPr>
     </p:bg>
     <p:spTree>
@@ -17481,11 +17196,11 @@
           <a:bodyPr wrap="square" lIns="0" tIns="0" rIns="0" bIns="0" rtlCol="0" anchor="ctr"/>
           <a:lstStyle/>
           <a:p>
-            <a:pPr algn="l" indent="0" marL="0">
-              <a:buNone/>
-            </a:pPr>
-            <a:r>
-              <a:rPr lang="en-US" sz="1100" b="1" spc="300" kern="0" dirty="0">
+            <a:pPr marL="0" indent="0" algn="l">
+              <a:buNone/>
+            </a:pPr>
+            <a:r>
+              <a:rPr lang="en-US" sz="1100" b="1" kern="0" spc="300" dirty="0">
                 <a:solidFill>
                   <a:srgbClr val="B6C800"/>
                 </a:solidFill>
@@ -17520,7 +17235,7 @@
           <a:bodyPr wrap="square" lIns="0" tIns="0" rIns="0" bIns="0" rtlCol="0" anchor="t"/>
           <a:lstStyle/>
           <a:p>
-            <a:pPr algn="l" indent="0" marL="0">
+            <a:pPr marL="0" indent="0" algn="l">
               <a:lnSpc>
                 <a:spcPct val="100000"/>
               </a:lnSpc>
@@ -17562,7 +17277,7 @@
           <a:bodyPr wrap="square" lIns="0" tIns="0" rIns="0" bIns="0" rtlCol="0" anchor="ctr"/>
           <a:lstStyle/>
           <a:p>
-            <a:pPr indent="0" marL="0">
+            <a:pPr marL="0" indent="0">
               <a:buNone/>
             </a:pPr>
             <a:r>
@@ -17606,7 +17321,7 @@
             <a:prstDash val="solid"/>
           </a:ln>
           <a:effectLst>
-            <a:outerShdw sx="100000" sy="100000" kx="0" ky="0" algn="bl" rotWithShape="0" blurRad="177800" dist="63500" dir="5400000">
+            <a:outerShdw blurRad="177800" dist="63500" dir="5400000" algn="bl" rotWithShape="0">
               <a:srgbClr val="3E00DB">
                 <a:alpha val="55000"/>
               </a:srgbClr>
@@ -17657,11 +17372,11 @@
           <a:bodyPr wrap="square" lIns="0" tIns="0" rIns="0" bIns="0" rtlCol="0" anchor="ctr"/>
           <a:lstStyle/>
           <a:p>
-            <a:pPr algn="ctr" indent="0" marL="0">
-              <a:buNone/>
-            </a:pPr>
-            <a:r>
-              <a:rPr lang="en-US" sz="900" b="1" spc="100" kern="0" dirty="0">
+            <a:pPr marL="0" indent="0" algn="ctr">
+              <a:buNone/>
+            </a:pPr>
+            <a:r>
+              <a:rPr lang="en-US" sz="900" b="1" kern="0" spc="100" dirty="0">
                 <a:solidFill>
                   <a:srgbClr val="0A0A0F"/>
                 </a:solidFill>
@@ -17696,7 +17411,7 @@
           <a:bodyPr wrap="square" lIns="0" tIns="0" rIns="0" bIns="0" rtlCol="0" anchor="ctr"/>
           <a:lstStyle/>
           <a:p>
-            <a:pPr indent="0" marL="0">
+            <a:pPr marL="0" indent="0">
               <a:buNone/>
             </a:pPr>
             <a:r>
@@ -17735,7 +17450,7 @@
           <a:bodyPr wrap="square" lIns="0" tIns="0" rIns="0" bIns="0" rtlCol="0" anchor="ctr"/>
           <a:lstStyle/>
           <a:p>
-            <a:pPr indent="0" marL="0">
+            <a:pPr marL="0" indent="0">
               <a:buNone/>
             </a:pPr>
             <a:r>
@@ -17774,7 +17489,7 @@
           <a:bodyPr wrap="square" lIns="0" tIns="0" rIns="0" bIns="0" rtlCol="0" anchor="t"/>
           <a:lstStyle/>
           <a:p>
-            <a:pPr indent="0" marL="0">
+            <a:pPr marL="0" indent="0">
               <a:buNone/>
             </a:pPr>
             <a:r>
@@ -17818,7 +17533,7 @@
             <a:prstDash val="solid"/>
           </a:ln>
           <a:effectLst>
-            <a:outerShdw sx="100000" sy="100000" kx="0" ky="0" algn="bl" rotWithShape="0" blurRad="177800" dist="63500" dir="5400000">
+            <a:outerShdw blurRad="177800" dist="63500" dir="5400000" algn="bl" rotWithShape="0">
               <a:srgbClr val="3E00DB">
                 <a:alpha val="55000"/>
               </a:srgbClr>
@@ -17869,11 +17584,11 @@
           <a:bodyPr wrap="square" lIns="0" tIns="0" rIns="0" bIns="0" rtlCol="0" anchor="ctr"/>
           <a:lstStyle/>
           <a:p>
-            <a:pPr algn="ctr" indent="0" marL="0">
-              <a:buNone/>
-            </a:pPr>
-            <a:r>
-              <a:rPr lang="en-US" sz="900" b="1" spc="100" kern="0" dirty="0">
+            <a:pPr marL="0" indent="0" algn="ctr">
+              <a:buNone/>
+            </a:pPr>
+            <a:r>
+              <a:rPr lang="en-US" sz="900" b="1" kern="0" spc="100" dirty="0">
                 <a:solidFill>
                   <a:srgbClr val="FFFFFF"/>
                 </a:solidFill>
@@ -17908,7 +17623,7 @@
           <a:bodyPr wrap="square" lIns="0" tIns="0" rIns="0" bIns="0" rtlCol="0" anchor="ctr"/>
           <a:lstStyle/>
           <a:p>
-            <a:pPr indent="0" marL="0">
+            <a:pPr marL="0" indent="0">
               <a:buNone/>
             </a:pPr>
             <a:r>
@@ -17947,7 +17662,7 @@
           <a:bodyPr wrap="square" lIns="0" tIns="0" rIns="0" bIns="0" rtlCol="0" anchor="ctr"/>
           <a:lstStyle/>
           <a:p>
-            <a:pPr indent="0" marL="0">
+            <a:pPr marL="0" indent="0">
               <a:buNone/>
             </a:pPr>
             <a:r>
@@ -17986,7 +17701,7 @@
           <a:bodyPr wrap="square" lIns="0" tIns="0" rIns="0" bIns="0" rtlCol="0" anchor="t"/>
           <a:lstStyle/>
           <a:p>
-            <a:pPr indent="0" marL="0">
+            <a:pPr marL="0" indent="0">
               <a:buNone/>
             </a:pPr>
             <a:r>
@@ -18030,7 +17745,7 @@
             <a:prstDash val="solid"/>
           </a:ln>
           <a:effectLst>
-            <a:outerShdw sx="100000" sy="100000" kx="0" ky="0" algn="bl" rotWithShape="0" blurRad="177800" dist="63500" dir="5400000">
+            <a:outerShdw blurRad="177800" dist="63500" dir="5400000" algn="bl" rotWithShape="0">
               <a:srgbClr val="3E00DB">
                 <a:alpha val="55000"/>
               </a:srgbClr>
@@ -18081,11 +17796,11 @@
           <a:bodyPr wrap="square" lIns="0" tIns="0" rIns="0" bIns="0" rtlCol="0" anchor="ctr"/>
           <a:lstStyle/>
           <a:p>
-            <a:pPr algn="ctr" indent="0" marL="0">
-              <a:buNone/>
-            </a:pPr>
-            <a:r>
-              <a:rPr lang="en-US" sz="900" b="1" spc="100" kern="0" dirty="0">
+            <a:pPr marL="0" indent="0" algn="ctr">
+              <a:buNone/>
+            </a:pPr>
+            <a:r>
+              <a:rPr lang="en-US" sz="900" b="1" kern="0" spc="100" dirty="0">
                 <a:solidFill>
                   <a:srgbClr val="0A0A0F"/>
                 </a:solidFill>
@@ -18120,7 +17835,7 @@
           <a:bodyPr wrap="square" lIns="0" tIns="0" rIns="0" bIns="0" rtlCol="0" anchor="ctr"/>
           <a:lstStyle/>
           <a:p>
-            <a:pPr indent="0" marL="0">
+            <a:pPr marL="0" indent="0">
               <a:buNone/>
             </a:pPr>
             <a:r>
@@ -18159,7 +17874,7 @@
           <a:bodyPr wrap="square" lIns="0" tIns="0" rIns="0" bIns="0" rtlCol="0" anchor="ctr"/>
           <a:lstStyle/>
           <a:p>
-            <a:pPr indent="0" marL="0">
+            <a:pPr marL="0" indent="0">
               <a:buNone/>
             </a:pPr>
             <a:r>
@@ -18198,7 +17913,7 @@
           <a:bodyPr wrap="square" lIns="0" tIns="0" rIns="0" bIns="0" rtlCol="0" anchor="t"/>
           <a:lstStyle/>
           <a:p>
-            <a:pPr indent="0" marL="0">
+            <a:pPr marL="0" indent="0">
               <a:buNone/>
             </a:pPr>
             <a:r>
@@ -18237,11 +17952,11 @@
           <a:bodyPr wrap="square" lIns="0" tIns="0" rIns="0" bIns="0" rtlCol="0" anchor="ctr"/>
           <a:lstStyle/>
           <a:p>
-            <a:pPr indent="0" marL="0">
-              <a:buNone/>
-            </a:pPr>
-            <a:r>
-              <a:rPr lang="en-US" sz="850" spc="100" kern="0" dirty="0">
+            <a:pPr marL="0" indent="0">
+              <a:buNone/>
+            </a:pPr>
+            <a:r>
+              <a:rPr lang="en-US" sz="850" kern="0" spc="100" dirty="0">
                 <a:solidFill>
                   <a:srgbClr val="5A5570"/>
                 </a:solidFill>
@@ -18276,7 +17991,7 @@
           <a:bodyPr wrap="square" lIns="0" tIns="0" rIns="0" bIns="0" rtlCol="0" anchor="ctr"/>
           <a:lstStyle/>
           <a:p>
-            <a:pPr algn="r" indent="0" marL="0">
+            <a:pPr marL="0" indent="0" algn="r">
               <a:buNone/>
             </a:pPr>
             <a:r>
@@ -18315,7 +18030,7 @@
           <a:bodyPr wrap="square" lIns="0" tIns="0" rIns="0" bIns="0" rtlCol="0" anchor="ctr"/>
           <a:lstStyle/>
           <a:p>
-            <a:pPr algn="r" indent="0" marL="0">
+            <a:pPr marL="0" indent="0" algn="r">
               <a:buNone/>
             </a:pPr>
             <a:r>
@@ -18349,6 +18064,7 @@
         <a:solidFill>
           <a:srgbClr val="0A0A0F"/>
         </a:solidFill>
+        <a:effectLst/>
       </p:bgPr>
     </p:bg>
     <p:spTree>
@@ -18450,11 +18166,11 @@
           <a:bodyPr wrap="square" lIns="0" tIns="0" rIns="0" bIns="0" rtlCol="0" anchor="ctr"/>
           <a:lstStyle/>
           <a:p>
-            <a:pPr algn="l" indent="0" marL="0">
-              <a:buNone/>
-            </a:pPr>
-            <a:r>
-              <a:rPr lang="en-US" sz="1100" b="1" spc="300" kern="0" dirty="0">
+            <a:pPr marL="0" indent="0" algn="l">
+              <a:buNone/>
+            </a:pPr>
+            <a:r>
+              <a:rPr lang="en-US" sz="1100" b="1" kern="0" spc="300" dirty="0">
                 <a:solidFill>
                   <a:srgbClr val="B6C800"/>
                 </a:solidFill>
@@ -18489,7 +18205,7 @@
           <a:bodyPr wrap="square" lIns="0" tIns="0" rIns="0" bIns="0" rtlCol="0" anchor="t"/>
           <a:lstStyle/>
           <a:p>
-            <a:pPr algn="l" indent="0" marL="0">
+            <a:pPr marL="0" indent="0" algn="l">
               <a:lnSpc>
                 <a:spcPct val="100000"/>
               </a:lnSpc>
@@ -18536,7 +18252,7 @@
             <a:prstDash val="solid"/>
           </a:ln>
           <a:effectLst>
-            <a:outerShdw sx="100000" sy="100000" kx="0" ky="0" algn="bl" rotWithShape="0" blurRad="177800" dist="63500" dir="5400000">
+            <a:outerShdw blurRad="177800" dist="63500" dir="5400000" algn="bl" rotWithShape="0">
               <a:srgbClr val="3E00DB">
                 <a:alpha val="55000"/>
               </a:srgbClr>
@@ -18565,11 +18281,11 @@
           <a:bodyPr wrap="square" lIns="0" tIns="0" rIns="0" bIns="0" rtlCol="0" anchor="ctr"/>
           <a:lstStyle/>
           <a:p>
-            <a:pPr indent="0" marL="0">
-              <a:buNone/>
-            </a:pPr>
-            <a:r>
-              <a:rPr lang="en-US" sz="950" b="1" spc="200" kern="0" dirty="0">
+            <a:pPr marL="0" indent="0">
+              <a:buNone/>
+            </a:pPr>
+            <a:r>
+              <a:rPr lang="en-US" sz="950" b="1" kern="0" spc="200" dirty="0">
                 <a:solidFill>
                   <a:srgbClr val="AEAEC2"/>
                 </a:solidFill>
@@ -18604,7 +18320,7 @@
           <a:bodyPr wrap="square" lIns="0" tIns="0" rIns="0" bIns="0" rtlCol="0" anchor="ctr"/>
           <a:lstStyle/>
           <a:p>
-            <a:pPr indent="0" marL="0">
+            <a:pPr marL="0" indent="0">
               <a:buNone/>
             </a:pPr>
             <a:r>
@@ -18643,7 +18359,7 @@
           <a:bodyPr wrap="square" lIns="0" tIns="0" rIns="0" bIns="0" rtlCol="0" anchor="t"/>
           <a:lstStyle/>
           <a:p>
-            <a:pPr indent="0" marL="0">
+            <a:pPr marL="0" indent="0">
               <a:lnSpc>
                 <a:spcPct val="100000"/>
               </a:lnSpc>
@@ -18685,7 +18401,7 @@
           <a:bodyPr wrap="square" lIns="0" tIns="0" rIns="0" bIns="0" rtlCol="0" anchor="ctr"/>
           <a:lstStyle/>
           <a:p>
-            <a:pPr indent="0" marL="0">
+            <a:pPr marL="0" indent="0">
               <a:buNone/>
             </a:pPr>
             <a:r>
@@ -18729,7 +18445,7 @@
             <a:prstDash val="solid"/>
           </a:ln>
           <a:effectLst>
-            <a:outerShdw sx="100000" sy="100000" kx="0" ky="0" algn="bl" rotWithShape="0" blurRad="177800" dist="63500" dir="5400000">
+            <a:outerShdw blurRad="177800" dist="63500" dir="5400000" algn="bl" rotWithShape="0">
               <a:srgbClr val="3E00DB">
                 <a:alpha val="55000"/>
               </a:srgbClr>
@@ -18758,11 +18474,11 @@
           <a:bodyPr wrap="square" lIns="0" tIns="0" rIns="0" bIns="0" rtlCol="0" anchor="ctr"/>
           <a:lstStyle/>
           <a:p>
-            <a:pPr indent="0" marL="0">
-              <a:buNone/>
-            </a:pPr>
-            <a:r>
-              <a:rPr lang="en-US" sz="950" b="1" spc="200" kern="0" dirty="0">
+            <a:pPr marL="0" indent="0">
+              <a:buNone/>
+            </a:pPr>
+            <a:r>
+              <a:rPr lang="en-US" sz="950" b="1" kern="0" spc="200" dirty="0">
                 <a:solidFill>
                   <a:srgbClr val="AEAEC2"/>
                 </a:solidFill>
@@ -18797,7 +18513,7 @@
           <a:bodyPr wrap="square" lIns="0" tIns="0" rIns="0" bIns="0" rtlCol="0" anchor="ctr"/>
           <a:lstStyle/>
           <a:p>
-            <a:pPr indent="0" marL="0">
+            <a:pPr marL="0" indent="0">
               <a:buNone/>
             </a:pPr>
             <a:r>
@@ -18836,7 +18552,7 @@
           <a:bodyPr wrap="square" lIns="0" tIns="0" rIns="0" bIns="0" rtlCol="0" anchor="t"/>
           <a:lstStyle/>
           <a:p>
-            <a:pPr indent="0" marL="0">
+            <a:pPr marL="0" indent="0">
               <a:lnSpc>
                 <a:spcPct val="100000"/>
               </a:lnSpc>
@@ -18878,7 +18594,7 @@
           <a:bodyPr wrap="square" lIns="0" tIns="0" rIns="0" bIns="0" rtlCol="0" anchor="ctr"/>
           <a:lstStyle/>
           <a:p>
-            <a:pPr indent="0" marL="0">
+            <a:pPr marL="0" indent="0">
               <a:buNone/>
             </a:pPr>
             <a:r>
@@ -18922,7 +18638,7 @@
             <a:prstDash val="solid"/>
           </a:ln>
           <a:effectLst>
-            <a:outerShdw sx="100000" sy="100000" kx="0" ky="0" algn="bl" rotWithShape="0" blurRad="177800" dist="63500" dir="5400000">
+            <a:outerShdw blurRad="177800" dist="63500" dir="5400000" algn="bl" rotWithShape="0">
               <a:srgbClr val="3E00DB">
                 <a:alpha val="55000"/>
               </a:srgbClr>
@@ -18951,11 +18667,11 @@
           <a:bodyPr wrap="square" lIns="0" tIns="0" rIns="0" bIns="0" rtlCol="0" anchor="ctr"/>
           <a:lstStyle/>
           <a:p>
-            <a:pPr indent="0" marL="0">
-              <a:buNone/>
-            </a:pPr>
-            <a:r>
-              <a:rPr lang="en-US" sz="950" b="1" spc="200" kern="0" dirty="0">
+            <a:pPr marL="0" indent="0">
+              <a:buNone/>
+            </a:pPr>
+            <a:r>
+              <a:rPr lang="en-US" sz="950" b="1" kern="0" spc="200" dirty="0">
                 <a:solidFill>
                   <a:srgbClr val="AEAEC2"/>
                 </a:solidFill>
@@ -18990,7 +18706,7 @@
           <a:bodyPr wrap="square" lIns="0" tIns="0" rIns="0" bIns="0" rtlCol="0" anchor="ctr"/>
           <a:lstStyle/>
           <a:p>
-            <a:pPr indent="0" marL="0">
+            <a:pPr marL="0" indent="0">
               <a:buNone/>
             </a:pPr>
             <a:r>
@@ -19029,7 +18745,7 @@
           <a:bodyPr wrap="square" lIns="0" tIns="0" rIns="0" bIns="0" rtlCol="0" anchor="t"/>
           <a:lstStyle/>
           <a:p>
-            <a:pPr indent="0" marL="0">
+            <a:pPr marL="0" indent="0">
               <a:lnSpc>
                 <a:spcPct val="100000"/>
               </a:lnSpc>
@@ -19071,7 +18787,7 @@
           <a:bodyPr wrap="square" lIns="0" tIns="0" rIns="0" bIns="0" rtlCol="0" anchor="ctr"/>
           <a:lstStyle/>
           <a:p>
-            <a:pPr indent="0" marL="0">
+            <a:pPr marL="0" indent="0">
               <a:buNone/>
             </a:pPr>
             <a:r>
@@ -19115,7 +18831,7 @@
             <a:prstDash val="solid"/>
           </a:ln>
           <a:effectLst>
-            <a:outerShdw sx="100000" sy="100000" kx="0" ky="0" algn="bl" rotWithShape="0" blurRad="177800" dist="63500" dir="5400000">
+            <a:outerShdw blurRad="177800" dist="63500" dir="5400000" algn="bl" rotWithShape="0">
               <a:srgbClr val="3E00DB">
                 <a:alpha val="55000"/>
               </a:srgbClr>
@@ -19144,11 +18860,11 @@
           <a:bodyPr wrap="square" lIns="0" tIns="0" rIns="0" bIns="0" rtlCol="0" anchor="ctr"/>
           <a:lstStyle/>
           <a:p>
-            <a:pPr indent="0" marL="0">
-              <a:buNone/>
-            </a:pPr>
-            <a:r>
-              <a:rPr lang="en-US" sz="950" b="1" spc="200" kern="0" dirty="0">
+            <a:pPr marL="0" indent="0">
+              <a:buNone/>
+            </a:pPr>
+            <a:r>
+              <a:rPr lang="en-US" sz="950" b="1" kern="0" spc="200" dirty="0">
                 <a:solidFill>
                   <a:srgbClr val="AEAEC2"/>
                 </a:solidFill>
@@ -19183,7 +18899,7 @@
           <a:bodyPr wrap="square" lIns="0" tIns="0" rIns="0" bIns="0" rtlCol="0" anchor="ctr"/>
           <a:lstStyle/>
           <a:p>
-            <a:pPr indent="0" marL="0">
+            <a:pPr marL="0" indent="0">
               <a:buNone/>
             </a:pPr>
             <a:r>
@@ -19222,7 +18938,7 @@
           <a:bodyPr wrap="square" lIns="0" tIns="0" rIns="0" bIns="0" rtlCol="0" anchor="t"/>
           <a:lstStyle/>
           <a:p>
-            <a:pPr indent="0" marL="0">
+            <a:pPr marL="0" indent="0">
               <a:lnSpc>
                 <a:spcPct val="100000"/>
               </a:lnSpc>
@@ -19264,7 +18980,7 @@
           <a:bodyPr wrap="square" lIns="0" tIns="0" rIns="0" bIns="0" rtlCol="0" anchor="ctr"/>
           <a:lstStyle/>
           <a:p>
-            <a:pPr indent="0" marL="0">
+            <a:pPr marL="0" indent="0">
               <a:buNone/>
             </a:pPr>
             <a:r>
@@ -19308,7 +19024,7 @@
             <a:prstDash val="solid"/>
           </a:ln>
           <a:effectLst>
-            <a:outerShdw sx="100000" sy="100000" kx="0" ky="0" algn="bl" rotWithShape="0" blurRad="177800" dist="63500" dir="5400000">
+            <a:outerShdw blurRad="177800" dist="63500" dir="5400000" algn="bl" rotWithShape="0">
               <a:srgbClr val="3E00DB">
                 <a:alpha val="55000"/>
               </a:srgbClr>
@@ -19337,11 +19053,11 @@
           <a:bodyPr wrap="square" lIns="0" tIns="0" rIns="0" bIns="0" rtlCol="0" anchor="ctr"/>
           <a:lstStyle/>
           <a:p>
-            <a:pPr indent="0" marL="0">
-              <a:buNone/>
-            </a:pPr>
-            <a:r>
-              <a:rPr lang="en-US" sz="950" b="1" spc="200" kern="0" dirty="0">
+            <a:pPr marL="0" indent="0">
+              <a:buNone/>
+            </a:pPr>
+            <a:r>
+              <a:rPr lang="en-US" sz="950" b="1" kern="0" spc="200" dirty="0">
                 <a:solidFill>
                   <a:srgbClr val="AEAEC2"/>
                 </a:solidFill>
@@ -19376,7 +19092,7 @@
           <a:bodyPr wrap="square" lIns="0" tIns="0" rIns="0" bIns="0" rtlCol="0" anchor="ctr"/>
           <a:lstStyle/>
           <a:p>
-            <a:pPr indent="0" marL="0">
+            <a:pPr marL="0" indent="0">
               <a:buNone/>
             </a:pPr>
             <a:r>
@@ -19415,7 +19131,7 @@
           <a:bodyPr wrap="square" lIns="0" tIns="0" rIns="0" bIns="0" rtlCol="0" anchor="t"/>
           <a:lstStyle/>
           <a:p>
-            <a:pPr indent="0" marL="0">
+            <a:pPr marL="0" indent="0">
               <a:lnSpc>
                 <a:spcPct val="100000"/>
               </a:lnSpc>
@@ -19457,7 +19173,7 @@
           <a:bodyPr wrap="square" lIns="0" tIns="0" rIns="0" bIns="0" rtlCol="0" anchor="ctr"/>
           <a:lstStyle/>
           <a:p>
-            <a:pPr indent="0" marL="0">
+            <a:pPr marL="0" indent="0">
               <a:buNone/>
             </a:pPr>
             <a:r>
@@ -19501,7 +19217,7 @@
             <a:prstDash val="solid"/>
           </a:ln>
           <a:effectLst>
-            <a:outerShdw sx="100000" sy="100000" kx="0" ky="0" algn="bl" rotWithShape="0" blurRad="177800" dist="63500" dir="5400000">
+            <a:outerShdw blurRad="177800" dist="63500" dir="5400000" algn="bl" rotWithShape="0">
               <a:srgbClr val="3E00DB">
                 <a:alpha val="55000"/>
               </a:srgbClr>
@@ -19530,11 +19246,11 @@
           <a:bodyPr wrap="square" lIns="0" tIns="0" rIns="0" bIns="0" rtlCol="0" anchor="ctr"/>
           <a:lstStyle/>
           <a:p>
-            <a:pPr indent="0" marL="0">
-              <a:buNone/>
-            </a:pPr>
-            <a:r>
-              <a:rPr lang="en-US" sz="950" b="1" spc="200" kern="0" dirty="0">
+            <a:pPr marL="0" indent="0">
+              <a:buNone/>
+            </a:pPr>
+            <a:r>
+              <a:rPr lang="en-US" sz="950" b="1" kern="0" spc="200" dirty="0">
                 <a:solidFill>
                   <a:srgbClr val="CDD6FF"/>
                 </a:solidFill>
@@ -19569,7 +19285,7 @@
           <a:bodyPr wrap="square" lIns="0" tIns="0" rIns="0" bIns="0" rtlCol="0" anchor="ctr"/>
           <a:lstStyle/>
           <a:p>
-            <a:pPr indent="0" marL="0">
+            <a:pPr marL="0" indent="0">
               <a:buNone/>
             </a:pPr>
             <a:r>
@@ -19608,7 +19324,7 @@
           <a:bodyPr wrap="square" lIns="0" tIns="0" rIns="0" bIns="0" rtlCol="0" anchor="t"/>
           <a:lstStyle/>
           <a:p>
-            <a:pPr indent="0" marL="0">
+            <a:pPr marL="0" indent="0">
               <a:lnSpc>
                 <a:spcPct val="100000"/>
               </a:lnSpc>
@@ -19650,7 +19366,7 @@
           <a:bodyPr wrap="square" lIns="0" tIns="0" rIns="0" bIns="0" rtlCol="0" anchor="ctr"/>
           <a:lstStyle/>
           <a:p>
-            <a:pPr indent="0" marL="0">
+            <a:pPr marL="0" indent="0">
               <a:buNone/>
             </a:pPr>
             <a:r>
@@ -19689,11 +19405,11 @@
           <a:bodyPr wrap="square" lIns="0" tIns="0" rIns="0" bIns="0" rtlCol="0" anchor="ctr"/>
           <a:lstStyle/>
           <a:p>
-            <a:pPr indent="0" marL="0">
-              <a:buNone/>
-            </a:pPr>
-            <a:r>
-              <a:rPr lang="en-US" sz="850" spc="100" kern="0" dirty="0">
+            <a:pPr marL="0" indent="0">
+              <a:buNone/>
+            </a:pPr>
+            <a:r>
+              <a:rPr lang="en-US" sz="850" kern="0" spc="100" dirty="0">
                 <a:solidFill>
                   <a:srgbClr val="5A5570"/>
                 </a:solidFill>
@@ -19728,7 +19444,7 @@
           <a:bodyPr wrap="square" lIns="0" tIns="0" rIns="0" bIns="0" rtlCol="0" anchor="ctr"/>
           <a:lstStyle/>
           <a:p>
-            <a:pPr algn="r" indent="0" marL="0">
+            <a:pPr marL="0" indent="0" algn="r">
               <a:buNone/>
             </a:pPr>
             <a:r>
@@ -19767,7 +19483,7 @@
           <a:bodyPr wrap="square" lIns="0" tIns="0" rIns="0" bIns="0" rtlCol="0" anchor="ctr"/>
           <a:lstStyle/>
           <a:p>
-            <a:pPr algn="r" indent="0" marL="0">
+            <a:pPr marL="0" indent="0" algn="r">
               <a:buNone/>
             </a:pPr>
             <a:r>
@@ -19801,6 +19517,7 @@
         <a:solidFill>
           <a:srgbClr val="0A0A0F"/>
         </a:solidFill>
+        <a:effectLst/>
       </p:bgPr>
     </p:bg>
     <p:spTree>
@@ -19902,11 +19619,11 @@
           <a:bodyPr wrap="square" lIns="0" tIns="0" rIns="0" bIns="0" rtlCol="0" anchor="ctr"/>
           <a:lstStyle/>
           <a:p>
-            <a:pPr algn="l" indent="0" marL="0">
-              <a:buNone/>
-            </a:pPr>
-            <a:r>
-              <a:rPr lang="en-US" sz="1100" b="1" spc="300" kern="0" dirty="0">
+            <a:pPr marL="0" indent="0" algn="l">
+              <a:buNone/>
+            </a:pPr>
+            <a:r>
+              <a:rPr lang="en-US" sz="1100" b="1" kern="0" spc="300" dirty="0">
                 <a:solidFill>
                   <a:srgbClr val="B6C800"/>
                 </a:solidFill>
@@ -19941,7 +19658,7 @@
           <a:bodyPr wrap="square" lIns="0" tIns="0" rIns="0" bIns="0" rtlCol="0" anchor="t"/>
           <a:lstStyle/>
           <a:p>
-            <a:pPr algn="l" indent="0" marL="0">
+            <a:pPr marL="0" indent="0" algn="l">
               <a:lnSpc>
                 <a:spcPct val="100000"/>
               </a:lnSpc>
@@ -19983,7 +19700,7 @@
           <a:bodyPr wrap="square" lIns="0" tIns="0" rIns="0" bIns="0" rtlCol="0" anchor="ctr"/>
           <a:lstStyle/>
           <a:p>
-            <a:pPr indent="0" marL="0">
+            <a:pPr marL="0" indent="0">
               <a:buNone/>
             </a:pPr>
             <a:r>
@@ -20017,17 +19734,41 @@
         </p:nvGraphicFramePr>
         <p:xfrm>
           <a:off x="548640" y="1874520"/>
-          <a:ext cx="5394960" cy="914400"/>
+          <a:ext cx="5394960" cy="4197096"/>
         </p:xfrm>
         <a:graphic>
           <a:graphicData uri="http://schemas.openxmlformats.org/drawingml/2006/table">
             <a:tbl>
               <a:tblPr/>
               <a:tblGrid>
-                <a:gridCol w="2377440"/>
-                <a:gridCol w="777240"/>
-                <a:gridCol w="914400"/>
-                <a:gridCol w="1325880"/>
+                <a:gridCol w="2377440">
+                  <a:extLst>
+                    <a:ext uri="{9D8B030D-6E8A-4147-A177-3AD203B41FA5}">
+                      <a16:colId xmlns:a16="http://schemas.microsoft.com/office/drawing/2014/main" val="20000"/>
+                    </a:ext>
+                  </a:extLst>
+                </a:gridCol>
+                <a:gridCol w="777240">
+                  <a:extLst>
+                    <a:ext uri="{9D8B030D-6E8A-4147-A177-3AD203B41FA5}">
+                      <a16:colId xmlns:a16="http://schemas.microsoft.com/office/drawing/2014/main" val="20001"/>
+                    </a:ext>
+                  </a:extLst>
+                </a:gridCol>
+                <a:gridCol w="914400">
+                  <a:extLst>
+                    <a:ext uri="{9D8B030D-6E8A-4147-A177-3AD203B41FA5}">
+                      <a16:colId xmlns:a16="http://schemas.microsoft.com/office/drawing/2014/main" val="20002"/>
+                    </a:ext>
+                  </a:extLst>
+                </a:gridCol>
+                <a:gridCol w="1325880">
+                  <a:extLst>
+                    <a:ext uri="{9D8B030D-6E8A-4147-A177-3AD203B41FA5}">
+                      <a16:colId xmlns:a16="http://schemas.microsoft.com/office/drawing/2014/main" val="20003"/>
+                    </a:ext>
+                  </a:extLst>
+                </a:gridCol>
               </a:tblGrid>
               <a:tr h="233172">
                 <a:tc>
@@ -20035,7 +19776,7 @@
                     <a:bodyPr/>
                     <a:lstStyle/>
                     <a:p>
-                      <a:pPr algn="l" indent="0" marL="0">
+                      <a:pPr marL="0" indent="0" algn="l">
                         <a:buNone/>
                       </a:pPr>
                       <a:r>
@@ -20103,7 +19844,7 @@
                     <a:bodyPr/>
                     <a:lstStyle/>
                     <a:p>
-                      <a:pPr algn="r" indent="0" marL="0">
+                      <a:pPr marL="0" indent="0" algn="r">
                         <a:buNone/>
                       </a:pPr>
                       <a:r>
@@ -20171,7 +19912,7 @@
                     <a:bodyPr/>
                     <a:lstStyle/>
                     <a:p>
-                      <a:pPr algn="r" indent="0" marL="0">
+                      <a:pPr marL="0" indent="0" algn="r">
                         <a:buNone/>
                       </a:pPr>
                       <a:r>
@@ -20239,7 +19980,7 @@
                     <a:bodyPr/>
                     <a:lstStyle/>
                     <a:p>
-                      <a:pPr algn="r" indent="0" marL="0">
+                      <a:pPr marL="0" indent="0" algn="r">
                         <a:buNone/>
                       </a:pPr>
                       <a:r>
@@ -20302,6 +20043,11 @@
                     </a:solidFill>
                   </a:tcPr>
                 </a:tc>
+                <a:extLst>
+                  <a:ext uri="{0D108BD9-81ED-4DB2-BD59-A6C34878D82A}">
+                    <a16:rowId xmlns:a16="http://schemas.microsoft.com/office/drawing/2014/main" val="10000"/>
+                  </a:ext>
+                </a:extLst>
               </a:tr>
               <a:tr h="233172">
                 <a:tc gridSpan="4">
@@ -20309,11 +20055,11 @@
                     <a:bodyPr/>
                     <a:lstStyle/>
                     <a:p>
-                      <a:pPr algn="l" indent="0" marL="0">
+                      <a:pPr marL="0" indent="0" algn="l">
                         <a:buNone/>
                       </a:pPr>
                       <a:r>
-                        <a:rPr lang="en-US" sz="850" b="1" spc="100" kern="0" dirty="0">
+                        <a:rPr lang="en-US" sz="850" b="1" kern="0" spc="100" dirty="0">
                           <a:solidFill>
                             <a:srgbClr val="CDD6FF"/>
                           </a:solidFill>
@@ -20373,14 +20119,40 @@
                   </a:tcPr>
                 </a:tc>
                 <a:tc hMerge="1">
+                  <a:txBody>
+                    <a:bodyPr/>
+                    <a:lstStyle/>
+                    <a:p>
+                      <a:endParaRPr lang="en-US"/>
+                    </a:p>
+                  </a:txBody>
                   <a:tcPr/>
                 </a:tc>
                 <a:tc hMerge="1">
+                  <a:txBody>
+                    <a:bodyPr/>
+                    <a:lstStyle/>
+                    <a:p>
+                      <a:endParaRPr lang="en-US"/>
+                    </a:p>
+                  </a:txBody>
                   <a:tcPr/>
                 </a:tc>
                 <a:tc hMerge="1">
+                  <a:txBody>
+                    <a:bodyPr/>
+                    <a:lstStyle/>
+                    <a:p>
+                      <a:endParaRPr lang="en-US"/>
+                    </a:p>
+                  </a:txBody>
                   <a:tcPr/>
                 </a:tc>
+                <a:extLst>
+                  <a:ext uri="{0D108BD9-81ED-4DB2-BD59-A6C34878D82A}">
+                    <a16:rowId xmlns:a16="http://schemas.microsoft.com/office/drawing/2014/main" val="10001"/>
+                  </a:ext>
+                </a:extLst>
               </a:tr>
               <a:tr h="233172">
                 <a:tc>
@@ -20388,7 +20160,7 @@
                     <a:bodyPr/>
                     <a:lstStyle/>
                     <a:p>
-                      <a:pPr algn="l" indent="0" marL="0">
+                      <a:pPr marL="0" indent="0" algn="l">
                         <a:buNone/>
                       </a:pPr>
                       <a:r>
@@ -20453,7 +20225,7 @@
                     <a:bodyPr/>
                     <a:lstStyle/>
                     <a:p>
-                      <a:pPr algn="r" indent="0" marL="0">
+                      <a:pPr marL="0" indent="0" algn="r">
                         <a:buNone/>
                       </a:pPr>
                       <a:r>
@@ -20518,7 +20290,7 @@
                     <a:bodyPr/>
                     <a:lstStyle/>
                     <a:p>
-                      <a:pPr algn="r" indent="0" marL="0">
+                      <a:pPr marL="0" indent="0" algn="r">
                         <a:buNone/>
                       </a:pPr>
                       <a:r>
@@ -20583,7 +20355,7 @@
                     <a:bodyPr/>
                     <a:lstStyle/>
                     <a:p>
-                      <a:pPr algn="r" indent="0" marL="0">
+                      <a:pPr marL="0" indent="0" algn="r">
                         <a:buNone/>
                       </a:pPr>
                       <a:r>
@@ -20643,6 +20415,11 @@
                     </a:lnB>
                   </a:tcPr>
                 </a:tc>
+                <a:extLst>
+                  <a:ext uri="{0D108BD9-81ED-4DB2-BD59-A6C34878D82A}">
+                    <a16:rowId xmlns:a16="http://schemas.microsoft.com/office/drawing/2014/main" val="10002"/>
+                  </a:ext>
+                </a:extLst>
               </a:tr>
               <a:tr h="233172">
                 <a:tc>
@@ -20650,7 +20427,7 @@
                     <a:bodyPr/>
                     <a:lstStyle/>
                     <a:p>
-                      <a:pPr algn="l" indent="0" marL="0">
+                      <a:pPr marL="0" indent="0" algn="l">
                         <a:buNone/>
                       </a:pPr>
                       <a:r>
@@ -20715,7 +20492,7 @@
                     <a:bodyPr/>
                     <a:lstStyle/>
                     <a:p>
-                      <a:pPr algn="r" indent="0" marL="0">
+                      <a:pPr marL="0" indent="0" algn="r">
                         <a:buNone/>
                       </a:pPr>
                       <a:r>
@@ -20780,7 +20557,7 @@
                     <a:bodyPr/>
                     <a:lstStyle/>
                     <a:p>
-                      <a:pPr algn="r" indent="0" marL="0">
+                      <a:pPr marL="0" indent="0" algn="r">
                         <a:buNone/>
                       </a:pPr>
                       <a:r>
@@ -20845,7 +20622,7 @@
                     <a:bodyPr/>
                     <a:lstStyle/>
                     <a:p>
-                      <a:pPr algn="r" indent="0" marL="0">
+                      <a:pPr marL="0" indent="0" algn="r">
                         <a:buNone/>
                       </a:pPr>
                       <a:r>
@@ -20905,6 +20682,11 @@
                     </a:lnB>
                   </a:tcPr>
                 </a:tc>
+                <a:extLst>
+                  <a:ext uri="{0D108BD9-81ED-4DB2-BD59-A6C34878D82A}">
+                    <a16:rowId xmlns:a16="http://schemas.microsoft.com/office/drawing/2014/main" val="10003"/>
+                  </a:ext>
+                </a:extLst>
               </a:tr>
               <a:tr h="233172">
                 <a:tc>
@@ -20912,7 +20694,7 @@
                     <a:bodyPr/>
                     <a:lstStyle/>
                     <a:p>
-                      <a:pPr algn="l" indent="0" marL="0">
+                      <a:pPr marL="0" indent="0" algn="l">
                         <a:buNone/>
                       </a:pPr>
                       <a:r>
@@ -20977,7 +20759,7 @@
                     <a:bodyPr/>
                     <a:lstStyle/>
                     <a:p>
-                      <a:pPr algn="r" indent="0" marL="0">
+                      <a:pPr marL="0" indent="0" algn="r">
                         <a:buNone/>
                       </a:pPr>
                       <a:r>
@@ -21042,7 +20824,7 @@
                     <a:bodyPr/>
                     <a:lstStyle/>
                     <a:p>
-                      <a:pPr algn="r" indent="0" marL="0">
+                      <a:pPr marL="0" indent="0" algn="r">
                         <a:buNone/>
                       </a:pPr>
                       <a:r>
@@ -21107,7 +20889,7 @@
                     <a:bodyPr/>
                     <a:lstStyle/>
                     <a:p>
-                      <a:pPr algn="r" indent="0" marL="0">
+                      <a:pPr marL="0" indent="0" algn="r">
                         <a:buNone/>
                       </a:pPr>
                       <a:r>
@@ -21167,6 +20949,11 @@
                     </a:lnB>
                   </a:tcPr>
                 </a:tc>
+                <a:extLst>
+                  <a:ext uri="{0D108BD9-81ED-4DB2-BD59-A6C34878D82A}">
+                    <a16:rowId xmlns:a16="http://schemas.microsoft.com/office/drawing/2014/main" val="10004"/>
+                  </a:ext>
+                </a:extLst>
               </a:tr>
               <a:tr h="233172">
                 <a:tc>
@@ -21174,7 +20961,7 @@
                     <a:bodyPr/>
                     <a:lstStyle/>
                     <a:p>
-                      <a:pPr algn="l" indent="0" marL="0">
+                      <a:pPr marL="0" indent="0" algn="l">
                         <a:buNone/>
                       </a:pPr>
                       <a:r>
@@ -21239,7 +21026,7 @@
                     <a:bodyPr/>
                     <a:lstStyle/>
                     <a:p>
-                      <a:pPr algn="r" indent="0" marL="0">
+                      <a:pPr marL="0" indent="0" algn="r">
                         <a:buNone/>
                       </a:pPr>
                       <a:r>
@@ -21304,7 +21091,7 @@
                     <a:bodyPr/>
                     <a:lstStyle/>
                     <a:p>
-                      <a:pPr algn="r" indent="0" marL="0">
+                      <a:pPr marL="0" indent="0" algn="r">
                         <a:buNone/>
                       </a:pPr>
                       <a:r>
@@ -21369,7 +21156,7 @@
                     <a:bodyPr/>
                     <a:lstStyle/>
                     <a:p>
-                      <a:pPr algn="r" indent="0" marL="0">
+                      <a:pPr marL="0" indent="0" algn="r">
                         <a:buNone/>
                       </a:pPr>
                       <a:r>
@@ -21429,6 +21216,11 @@
                     </a:lnB>
                   </a:tcPr>
                 </a:tc>
+                <a:extLst>
+                  <a:ext uri="{0D108BD9-81ED-4DB2-BD59-A6C34878D82A}">
+                    <a16:rowId xmlns:a16="http://schemas.microsoft.com/office/drawing/2014/main" val="10005"/>
+                  </a:ext>
+                </a:extLst>
               </a:tr>
               <a:tr h="233172">
                 <a:tc gridSpan="4">
@@ -21436,11 +21228,11 @@
                     <a:bodyPr/>
                     <a:lstStyle/>
                     <a:p>
-                      <a:pPr algn="l" indent="0" marL="0">
+                      <a:pPr marL="0" indent="0" algn="l">
                         <a:buNone/>
                       </a:pPr>
                       <a:r>
-                        <a:rPr lang="en-US" sz="850" b="1" spc="100" kern="0" dirty="0">
+                        <a:rPr lang="en-US" sz="850" b="1" kern="0" spc="100" dirty="0">
                           <a:solidFill>
                             <a:srgbClr val="CDD6FF"/>
                           </a:solidFill>
@@ -21500,14 +21292,40 @@
                   </a:tcPr>
                 </a:tc>
                 <a:tc hMerge="1">
+                  <a:txBody>
+                    <a:bodyPr/>
+                    <a:lstStyle/>
+                    <a:p>
+                      <a:endParaRPr lang="en-US"/>
+                    </a:p>
+                  </a:txBody>
                   <a:tcPr/>
                 </a:tc>
                 <a:tc hMerge="1">
+                  <a:txBody>
+                    <a:bodyPr/>
+                    <a:lstStyle/>
+                    <a:p>
+                      <a:endParaRPr lang="en-US"/>
+                    </a:p>
+                  </a:txBody>
                   <a:tcPr/>
                 </a:tc>
                 <a:tc hMerge="1">
+                  <a:txBody>
+                    <a:bodyPr/>
+                    <a:lstStyle/>
+                    <a:p>
+                      <a:endParaRPr lang="en-US"/>
+                    </a:p>
+                  </a:txBody>
                   <a:tcPr/>
                 </a:tc>
+                <a:extLst>
+                  <a:ext uri="{0D108BD9-81ED-4DB2-BD59-A6C34878D82A}">
+                    <a16:rowId xmlns:a16="http://schemas.microsoft.com/office/drawing/2014/main" val="10006"/>
+                  </a:ext>
+                </a:extLst>
               </a:tr>
               <a:tr h="233172">
                 <a:tc>
@@ -21515,7 +21333,7 @@
                     <a:bodyPr/>
                     <a:lstStyle/>
                     <a:p>
-                      <a:pPr algn="l" indent="0" marL="0">
+                      <a:pPr marL="0" indent="0" algn="l">
                         <a:buNone/>
                       </a:pPr>
                       <a:r>
@@ -21580,7 +21398,7 @@
                     <a:bodyPr/>
                     <a:lstStyle/>
                     <a:p>
-                      <a:pPr algn="r" indent="0" marL="0">
+                      <a:pPr marL="0" indent="0" algn="r">
                         <a:buNone/>
                       </a:pPr>
                       <a:r>
@@ -21645,7 +21463,7 @@
                     <a:bodyPr/>
                     <a:lstStyle/>
                     <a:p>
-                      <a:pPr algn="r" indent="0" marL="0">
+                      <a:pPr marL="0" indent="0" algn="r">
                         <a:buNone/>
                       </a:pPr>
                       <a:r>
@@ -21710,7 +21528,7 @@
                     <a:bodyPr/>
                     <a:lstStyle/>
                     <a:p>
-                      <a:pPr algn="r" indent="0" marL="0">
+                      <a:pPr marL="0" indent="0" algn="r">
                         <a:buNone/>
                       </a:pPr>
                       <a:r>
@@ -21770,6 +21588,11 @@
                     </a:lnB>
                   </a:tcPr>
                 </a:tc>
+                <a:extLst>
+                  <a:ext uri="{0D108BD9-81ED-4DB2-BD59-A6C34878D82A}">
+                    <a16:rowId xmlns:a16="http://schemas.microsoft.com/office/drawing/2014/main" val="10007"/>
+                  </a:ext>
+                </a:extLst>
               </a:tr>
               <a:tr h="233172">
                 <a:tc gridSpan="4">
@@ -21777,11 +21600,11 @@
                     <a:bodyPr/>
                     <a:lstStyle/>
                     <a:p>
-                      <a:pPr algn="l" indent="0" marL="0">
+                      <a:pPr marL="0" indent="0" algn="l">
                         <a:buNone/>
                       </a:pPr>
                       <a:r>
-                        <a:rPr lang="en-US" sz="850" b="1" spc="100" kern="0" dirty="0">
+                        <a:rPr lang="en-US" sz="850" b="1" kern="0" spc="100" dirty="0">
                           <a:solidFill>
                             <a:srgbClr val="CDD6FF"/>
                           </a:solidFill>
@@ -21841,14 +21664,40 @@
                   </a:tcPr>
                 </a:tc>
                 <a:tc hMerge="1">
+                  <a:txBody>
+                    <a:bodyPr/>
+                    <a:lstStyle/>
+                    <a:p>
+                      <a:endParaRPr lang="en-US"/>
+                    </a:p>
+                  </a:txBody>
                   <a:tcPr/>
                 </a:tc>
                 <a:tc hMerge="1">
+                  <a:txBody>
+                    <a:bodyPr/>
+                    <a:lstStyle/>
+                    <a:p>
+                      <a:endParaRPr lang="en-US"/>
+                    </a:p>
+                  </a:txBody>
                   <a:tcPr/>
                 </a:tc>
                 <a:tc hMerge="1">
+                  <a:txBody>
+                    <a:bodyPr/>
+                    <a:lstStyle/>
+                    <a:p>
+                      <a:endParaRPr lang="en-US"/>
+                    </a:p>
+                  </a:txBody>
                   <a:tcPr/>
                 </a:tc>
+                <a:extLst>
+                  <a:ext uri="{0D108BD9-81ED-4DB2-BD59-A6C34878D82A}">
+                    <a16:rowId xmlns:a16="http://schemas.microsoft.com/office/drawing/2014/main" val="10008"/>
+                  </a:ext>
+                </a:extLst>
               </a:tr>
               <a:tr h="233172">
                 <a:tc>
@@ -21856,7 +21705,7 @@
                     <a:bodyPr/>
                     <a:lstStyle/>
                     <a:p>
-                      <a:pPr algn="l" indent="0" marL="0">
+                      <a:pPr marL="0" indent="0" algn="l">
                         <a:buNone/>
                       </a:pPr>
                       <a:r>
@@ -21921,7 +21770,7 @@
                     <a:bodyPr/>
                     <a:lstStyle/>
                     <a:p>
-                      <a:pPr algn="r" indent="0" marL="0">
+                      <a:pPr marL="0" indent="0" algn="r">
                         <a:buNone/>
                       </a:pPr>
                       <a:r>
@@ -21986,7 +21835,7 @@
                     <a:bodyPr/>
                     <a:lstStyle/>
                     <a:p>
-                      <a:pPr algn="r" indent="0" marL="0">
+                      <a:pPr marL="0" indent="0" algn="r">
                         <a:buNone/>
                       </a:pPr>
                       <a:r>
@@ -22051,7 +21900,7 @@
                     <a:bodyPr/>
                     <a:lstStyle/>
                     <a:p>
-                      <a:pPr algn="r" indent="0" marL="0">
+                      <a:pPr marL="0" indent="0" algn="r">
                         <a:buNone/>
                       </a:pPr>
                       <a:r>
@@ -22111,6 +21960,11 @@
                     </a:lnB>
                   </a:tcPr>
                 </a:tc>
+                <a:extLst>
+                  <a:ext uri="{0D108BD9-81ED-4DB2-BD59-A6C34878D82A}">
+                    <a16:rowId xmlns:a16="http://schemas.microsoft.com/office/drawing/2014/main" val="10009"/>
+                  </a:ext>
+                </a:extLst>
               </a:tr>
               <a:tr h="233172">
                 <a:tc>
@@ -22118,7 +21972,7 @@
                     <a:bodyPr/>
                     <a:lstStyle/>
                     <a:p>
-                      <a:pPr algn="l" indent="0" marL="0">
+                      <a:pPr marL="0" indent="0" algn="l">
                         <a:buNone/>
                       </a:pPr>
                       <a:r>
@@ -22183,7 +22037,7 @@
                     <a:bodyPr/>
                     <a:lstStyle/>
                     <a:p>
-                      <a:pPr algn="r" indent="0" marL="0">
+                      <a:pPr marL="0" indent="0" algn="r">
                         <a:buNone/>
                       </a:pPr>
                       <a:r>
@@ -22248,7 +22102,7 @@
                     <a:bodyPr/>
                     <a:lstStyle/>
                     <a:p>
-                      <a:pPr algn="r" indent="0" marL="0">
+                      <a:pPr marL="0" indent="0" algn="r">
                         <a:buNone/>
                       </a:pPr>
                       <a:r>
@@ -22313,7 +22167,7 @@
                     <a:bodyPr/>
                     <a:lstStyle/>
                     <a:p>
-                      <a:pPr algn="r" indent="0" marL="0">
+                      <a:pPr marL="0" indent="0" algn="r">
                         <a:buNone/>
                       </a:pPr>
                       <a:r>
@@ -22373,6 +22227,11 @@
                     </a:lnB>
                   </a:tcPr>
                 </a:tc>
+                <a:extLst>
+                  <a:ext uri="{0D108BD9-81ED-4DB2-BD59-A6C34878D82A}">
+                    <a16:rowId xmlns:a16="http://schemas.microsoft.com/office/drawing/2014/main" val="10010"/>
+                  </a:ext>
+                </a:extLst>
               </a:tr>
               <a:tr h="233172">
                 <a:tc>
@@ -22380,7 +22239,7 @@
                     <a:bodyPr/>
                     <a:lstStyle/>
                     <a:p>
-                      <a:pPr algn="l" indent="0" marL="0">
+                      <a:pPr marL="0" indent="0" algn="l">
                         <a:buNone/>
                       </a:pPr>
                       <a:r>
@@ -22445,7 +22304,7 @@
                     <a:bodyPr/>
                     <a:lstStyle/>
                     <a:p>
-                      <a:pPr algn="r" indent="0" marL="0">
+                      <a:pPr marL="0" indent="0" algn="r">
                         <a:buNone/>
                       </a:pPr>
                       <a:r>
@@ -22510,7 +22369,7 @@
                     <a:bodyPr/>
                     <a:lstStyle/>
                     <a:p>
-                      <a:pPr algn="r" indent="0" marL="0">
+                      <a:pPr marL="0" indent="0" algn="r">
                         <a:buNone/>
                       </a:pPr>
                       <a:r>
@@ -22575,7 +22434,7 @@
                     <a:bodyPr/>
                     <a:lstStyle/>
                     <a:p>
-                      <a:pPr algn="r" indent="0" marL="0">
+                      <a:pPr marL="0" indent="0" algn="r">
                         <a:buNone/>
                       </a:pPr>
                       <a:r>
@@ -22635,6 +22494,11 @@
                     </a:lnB>
                   </a:tcPr>
                 </a:tc>
+                <a:extLst>
+                  <a:ext uri="{0D108BD9-81ED-4DB2-BD59-A6C34878D82A}">
+                    <a16:rowId xmlns:a16="http://schemas.microsoft.com/office/drawing/2014/main" val="10011"/>
+                  </a:ext>
+                </a:extLst>
               </a:tr>
               <a:tr h="233172">
                 <a:tc gridSpan="4">
@@ -22642,11 +22506,11 @@
                     <a:bodyPr/>
                     <a:lstStyle/>
                     <a:p>
-                      <a:pPr algn="l" indent="0" marL="0">
+                      <a:pPr marL="0" indent="0" algn="l">
                         <a:buNone/>
                       </a:pPr>
                       <a:r>
-                        <a:rPr lang="en-US" sz="850" b="1" spc="100" kern="0" dirty="0">
+                        <a:rPr lang="en-US" sz="850" b="1" kern="0" spc="100" dirty="0">
                           <a:solidFill>
                             <a:srgbClr val="CDD6FF"/>
                           </a:solidFill>
@@ -22706,14 +22570,40 @@
                   </a:tcPr>
                 </a:tc>
                 <a:tc hMerge="1">
+                  <a:txBody>
+                    <a:bodyPr/>
+                    <a:lstStyle/>
+                    <a:p>
+                      <a:endParaRPr lang="en-US"/>
+                    </a:p>
+                  </a:txBody>
                   <a:tcPr/>
                 </a:tc>
                 <a:tc hMerge="1">
+                  <a:txBody>
+                    <a:bodyPr/>
+                    <a:lstStyle/>
+                    <a:p>
+                      <a:endParaRPr lang="en-US"/>
+                    </a:p>
+                  </a:txBody>
                   <a:tcPr/>
                 </a:tc>
                 <a:tc hMerge="1">
+                  <a:txBody>
+                    <a:bodyPr/>
+                    <a:lstStyle/>
+                    <a:p>
+                      <a:endParaRPr lang="en-US"/>
+                    </a:p>
+                  </a:txBody>
                   <a:tcPr/>
                 </a:tc>
+                <a:extLst>
+                  <a:ext uri="{0D108BD9-81ED-4DB2-BD59-A6C34878D82A}">
+                    <a16:rowId xmlns:a16="http://schemas.microsoft.com/office/drawing/2014/main" val="10012"/>
+                  </a:ext>
+                </a:extLst>
               </a:tr>
               <a:tr h="233172">
                 <a:tc>
@@ -22721,7 +22611,7 @@
                     <a:bodyPr/>
                     <a:lstStyle/>
                     <a:p>
-                      <a:pPr algn="l" indent="0" marL="0">
+                      <a:pPr marL="0" indent="0" algn="l">
                         <a:buNone/>
                       </a:pPr>
                       <a:r>
@@ -22786,7 +22676,7 @@
                     <a:bodyPr/>
                     <a:lstStyle/>
                     <a:p>
-                      <a:pPr algn="r" indent="0" marL="0">
+                      <a:pPr marL="0" indent="0" algn="r">
                         <a:buNone/>
                       </a:pPr>
                       <a:r>
@@ -22851,7 +22741,7 @@
                     <a:bodyPr/>
                     <a:lstStyle/>
                     <a:p>
-                      <a:pPr algn="r" indent="0" marL="0">
+                      <a:pPr marL="0" indent="0" algn="r">
                         <a:buNone/>
                       </a:pPr>
                       <a:r>
@@ -22916,7 +22806,7 @@
                     <a:bodyPr/>
                     <a:lstStyle/>
                     <a:p>
-                      <a:pPr algn="r" indent="0" marL="0">
+                      <a:pPr marL="0" indent="0" algn="r">
                         <a:buNone/>
                       </a:pPr>
                       <a:r>
@@ -22976,6 +22866,11 @@
                     </a:lnB>
                   </a:tcPr>
                 </a:tc>
+                <a:extLst>
+                  <a:ext uri="{0D108BD9-81ED-4DB2-BD59-A6C34878D82A}">
+                    <a16:rowId xmlns:a16="http://schemas.microsoft.com/office/drawing/2014/main" val="10013"/>
+                  </a:ext>
+                </a:extLst>
               </a:tr>
               <a:tr h="233172">
                 <a:tc>
@@ -22983,7 +22878,7 @@
                     <a:bodyPr/>
                     <a:lstStyle/>
                     <a:p>
-                      <a:pPr algn="l" indent="0" marL="0">
+                      <a:pPr marL="0" indent="0" algn="l">
                         <a:buNone/>
                       </a:pPr>
                       <a:r>
@@ -23048,7 +22943,7 @@
                     <a:bodyPr/>
                     <a:lstStyle/>
                     <a:p>
-                      <a:pPr algn="r" indent="0" marL="0">
+                      <a:pPr marL="0" indent="0" algn="r">
                         <a:buNone/>
                       </a:pPr>
                       <a:r>
@@ -23113,7 +23008,7 @@
                     <a:bodyPr/>
                     <a:lstStyle/>
                     <a:p>
-                      <a:pPr algn="r" indent="0" marL="0">
+                      <a:pPr marL="0" indent="0" algn="r">
                         <a:buNone/>
                       </a:pPr>
                       <a:r>
@@ -23178,7 +23073,7 @@
                     <a:bodyPr/>
                     <a:lstStyle/>
                     <a:p>
-                      <a:pPr algn="r" indent="0" marL="0">
+                      <a:pPr marL="0" indent="0" algn="r">
                         <a:buNone/>
                       </a:pPr>
                       <a:r>
@@ -23238,6 +23133,11 @@
                     </a:lnB>
                   </a:tcPr>
                 </a:tc>
+                <a:extLst>
+                  <a:ext uri="{0D108BD9-81ED-4DB2-BD59-A6C34878D82A}">
+                    <a16:rowId xmlns:a16="http://schemas.microsoft.com/office/drawing/2014/main" val="10014"/>
+                  </a:ext>
+                </a:extLst>
               </a:tr>
               <a:tr h="233172">
                 <a:tc>
@@ -23245,7 +23145,7 @@
                     <a:bodyPr/>
                     <a:lstStyle/>
                     <a:p>
-                      <a:pPr algn="l" indent="0" marL="0">
+                      <a:pPr marL="0" indent="0" algn="l">
                         <a:buNone/>
                       </a:pPr>
                       <a:r>
@@ -23310,7 +23210,7 @@
                     <a:bodyPr/>
                     <a:lstStyle/>
                     <a:p>
-                      <a:pPr algn="r" indent="0" marL="0">
+                      <a:pPr marL="0" indent="0" algn="r">
                         <a:buNone/>
                       </a:pPr>
                       <a:r>
@@ -23375,7 +23275,7 @@
                     <a:bodyPr/>
                     <a:lstStyle/>
                     <a:p>
-                      <a:pPr algn="r" indent="0" marL="0">
+                      <a:pPr marL="0" indent="0" algn="r">
                         <a:buNone/>
                       </a:pPr>
                       <a:r>
@@ -23440,7 +23340,7 @@
                     <a:bodyPr/>
                     <a:lstStyle/>
                     <a:p>
-                      <a:pPr algn="r" indent="0" marL="0">
+                      <a:pPr marL="0" indent="0" algn="r">
                         <a:buNone/>
                       </a:pPr>
                       <a:r>
@@ -23500,6 +23400,11 @@
                     </a:lnB>
                   </a:tcPr>
                 </a:tc>
+                <a:extLst>
+                  <a:ext uri="{0D108BD9-81ED-4DB2-BD59-A6C34878D82A}">
+                    <a16:rowId xmlns:a16="http://schemas.microsoft.com/office/drawing/2014/main" val="10015"/>
+                  </a:ext>
+                </a:extLst>
               </a:tr>
               <a:tr h="233172">
                 <a:tc>
@@ -23507,7 +23412,7 @@
                     <a:bodyPr/>
                     <a:lstStyle/>
                     <a:p>
-                      <a:pPr algn="l" indent="0" marL="0">
+                      <a:pPr marL="0" indent="0" algn="l">
                         <a:buNone/>
                       </a:pPr>
                       <a:r>
@@ -23572,7 +23477,7 @@
                     <a:bodyPr/>
                     <a:lstStyle/>
                     <a:p>
-                      <a:pPr algn="r" indent="0" marL="0">
+                      <a:pPr marL="0" indent="0" algn="r">
                         <a:buNone/>
                       </a:pPr>
                       <a:r>
@@ -23637,7 +23542,7 @@
                     <a:bodyPr/>
                     <a:lstStyle/>
                     <a:p>
-                      <a:pPr algn="r" indent="0" marL="0">
+                      <a:pPr marL="0" indent="0" algn="r">
                         <a:buNone/>
                       </a:pPr>
                       <a:r>
@@ -23702,7 +23607,7 @@
                     <a:bodyPr/>
                     <a:lstStyle/>
                     <a:p>
-                      <a:pPr algn="r" indent="0" marL="0">
+                      <a:pPr marL="0" indent="0" algn="r">
                         <a:buNone/>
                       </a:pPr>
                       <a:r>
@@ -23762,6 +23667,11 @@
                     </a:lnB>
                   </a:tcPr>
                 </a:tc>
+                <a:extLst>
+                  <a:ext uri="{0D108BD9-81ED-4DB2-BD59-A6C34878D82A}">
+                    <a16:rowId xmlns:a16="http://schemas.microsoft.com/office/drawing/2014/main" val="10016"/>
+                  </a:ext>
+                </a:extLst>
               </a:tr>
               <a:tr h="233172">
                 <a:tc>
@@ -23769,7 +23679,7 @@
                     <a:bodyPr/>
                     <a:lstStyle/>
                     <a:p>
-                      <a:pPr algn="l" indent="0" marL="0">
+                      <a:pPr marL="0" indent="0" algn="l">
                         <a:buNone/>
                       </a:pPr>
                       <a:r>
@@ -23834,7 +23744,7 @@
                     <a:bodyPr/>
                     <a:lstStyle/>
                     <a:p>
-                      <a:pPr algn="r" indent="0" marL="0">
+                      <a:pPr marL="0" indent="0" algn="r">
                         <a:buNone/>
                       </a:pPr>
                       <a:r>
@@ -23899,7 +23809,7 @@
                     <a:bodyPr/>
                     <a:lstStyle/>
                     <a:p>
-                      <a:pPr algn="r" indent="0" marL="0">
+                      <a:pPr marL="0" indent="0" algn="r">
                         <a:buNone/>
                       </a:pPr>
                       <a:r>
@@ -23964,7 +23874,7 @@
                     <a:bodyPr/>
                     <a:lstStyle/>
                     <a:p>
-                      <a:pPr algn="r" indent="0" marL="0">
+                      <a:pPr marL="0" indent="0" algn="r">
                         <a:buNone/>
                       </a:pPr>
                       <a:r>
@@ -24024,6 +23934,11 @@
                     </a:lnB>
                   </a:tcPr>
                 </a:tc>
+                <a:extLst>
+                  <a:ext uri="{0D108BD9-81ED-4DB2-BD59-A6C34878D82A}">
+                    <a16:rowId xmlns:a16="http://schemas.microsoft.com/office/drawing/2014/main" val="10017"/>
+                  </a:ext>
+                </a:extLst>
               </a:tr>
             </a:tbl>
           </a:graphicData>
@@ -24045,17 +23960,41 @@
         </p:nvGraphicFramePr>
         <p:xfrm>
           <a:off x="6217920" y="1874520"/>
-          <a:ext cx="5394960" cy="914400"/>
+          <a:ext cx="5394960" cy="2798064"/>
         </p:xfrm>
         <a:graphic>
           <a:graphicData uri="http://schemas.openxmlformats.org/drawingml/2006/table">
             <a:tbl>
               <a:tblPr/>
               <a:tblGrid>
-                <a:gridCol w="2377440"/>
-                <a:gridCol w="777240"/>
-                <a:gridCol w="914400"/>
-                <a:gridCol w="1325880"/>
+                <a:gridCol w="2377440">
+                  <a:extLst>
+                    <a:ext uri="{9D8B030D-6E8A-4147-A177-3AD203B41FA5}">
+                      <a16:colId xmlns:a16="http://schemas.microsoft.com/office/drawing/2014/main" val="20000"/>
+                    </a:ext>
+                  </a:extLst>
+                </a:gridCol>
+                <a:gridCol w="777240">
+                  <a:extLst>
+                    <a:ext uri="{9D8B030D-6E8A-4147-A177-3AD203B41FA5}">
+                      <a16:colId xmlns:a16="http://schemas.microsoft.com/office/drawing/2014/main" val="20001"/>
+                    </a:ext>
+                  </a:extLst>
+                </a:gridCol>
+                <a:gridCol w="914400">
+                  <a:extLst>
+                    <a:ext uri="{9D8B030D-6E8A-4147-A177-3AD203B41FA5}">
+                      <a16:colId xmlns:a16="http://schemas.microsoft.com/office/drawing/2014/main" val="20002"/>
+                    </a:ext>
+                  </a:extLst>
+                </a:gridCol>
+                <a:gridCol w="1325880">
+                  <a:extLst>
+                    <a:ext uri="{9D8B030D-6E8A-4147-A177-3AD203B41FA5}">
+                      <a16:colId xmlns:a16="http://schemas.microsoft.com/office/drawing/2014/main" val="20003"/>
+                    </a:ext>
+                  </a:extLst>
+                </a:gridCol>
               </a:tblGrid>
               <a:tr h="233172">
                 <a:tc>
@@ -24063,7 +24002,7 @@
                     <a:bodyPr/>
                     <a:lstStyle/>
                     <a:p>
-                      <a:pPr algn="l" indent="0" marL="0">
+                      <a:pPr marL="0" indent="0" algn="l">
                         <a:buNone/>
                       </a:pPr>
                       <a:r>
@@ -24131,7 +24070,7 @@
                     <a:bodyPr/>
                     <a:lstStyle/>
                     <a:p>
-                      <a:pPr algn="r" indent="0" marL="0">
+                      <a:pPr marL="0" indent="0" algn="r">
                         <a:buNone/>
                       </a:pPr>
                       <a:r>
@@ -24199,7 +24138,7 @@
                     <a:bodyPr/>
                     <a:lstStyle/>
                     <a:p>
-                      <a:pPr algn="r" indent="0" marL="0">
+                      <a:pPr marL="0" indent="0" algn="r">
                         <a:buNone/>
                       </a:pPr>
                       <a:r>
@@ -24267,7 +24206,7 @@
                     <a:bodyPr/>
                     <a:lstStyle/>
                     <a:p>
-                      <a:pPr algn="r" indent="0" marL="0">
+                      <a:pPr marL="0" indent="0" algn="r">
                         <a:buNone/>
                       </a:pPr>
                       <a:r>
@@ -24330,6 +24269,11 @@
                     </a:solidFill>
                   </a:tcPr>
                 </a:tc>
+                <a:extLst>
+                  <a:ext uri="{0D108BD9-81ED-4DB2-BD59-A6C34878D82A}">
+                    <a16:rowId xmlns:a16="http://schemas.microsoft.com/office/drawing/2014/main" val="10000"/>
+                  </a:ext>
+                </a:extLst>
               </a:tr>
               <a:tr h="233172">
                 <a:tc gridSpan="4">
@@ -24337,11 +24281,11 @@
                     <a:bodyPr/>
                     <a:lstStyle/>
                     <a:p>
-                      <a:pPr algn="l" indent="0" marL="0">
+                      <a:pPr marL="0" indent="0" algn="l">
                         <a:buNone/>
                       </a:pPr>
                       <a:r>
-                        <a:rPr lang="en-US" sz="850" b="1" spc="100" kern="0" dirty="0">
+                        <a:rPr lang="en-US" sz="850" b="1" kern="0" spc="100" dirty="0">
                           <a:solidFill>
                             <a:srgbClr val="CDD6FF"/>
                           </a:solidFill>
@@ -24401,14 +24345,40 @@
                   </a:tcPr>
                 </a:tc>
                 <a:tc hMerge="1">
+                  <a:txBody>
+                    <a:bodyPr/>
+                    <a:lstStyle/>
+                    <a:p>
+                      <a:endParaRPr lang="en-US"/>
+                    </a:p>
+                  </a:txBody>
                   <a:tcPr/>
                 </a:tc>
                 <a:tc hMerge="1">
+                  <a:txBody>
+                    <a:bodyPr/>
+                    <a:lstStyle/>
+                    <a:p>
+                      <a:endParaRPr lang="en-US"/>
+                    </a:p>
+                  </a:txBody>
                   <a:tcPr/>
                 </a:tc>
                 <a:tc hMerge="1">
+                  <a:txBody>
+                    <a:bodyPr/>
+                    <a:lstStyle/>
+                    <a:p>
+                      <a:endParaRPr lang="en-US"/>
+                    </a:p>
+                  </a:txBody>
                   <a:tcPr/>
                 </a:tc>
+                <a:extLst>
+                  <a:ext uri="{0D108BD9-81ED-4DB2-BD59-A6C34878D82A}">
+                    <a16:rowId xmlns:a16="http://schemas.microsoft.com/office/drawing/2014/main" val="10001"/>
+                  </a:ext>
+                </a:extLst>
               </a:tr>
               <a:tr h="233172">
                 <a:tc>
@@ -24416,7 +24386,7 @@
                     <a:bodyPr/>
                     <a:lstStyle/>
                     <a:p>
-                      <a:pPr algn="l" indent="0" marL="0">
+                      <a:pPr marL="0" indent="0" algn="l">
                         <a:buNone/>
                       </a:pPr>
                       <a:r>
@@ -24481,7 +24451,7 @@
                     <a:bodyPr/>
                     <a:lstStyle/>
                     <a:p>
-                      <a:pPr algn="r" indent="0" marL="0">
+                      <a:pPr marL="0" indent="0" algn="r">
                         <a:buNone/>
                       </a:pPr>
                       <a:r>
@@ -24546,7 +24516,7 @@
                     <a:bodyPr/>
                     <a:lstStyle/>
                     <a:p>
-                      <a:pPr algn="r" indent="0" marL="0">
+                      <a:pPr marL="0" indent="0" algn="r">
                         <a:buNone/>
                       </a:pPr>
                       <a:r>
@@ -24611,7 +24581,7 @@
                     <a:bodyPr/>
                     <a:lstStyle/>
                     <a:p>
-                      <a:pPr algn="r" indent="0" marL="0">
+                      <a:pPr marL="0" indent="0" algn="r">
                         <a:buNone/>
                       </a:pPr>
                       <a:r>
@@ -24671,6 +24641,11 @@
                     </a:lnB>
                   </a:tcPr>
                 </a:tc>
+                <a:extLst>
+                  <a:ext uri="{0D108BD9-81ED-4DB2-BD59-A6C34878D82A}">
+                    <a16:rowId xmlns:a16="http://schemas.microsoft.com/office/drawing/2014/main" val="10002"/>
+                  </a:ext>
+                </a:extLst>
               </a:tr>
               <a:tr h="233172">
                 <a:tc>
@@ -24678,7 +24653,7 @@
                     <a:bodyPr/>
                     <a:lstStyle/>
                     <a:p>
-                      <a:pPr algn="l" indent="0" marL="0">
+                      <a:pPr marL="0" indent="0" algn="l">
                         <a:buNone/>
                       </a:pPr>
                       <a:r>
@@ -24743,7 +24718,7 @@
                     <a:bodyPr/>
                     <a:lstStyle/>
                     <a:p>
-                      <a:pPr algn="r" indent="0" marL="0">
+                      <a:pPr marL="0" indent="0" algn="r">
                         <a:buNone/>
                       </a:pPr>
                       <a:r>
@@ -24808,7 +24783,7 @@
                     <a:bodyPr/>
                     <a:lstStyle/>
                     <a:p>
-                      <a:pPr algn="r" indent="0" marL="0">
+                      <a:pPr marL="0" indent="0" algn="r">
                         <a:buNone/>
                       </a:pPr>
                       <a:r>
@@ -24873,7 +24848,7 @@
                     <a:bodyPr/>
                     <a:lstStyle/>
                     <a:p>
-                      <a:pPr algn="r" indent="0" marL="0">
+                      <a:pPr marL="0" indent="0" algn="r">
                         <a:buNone/>
                       </a:pPr>
                       <a:r>
@@ -24933,6 +24908,11 @@
                     </a:lnB>
                   </a:tcPr>
                 </a:tc>
+                <a:extLst>
+                  <a:ext uri="{0D108BD9-81ED-4DB2-BD59-A6C34878D82A}">
+                    <a16:rowId xmlns:a16="http://schemas.microsoft.com/office/drawing/2014/main" val="10003"/>
+                  </a:ext>
+                </a:extLst>
               </a:tr>
               <a:tr h="233172">
                 <a:tc>
@@ -24940,7 +24920,7 @@
                     <a:bodyPr/>
                     <a:lstStyle/>
                     <a:p>
-                      <a:pPr algn="l" indent="0" marL="0">
+                      <a:pPr marL="0" indent="0" algn="l">
                         <a:buNone/>
                       </a:pPr>
                       <a:r>
@@ -25005,7 +24985,7 @@
                     <a:bodyPr/>
                     <a:lstStyle/>
                     <a:p>
-                      <a:pPr algn="r" indent="0" marL="0">
+                      <a:pPr marL="0" indent="0" algn="r">
                         <a:buNone/>
                       </a:pPr>
                       <a:r>
@@ -25070,7 +25050,7 @@
                     <a:bodyPr/>
                     <a:lstStyle/>
                     <a:p>
-                      <a:pPr algn="r" indent="0" marL="0">
+                      <a:pPr marL="0" indent="0" algn="r">
                         <a:buNone/>
                       </a:pPr>
                       <a:r>
@@ -25135,7 +25115,7 @@
                     <a:bodyPr/>
                     <a:lstStyle/>
                     <a:p>
-                      <a:pPr algn="r" indent="0" marL="0">
+                      <a:pPr marL="0" indent="0" algn="r">
                         <a:buNone/>
                       </a:pPr>
                       <a:r>
@@ -25195,6 +25175,11 @@
                     </a:lnB>
                   </a:tcPr>
                 </a:tc>
+                <a:extLst>
+                  <a:ext uri="{0D108BD9-81ED-4DB2-BD59-A6C34878D82A}">
+                    <a16:rowId xmlns:a16="http://schemas.microsoft.com/office/drawing/2014/main" val="10004"/>
+                  </a:ext>
+                </a:extLst>
               </a:tr>
               <a:tr h="233172">
                 <a:tc>
@@ -25202,7 +25187,7 @@
                     <a:bodyPr/>
                     <a:lstStyle/>
                     <a:p>
-                      <a:pPr algn="l" indent="0" marL="0">
+                      <a:pPr marL="0" indent="0" algn="l">
                         <a:buNone/>
                       </a:pPr>
                       <a:r>
@@ -25267,7 +25252,7 @@
                     <a:bodyPr/>
                     <a:lstStyle/>
                     <a:p>
-                      <a:pPr algn="r" indent="0" marL="0">
+                      <a:pPr marL="0" indent="0" algn="r">
                         <a:buNone/>
                       </a:pPr>
                       <a:r>
@@ -25332,7 +25317,7 @@
                     <a:bodyPr/>
                     <a:lstStyle/>
                     <a:p>
-                      <a:pPr algn="r" indent="0" marL="0">
+                      <a:pPr marL="0" indent="0" algn="r">
                         <a:buNone/>
                       </a:pPr>
                       <a:r>
@@ -25397,7 +25382,7 @@
                     <a:bodyPr/>
                     <a:lstStyle/>
                     <a:p>
-                      <a:pPr algn="r" indent="0" marL="0">
+                      <a:pPr marL="0" indent="0" algn="r">
                         <a:buNone/>
                       </a:pPr>
                       <a:r>
@@ -25457,6 +25442,11 @@
                     </a:lnB>
                   </a:tcPr>
                 </a:tc>
+                <a:extLst>
+                  <a:ext uri="{0D108BD9-81ED-4DB2-BD59-A6C34878D82A}">
+                    <a16:rowId xmlns:a16="http://schemas.microsoft.com/office/drawing/2014/main" val="10005"/>
+                  </a:ext>
+                </a:extLst>
               </a:tr>
               <a:tr h="233172">
                 <a:tc gridSpan="4">
@@ -25464,11 +25454,11 @@
                     <a:bodyPr/>
                     <a:lstStyle/>
                     <a:p>
-                      <a:pPr algn="l" indent="0" marL="0">
+                      <a:pPr marL="0" indent="0" algn="l">
                         <a:buNone/>
                       </a:pPr>
                       <a:r>
-                        <a:rPr lang="en-US" sz="850" b="1" spc="100" kern="0" dirty="0">
+                        <a:rPr lang="en-US" sz="850" b="1" kern="0" spc="100" dirty="0">
                           <a:solidFill>
                             <a:srgbClr val="CDD6FF"/>
                           </a:solidFill>
@@ -25528,14 +25518,40 @@
                   </a:tcPr>
                 </a:tc>
                 <a:tc hMerge="1">
+                  <a:txBody>
+                    <a:bodyPr/>
+                    <a:lstStyle/>
+                    <a:p>
+                      <a:endParaRPr lang="en-US"/>
+                    </a:p>
+                  </a:txBody>
                   <a:tcPr/>
                 </a:tc>
                 <a:tc hMerge="1">
+                  <a:txBody>
+                    <a:bodyPr/>
+                    <a:lstStyle/>
+                    <a:p>
+                      <a:endParaRPr lang="en-US"/>
+                    </a:p>
+                  </a:txBody>
                   <a:tcPr/>
                 </a:tc>
                 <a:tc hMerge="1">
+                  <a:txBody>
+                    <a:bodyPr/>
+                    <a:lstStyle/>
+                    <a:p>
+                      <a:endParaRPr lang="en-US"/>
+                    </a:p>
+                  </a:txBody>
                   <a:tcPr/>
                 </a:tc>
+                <a:extLst>
+                  <a:ext uri="{0D108BD9-81ED-4DB2-BD59-A6C34878D82A}">
+                    <a16:rowId xmlns:a16="http://schemas.microsoft.com/office/drawing/2014/main" val="10006"/>
+                  </a:ext>
+                </a:extLst>
               </a:tr>
               <a:tr h="233172">
                 <a:tc>
@@ -25543,7 +25559,7 @@
                     <a:bodyPr/>
                     <a:lstStyle/>
                     <a:p>
-                      <a:pPr algn="l" indent="0" marL="0">
+                      <a:pPr marL="0" indent="0" algn="l">
                         <a:buNone/>
                       </a:pPr>
                       <a:r>
@@ -25608,7 +25624,7 @@
                     <a:bodyPr/>
                     <a:lstStyle/>
                     <a:p>
-                      <a:pPr algn="r" indent="0" marL="0">
+                      <a:pPr marL="0" indent="0" algn="r">
                         <a:buNone/>
                       </a:pPr>
                       <a:r>
@@ -25673,7 +25689,7 @@
                     <a:bodyPr/>
                     <a:lstStyle/>
                     <a:p>
-                      <a:pPr algn="r" indent="0" marL="0">
+                      <a:pPr marL="0" indent="0" algn="r">
                         <a:buNone/>
                       </a:pPr>
                       <a:r>
@@ -25738,7 +25754,7 @@
                     <a:bodyPr/>
                     <a:lstStyle/>
                     <a:p>
-                      <a:pPr algn="r" indent="0" marL="0">
+                      <a:pPr marL="0" indent="0" algn="r">
                         <a:buNone/>
                       </a:pPr>
                       <a:r>
@@ -25798,6 +25814,11 @@
                     </a:lnB>
                   </a:tcPr>
                 </a:tc>
+                <a:extLst>
+                  <a:ext uri="{0D108BD9-81ED-4DB2-BD59-A6C34878D82A}">
+                    <a16:rowId xmlns:a16="http://schemas.microsoft.com/office/drawing/2014/main" val="10007"/>
+                  </a:ext>
+                </a:extLst>
               </a:tr>
               <a:tr h="233172">
                 <a:tc>
@@ -25805,7 +25826,7 @@
                     <a:bodyPr/>
                     <a:lstStyle/>
                     <a:p>
-                      <a:pPr algn="l" indent="0" marL="0">
+                      <a:pPr marL="0" indent="0" algn="l">
                         <a:buNone/>
                       </a:pPr>
                       <a:r>
@@ -25870,7 +25891,7 @@
                     <a:bodyPr/>
                     <a:lstStyle/>
                     <a:p>
-                      <a:pPr algn="r" indent="0" marL="0">
+                      <a:pPr marL="0" indent="0" algn="r">
                         <a:buNone/>
                       </a:pPr>
                       <a:r>
@@ -25935,7 +25956,7 @@
                     <a:bodyPr/>
                     <a:lstStyle/>
                     <a:p>
-                      <a:pPr algn="r" indent="0" marL="0">
+                      <a:pPr marL="0" indent="0" algn="r">
                         <a:buNone/>
                       </a:pPr>
                       <a:r>
@@ -26000,7 +26021,7 @@
                     <a:bodyPr/>
                     <a:lstStyle/>
                     <a:p>
-                      <a:pPr algn="r" indent="0" marL="0">
+                      <a:pPr marL="0" indent="0" algn="r">
                         <a:buNone/>
                       </a:pPr>
                       <a:r>
@@ -26060,6 +26081,11 @@
                     </a:lnB>
                   </a:tcPr>
                 </a:tc>
+                <a:extLst>
+                  <a:ext uri="{0D108BD9-81ED-4DB2-BD59-A6C34878D82A}">
+                    <a16:rowId xmlns:a16="http://schemas.microsoft.com/office/drawing/2014/main" val="10008"/>
+                  </a:ext>
+                </a:extLst>
               </a:tr>
               <a:tr h="233172">
                 <a:tc>
@@ -26067,7 +26093,7 @@
                     <a:bodyPr/>
                     <a:lstStyle/>
                     <a:p>
-                      <a:pPr algn="l" indent="0" marL="0">
+                      <a:pPr marL="0" indent="0" algn="l">
                         <a:buNone/>
                       </a:pPr>
                       <a:r>
@@ -26132,7 +26158,7 @@
                     <a:bodyPr/>
                     <a:lstStyle/>
                     <a:p>
-                      <a:pPr algn="r" indent="0" marL="0">
+                      <a:pPr marL="0" indent="0" algn="r">
                         <a:buNone/>
                       </a:pPr>
                       <a:r>
@@ -26197,7 +26223,7 @@
                     <a:bodyPr/>
                     <a:lstStyle/>
                     <a:p>
-                      <a:pPr algn="r" indent="0" marL="0">
+                      <a:pPr marL="0" indent="0" algn="r">
                         <a:buNone/>
                       </a:pPr>
                       <a:r>
@@ -26262,7 +26288,7 @@
                     <a:bodyPr/>
                     <a:lstStyle/>
                     <a:p>
-                      <a:pPr algn="r" indent="0" marL="0">
+                      <a:pPr marL="0" indent="0" algn="r">
                         <a:buNone/>
                       </a:pPr>
                       <a:r>
@@ -26322,6 +26348,11 @@
                     </a:lnB>
                   </a:tcPr>
                 </a:tc>
+                <a:extLst>
+                  <a:ext uri="{0D108BD9-81ED-4DB2-BD59-A6C34878D82A}">
+                    <a16:rowId xmlns:a16="http://schemas.microsoft.com/office/drawing/2014/main" val="10009"/>
+                  </a:ext>
+                </a:extLst>
               </a:tr>
               <a:tr h="233172">
                 <a:tc>
@@ -26329,7 +26360,7 @@
                     <a:bodyPr/>
                     <a:lstStyle/>
                     <a:p>
-                      <a:pPr algn="l" indent="0" marL="0">
+                      <a:pPr marL="0" indent="0" algn="l">
                         <a:buNone/>
                       </a:pPr>
                       <a:r>
@@ -26394,7 +26425,7 @@
                     <a:bodyPr/>
                     <a:lstStyle/>
                     <a:p>
-                      <a:pPr algn="r" indent="0" marL="0">
+                      <a:pPr marL="0" indent="0" algn="r">
                         <a:buNone/>
                       </a:pPr>
                       <a:r>
@@ -26459,7 +26490,7 @@
                     <a:bodyPr/>
                     <a:lstStyle/>
                     <a:p>
-                      <a:pPr algn="r" indent="0" marL="0">
+                      <a:pPr marL="0" indent="0" algn="r">
                         <a:buNone/>
                       </a:pPr>
                       <a:r>
@@ -26524,7 +26555,7 @@
                     <a:bodyPr/>
                     <a:lstStyle/>
                     <a:p>
-                      <a:pPr algn="r" indent="0" marL="0">
+                      <a:pPr marL="0" indent="0" algn="r">
                         <a:buNone/>
                       </a:pPr>
                       <a:r>
@@ -26584,6 +26615,11 @@
                     </a:lnB>
                   </a:tcPr>
                 </a:tc>
+                <a:extLst>
+                  <a:ext uri="{0D108BD9-81ED-4DB2-BD59-A6C34878D82A}">
+                    <a16:rowId xmlns:a16="http://schemas.microsoft.com/office/drawing/2014/main" val="10010"/>
+                  </a:ext>
+                </a:extLst>
               </a:tr>
               <a:tr h="233172">
                 <a:tc>
@@ -26591,7 +26627,7 @@
                     <a:bodyPr/>
                     <a:lstStyle/>
                     <a:p>
-                      <a:pPr algn="l" indent="0" marL="0">
+                      <a:pPr marL="0" indent="0" algn="l">
                         <a:buNone/>
                       </a:pPr>
                       <a:r>
@@ -26659,7 +26695,7 @@
                     <a:bodyPr/>
                     <a:lstStyle/>
                     <a:p>
-                      <a:pPr algn="r" indent="0" marL="0">
+                      <a:pPr marL="0" indent="0" algn="r">
                         <a:buNone/>
                       </a:pPr>
                       <a:r>
@@ -26727,7 +26763,7 @@
                     <a:bodyPr/>
                     <a:lstStyle/>
                     <a:p>
-                      <a:pPr algn="r" indent="0" marL="0">
+                      <a:pPr marL="0" indent="0" algn="r">
                         <a:buNone/>
                       </a:pPr>
                       <a:r>
@@ -26795,7 +26831,7 @@
                     <a:bodyPr/>
                     <a:lstStyle/>
                     <a:p>
-                      <a:pPr algn="r" indent="0" marL="0">
+                      <a:pPr marL="0" indent="0" algn="r">
                         <a:buNone/>
                       </a:pPr>
                       <a:r>
@@ -26858,6 +26894,11 @@
                     </a:solidFill>
                   </a:tcPr>
                 </a:tc>
+                <a:extLst>
+                  <a:ext uri="{0D108BD9-81ED-4DB2-BD59-A6C34878D82A}">
+                    <a16:rowId xmlns:a16="http://schemas.microsoft.com/office/drawing/2014/main" val="10011"/>
+                  </a:ext>
+                </a:extLst>
               </a:tr>
             </a:tbl>
           </a:graphicData>
@@ -26889,7 +26930,7 @@
             <a:prstDash val="solid"/>
           </a:ln>
           <a:effectLst>
-            <a:outerShdw sx="100000" sy="100000" kx="0" ky="0" algn="bl" rotWithShape="0" blurRad="177800" dist="63500" dir="5400000">
+            <a:outerShdw blurRad="177800" dist="63500" dir="5400000" algn="bl" rotWithShape="0">
               <a:srgbClr val="3E00DB">
                 <a:alpha val="55000"/>
               </a:srgbClr>
@@ -26918,11 +26959,11 @@
           <a:bodyPr wrap="square" lIns="0" tIns="0" rIns="0" bIns="0" rtlCol="0" anchor="ctr"/>
           <a:lstStyle/>
           <a:p>
-            <a:pPr indent="0" marL="0">
-              <a:buNone/>
-            </a:pPr>
-            <a:r>
-              <a:rPr lang="en-US" sz="900" b="1" spc="200" kern="0" dirty="0">
+            <a:pPr marL="0" indent="0">
+              <a:buNone/>
+            </a:pPr>
+            <a:r>
+              <a:rPr lang="en-US" sz="900" b="1" kern="0" spc="200" dirty="0">
                 <a:solidFill>
                   <a:srgbClr val="CDD6FF"/>
                 </a:solidFill>
@@ -26957,7 +26998,7 @@
           <a:bodyPr wrap="square" lIns="0" tIns="0" rIns="0" bIns="0" rtlCol="0" anchor="ctr"/>
           <a:lstStyle/>
           <a:p>
-            <a:pPr indent="0" marL="0">
+            <a:pPr marL="0" indent="0">
               <a:buNone/>
             </a:pPr>
             <a:r>
@@ -26971,9 +27012,6 @@
               </a:rPr>
               <a:t>Phase 1 (clinic): </a:t>
             </a:r>
-            <a:pPr indent="0" marL="0">
-              <a:buNone/>
-            </a:pPr>
             <a:r>
               <a:rPr lang="en-US" sz="1250" b="1" dirty="0">
                 <a:solidFill>
@@ -26985,9 +27023,6 @@
               </a:rPr>
               <a:t>$419,175/mo</a:t>
             </a:r>
-            <a:pPr indent="0" marL="0">
-              <a:buNone/>
-            </a:pPr>
             <a:r>
               <a:rPr lang="en-US" sz="1250" dirty="0">
                 <a:solidFill>
@@ -26999,9 +27034,6 @@
               </a:rPr>
               <a:t>    ·    Phase 2 (surgical): </a:t>
             </a:r>
-            <a:pPr indent="0" marL="0">
-              <a:buNone/>
-            </a:pPr>
             <a:r>
               <a:rPr lang="en-US" sz="1250" b="1" dirty="0">
                 <a:solidFill>
@@ -27038,11 +27070,11 @@
           <a:bodyPr wrap="square" lIns="0" tIns="0" rIns="0" bIns="0" rtlCol="0" anchor="ctr"/>
           <a:lstStyle/>
           <a:p>
-            <a:pPr indent="0" marL="0">
-              <a:buNone/>
-            </a:pPr>
-            <a:r>
-              <a:rPr lang="en-US" sz="850" spc="100" kern="0" dirty="0">
+            <a:pPr marL="0" indent="0">
+              <a:buNone/>
+            </a:pPr>
+            <a:r>
+              <a:rPr lang="en-US" sz="850" kern="0" spc="100" dirty="0">
                 <a:solidFill>
                   <a:srgbClr val="5A5570"/>
                 </a:solidFill>
@@ -27077,7 +27109,7 @@
           <a:bodyPr wrap="square" lIns="0" tIns="0" rIns="0" bIns="0" rtlCol="0" anchor="ctr"/>
           <a:lstStyle/>
           <a:p>
-            <a:pPr algn="r" indent="0" marL="0">
+            <a:pPr marL="0" indent="0" algn="r">
               <a:buNone/>
             </a:pPr>
             <a:r>
@@ -27097,7 +27129,7 @@
       </p:sp>
       <p:sp>
         <p:nvSpPr>
-          <p:cNvPr id="15" name="Text 11"/>
+          <p:cNvPr id="9" name="Text 11"/>
           <p:cNvSpPr/>
           <p:nvPr/>
         </p:nvSpPr>
@@ -27116,7 +27148,7 @@
           <a:bodyPr wrap="square" lIns="0" tIns="0" rIns="0" bIns="0" rtlCol="0" anchor="ctr"/>
           <a:lstStyle/>
           <a:p>
-            <a:pPr algn="r" indent="0" marL="0">
+            <a:pPr marL="0" indent="0" algn="r">
               <a:buNone/>
             </a:pPr>
             <a:r>
@@ -27150,6 +27182,7 @@
         <a:solidFill>
           <a:srgbClr val="0A0A0F"/>
         </a:solidFill>
+        <a:effectLst/>
       </p:bgPr>
     </p:bg>
     <p:spTree>
@@ -27251,11 +27284,11 @@
           <a:bodyPr wrap="square" lIns="0" tIns="0" rIns="0" bIns="0" rtlCol="0" anchor="ctr"/>
           <a:lstStyle/>
           <a:p>
-            <a:pPr algn="l" indent="0" marL="0">
-              <a:buNone/>
-            </a:pPr>
-            <a:r>
-              <a:rPr lang="en-US" sz="1100" b="1" spc="300" kern="0" dirty="0">
+            <a:pPr marL="0" indent="0" algn="l">
+              <a:buNone/>
+            </a:pPr>
+            <a:r>
+              <a:rPr lang="en-US" sz="1100" b="1" kern="0" spc="300" dirty="0">
                 <a:solidFill>
                   <a:srgbClr val="B6C800"/>
                 </a:solidFill>
@@ -27290,7 +27323,7 @@
           <a:bodyPr wrap="square" lIns="0" tIns="0" rIns="0" bIns="0" rtlCol="0" anchor="t"/>
           <a:lstStyle/>
           <a:p>
-            <a:pPr algn="l" indent="0" marL="0">
+            <a:pPr marL="0" indent="0" algn="l">
               <a:lnSpc>
                 <a:spcPct val="100000"/>
               </a:lnSpc>
@@ -27332,7 +27365,7 @@
           <a:bodyPr wrap="square" lIns="0" tIns="0" rIns="0" bIns="0" rtlCol="0" anchor="ctr"/>
           <a:lstStyle/>
           <a:p>
-            <a:pPr indent="0" marL="0">
+            <a:pPr marL="0" indent="0">
               <a:buNone/>
             </a:pPr>
             <a:r>
@@ -27366,18 +27399,48 @@
         </p:nvGraphicFramePr>
         <p:xfrm>
           <a:off x="548640" y="2148840"/>
-          <a:ext cx="11064240" cy="914400"/>
+          <a:ext cx="11064240" cy="3200400"/>
         </p:xfrm>
         <a:graphic>
           <a:graphicData uri="http://schemas.openxmlformats.org/drawingml/2006/table">
             <a:tbl>
               <a:tblPr/>
               <a:tblGrid>
-                <a:gridCol w="2743200"/>
-                <a:gridCol w="2080260"/>
-                <a:gridCol w="2080260"/>
-                <a:gridCol w="2080260"/>
-                <a:gridCol w="2080260"/>
+                <a:gridCol w="2743200">
+                  <a:extLst>
+                    <a:ext uri="{9D8B030D-6E8A-4147-A177-3AD203B41FA5}">
+                      <a16:colId xmlns:a16="http://schemas.microsoft.com/office/drawing/2014/main" val="20000"/>
+                    </a:ext>
+                  </a:extLst>
+                </a:gridCol>
+                <a:gridCol w="2080260">
+                  <a:extLst>
+                    <a:ext uri="{9D8B030D-6E8A-4147-A177-3AD203B41FA5}">
+                      <a16:colId xmlns:a16="http://schemas.microsoft.com/office/drawing/2014/main" val="20001"/>
+                    </a:ext>
+                  </a:extLst>
+                </a:gridCol>
+                <a:gridCol w="2080260">
+                  <a:extLst>
+                    <a:ext uri="{9D8B030D-6E8A-4147-A177-3AD203B41FA5}">
+                      <a16:colId xmlns:a16="http://schemas.microsoft.com/office/drawing/2014/main" val="20002"/>
+                    </a:ext>
+                  </a:extLst>
+                </a:gridCol>
+                <a:gridCol w="2080260">
+                  <a:extLst>
+                    <a:ext uri="{9D8B030D-6E8A-4147-A177-3AD203B41FA5}">
+                      <a16:colId xmlns:a16="http://schemas.microsoft.com/office/drawing/2014/main" val="20003"/>
+                    </a:ext>
+                  </a:extLst>
+                </a:gridCol>
+                <a:gridCol w="2080260">
+                  <a:extLst>
+                    <a:ext uri="{9D8B030D-6E8A-4147-A177-3AD203B41FA5}">
+                      <a16:colId xmlns:a16="http://schemas.microsoft.com/office/drawing/2014/main" val="20004"/>
+                    </a:ext>
+                  </a:extLst>
+                </a:gridCol>
               </a:tblGrid>
               <a:tr h="457200">
                 <a:tc>
@@ -27385,7 +27448,7 @@
                     <a:bodyPr/>
                     <a:lstStyle/>
                     <a:p>
-                      <a:pPr algn="l" indent="0" marL="0">
+                      <a:pPr marL="0" indent="0" algn="l">
                         <a:buNone/>
                       </a:pPr>
                       <a:r>
@@ -27453,7 +27516,7 @@
                     <a:bodyPr/>
                     <a:lstStyle/>
                     <a:p>
-                      <a:pPr algn="r" indent="0" marL="0">
+                      <a:pPr marL="0" indent="0" algn="r">
                         <a:buNone/>
                       </a:pPr>
                       <a:r>
@@ -27521,7 +27584,7 @@
                     <a:bodyPr/>
                     <a:lstStyle/>
                     <a:p>
-                      <a:pPr algn="r" indent="0" marL="0">
+                      <a:pPr marL="0" indent="0" algn="r">
                         <a:buNone/>
                       </a:pPr>
                       <a:r>
@@ -27589,7 +27652,7 @@
                     <a:bodyPr/>
                     <a:lstStyle/>
                     <a:p>
-                      <a:pPr algn="r" indent="0" marL="0">
+                      <a:pPr marL="0" indent="0" algn="r">
                         <a:buNone/>
                       </a:pPr>
                       <a:r>
@@ -27657,7 +27720,7 @@
                     <a:bodyPr/>
                     <a:lstStyle/>
                     <a:p>
-                      <a:pPr algn="r" indent="0" marL="0">
+                      <a:pPr marL="0" indent="0" algn="r">
                         <a:buNone/>
                       </a:pPr>
                       <a:r>
@@ -27720,6 +27783,11 @@
                     </a:solidFill>
                   </a:tcPr>
                 </a:tc>
+                <a:extLst>
+                  <a:ext uri="{0D108BD9-81ED-4DB2-BD59-A6C34878D82A}">
+                    <a16:rowId xmlns:a16="http://schemas.microsoft.com/office/drawing/2014/main" val="10000"/>
+                  </a:ext>
+                </a:extLst>
               </a:tr>
               <a:tr h="457200">
                 <a:tc>
@@ -27727,7 +27795,7 @@
                     <a:bodyPr/>
                     <a:lstStyle/>
                     <a:p>
-                      <a:pPr algn="l" indent="0" marL="0">
+                      <a:pPr marL="0" indent="0" algn="l">
                         <a:buNone/>
                       </a:pPr>
                       <a:r>
@@ -27795,7 +27863,7 @@
                     <a:bodyPr/>
                     <a:lstStyle/>
                     <a:p>
-                      <a:pPr algn="r" indent="0" marL="0">
+                      <a:pPr marL="0" indent="0" algn="r">
                         <a:buNone/>
                       </a:pPr>
                       <a:r>
@@ -27863,7 +27931,7 @@
                     <a:bodyPr/>
                     <a:lstStyle/>
                     <a:p>
-                      <a:pPr algn="r" indent="0" marL="0">
+                      <a:pPr marL="0" indent="0" algn="r">
                         <a:buNone/>
                       </a:pPr>
                       <a:r>
@@ -27931,7 +27999,7 @@
                     <a:bodyPr/>
                     <a:lstStyle/>
                     <a:p>
-                      <a:pPr algn="r" indent="0" marL="0">
+                      <a:pPr marL="0" indent="0" algn="r">
                         <a:buNone/>
                       </a:pPr>
                       <a:r>
@@ -27999,7 +28067,7 @@
                     <a:bodyPr/>
                     <a:lstStyle/>
                     <a:p>
-                      <a:pPr algn="r" indent="0" marL="0">
+                      <a:pPr marL="0" indent="0" algn="r">
                         <a:buNone/>
                       </a:pPr>
                       <a:r>
@@ -28062,6 +28130,11 @@
                     </a:solidFill>
                   </a:tcPr>
                 </a:tc>
+                <a:extLst>
+                  <a:ext uri="{0D108BD9-81ED-4DB2-BD59-A6C34878D82A}">
+                    <a16:rowId xmlns:a16="http://schemas.microsoft.com/office/drawing/2014/main" val="10001"/>
+                  </a:ext>
+                </a:extLst>
               </a:tr>
               <a:tr h="457200">
                 <a:tc>
@@ -28069,7 +28142,7 @@
                     <a:bodyPr/>
                     <a:lstStyle/>
                     <a:p>
-                      <a:pPr algn="l" indent="0" marL="0">
+                      <a:pPr marL="0" indent="0" algn="l">
                         <a:buNone/>
                       </a:pPr>
                       <a:r>
@@ -28137,7 +28210,7 @@
                     <a:bodyPr/>
                     <a:lstStyle/>
                     <a:p>
-                      <a:pPr algn="r" indent="0" marL="0">
+                      <a:pPr marL="0" indent="0" algn="r">
                         <a:buNone/>
                       </a:pPr>
                       <a:r>
@@ -28205,7 +28278,7 @@
                     <a:bodyPr/>
                     <a:lstStyle/>
                     <a:p>
-                      <a:pPr algn="r" indent="0" marL="0">
+                      <a:pPr marL="0" indent="0" algn="r">
                         <a:buNone/>
                       </a:pPr>
                       <a:r>
@@ -28273,7 +28346,7 @@
                     <a:bodyPr/>
                     <a:lstStyle/>
                     <a:p>
-                      <a:pPr algn="r" indent="0" marL="0">
+                      <a:pPr marL="0" indent="0" algn="r">
                         <a:buNone/>
                       </a:pPr>
                       <a:r>
@@ -28341,7 +28414,7 @@
                     <a:bodyPr/>
                     <a:lstStyle/>
                     <a:p>
-                      <a:pPr algn="r" indent="0" marL="0">
+                      <a:pPr marL="0" indent="0" algn="r">
                         <a:buNone/>
                       </a:pPr>
                       <a:r>
@@ -28404,6 +28477,11 @@
                     </a:solidFill>
                   </a:tcPr>
                 </a:tc>
+                <a:extLst>
+                  <a:ext uri="{0D108BD9-81ED-4DB2-BD59-A6C34878D82A}">
+                    <a16:rowId xmlns:a16="http://schemas.microsoft.com/office/drawing/2014/main" val="10002"/>
+                  </a:ext>
+                </a:extLst>
               </a:tr>
               <a:tr h="457200">
                 <a:tc>
@@ -28411,7 +28489,7 @@
                     <a:bodyPr/>
                     <a:lstStyle/>
                     <a:p>
-                      <a:pPr algn="l" indent="0" marL="0">
+                      <a:pPr marL="0" indent="0" algn="l">
                         <a:buNone/>
                       </a:pPr>
                       <a:r>
@@ -28479,7 +28557,7 @@
                     <a:bodyPr/>
                     <a:lstStyle/>
                     <a:p>
-                      <a:pPr algn="r" indent="0" marL="0">
+                      <a:pPr marL="0" indent="0" algn="r">
                         <a:buNone/>
                       </a:pPr>
                       <a:r>
@@ -28547,7 +28625,7 @@
                     <a:bodyPr/>
                     <a:lstStyle/>
                     <a:p>
-                      <a:pPr algn="r" indent="0" marL="0">
+                      <a:pPr marL="0" indent="0" algn="r">
                         <a:buNone/>
                       </a:pPr>
                       <a:r>
@@ -28615,7 +28693,7 @@
                     <a:bodyPr/>
                     <a:lstStyle/>
                     <a:p>
-                      <a:pPr algn="r" indent="0" marL="0">
+                      <a:pPr marL="0" indent="0" algn="r">
                         <a:buNone/>
                       </a:pPr>
                       <a:r>
@@ -28683,7 +28761,7 @@
                     <a:bodyPr/>
                     <a:lstStyle/>
                     <a:p>
-                      <a:pPr algn="r" indent="0" marL="0">
+                      <a:pPr marL="0" indent="0" algn="r">
                         <a:buNone/>
                       </a:pPr>
                       <a:r>
@@ -28746,6 +28824,11 @@
                     </a:solidFill>
                   </a:tcPr>
                 </a:tc>
+                <a:extLst>
+                  <a:ext uri="{0D108BD9-81ED-4DB2-BD59-A6C34878D82A}">
+                    <a16:rowId xmlns:a16="http://schemas.microsoft.com/office/drawing/2014/main" val="10003"/>
+                  </a:ext>
+                </a:extLst>
               </a:tr>
               <a:tr h="457200">
                 <a:tc>
@@ -28753,7 +28836,7 @@
                     <a:bodyPr/>
                     <a:lstStyle/>
                     <a:p>
-                      <a:pPr algn="l" indent="0" marL="0">
+                      <a:pPr marL="0" indent="0" algn="l">
                         <a:buNone/>
                       </a:pPr>
                       <a:r>
@@ -28821,7 +28904,7 @@
                     <a:bodyPr/>
                     <a:lstStyle/>
                     <a:p>
-                      <a:pPr algn="r" indent="0" marL="0">
+                      <a:pPr marL="0" indent="0" algn="r">
                         <a:buNone/>
                       </a:pPr>
                       <a:r>
@@ -28889,7 +28972,7 @@
                     <a:bodyPr/>
                     <a:lstStyle/>
                     <a:p>
-                      <a:pPr algn="r" indent="0" marL="0">
+                      <a:pPr marL="0" indent="0" algn="r">
                         <a:buNone/>
                       </a:pPr>
                       <a:r>
@@ -28957,7 +29040,7 @@
                     <a:bodyPr/>
                     <a:lstStyle/>
                     <a:p>
-                      <a:pPr algn="r" indent="0" marL="0">
+                      <a:pPr marL="0" indent="0" algn="r">
                         <a:buNone/>
                       </a:pPr>
                       <a:r>
@@ -29025,7 +29108,7 @@
                     <a:bodyPr/>
                     <a:lstStyle/>
                     <a:p>
-                      <a:pPr algn="r" indent="0" marL="0">
+                      <a:pPr marL="0" indent="0" algn="r">
                         <a:buNone/>
                       </a:pPr>
                       <a:r>
@@ -29088,6 +29171,11 @@
                     </a:solidFill>
                   </a:tcPr>
                 </a:tc>
+                <a:extLst>
+                  <a:ext uri="{0D108BD9-81ED-4DB2-BD59-A6C34878D82A}">
+                    <a16:rowId xmlns:a16="http://schemas.microsoft.com/office/drawing/2014/main" val="10004"/>
+                  </a:ext>
+                </a:extLst>
               </a:tr>
               <a:tr h="457200">
                 <a:tc>
@@ -29095,7 +29183,7 @@
                     <a:bodyPr/>
                     <a:lstStyle/>
                     <a:p>
-                      <a:pPr algn="l" indent="0" marL="0">
+                      <a:pPr marL="0" indent="0" algn="l">
                         <a:buNone/>
                       </a:pPr>
                       <a:r>
@@ -29163,7 +29251,7 @@
                     <a:bodyPr/>
                     <a:lstStyle/>
                     <a:p>
-                      <a:pPr algn="r" indent="0" marL="0">
+                      <a:pPr marL="0" indent="0" algn="r">
                         <a:buNone/>
                       </a:pPr>
                       <a:r>
@@ -29231,7 +29319,7 @@
                     <a:bodyPr/>
                     <a:lstStyle/>
                     <a:p>
-                      <a:pPr algn="r" indent="0" marL="0">
+                      <a:pPr marL="0" indent="0" algn="r">
                         <a:buNone/>
                       </a:pPr>
                       <a:r>
@@ -29299,7 +29387,7 @@
                     <a:bodyPr/>
                     <a:lstStyle/>
                     <a:p>
-                      <a:pPr algn="r" indent="0" marL="0">
+                      <a:pPr marL="0" indent="0" algn="r">
                         <a:buNone/>
                       </a:pPr>
                       <a:r>
@@ -29367,7 +29455,7 @@
                     <a:bodyPr/>
                     <a:lstStyle/>
                     <a:p>
-                      <a:pPr algn="r" indent="0" marL="0">
+                      <a:pPr marL="0" indent="0" algn="r">
                         <a:buNone/>
                       </a:pPr>
                       <a:r>
@@ -29430,6 +29518,11 @@
                     </a:solidFill>
                   </a:tcPr>
                 </a:tc>
+                <a:extLst>
+                  <a:ext uri="{0D108BD9-81ED-4DB2-BD59-A6C34878D82A}">
+                    <a16:rowId xmlns:a16="http://schemas.microsoft.com/office/drawing/2014/main" val="10005"/>
+                  </a:ext>
+                </a:extLst>
               </a:tr>
               <a:tr h="457200">
                 <a:tc>
@@ -29437,7 +29530,7 @@
                     <a:bodyPr/>
                     <a:lstStyle/>
                     <a:p>
-                      <a:pPr algn="l" indent="0" marL="0">
+                      <a:pPr marL="0" indent="0" algn="l">
                         <a:buNone/>
                       </a:pPr>
                       <a:r>
@@ -29505,7 +29598,7 @@
                     <a:bodyPr/>
                     <a:lstStyle/>
                     <a:p>
-                      <a:pPr algn="r" indent="0" marL="0">
+                      <a:pPr marL="0" indent="0" algn="r">
                         <a:buNone/>
                       </a:pPr>
                       <a:r>
@@ -29573,7 +29666,7 @@
                     <a:bodyPr/>
                     <a:lstStyle/>
                     <a:p>
-                      <a:pPr algn="r" indent="0" marL="0">
+                      <a:pPr marL="0" indent="0" algn="r">
                         <a:buNone/>
                       </a:pPr>
                       <a:r>
@@ -29641,7 +29734,7 @@
                     <a:bodyPr/>
                     <a:lstStyle/>
                     <a:p>
-                      <a:pPr algn="r" indent="0" marL="0">
+                      <a:pPr marL="0" indent="0" algn="r">
                         <a:buNone/>
                       </a:pPr>
                       <a:r>
@@ -29709,7 +29802,7 @@
                     <a:bodyPr/>
                     <a:lstStyle/>
                     <a:p>
-                      <a:pPr algn="r" indent="0" marL="0">
+                      <a:pPr marL="0" indent="0" algn="r">
                         <a:buNone/>
                       </a:pPr>
                       <a:r>
@@ -29772,6 +29865,11 @@
                     </a:solidFill>
                   </a:tcPr>
                 </a:tc>
+                <a:extLst>
+                  <a:ext uri="{0D108BD9-81ED-4DB2-BD59-A6C34878D82A}">
+                    <a16:rowId xmlns:a16="http://schemas.microsoft.com/office/drawing/2014/main" val="10006"/>
+                  </a:ext>
+                </a:extLst>
               </a:tr>
             </a:tbl>
           </a:graphicData>
@@ -29779,7 +29877,7 @@
       </p:graphicFrame>
       <p:sp>
         <p:nvSpPr>
-          <p:cNvPr id="9" name="Text 6"/>
+          <p:cNvPr id="8" name="Text 6"/>
           <p:cNvSpPr/>
           <p:nvPr/>
         </p:nvSpPr>
@@ -29798,11 +29896,11 @@
           <a:bodyPr wrap="square" lIns="0" tIns="0" rIns="0" bIns="0" rtlCol="0" anchor="ctr"/>
           <a:lstStyle/>
           <a:p>
-            <a:pPr indent="0" marL="0">
-              <a:buNone/>
-            </a:pPr>
-            <a:r>
-              <a:rPr lang="en-US" sz="850" spc="100" kern="0" dirty="0">
+            <a:pPr marL="0" indent="0">
+              <a:buNone/>
+            </a:pPr>
+            <a:r>
+              <a:rPr lang="en-US" sz="850" kern="0" spc="100" dirty="0">
                 <a:solidFill>
                   <a:srgbClr val="5A5570"/>
                 </a:solidFill>
@@ -29837,7 +29935,7 @@
           <a:bodyPr wrap="square" lIns="0" tIns="0" rIns="0" bIns="0" rtlCol="0" anchor="ctr"/>
           <a:lstStyle/>
           <a:p>
-            <a:pPr algn="r" indent="0" marL="0">
+            <a:pPr marL="0" indent="0" algn="r">
               <a:buNone/>
             </a:pPr>
             <a:r>
@@ -29876,7 +29974,7 @@
           <a:bodyPr wrap="square" lIns="0" tIns="0" rIns="0" bIns="0" rtlCol="0" anchor="ctr"/>
           <a:lstStyle/>
           <a:p>
-            <a:pPr algn="r" indent="0" marL="0">
+            <a:pPr marL="0" indent="0" algn="r">
               <a:buNone/>
             </a:pPr>
             <a:r>
@@ -29910,6 +30008,7 @@
         <a:solidFill>
           <a:srgbClr val="0A0A0F"/>
         </a:solidFill>
+        <a:effectLst/>
       </p:bgPr>
     </p:bg>
     <p:spTree>
@@ -30011,11 +30110,11 @@
           <a:bodyPr wrap="square" lIns="0" tIns="0" rIns="0" bIns="0" rtlCol="0" anchor="ctr"/>
           <a:lstStyle/>
           <a:p>
-            <a:pPr algn="l" indent="0" marL="0">
-              <a:buNone/>
-            </a:pPr>
-            <a:r>
-              <a:rPr lang="en-US" sz="1100" b="1" spc="300" kern="0" dirty="0">
+            <a:pPr marL="0" indent="0" algn="l">
+              <a:buNone/>
+            </a:pPr>
+            <a:r>
+              <a:rPr lang="en-US" sz="1100" b="1" kern="0" spc="300" dirty="0">
                 <a:solidFill>
                   <a:srgbClr val="B6C800"/>
                 </a:solidFill>
@@ -30050,7 +30149,7 @@
           <a:bodyPr wrap="square" lIns="0" tIns="0" rIns="0" bIns="0" rtlCol="0" anchor="t"/>
           <a:lstStyle/>
           <a:p>
-            <a:pPr algn="l" indent="0" marL="0">
+            <a:pPr marL="0" indent="0" algn="l">
               <a:lnSpc>
                 <a:spcPct val="100000"/>
               </a:lnSpc>
@@ -30073,7 +30172,7 @@
       </p:sp>
       <p:graphicFrame>
         <p:nvGraphicFramePr>
-          <p:cNvPr id="7" name="Chart 0" descr=""/>
+          <p:cNvPr id="7" name="Chart 0"/>
           <p:cNvGraphicFramePr/>
           <p:nvPr/>
         </p:nvGraphicFramePr>
@@ -30081,9 +30180,9 @@
           <a:off x="548640" y="1920240"/>
           <a:ext cx="11064240" cy="3383280"/>
         </p:xfrm>
-        <a:graphic xmlns:a="http://schemas.openxmlformats.org/drawingml/2006/main">
+        <a:graphic>
           <a:graphicData uri="http://schemas.openxmlformats.org/drawingml/2006/chart">
-            <c:chart xmlns:c="http://schemas.openxmlformats.org/drawingml/2006/chart" r:id="rId1"/>
+            <c:chart xmlns:c="http://schemas.openxmlformats.org/drawingml/2006/chart" xmlns:r="http://schemas.openxmlformats.org/officeDocument/2006/relationships" r:id="rId3"/>
           </a:graphicData>
         </a:graphic>
       </p:graphicFrame>
@@ -30108,7 +30207,7 @@
           <a:bodyPr wrap="square" lIns="0" tIns="0" rIns="0" bIns="0" rtlCol="0" anchor="ctr"/>
           <a:lstStyle/>
           <a:p>
-            <a:pPr algn="ctr" indent="0" marL="0">
+            <a:pPr marL="0" indent="0" algn="ctr">
               <a:buNone/>
             </a:pPr>
             <a:r>
@@ -30122,9 +30221,6 @@
               </a:rPr>
               <a:t>Breakeven Month ~14</a:t>
             </a:r>
-            <a:pPr algn="ctr" indent="0" marL="0">
-              <a:buNone/>
-            </a:pPr>
             <a:r>
               <a:rPr lang="en-US" sz="1350" dirty="0">
                 <a:solidFill>
@@ -30161,11 +30257,11 @@
           <a:bodyPr wrap="square" lIns="0" tIns="0" rIns="0" bIns="0" rtlCol="0" anchor="ctr"/>
           <a:lstStyle/>
           <a:p>
-            <a:pPr indent="0" marL="0">
-              <a:buNone/>
-            </a:pPr>
-            <a:r>
-              <a:rPr lang="en-US" sz="850" spc="100" kern="0" dirty="0">
+            <a:pPr marL="0" indent="0">
+              <a:buNone/>
+            </a:pPr>
+            <a:r>
+              <a:rPr lang="en-US" sz="850" kern="0" spc="100" dirty="0">
                 <a:solidFill>
                   <a:srgbClr val="5A5570"/>
                 </a:solidFill>
@@ -30200,7 +30296,7 @@
           <a:bodyPr wrap="square" lIns="0" tIns="0" rIns="0" bIns="0" rtlCol="0" anchor="ctr"/>
           <a:lstStyle/>
           <a:p>
-            <a:pPr algn="r" indent="0" marL="0">
+            <a:pPr marL="0" indent="0" algn="r">
               <a:buNone/>
             </a:pPr>
             <a:r>
@@ -30239,7 +30335,7 @@
           <a:bodyPr wrap="square" lIns="0" tIns="0" rIns="0" bIns="0" rtlCol="0" anchor="ctr"/>
           <a:lstStyle/>
           <a:p>
-            <a:pPr algn="r" indent="0" marL="0">
+            <a:pPr marL="0" indent="0" algn="r">
               <a:buNone/>
             </a:pPr>
             <a:r>
@@ -30558,4 +30654,319 @@
     </a:ext>
   </a:extLst>
 </a:theme>
+</file>
+
+<file path=ppt/theme/theme2.xml><?xml version="1.0" encoding="utf-8"?>
+<a:theme xmlns:a="http://schemas.openxmlformats.org/drawingml/2006/main" name="Office Theme">
+  <a:themeElements>
+    <a:clrScheme name="Office">
+      <a:dk1>
+        <a:sysClr val="windowText" lastClr="000000"/>
+      </a:dk1>
+      <a:lt1>
+        <a:sysClr val="window" lastClr="FFFFFF"/>
+      </a:lt1>
+      <a:dk2>
+        <a:srgbClr val="0E2841"/>
+      </a:dk2>
+      <a:lt2>
+        <a:srgbClr val="E8E8E8"/>
+      </a:lt2>
+      <a:accent1>
+        <a:srgbClr val="156082"/>
+      </a:accent1>
+      <a:accent2>
+        <a:srgbClr val="E97132"/>
+      </a:accent2>
+      <a:accent3>
+        <a:srgbClr val="196B24"/>
+      </a:accent3>
+      <a:accent4>
+        <a:srgbClr val="0F9ED5"/>
+      </a:accent4>
+      <a:accent5>
+        <a:srgbClr val="A02B93"/>
+      </a:accent5>
+      <a:accent6>
+        <a:srgbClr val="4EA72E"/>
+      </a:accent6>
+      <a:hlink>
+        <a:srgbClr val="467886"/>
+      </a:hlink>
+      <a:folHlink>
+        <a:srgbClr val="96607D"/>
+      </a:folHlink>
+    </a:clrScheme>
+    <a:fontScheme name="Office">
+      <a:majorFont>
+        <a:latin typeface="Aptos Display" panose="02110004020202020204"/>
+        <a:ea typeface=""/>
+        <a:cs typeface=""/>
+        <a:font script="Jpan" typeface="游ゴシック Light"/>
+        <a:font script="Hang" typeface="맑은 고딕"/>
+        <a:font script="Hans" typeface="等线 Light"/>
+        <a:font script="Hant" typeface="新細明體"/>
+        <a:font script="Arab" typeface="Times New Roman"/>
+        <a:font script="Hebr" typeface="Times New Roman"/>
+        <a:font script="Thai" typeface="Angsana New"/>
+        <a:font script="Ethi" typeface="Nyala"/>
+        <a:font script="Beng" typeface="Vrinda"/>
+        <a:font script="Gujr" typeface="Shruti"/>
+        <a:font script="Khmr" typeface="MoolBoran"/>
+        <a:font script="Knda" typeface="Tunga"/>
+        <a:font script="Guru" typeface="Raavi"/>
+        <a:font script="Cans" typeface="Euphemia"/>
+        <a:font script="Cher" typeface="Plantagenet Cherokee"/>
+        <a:font script="Yiii" typeface="Microsoft Yi Baiti"/>
+        <a:font script="Tibt" typeface="Microsoft Himalaya"/>
+        <a:font script="Thaa" typeface="MV Boli"/>
+        <a:font script="Deva" typeface="Mangal"/>
+        <a:font script="Telu" typeface="Gautami"/>
+        <a:font script="Taml" typeface="Latha"/>
+        <a:font script="Syrc" typeface="Estrangelo Edessa"/>
+        <a:font script="Orya" typeface="Kalinga"/>
+        <a:font script="Mlym" typeface="Kartika"/>
+        <a:font script="Laoo" typeface="DokChampa"/>
+        <a:font script="Sinh" typeface="Iskoola Pota"/>
+        <a:font script="Mong" typeface="Mongolian Baiti"/>
+        <a:font script="Viet" typeface="Times New Roman"/>
+        <a:font script="Uigh" typeface="Microsoft Uighur"/>
+        <a:font script="Geor" typeface="Sylfaen"/>
+        <a:font script="Armn" typeface="Arial"/>
+        <a:font script="Bugi" typeface="Leelawadee UI"/>
+        <a:font script="Bopo" typeface="Microsoft JhengHei"/>
+        <a:font script="Java" typeface="Javanese Text"/>
+        <a:font script="Lisu" typeface="Segoe UI"/>
+        <a:font script="Mymr" typeface="Myanmar Text"/>
+        <a:font script="Nkoo" typeface="Ebrima"/>
+        <a:font script="Olck" typeface="Nirmala UI"/>
+        <a:font script="Osma" typeface="Ebrima"/>
+        <a:font script="Phag" typeface="Phagspa"/>
+        <a:font script="Syrn" typeface="Estrangelo Edessa"/>
+        <a:font script="Syrj" typeface="Estrangelo Edessa"/>
+        <a:font script="Syre" typeface="Estrangelo Edessa"/>
+        <a:font script="Sora" typeface="Nirmala UI"/>
+        <a:font script="Tale" typeface="Microsoft Tai Le"/>
+        <a:font script="Talu" typeface="Microsoft New Tai Lue"/>
+        <a:font script="Tfng" typeface="Ebrima"/>
+      </a:majorFont>
+      <a:minorFont>
+        <a:latin typeface="Aptos" panose="02110004020202020204"/>
+        <a:ea typeface=""/>
+        <a:cs typeface=""/>
+        <a:font script="Jpan" typeface="游ゴシック"/>
+        <a:font script="Hang" typeface="맑은 고딕"/>
+        <a:font script="Hans" typeface="等线"/>
+        <a:font script="Hant" typeface="新細明體"/>
+        <a:font script="Arab" typeface="Arial"/>
+        <a:font script="Hebr" typeface="Arial"/>
+        <a:font script="Thai" typeface="Cordia New"/>
+        <a:font script="Ethi" typeface="Nyala"/>
+        <a:font script="Beng" typeface="Vrinda"/>
+        <a:font script="Gujr" typeface="Shruti"/>
+        <a:font script="Khmr" typeface="DaunPenh"/>
+        <a:font script="Knda" typeface="Tunga"/>
+        <a:font script="Guru" typeface="Raavi"/>
+        <a:font script="Cans" typeface="Euphemia"/>
+        <a:font script="Cher" typeface="Plantagenet Cherokee"/>
+        <a:font script="Yiii" typeface="Microsoft Yi Baiti"/>
+        <a:font script="Tibt" typeface="Microsoft Himalaya"/>
+        <a:font script="Thaa" typeface="MV Boli"/>
+        <a:font script="Deva" typeface="Mangal"/>
+        <a:font script="Telu" typeface="Gautami"/>
+        <a:font script="Taml" typeface="Latha"/>
+        <a:font script="Syrc" typeface="Estrangelo Edessa"/>
+        <a:font script="Orya" typeface="Kalinga"/>
+        <a:font script="Mlym" typeface="Kartika"/>
+        <a:font script="Laoo" typeface="DokChampa"/>
+        <a:font script="Sinh" typeface="Iskoola Pota"/>
+        <a:font script="Mong" typeface="Mongolian Baiti"/>
+        <a:font script="Viet" typeface="Arial"/>
+        <a:font script="Uigh" typeface="Microsoft Uighur"/>
+        <a:font script="Geor" typeface="Sylfaen"/>
+        <a:font script="Armn" typeface="Arial"/>
+        <a:font script="Bugi" typeface="Leelawadee UI"/>
+        <a:font script="Bopo" typeface="Microsoft JhengHei"/>
+        <a:font script="Java" typeface="Javanese Text"/>
+        <a:font script="Lisu" typeface="Segoe UI"/>
+        <a:font script="Mymr" typeface="Myanmar Text"/>
+        <a:font script="Nkoo" typeface="Ebrima"/>
+        <a:font script="Olck" typeface="Nirmala UI"/>
+        <a:font script="Osma" typeface="Ebrima"/>
+        <a:font script="Phag" typeface="Phagspa"/>
+        <a:font script="Syrn" typeface="Estrangelo Edessa"/>
+        <a:font script="Syrj" typeface="Estrangelo Edessa"/>
+        <a:font script="Syre" typeface="Estrangelo Edessa"/>
+        <a:font script="Sora" typeface="Nirmala UI"/>
+        <a:font script="Tale" typeface="Microsoft Tai Le"/>
+        <a:font script="Talu" typeface="Microsoft New Tai Lue"/>
+        <a:font script="Tfng" typeface="Ebrima"/>
+      </a:minorFont>
+    </a:fontScheme>
+    <a:fmtScheme name="Office">
+      <a:fillStyleLst>
+        <a:solidFill>
+          <a:schemeClr val="phClr"/>
+        </a:solidFill>
+        <a:gradFill rotWithShape="1">
+          <a:gsLst>
+            <a:gs pos="0">
+              <a:schemeClr val="phClr">
+                <a:lumMod val="110000"/>
+                <a:satMod val="105000"/>
+                <a:tint val="67000"/>
+              </a:schemeClr>
+            </a:gs>
+            <a:gs pos="50000">
+              <a:schemeClr val="phClr">
+                <a:lumMod val="105000"/>
+                <a:satMod val="103000"/>
+                <a:tint val="73000"/>
+              </a:schemeClr>
+            </a:gs>
+            <a:gs pos="100000">
+              <a:schemeClr val="phClr">
+                <a:lumMod val="105000"/>
+                <a:satMod val="109000"/>
+                <a:tint val="81000"/>
+              </a:schemeClr>
+            </a:gs>
+          </a:gsLst>
+          <a:lin ang="5400000" scaled="0"/>
+        </a:gradFill>
+        <a:gradFill rotWithShape="1">
+          <a:gsLst>
+            <a:gs pos="0">
+              <a:schemeClr val="phClr">
+                <a:satMod val="103000"/>
+                <a:lumMod val="102000"/>
+                <a:tint val="94000"/>
+              </a:schemeClr>
+            </a:gs>
+            <a:gs pos="50000">
+              <a:schemeClr val="phClr">
+                <a:satMod val="110000"/>
+                <a:lumMod val="100000"/>
+                <a:shade val="100000"/>
+              </a:schemeClr>
+            </a:gs>
+            <a:gs pos="100000">
+              <a:schemeClr val="phClr">
+                <a:lumMod val="99000"/>
+                <a:satMod val="120000"/>
+                <a:shade val="78000"/>
+              </a:schemeClr>
+            </a:gs>
+          </a:gsLst>
+          <a:lin ang="5400000" scaled="0"/>
+        </a:gradFill>
+      </a:fillStyleLst>
+      <a:lnStyleLst>
+        <a:ln w="12700" cap="flat" cmpd="sng" algn="ctr">
+          <a:solidFill>
+            <a:schemeClr val="phClr"/>
+          </a:solidFill>
+          <a:prstDash val="solid"/>
+          <a:miter lim="800000"/>
+        </a:ln>
+        <a:ln w="19050" cap="flat" cmpd="sng" algn="ctr">
+          <a:solidFill>
+            <a:schemeClr val="phClr"/>
+          </a:solidFill>
+          <a:prstDash val="solid"/>
+          <a:miter lim="800000"/>
+        </a:ln>
+        <a:ln w="25400" cap="flat" cmpd="sng" algn="ctr">
+          <a:solidFill>
+            <a:schemeClr val="phClr"/>
+          </a:solidFill>
+          <a:prstDash val="solid"/>
+          <a:miter lim="800000"/>
+        </a:ln>
+      </a:lnStyleLst>
+      <a:effectStyleLst>
+        <a:effectStyle>
+          <a:effectLst/>
+        </a:effectStyle>
+        <a:effectStyle>
+          <a:effectLst/>
+        </a:effectStyle>
+        <a:effectStyle>
+          <a:effectLst>
+            <a:outerShdw blurRad="57150" dist="19050" dir="5400000" algn="ctr" rotWithShape="0">
+              <a:srgbClr val="000000">
+                <a:alpha val="63000"/>
+              </a:srgbClr>
+            </a:outerShdw>
+          </a:effectLst>
+        </a:effectStyle>
+      </a:effectStyleLst>
+      <a:bgFillStyleLst>
+        <a:solidFill>
+          <a:schemeClr val="phClr"/>
+        </a:solidFill>
+        <a:solidFill>
+          <a:schemeClr val="phClr">
+            <a:tint val="95000"/>
+            <a:satMod val="170000"/>
+          </a:schemeClr>
+        </a:solidFill>
+        <a:gradFill rotWithShape="1">
+          <a:gsLst>
+            <a:gs pos="0">
+              <a:schemeClr val="phClr">
+                <a:tint val="93000"/>
+                <a:satMod val="150000"/>
+                <a:shade val="98000"/>
+                <a:lumMod val="102000"/>
+              </a:schemeClr>
+            </a:gs>
+            <a:gs pos="50000">
+              <a:schemeClr val="phClr">
+                <a:tint val="98000"/>
+                <a:satMod val="130000"/>
+                <a:shade val="90000"/>
+                <a:lumMod val="103000"/>
+              </a:schemeClr>
+            </a:gs>
+            <a:gs pos="100000">
+              <a:schemeClr val="phClr">
+                <a:shade val="63000"/>
+                <a:satMod val="120000"/>
+              </a:schemeClr>
+            </a:gs>
+          </a:gsLst>
+          <a:lin ang="5400000" scaled="0"/>
+        </a:gradFill>
+      </a:bgFillStyleLst>
+    </a:fmtScheme>
+  </a:themeElements>
+  <a:objectDefaults>
+    <a:lnDef>
+      <a:spPr/>
+      <a:bodyPr/>
+      <a:lstStyle/>
+      <a:style>
+        <a:lnRef idx="2">
+          <a:schemeClr val="accent1"/>
+        </a:lnRef>
+        <a:fillRef idx="0">
+          <a:schemeClr val="accent1"/>
+        </a:fillRef>
+        <a:effectRef idx="1">
+          <a:schemeClr val="accent1"/>
+        </a:effectRef>
+        <a:fontRef idx="minor">
+          <a:schemeClr val="tx1"/>
+        </a:fontRef>
+      </a:style>
+    </a:lnDef>
+  </a:objectDefaults>
+  <a:extraClrSchemeLst/>
+  <a:extLst>
+    <a:ext uri="{05A4C25C-085E-4340-85A3-A5531E510DB2}">
+      <thm15:themeFamily xmlns:thm15="http://schemas.microsoft.com/office/thememl/2012/main" name="Office Theme" id="{2E142A2C-CD16-42D6-873A-C26D2A0506FA}" vid="{1BDDFF52-6CD6-40A5-AB3C-68EB2F1E4D0A}"/>
+    </a:ext>
+  </a:extLst>
+</a:theme>
 </file>
--- a/Playa-Vista-ASC-Investor-Deck.pptx
+++ b/Playa-Vista-ASC-Investor-Deck.pptx
@@ -4,9 +4,6 @@
   <p:sldMasterIdLst>
     <p:sldMasterId id="2147483648" r:id="rId1"/>
   </p:sldMasterIdLst>
-  <p:notesMasterIdLst>
-    <p:notesMasterId r:id="rId19"/>
-  </p:notesMasterIdLst>
   <p:sldIdLst>
     <p:sldId id="256" r:id="rId2"/>
     <p:sldId id="257" r:id="rId3"/>
@@ -26,6 +23,9 @@
     <p:sldId id="271" r:id="rId17"/>
     <p:sldId id="272" r:id="rId18"/>
   </p:sldIdLst>
+  <p:notesMasterIdLst>
+    <p:notesMasterId r:id="rId19"/>
+  </p:notesMasterIdLst>
   <p:sldSz cx="12192000" cy="6858000"/>
   <p:notesSz cx="6858000" cy="12192000"/>
   <p:defaultTextStyle>
@@ -120,20 +120,13 @@
       </a:defRPr>
     </a:lvl9pPr>
   </p:defaultTextStyle>
-  <p:extLst>
-    <p:ext uri="{EFAFB233-063F-42B5-8137-9DF3F51BA10A}">
-      <p15:sldGuideLst xmlns:p15="http://schemas.microsoft.com/office/powerpoint/2012/main"/>
-    </p:ext>
-  </p:extLst>
 </p:presentation>
 </file>
 
 <file path=ppt/charts/chart1.xml><?xml version="1.0" encoding="utf-8"?>
-<c:chartSpace xmlns:c="http://schemas.openxmlformats.org/drawingml/2006/chart" xmlns:a="http://schemas.openxmlformats.org/drawingml/2006/main" xmlns:r="http://schemas.openxmlformats.org/officeDocument/2006/relationships" xmlns:c16r2="http://schemas.microsoft.com/office/drawing/2015/06/chart">
+<c:chartSpace xmlns:c="http://schemas.openxmlformats.org/drawingml/2006/chart" xmlns:a="http://schemas.openxmlformats.org/drawingml/2006/main" xmlns:r="http://schemas.openxmlformats.org/officeDocument/2006/relationships">
   <c:date1904 val="0"/>
-  <c:lang val="en-US"/>
   <c:roundedCorners val="1"/>
-  <c:style val="2"/>
   <c:chart>
     <c:autoTitleDeleted val="1"/>
     <c:plotArea>
@@ -158,33 +151,25 @@
           </c:tx>
           <c:spPr>
             <a:solidFill>
-              <a:srgbClr val="B6C800"/>
+              <a:srgbClr val="FF7A8A"/>
             </a:solidFill>
             <a:effectLst/>
           </c:spPr>
           <c:invertIfNegative val="0"/>
           <c:dLbls>
-            <c:numFmt formatCode="\$#,##0&quot;K&quot;" sourceLinked="0"/>
-            <c:spPr>
-              <a:noFill/>
-              <a:ln>
-                <a:noFill/>
-              </a:ln>
-              <a:effectLst/>
-            </c:spPr>
+            <c:numFmt formatCode="$#,##0&quot;K&quot;" sourceLinked="0"/>
             <c:txPr>
               <a:bodyPr/>
               <a:lstStyle/>
               <a:p>
                 <a:pPr>
-                  <a:defRPr sz="1000" b="0" i="0" u="none" strike="noStrike">
+                  <a:defRPr b="0" i="0" strike="noStrike" sz="1000" u="none">
                     <a:solidFill>
                       <a:srgbClr val="FFFFFF"/>
                     </a:solidFill>
                     <a:latin typeface="Calibri"/>
                   </a:defRPr>
                 </a:pPr>
-                <a:endParaRPr lang="en-US"/>
               </a:p>
             </c:txPr>
             <c:showLegendKey val="0"/>
@@ -194,40 +179,114 @@
             <c:showPercent val="0"/>
             <c:showBubbleSize val="0"/>
             <c:showLeaderLines val="0"/>
-            <c:extLst>
-              <c:ext xmlns:c15="http://schemas.microsoft.com/office/drawing/2012/chart" uri="{CE6537A1-D6FC-4f65-9D91-7224C49458BB}">
-                <c15:showLeaderLines val="0"/>
-              </c:ext>
-            </c:extLst>
           </c:dLbls>
+          <c:dPt>
+            <c:idx val="0"/>
+            <c:invertIfNegative val="0"/>
+            <c:bubble3D val="0"/>
+            <c:spPr>
+              <a:solidFill>
+                <a:srgbClr val="FF7A8A"/>
+              </a:solidFill>
+              <a:effectLst/>
+            </c:spPr>
+          </c:dPt>
+          <c:dPt>
+            <c:idx val="1"/>
+            <c:invertIfNegative val="0"/>
+            <c:bubble3D val="0"/>
+            <c:spPr>
+              <a:solidFill>
+                <a:srgbClr val="FF7A8A"/>
+              </a:solidFill>
+              <a:effectLst/>
+            </c:spPr>
+          </c:dPt>
+          <c:dPt>
+            <c:idx val="2"/>
+            <c:invertIfNegative val="0"/>
+            <c:bubble3D val="0"/>
+            <c:spPr>
+              <a:solidFill>
+                <a:srgbClr val="FF7A8A"/>
+              </a:solidFill>
+              <a:effectLst/>
+            </c:spPr>
+          </c:dPt>
+          <c:dPt>
+            <c:idx val="3"/>
+            <c:invertIfNegative val="0"/>
+            <c:bubble3D val="0"/>
+            <c:spPr>
+              <a:solidFill>
+                <a:srgbClr val="B6C800"/>
+              </a:solidFill>
+              <a:effectLst/>
+            </c:spPr>
+          </c:dPt>
+          <c:dPt>
+            <c:idx val="4"/>
+            <c:invertIfNegative val="0"/>
+            <c:bubble3D val="0"/>
+            <c:spPr>
+              <a:solidFill>
+                <a:srgbClr val="B6C800"/>
+              </a:solidFill>
+              <a:effectLst/>
+            </c:spPr>
+          </c:dPt>
+          <c:dPt>
+            <c:idx val="5"/>
+            <c:invertIfNegative val="0"/>
+            <c:bubble3D val="0"/>
+            <c:spPr>
+              <a:solidFill>
+                <a:srgbClr val="B6C800"/>
+              </a:solidFill>
+              <a:effectLst/>
+            </c:spPr>
+          </c:dPt>
+          <c:dPt>
+            <c:idx val="6"/>
+            <c:invertIfNegative val="0"/>
+            <c:bubble3D val="0"/>
+            <c:spPr>
+              <a:solidFill>
+                <a:srgbClr val="B6C800"/>
+              </a:solidFill>
+              <a:effectLst/>
+            </c:spPr>
+          </c:dPt>
           <c:cat>
-            <c:strRef>
+            <c:multiLvlStrRef>
               <c:f>Sheet1!$A$2:$A$8</c:f>
-              <c:strCache>
+              <c:multiLvlStrCache>
                 <c:ptCount val="7"/>
-                <c:pt idx="0">
-                  <c:v>Mo 0–3</c:v>
-                </c:pt>
-                <c:pt idx="1">
-                  <c:v>Mo 3–6</c:v>
-                </c:pt>
-                <c:pt idx="2">
-                  <c:v>Mo 6–12</c:v>
-                </c:pt>
-                <c:pt idx="3">
-                  <c:v>Mo 12–16</c:v>
-                </c:pt>
-                <c:pt idx="4">
-                  <c:v>Mo 16–20</c:v>
-                </c:pt>
-                <c:pt idx="5">
-                  <c:v>Mo 20–28</c:v>
-                </c:pt>
-                <c:pt idx="6">
-                  <c:v>Mo 28–36</c:v>
-                </c:pt>
-              </c:strCache>
-            </c:strRef>
+                <c:lvl>
+                  <c:pt idx="0">
+                    <c:v>Mo 0–3</c:v>
+                  </c:pt>
+                  <c:pt idx="1">
+                    <c:v>Mo 3–6</c:v>
+                  </c:pt>
+                  <c:pt idx="2">
+                    <c:v>Mo 6–12</c:v>
+                  </c:pt>
+                  <c:pt idx="3">
+                    <c:v>Mo 12–16</c:v>
+                  </c:pt>
+                  <c:pt idx="4">
+                    <c:v>Mo 16–20</c:v>
+                  </c:pt>
+                  <c:pt idx="5">
+                    <c:v>Mo 20–28</c:v>
+                  </c:pt>
+                  <c:pt idx="6">
+                    <c:v>Mo 28–36</c:v>
+                  </c:pt>
+                </c:lvl>
+              </c:multiLvlStrCache>
+            </c:multiLvlStrRef>
           </c:cat>
           <c:val>
             <c:numRef>
@@ -259,23 +318,36 @@
               </c:numCache>
             </c:numRef>
           </c:val>
-          <c:extLst>
-            <c:ext xmlns:c16="http://schemas.microsoft.com/office/drawing/2014/chart" uri="{C3380CC4-5D6E-409C-BE32-E72D297353CC}">
-              <c16:uniqueId val="{00000000-75B9-48BB-AC4A-07871EF5A334}"/>
-            </c:ext>
-          </c:extLst>
         </c:ser>
         <c:dLbls>
+          <c:numFmt formatCode="$#,##0&quot;K&quot;" sourceLinked="0"/>
+          <c:txPr>
+            <a:bodyPr/>
+            <a:lstStyle/>
+            <a:p>
+              <a:pPr>
+                <a:defRPr b="0" i="0" strike="noStrike" sz="1000" u="none">
+                  <a:solidFill>
+                    <a:srgbClr val="FFFFFF"/>
+                  </a:solidFill>
+                  <a:latin typeface="Calibri"/>
+                </a:defRPr>
+              </a:pPr>
+            </a:p>
+          </c:txPr>
           <c:showLegendKey val="0"/>
           <c:showVal val="1"/>
           <c:showCatName val="0"/>
           <c:showSerName val="0"/>
           <c:showPercent val="0"/>
           <c:showBubbleSize val="0"/>
+          <c:showLeaderLines val="0"/>
         </c:dLbls>
         <c:gapWidth val="55"/>
+        <c:overlap val="0"/>
         <c:axId val="2094734554"/>
         <c:axId val="2094734552"/>
+        <c:axId val="2094734556"/>
       </c:barChart>
       <c:catAx>
         <c:axId val="2094734554"/>
@@ -316,7 +388,6 @@
         <c:crosses val="autoZero"/>
         <c:auto val="1"/>
         <c:lblAlgn val="ctr"/>
-        <c:lblOffset val="100"/>
         <c:noMultiLvlLbl val="1"/>
       </c:catAx>
       <c:valAx>
@@ -337,7 +408,7 @@
             </a:ln>
           </c:spPr>
         </c:majorGridlines>
-        <c:numFmt formatCode="\$#,##0&quot;K&quot;" sourceLinked="0"/>
+        <c:numFmt formatCode="$#,##0&quot;K&quot;" sourceLinked="0"/>
         <c:majorTickMark val="out"/>
         <c:minorTickMark val="none"/>
         <c:tickLblPos val="nextTo"/>
@@ -381,7 +452,6 @@
     </c:plotArea>
     <c:plotVisOnly val="1"/>
     <c:dispBlanksAs val="span"/>
-    <c:showDLblsOverMax val="1"/>
   </c:chart>
   <c:spPr>
     <a:solidFill>
@@ -420,10 +490,234 @@
           <a:chExt cx="0" cy="0"/>
         </a:xfrm>
       </p:grpSpPr>
+      <p:sp>
+        <p:nvSpPr>
+          <p:cNvPr id="2" name="Header Placeholder 1"/>
+          <p:cNvSpPr>
+            <a:spLocks noGrp="1"/>
+          </p:cNvSpPr>
+          <p:nvPr>
+            <p:ph type="hdr" sz="quarter"/>
+          </p:nvPr>
+        </p:nvSpPr>
+        <p:spPr>
+          <a:xfrm>
+            <a:off x="0" y="0"/>
+            <a:ext cx="2971800" cy="458788"/>
+          </a:xfrm>
+          <a:prstGeom prst="rect">
+            <a:avLst/>
+          </a:prstGeom>
+        </p:spPr>
+        <p:txBody>
+          <a:bodyPr vert="horz" lIns="91440" tIns="45720" rIns="91440" bIns="45720" rtlCol="0"/>
+          <a:lstStyle>
+            <a:lvl1pPr algn="l">
+              <a:defRPr sz="1200"/>
+            </a:lvl1pPr>
+          </a:lstStyle>
+          <a:p>
+            <a:endParaRPr lang="en-US"/>
+          </a:p>
+        </p:txBody>
+      </p:sp>
+      <p:sp>
+        <p:nvSpPr>
+          <p:cNvPr id="3" name="Date Placeholder 2"/>
+          <p:cNvSpPr>
+            <a:spLocks noGrp="1"/>
+          </p:cNvSpPr>
+          <p:nvPr>
+            <p:ph type="dt" idx="1"/>
+          </p:nvPr>
+        </p:nvSpPr>
+        <p:spPr>
+          <a:xfrm>
+            <a:off x="3884613" y="0"/>
+            <a:ext cx="2971800" cy="458788"/>
+          </a:xfrm>
+          <a:prstGeom prst="rect">
+            <a:avLst/>
+          </a:prstGeom>
+        </p:spPr>
+        <p:txBody>
+          <a:bodyPr vert="horz" lIns="91440" tIns="45720" rIns="91440" bIns="45720" rtlCol="0"/>
+          <a:lstStyle>
+            <a:lvl1pPr algn="r">
+              <a:defRPr sz="1200"/>
+            </a:lvl1pPr>
+          </a:lstStyle>
+          <a:p>
+            <a:fld id="{5282F153-3F37-0F45-9E97-73ACFA13230C}" type="datetimeFigureOut">
+              <a:rPr lang="en-US"/>
+              <a:t>7/23/19</a:t>
+            </a:fld>
+            <a:endParaRPr lang="en-US"/>
+          </a:p>
+        </p:txBody>
+      </p:sp>
+      <p:sp>
+        <p:nvSpPr>
+          <p:cNvPr id="4" name="Slide Image Placeholder 3"/>
+          <p:cNvSpPr>
+            <a:spLocks noGrp="1" noRot="1" noChangeAspect="1"/>
+          </p:cNvSpPr>
+          <p:nvPr>
+            <p:ph type="sldImg" idx="2"/>
+          </p:nvPr>
+        </p:nvSpPr>
+        <p:spPr>
+          <a:xfrm>
+            <a:off x="685800" y="1143000"/>
+            <a:ext cx="5486400" cy="3086100"/>
+          </a:xfrm>
+          <a:prstGeom prst="rect">
+            <a:avLst/>
+          </a:prstGeom>
+          <a:noFill/>
+          <a:ln w="12700">
+            <a:solidFill>
+              <a:prstClr val="black"/>
+            </a:solidFill>
+          </a:ln>
+        </p:spPr>
+        <p:txBody>
+          <a:bodyPr vert="horz" lIns="91440" tIns="45720" rIns="91440" bIns="45720" rtlCol="0" anchor="ctr"/>
+          <a:lstStyle/>
+          <a:p>
+            <a:endParaRPr lang="en-US"/>
+          </a:p>
+        </p:txBody>
+      </p:sp>
+      <p:sp>
+        <p:nvSpPr>
+          <p:cNvPr id="5" name="Notes Placeholder 4"/>
+          <p:cNvSpPr>
+            <a:spLocks noGrp="1"/>
+          </p:cNvSpPr>
+          <p:nvPr>
+            <p:ph type="body" sz="quarter" idx="3"/>
+          </p:nvPr>
+        </p:nvSpPr>
+        <p:spPr>
+          <a:xfrm>
+            <a:off x="685800" y="4400550"/>
+            <a:ext cx="5486400" cy="3600450"/>
+          </a:xfrm>
+          <a:prstGeom prst="rect">
+            <a:avLst/>
+          </a:prstGeom>
+        </p:spPr>
+        <p:txBody>
+          <a:bodyPr vert="horz" lIns="91440" tIns="45720" rIns="91440" bIns="45720" rtlCol="0"/>
+          <a:lstStyle/>
+          <a:p>
+            <a:pPr lvl="0"/>
+            <a:r>
+              <a:rPr lang="en-US"/>
+              <a:t>Click to edit Master text styles</a:t>
+            </a:r>
+          </a:p>
+          <a:p>
+            <a:pPr lvl="1"/>
+            <a:r>
+              <a:rPr lang="en-US"/>
+              <a:t>Second level</a:t>
+            </a:r>
+          </a:p>
+          <a:p>
+            <a:pPr lvl="2"/>
+            <a:r>
+              <a:rPr lang="en-US"/>
+              <a:t>Third level</a:t>
+            </a:r>
+          </a:p>
+          <a:p>
+            <a:pPr lvl="3"/>
+            <a:r>
+              <a:rPr lang="en-US"/>
+              <a:t>Fourth level</a:t>
+            </a:r>
+          </a:p>
+          <a:p>
+            <a:pPr lvl="4"/>
+            <a:r>
+              <a:rPr lang="en-US"/>
+              <a:t>Fifth level</a:t>
+            </a:r>
+          </a:p>
+        </p:txBody>
+      </p:sp>
+      <p:sp>
+        <p:nvSpPr>
+          <p:cNvPr id="6" name="Footer Placeholder 5"/>
+          <p:cNvSpPr>
+            <a:spLocks noGrp="1"/>
+          </p:cNvSpPr>
+          <p:nvPr>
+            <p:ph type="ftr" sz="quarter" idx="4"/>
+          </p:nvPr>
+        </p:nvSpPr>
+        <p:spPr>
+          <a:xfrm>
+            <a:off x="0" y="8685213"/>
+            <a:ext cx="2971800" cy="458787"/>
+          </a:xfrm>
+          <a:prstGeom prst="rect">
+            <a:avLst/>
+          </a:prstGeom>
+        </p:spPr>
+        <p:txBody>
+          <a:bodyPr vert="horz" lIns="91440" tIns="45720" rIns="91440" bIns="45720" rtlCol="0" anchor="b"/>
+          <a:lstStyle>
+            <a:lvl1pPr algn="l">
+              <a:defRPr sz="1200"/>
+            </a:lvl1pPr>
+          </a:lstStyle>
+          <a:p>
+            <a:endParaRPr lang="en-US"/>
+          </a:p>
+        </p:txBody>
+      </p:sp>
+      <p:sp>
+        <p:nvSpPr>
+          <p:cNvPr id="7" name="Slide Number Placeholder 6"/>
+          <p:cNvSpPr>
+            <a:spLocks noGrp="1"/>
+          </p:cNvSpPr>
+          <p:nvPr>
+            <p:ph type="sldNum" sz="quarter" idx="5"/>
+          </p:nvPr>
+        </p:nvSpPr>
+        <p:spPr>
+          <a:xfrm>
+            <a:off x="3884613" y="8685213"/>
+            <a:ext cx="2971800" cy="458787"/>
+          </a:xfrm>
+          <a:prstGeom prst="rect">
+            <a:avLst/>
+          </a:prstGeom>
+        </p:spPr>
+        <p:txBody>
+          <a:bodyPr vert="horz" lIns="91440" tIns="45720" rIns="91440" bIns="45720" rtlCol="0" anchor="b"/>
+          <a:lstStyle>
+            <a:lvl1pPr algn="r">
+              <a:defRPr sz="1200"/>
+            </a:lvl1pPr>
+          </a:lstStyle>
+          <a:p>
+            <a:fld id="{CE5E9CC1-C706-0F49-92D6-E571CC5EEA8F}" type="slidenum">
+              <a:rPr lang="en-US"/>
+              <a:t>‹#›</a:t>
+            </a:fld>
+            <a:endParaRPr lang="en-US"/>
+          </a:p>
+        </p:txBody>
+      </p:sp>
     </p:spTree>
     <p:extLst>
       <p:ext uri="{BB962C8B-B14F-4D97-AF65-F5344CB8AC3E}">
-        <p14:creationId xmlns:p14="http://schemas.microsoft.com/office/powerpoint/2010/main" val="3167112693"/>
+        <p14:creationId xmlns:p14="http://schemas.microsoft.com/office/powerpoint/2010/main" val="1024086991"/>
       </p:ext>
     </p:extLst>
   </p:cSld>
@@ -567,6 +861,10 @@
           <a:bodyPr/>
           <a:lstStyle/>
           <a:p>
+            <a:r>
+              <a:rPr lang="en-US" dirty="0"/>
+              <a:t/>
+            </a:r>
             <a:endParaRPr lang="en-US" dirty="0"/>
           </a:p>
         </p:txBody>
@@ -651,6 +949,10 @@
           <a:bodyPr/>
           <a:lstStyle/>
           <a:p>
+            <a:r>
+              <a:rPr lang="en-US" dirty="0"/>
+              <a:t/>
+            </a:r>
             <a:endParaRPr lang="en-US" dirty="0"/>
           </a:p>
         </p:txBody>
@@ -735,6 +1037,10 @@
           <a:bodyPr/>
           <a:lstStyle/>
           <a:p>
+            <a:r>
+              <a:rPr lang="en-US" dirty="0"/>
+              <a:t/>
+            </a:r>
             <a:endParaRPr lang="en-US" dirty="0"/>
           </a:p>
         </p:txBody>
@@ -819,6 +1125,10 @@
           <a:bodyPr/>
           <a:lstStyle/>
           <a:p>
+            <a:r>
+              <a:rPr lang="en-US" dirty="0"/>
+              <a:t/>
+            </a:r>
             <a:endParaRPr lang="en-US" dirty="0"/>
           </a:p>
         </p:txBody>
@@ -903,6 +1213,10 @@
           <a:bodyPr/>
           <a:lstStyle/>
           <a:p>
+            <a:r>
+              <a:rPr lang="en-US" dirty="0"/>
+              <a:t/>
+            </a:r>
             <a:endParaRPr lang="en-US" dirty="0"/>
           </a:p>
         </p:txBody>
@@ -987,6 +1301,10 @@
           <a:bodyPr/>
           <a:lstStyle/>
           <a:p>
+            <a:r>
+              <a:rPr lang="en-US" dirty="0"/>
+              <a:t/>
+            </a:r>
             <a:endParaRPr lang="en-US" dirty="0"/>
           </a:p>
         </p:txBody>
@@ -1071,6 +1389,10 @@
           <a:bodyPr/>
           <a:lstStyle/>
           <a:p>
+            <a:r>
+              <a:rPr lang="en-US" dirty="0"/>
+              <a:t/>
+            </a:r>
             <a:endParaRPr lang="en-US" dirty="0"/>
           </a:p>
         </p:txBody>
@@ -1155,6 +1477,10 @@
           <a:bodyPr/>
           <a:lstStyle/>
           <a:p>
+            <a:r>
+              <a:rPr lang="en-US" dirty="0"/>
+              <a:t/>
+            </a:r>
             <a:endParaRPr lang="en-US" dirty="0"/>
           </a:p>
         </p:txBody>
@@ -1239,6 +1565,10 @@
           <a:bodyPr/>
           <a:lstStyle/>
           <a:p>
+            <a:r>
+              <a:rPr lang="en-US" dirty="0"/>
+              <a:t/>
+            </a:r>
             <a:endParaRPr lang="en-US" dirty="0"/>
           </a:p>
         </p:txBody>
@@ -1323,6 +1653,10 @@
           <a:bodyPr/>
           <a:lstStyle/>
           <a:p>
+            <a:r>
+              <a:rPr lang="en-US" dirty="0"/>
+              <a:t/>
+            </a:r>
             <a:endParaRPr lang="en-US" dirty="0"/>
           </a:p>
         </p:txBody>
@@ -1407,6 +1741,10 @@
           <a:bodyPr/>
           <a:lstStyle/>
           <a:p>
+            <a:r>
+              <a:rPr lang="en-US" dirty="0"/>
+              <a:t/>
+            </a:r>
             <a:endParaRPr lang="en-US" dirty="0"/>
           </a:p>
         </p:txBody>
@@ -1491,6 +1829,10 @@
           <a:bodyPr/>
           <a:lstStyle/>
           <a:p>
+            <a:r>
+              <a:rPr lang="en-US" dirty="0"/>
+              <a:t/>
+            </a:r>
             <a:endParaRPr lang="en-US" dirty="0"/>
           </a:p>
         </p:txBody>
@@ -1575,6 +1917,10 @@
           <a:bodyPr/>
           <a:lstStyle/>
           <a:p>
+            <a:r>
+              <a:rPr lang="en-US" dirty="0"/>
+              <a:t/>
+            </a:r>
             <a:endParaRPr lang="en-US" dirty="0"/>
           </a:p>
         </p:txBody>
@@ -1659,6 +2005,10 @@
           <a:bodyPr/>
           <a:lstStyle/>
           <a:p>
+            <a:r>
+              <a:rPr lang="en-US" dirty="0"/>
+              <a:t/>
+            </a:r>
             <a:endParaRPr lang="en-US" dirty="0"/>
           </a:p>
         </p:txBody>
@@ -1743,6 +2093,10 @@
           <a:bodyPr/>
           <a:lstStyle/>
           <a:p>
+            <a:r>
+              <a:rPr lang="en-US" dirty="0"/>
+              <a:t/>
+            </a:r>
             <a:endParaRPr lang="en-US" dirty="0"/>
           </a:p>
         </p:txBody>
@@ -1827,6 +2181,10 @@
           <a:bodyPr/>
           <a:lstStyle/>
           <a:p>
+            <a:r>
+              <a:rPr lang="en-US" dirty="0"/>
+              <a:t/>
+            </a:r>
             <a:endParaRPr lang="en-US" dirty="0"/>
           </a:p>
         </p:txBody>
@@ -1911,6 +2269,10 @@
           <a:bodyPr/>
           <a:lstStyle/>
           <a:p>
+            <a:r>
+              <a:rPr lang="en-US" dirty="0"/>
+              <a:t/>
+            </a:r>
             <a:endParaRPr lang="en-US" dirty="0"/>
           </a:p>
         </p:txBody>
@@ -1984,11 +2346,6 @@
 <file path=ppt/slideMasters/slideMaster1.xml><?xml version="1.0" encoding="utf-8"?>
 <p:sldMaster xmlns:a="http://schemas.openxmlformats.org/drawingml/2006/main" xmlns:r="http://schemas.openxmlformats.org/officeDocument/2006/relationships" xmlns:p="http://schemas.openxmlformats.org/presentationml/2006/main">
   <p:cSld>
-    <p:bg>
-      <p:bgRef idx="1001">
-        <a:schemeClr val="bg1"/>
-      </p:bgRef>
-    </p:bg>
     <p:spTree>
       <p:nvGrpSpPr>
         <p:cNvPr id="1" name=""/>
@@ -2271,7 +2628,6 @@
         <a:solidFill>
           <a:srgbClr val="0A0A0F"/>
         </a:solidFill>
-        <a:effectLst/>
       </p:bgPr>
     </p:bg>
     <p:spTree>
@@ -2395,11 +2751,11 @@
           <a:bodyPr wrap="square" lIns="0" tIns="0" rIns="0" bIns="0" rtlCol="0" anchor="ctr"/>
           <a:lstStyle/>
           <a:p>
-            <a:pPr marL="0" indent="0" algn="l">
-              <a:buNone/>
-            </a:pPr>
-            <a:r>
-              <a:rPr lang="en-US" sz="1100" b="1" kern="0" spc="300" dirty="0">
+            <a:pPr algn="l" indent="0" marL="0">
+              <a:buNone/>
+            </a:pPr>
+            <a:r>
+              <a:rPr lang="en-US" sz="1100" b="1" spc="300" kern="0" dirty="0">
                 <a:solidFill>
                   <a:srgbClr val="B6C800"/>
                 </a:solidFill>
@@ -2434,7 +2790,7 @@
           <a:bodyPr wrap="square" lIns="0" tIns="0" rIns="0" bIns="0" rtlCol="0" anchor="ctr"/>
           <a:lstStyle/>
           <a:p>
-            <a:pPr marL="0" indent="0">
+            <a:pPr indent="0" marL="0">
               <a:lnSpc>
                 <a:spcPct val="98000"/>
               </a:lnSpc>
@@ -2451,6 +2807,12 @@
               </a:rPr>
               <a:t>PLAYA VISTA </a:t>
             </a:r>
+            <a:pPr indent="0" marL="0">
+              <a:lnSpc>
+                <a:spcPct val="98000"/>
+              </a:lnSpc>
+              <a:buNone/>
+            </a:pPr>
             <a:r>
               <a:rPr lang="en-US" sz="5000" b="1" dirty="0">
                 <a:solidFill>
@@ -2462,15 +2824,21 @@
               </a:rPr>
               <a:t>ASC</a:t>
             </a:r>
-            <a:endParaRPr lang="en-US" sz="5000" dirty="0"/>
-          </a:p>
-          <a:p>
-            <a:pPr marL="0" indent="0">
+            <a:pPr indent="0" marL="0">
               <a:lnSpc>
                 <a:spcPct val="98000"/>
               </a:lnSpc>
               <a:buNone/>
             </a:pPr>
+            <a:endParaRPr lang="en-US" sz="5000" dirty="0"/>
+          </a:p>
+          <a:p>
+            <a:pPr indent="0" marL="0">
+              <a:lnSpc>
+                <a:spcPct val="98000"/>
+              </a:lnSpc>
+              <a:buNone/>
+            </a:pPr>
             <a:r>
               <a:rPr lang="en-US" sz="5000" b="1" dirty="0">
                 <a:solidFill>
@@ -2527,7 +2895,7 @@
           <a:bodyPr wrap="square" lIns="0" tIns="0" rIns="0" bIns="0" rtlCol="0" anchor="ctr"/>
           <a:lstStyle/>
           <a:p>
-            <a:pPr marL="0" indent="0">
+            <a:pPr indent="0" marL="0">
               <a:buNone/>
             </a:pPr>
             <a:r>
@@ -2541,6 +2909,9 @@
               </a:rPr>
               <a:t>Cash-flow positive on the clinic alone</a:t>
             </a:r>
+            <a:pPr indent="0" marL="0">
+              <a:buNone/>
+            </a:pPr>
             <a:r>
               <a:rPr lang="en-US" sz="1900" b="1" dirty="0">
                 <a:solidFill>
@@ -2577,7 +2948,7 @@
           <a:bodyPr wrap="square" lIns="0" tIns="0" rIns="0" bIns="0" rtlCol="0" anchor="ctr"/>
           <a:lstStyle/>
           <a:p>
-            <a:pPr marL="0" indent="0">
+            <a:pPr indent="0" marL="0">
               <a:buNone/>
             </a:pPr>
             <a:r>
@@ -2636,7 +3007,7 @@
           <a:bodyPr wrap="square" lIns="0" tIns="0" rIns="0" bIns="0" rtlCol="0" anchor="ctr"/>
           <a:lstStyle/>
           <a:p>
-            <a:pPr marL="0" indent="0">
+            <a:pPr indent="0" marL="0">
               <a:buNone/>
             </a:pPr>
             <a:r>
@@ -2675,7 +3046,7 @@
           <a:bodyPr wrap="square" lIns="0" tIns="0" rIns="0" bIns="0" rtlCol="0" anchor="ctr"/>
           <a:lstStyle/>
           <a:p>
-            <a:pPr marL="0" indent="0">
+            <a:pPr indent="0" marL="0">
               <a:buNone/>
             </a:pPr>
             <a:r>
@@ -2714,7 +3085,7 @@
           <a:bodyPr wrap="square" lIns="0" tIns="0" rIns="0" bIns="0" rtlCol="0" anchor="ctr"/>
           <a:lstStyle/>
           <a:p>
-            <a:pPr marL="0" indent="0">
+            <a:pPr indent="0" marL="0">
               <a:buNone/>
             </a:pPr>
             <a:r>
@@ -2753,7 +3124,7 @@
           <a:bodyPr wrap="square" lIns="0" tIns="0" rIns="0" bIns="0" rtlCol="0" anchor="ctr"/>
           <a:lstStyle/>
           <a:p>
-            <a:pPr marL="0" indent="0">
+            <a:pPr indent="0" marL="0">
               <a:buNone/>
             </a:pPr>
             <a:r>
@@ -2792,7 +3163,7 @@
           <a:bodyPr wrap="square" lIns="0" tIns="0" rIns="0" bIns="0" rtlCol="0" anchor="ctr"/>
           <a:lstStyle/>
           <a:p>
-            <a:pPr marL="0" indent="0">
+            <a:pPr indent="0" marL="0">
               <a:buNone/>
             </a:pPr>
             <a:r>
@@ -2831,7 +3202,7 @@
           <a:bodyPr wrap="square" lIns="0" tIns="0" rIns="0" bIns="0" rtlCol="0" anchor="ctr"/>
           <a:lstStyle/>
           <a:p>
-            <a:pPr marL="0" indent="0">
+            <a:pPr indent="0" marL="0">
               <a:buNone/>
             </a:pPr>
             <a:r>
@@ -2848,7 +3219,7 @@
             <a:endParaRPr lang="en-US" sz="1100" dirty="0"/>
           </a:p>
           <a:p>
-            <a:pPr marL="0" indent="0">
+            <a:pPr indent="0" marL="0">
               <a:buNone/>
             </a:pPr>
             <a:r>
@@ -2887,11 +3258,11 @@
           <a:bodyPr wrap="square" lIns="0" tIns="0" rIns="0" bIns="0" rtlCol="0" anchor="ctr"/>
           <a:lstStyle/>
           <a:p>
-            <a:pPr marL="0" indent="0">
-              <a:buNone/>
-            </a:pPr>
-            <a:r>
-              <a:rPr lang="en-US" sz="850" kern="0" spc="100" dirty="0">
+            <a:pPr indent="0" marL="0">
+              <a:buNone/>
+            </a:pPr>
+            <a:r>
+              <a:rPr lang="en-US" sz="850" spc="100" kern="0" dirty="0">
                 <a:solidFill>
                   <a:srgbClr val="5A5570"/>
                 </a:solidFill>
@@ -2926,7 +3297,7 @@
           <a:bodyPr wrap="square" lIns="0" tIns="0" rIns="0" bIns="0" rtlCol="0" anchor="ctr"/>
           <a:lstStyle/>
           <a:p>
-            <a:pPr marL="0" indent="0" algn="r">
+            <a:pPr algn="r" indent="0" marL="0">
               <a:buNone/>
             </a:pPr>
             <a:r>
@@ -2960,7 +3331,6 @@
         <a:solidFill>
           <a:srgbClr val="0A0A0F"/>
         </a:solidFill>
-        <a:effectLst/>
       </p:bgPr>
     </p:bg>
     <p:spTree>
@@ -3062,11 +3432,11 @@
           <a:bodyPr wrap="square" lIns="0" tIns="0" rIns="0" bIns="0" rtlCol="0" anchor="ctr"/>
           <a:lstStyle/>
           <a:p>
-            <a:pPr marL="0" indent="0" algn="l">
-              <a:buNone/>
-            </a:pPr>
-            <a:r>
-              <a:rPr lang="en-US" sz="1100" b="1" kern="0" spc="300" dirty="0">
+            <a:pPr algn="l" indent="0" marL="0">
+              <a:buNone/>
+            </a:pPr>
+            <a:r>
+              <a:rPr lang="en-US" sz="1100" b="1" spc="300" kern="0" dirty="0">
                 <a:solidFill>
                   <a:srgbClr val="B6C800"/>
                 </a:solidFill>
@@ -3101,7 +3471,7 @@
           <a:bodyPr wrap="square" lIns="0" tIns="0" rIns="0" bIns="0" rtlCol="0" anchor="t"/>
           <a:lstStyle/>
           <a:p>
-            <a:pPr marL="0" indent="0" algn="l">
+            <a:pPr algn="l" indent="0" marL="0">
               <a:lnSpc>
                 <a:spcPct val="100000"/>
               </a:lnSpc>
@@ -3148,7 +3518,7 @@
             <a:prstDash val="solid"/>
           </a:ln>
           <a:effectLst>
-            <a:outerShdw blurRad="177800" dist="63500" dir="5400000" algn="bl" rotWithShape="0">
+            <a:outerShdw sx="100000" sy="100000" kx="0" ky="0" algn="bl" rotWithShape="0" blurRad="177800" dist="63500" dir="5400000">
               <a:srgbClr val="3E00DB">
                 <a:alpha val="55000"/>
               </a:srgbClr>
@@ -3177,7 +3547,7 @@
           <a:bodyPr wrap="square" lIns="0" tIns="0" rIns="0" bIns="0" rtlCol="0" anchor="ctr"/>
           <a:lstStyle/>
           <a:p>
-            <a:pPr marL="0" indent="0">
+            <a:pPr indent="0" marL="0">
               <a:buNone/>
             </a:pPr>
             <a:r>
@@ -3216,7 +3586,7 @@
           <a:bodyPr wrap="square" lIns="0" tIns="0" rIns="0" bIns="0" rtlCol="0" anchor="ctr"/>
           <a:lstStyle/>
           <a:p>
-            <a:pPr marL="0" indent="0" algn="r">
+            <a:pPr algn="r" indent="0" marL="0">
               <a:buNone/>
             </a:pPr>
             <a:r>
@@ -3255,7 +3625,7 @@
           <a:bodyPr wrap="square" lIns="0" tIns="0" rIns="0" bIns="0" rtlCol="0" anchor="ctr"/>
           <a:lstStyle/>
           <a:p>
-            <a:pPr marL="0" indent="0" algn="r">
+            <a:pPr algn="r" indent="0" marL="0">
               <a:buNone/>
             </a:pPr>
             <a:r>
@@ -3294,7 +3664,7 @@
           <a:bodyPr wrap="square" lIns="0" tIns="0" rIns="0" bIns="0" rtlCol="0" anchor="ctr"/>
           <a:lstStyle/>
           <a:p>
-            <a:pPr marL="0" indent="0">
+            <a:pPr indent="0" marL="0">
               <a:buNone/>
             </a:pPr>
             <a:r>
@@ -3333,7 +3703,7 @@
           <a:bodyPr wrap="square" lIns="0" tIns="0" rIns="0" bIns="0" rtlCol="0" anchor="ctr"/>
           <a:lstStyle/>
           <a:p>
-            <a:pPr marL="0" indent="0" algn="r">
+            <a:pPr algn="r" indent="0" marL="0">
               <a:buNone/>
             </a:pPr>
             <a:r>
@@ -3392,7 +3762,7 @@
           <a:bodyPr wrap="square" lIns="0" tIns="0" rIns="0" bIns="0" rtlCol="0" anchor="ctr"/>
           <a:lstStyle/>
           <a:p>
-            <a:pPr marL="0" indent="0">
+            <a:pPr indent="0" marL="0">
               <a:buNone/>
             </a:pPr>
             <a:r>
@@ -3431,7 +3801,7 @@
           <a:bodyPr wrap="square" lIns="0" tIns="0" rIns="0" bIns="0" rtlCol="0" anchor="ctr"/>
           <a:lstStyle/>
           <a:p>
-            <a:pPr marL="0" indent="0" algn="r">
+            <a:pPr algn="r" indent="0" marL="0">
               <a:buNone/>
             </a:pPr>
             <a:r>
@@ -3470,7 +3840,7 @@
           <a:bodyPr wrap="square" lIns="0" tIns="0" rIns="0" bIns="0" rtlCol="0" anchor="ctr"/>
           <a:lstStyle/>
           <a:p>
-            <a:pPr marL="0" indent="0" algn="r">
+            <a:pPr algn="r" indent="0" marL="0">
               <a:buNone/>
             </a:pPr>
             <a:r>
@@ -3509,7 +3879,7 @@
           <a:bodyPr wrap="square" lIns="0" tIns="0" rIns="0" bIns="0" rtlCol="0" anchor="ctr"/>
           <a:lstStyle/>
           <a:p>
-            <a:pPr marL="0" indent="0">
+            <a:pPr indent="0" marL="0">
               <a:buNone/>
             </a:pPr>
             <a:r>
@@ -3548,7 +3918,7 @@
           <a:bodyPr wrap="square" lIns="0" tIns="0" rIns="0" bIns="0" rtlCol="0" anchor="ctr"/>
           <a:lstStyle/>
           <a:p>
-            <a:pPr marL="0" indent="0" algn="r">
+            <a:pPr algn="r" indent="0" marL="0">
               <a:buNone/>
             </a:pPr>
             <a:r>
@@ -3587,7 +3957,7 @@
           <a:bodyPr wrap="square" lIns="0" tIns="0" rIns="0" bIns="0" rtlCol="0" anchor="ctr"/>
           <a:lstStyle/>
           <a:p>
-            <a:pPr marL="0" indent="0">
+            <a:pPr indent="0" marL="0">
               <a:buNone/>
             </a:pPr>
             <a:r>
@@ -3626,7 +3996,7 @@
           <a:bodyPr wrap="square" lIns="0" tIns="0" rIns="0" bIns="0" rtlCol="0" anchor="ctr"/>
           <a:lstStyle/>
           <a:p>
-            <a:pPr marL="0" indent="0" algn="r">
+            <a:pPr algn="r" indent="0" marL="0">
               <a:buNone/>
             </a:pPr>
             <a:r>
@@ -3665,7 +4035,7 @@
           <a:bodyPr wrap="square" lIns="0" tIns="0" rIns="0" bIns="0" rtlCol="0" anchor="ctr"/>
           <a:lstStyle/>
           <a:p>
-            <a:pPr marL="0" indent="0">
+            <a:pPr indent="0" marL="0">
               <a:buNone/>
             </a:pPr>
             <a:r>
@@ -3704,7 +4074,7 @@
           <a:bodyPr wrap="square" lIns="0" tIns="0" rIns="0" bIns="0" rtlCol="0" anchor="ctr"/>
           <a:lstStyle/>
           <a:p>
-            <a:pPr marL="0" indent="0" algn="r">
+            <a:pPr algn="r" indent="0" marL="0">
               <a:buNone/>
             </a:pPr>
             <a:r>
@@ -3743,7 +4113,7 @@
           <a:bodyPr wrap="square" lIns="0" tIns="0" rIns="0" bIns="0" rtlCol="0" anchor="ctr"/>
           <a:lstStyle/>
           <a:p>
-            <a:pPr marL="0" indent="0">
+            <a:pPr indent="0" marL="0">
               <a:buNone/>
             </a:pPr>
             <a:r>
@@ -3782,7 +4152,7 @@
           <a:bodyPr wrap="square" lIns="0" tIns="0" rIns="0" bIns="0" rtlCol="0" anchor="ctr"/>
           <a:lstStyle/>
           <a:p>
-            <a:pPr marL="0" indent="0" algn="r">
+            <a:pPr algn="r" indent="0" marL="0">
               <a:buNone/>
             </a:pPr>
             <a:r>
@@ -3821,7 +4191,7 @@
           <a:bodyPr wrap="square" lIns="0" tIns="0" rIns="0" bIns="0" rtlCol="0" anchor="ctr"/>
           <a:lstStyle/>
           <a:p>
-            <a:pPr marL="0" indent="0">
+            <a:pPr indent="0" marL="0">
               <a:buNone/>
             </a:pPr>
             <a:r>
@@ -3860,7 +4230,7 @@
           <a:bodyPr wrap="square" lIns="0" tIns="0" rIns="0" bIns="0" rtlCol="0" anchor="ctr"/>
           <a:lstStyle/>
           <a:p>
-            <a:pPr marL="0" indent="0" algn="r">
+            <a:pPr algn="r" indent="0" marL="0">
               <a:buNone/>
             </a:pPr>
             <a:r>
@@ -3899,7 +4269,7 @@
           <a:bodyPr wrap="square" lIns="0" tIns="0" rIns="0" bIns="0" rtlCol="0" anchor="ctr"/>
           <a:lstStyle/>
           <a:p>
-            <a:pPr marL="0" indent="0">
+            <a:pPr indent="0" marL="0">
               <a:buNone/>
             </a:pPr>
             <a:r>
@@ -3938,7 +4308,7 @@
           <a:bodyPr wrap="square" lIns="0" tIns="0" rIns="0" bIns="0" rtlCol="0" anchor="ctr"/>
           <a:lstStyle/>
           <a:p>
-            <a:pPr marL="0" indent="0" algn="r">
+            <a:pPr algn="r" indent="0" marL="0">
               <a:buNone/>
             </a:pPr>
             <a:r>
@@ -3977,7 +4347,7 @@
           <a:bodyPr wrap="square" lIns="0" tIns="0" rIns="0" bIns="0" rtlCol="0" anchor="ctr"/>
           <a:lstStyle/>
           <a:p>
-            <a:pPr marL="0" indent="0">
+            <a:pPr indent="0" marL="0">
               <a:buNone/>
             </a:pPr>
             <a:r>
@@ -4016,7 +4386,7 @@
           <a:bodyPr wrap="square" lIns="0" tIns="0" rIns="0" bIns="0" rtlCol="0" anchor="ctr"/>
           <a:lstStyle/>
           <a:p>
-            <a:pPr marL="0" indent="0" algn="r">
+            <a:pPr algn="r" indent="0" marL="0">
               <a:buNone/>
             </a:pPr>
             <a:r>
@@ -4055,7 +4425,7 @@
           <a:bodyPr wrap="square" lIns="0" tIns="0" rIns="0" bIns="0" rtlCol="0" anchor="ctr"/>
           <a:lstStyle/>
           <a:p>
-            <a:pPr marL="0" indent="0">
+            <a:pPr indent="0" marL="0">
               <a:buNone/>
             </a:pPr>
             <a:r>
@@ -4094,7 +4464,7 @@
           <a:bodyPr wrap="square" lIns="0" tIns="0" rIns="0" bIns="0" rtlCol="0" anchor="ctr"/>
           <a:lstStyle/>
           <a:p>
-            <a:pPr marL="0" indent="0" algn="r">
+            <a:pPr algn="r" indent="0" marL="0">
               <a:buNone/>
             </a:pPr>
             <a:r>
@@ -4153,7 +4523,7 @@
           <a:bodyPr wrap="square" lIns="0" tIns="0" rIns="0" bIns="0" rtlCol="0" anchor="ctr"/>
           <a:lstStyle/>
           <a:p>
-            <a:pPr marL="0" indent="0">
+            <a:pPr indent="0" marL="0">
               <a:buNone/>
             </a:pPr>
             <a:r>
@@ -4192,7 +4562,7 @@
           <a:bodyPr wrap="square" lIns="0" tIns="0" rIns="0" bIns="0" rtlCol="0" anchor="ctr"/>
           <a:lstStyle/>
           <a:p>
-            <a:pPr marL="0" indent="0" algn="r">
+            <a:pPr algn="r" indent="0" marL="0">
               <a:buNone/>
             </a:pPr>
             <a:r>
@@ -4231,7 +4601,7 @@
           <a:bodyPr wrap="square" lIns="0" tIns="0" rIns="0" bIns="0" rtlCol="0" anchor="ctr"/>
           <a:lstStyle/>
           <a:p>
-            <a:pPr marL="0" indent="0" algn="r">
+            <a:pPr algn="r" indent="0" marL="0">
               <a:buNone/>
             </a:pPr>
             <a:r>
@@ -4277,7 +4647,7 @@
         </p:nvSpPr>
         <p:spPr>
           <a:xfrm>
-            <a:off x="868680" y="5877306"/>
+            <a:off x="868680" y="6025896"/>
             <a:ext cx="4297680" cy="384048"/>
           </a:xfrm>
           <a:prstGeom prst="rect">
@@ -4290,7 +4660,7 @@
           <a:bodyPr wrap="square" lIns="0" tIns="0" rIns="0" bIns="0" rtlCol="0" anchor="ctr"/>
           <a:lstStyle/>
           <a:p>
-            <a:pPr marL="0" indent="0">
+            <a:pPr indent="0" marL="0">
               <a:buNone/>
             </a:pPr>
             <a:r>
@@ -4304,6 +4674,9 @@
               </a:rPr>
               <a:t>OPERATING INCOME / MO  </a:t>
             </a:r>
+            <a:pPr indent="0" marL="0">
+              <a:buNone/>
+            </a:pPr>
             <a:r>
               <a:rPr lang="en-US" sz="850" dirty="0">
                 <a:solidFill>
@@ -4327,7 +4700,7 @@
         </p:nvSpPr>
         <p:spPr>
           <a:xfrm>
-            <a:off x="4892040" y="5877306"/>
+            <a:off x="4892040" y="6025896"/>
             <a:ext cx="1463040" cy="384048"/>
           </a:xfrm>
           <a:prstGeom prst="rect">
@@ -4340,7 +4713,7 @@
           <a:bodyPr wrap="square" lIns="0" tIns="0" rIns="0" bIns="0" rtlCol="0" anchor="ctr"/>
           <a:lstStyle/>
           <a:p>
-            <a:pPr marL="0" indent="0" algn="r">
+            <a:pPr algn="r" indent="0" marL="0">
               <a:buNone/>
             </a:pPr>
             <a:r>
@@ -4348,9 +4721,9 @@
                 <a:solidFill>
                   <a:srgbClr val="B6C800"/>
                 </a:solidFill>
-                <a:latin typeface="Georgia" pitchFamily="34" charset="0"/>
-                <a:ea typeface="Georgia" pitchFamily="34" charset="-122"/>
-                <a:cs typeface="Georgia" pitchFamily="34" charset="-120"/>
+                <a:latin typeface="Calibri" pitchFamily="34" charset="0"/>
+                <a:ea typeface="Calibri" pitchFamily="34" charset="-122"/>
+                <a:cs typeface="Calibri" pitchFamily="34" charset="-120"/>
               </a:rPr>
               <a:t>$521,737</a:t>
             </a:r>
@@ -4366,7 +4739,7 @@
         </p:nvSpPr>
         <p:spPr>
           <a:xfrm>
-            <a:off x="6400800" y="5900166"/>
+            <a:off x="6400800" y="6025896"/>
             <a:ext cx="457200" cy="384048"/>
           </a:xfrm>
           <a:prstGeom prst="rect">
@@ -4379,7 +4752,7 @@
           <a:bodyPr wrap="square" lIns="0" tIns="0" rIns="0" bIns="0" rtlCol="0" anchor="ctr"/>
           <a:lstStyle/>
           <a:p>
-            <a:pPr marL="0" indent="0" algn="r">
+            <a:pPr algn="r" indent="0" marL="0">
               <a:buNone/>
             </a:pPr>
             <a:r>
@@ -4423,7 +4796,7 @@
             <a:prstDash val="solid"/>
           </a:ln>
           <a:effectLst>
-            <a:outerShdw blurRad="177800" dist="63500" dir="5400000" algn="bl" rotWithShape="0">
+            <a:outerShdw sx="100000" sy="100000" kx="0" ky="0" algn="bl" rotWithShape="0" blurRad="177800" dist="63500" dir="5400000">
               <a:srgbClr val="3E00DB">
                 <a:alpha val="55000"/>
               </a:srgbClr>
@@ -4472,7 +4845,7 @@
           <a:bodyPr wrap="square" lIns="0" tIns="0" rIns="0" bIns="0" rtlCol="0" anchor="ctr"/>
           <a:lstStyle/>
           <a:p>
-            <a:pPr marL="0" indent="0">
+            <a:pPr indent="0" marL="0">
               <a:buNone/>
             </a:pPr>
             <a:r>
@@ -4511,7 +4884,7 @@
           <a:bodyPr wrap="square" lIns="0" tIns="0" rIns="0" bIns="0" rtlCol="0" anchor="t"/>
           <a:lstStyle/>
           <a:p>
-            <a:pPr marL="0" indent="0">
+            <a:pPr indent="0" marL="0">
               <a:buNone/>
             </a:pPr>
             <a:r>
@@ -4555,7 +4928,7 @@
             <a:prstDash val="solid"/>
           </a:ln>
           <a:effectLst>
-            <a:outerShdw blurRad="177800" dist="63500" dir="5400000" algn="bl" rotWithShape="0">
+            <a:outerShdw sx="100000" sy="100000" kx="0" ky="0" algn="bl" rotWithShape="0" blurRad="177800" dist="63500" dir="5400000">
               <a:srgbClr val="3E00DB">
                 <a:alpha val="55000"/>
               </a:srgbClr>
@@ -4604,7 +4977,7 @@
           <a:bodyPr wrap="square" lIns="0" tIns="0" rIns="0" bIns="0" rtlCol="0" anchor="ctr"/>
           <a:lstStyle/>
           <a:p>
-            <a:pPr marL="0" indent="0">
+            <a:pPr indent="0" marL="0">
               <a:buNone/>
             </a:pPr>
             <a:r>
@@ -4643,7 +5016,7 @@
           <a:bodyPr wrap="square" lIns="0" tIns="0" rIns="0" bIns="0" rtlCol="0" anchor="t"/>
           <a:lstStyle/>
           <a:p>
-            <a:pPr marL="0" indent="0">
+            <a:pPr indent="0" marL="0">
               <a:buNone/>
             </a:pPr>
             <a:r>
@@ -4682,11 +5055,11 @@
           <a:bodyPr wrap="square" lIns="0" tIns="0" rIns="0" bIns="0" rtlCol="0" anchor="ctr"/>
           <a:lstStyle/>
           <a:p>
-            <a:pPr marL="0" indent="0">
-              <a:buNone/>
-            </a:pPr>
-            <a:r>
-              <a:rPr lang="en-US" sz="850" kern="0" spc="100" dirty="0">
+            <a:pPr indent="0" marL="0">
+              <a:buNone/>
+            </a:pPr>
+            <a:r>
+              <a:rPr lang="en-US" sz="850" spc="100" kern="0" dirty="0">
                 <a:solidFill>
                   <a:srgbClr val="5A5570"/>
                 </a:solidFill>
@@ -4721,7 +5094,7 @@
           <a:bodyPr wrap="square" lIns="0" tIns="0" rIns="0" bIns="0" rtlCol="0" anchor="ctr"/>
           <a:lstStyle/>
           <a:p>
-            <a:pPr marL="0" indent="0" algn="r">
+            <a:pPr algn="r" indent="0" marL="0">
               <a:buNone/>
             </a:pPr>
             <a:r>
@@ -4760,7 +5133,7 @@
           <a:bodyPr wrap="square" lIns="0" tIns="0" rIns="0" bIns="0" rtlCol="0" anchor="ctr"/>
           <a:lstStyle/>
           <a:p>
-            <a:pPr marL="0" indent="0" algn="r">
+            <a:pPr algn="r" indent="0" marL="0">
               <a:buNone/>
             </a:pPr>
             <a:r>
@@ -4794,7 +5167,6 @@
         <a:solidFill>
           <a:srgbClr val="0A0A0F"/>
         </a:solidFill>
-        <a:effectLst/>
       </p:bgPr>
     </p:bg>
     <p:spTree>
@@ -4896,11 +5268,11 @@
           <a:bodyPr wrap="square" lIns="0" tIns="0" rIns="0" bIns="0" rtlCol="0" anchor="ctr"/>
           <a:lstStyle/>
           <a:p>
-            <a:pPr marL="0" indent="0" algn="l">
-              <a:buNone/>
-            </a:pPr>
-            <a:r>
-              <a:rPr lang="en-US" sz="1100" b="1" kern="0" spc="300" dirty="0">
+            <a:pPr algn="l" indent="0" marL="0">
+              <a:buNone/>
+            </a:pPr>
+            <a:r>
+              <a:rPr lang="en-US" sz="1100" b="1" spc="300" kern="0" dirty="0">
                 <a:solidFill>
                   <a:srgbClr val="B6C800"/>
                 </a:solidFill>
@@ -4935,7 +5307,7 @@
           <a:bodyPr wrap="square" lIns="0" tIns="0" rIns="0" bIns="0" rtlCol="0" anchor="t"/>
           <a:lstStyle/>
           <a:p>
-            <a:pPr marL="0" indent="0" algn="l">
+            <a:pPr algn="l" indent="0" marL="0">
               <a:lnSpc>
                 <a:spcPct val="100000"/>
               </a:lnSpc>
@@ -4977,7 +5349,7 @@
           <a:bodyPr wrap="square" lIns="0" tIns="0" rIns="0" bIns="0" rtlCol="0" anchor="ctr"/>
           <a:lstStyle/>
           <a:p>
-            <a:pPr marL="0" indent="0">
+            <a:pPr indent="0" marL="0">
               <a:buNone/>
             </a:pPr>
             <a:r>
@@ -5021,7 +5393,7 @@
             <a:prstDash val="solid"/>
           </a:ln>
           <a:effectLst>
-            <a:outerShdw blurRad="177800" dist="63500" dir="5400000" algn="bl" rotWithShape="0">
+            <a:outerShdw sx="100000" sy="100000" kx="0" ky="0" algn="bl" rotWithShape="0" blurRad="177800" dist="63500" dir="5400000">
               <a:srgbClr val="3E00DB">
                 <a:alpha val="55000"/>
               </a:srgbClr>
@@ -5050,11 +5422,11 @@
           <a:bodyPr wrap="square" lIns="0" tIns="0" rIns="0" bIns="0" rtlCol="0" anchor="ctr"/>
           <a:lstStyle/>
           <a:p>
-            <a:pPr marL="0" indent="0">
-              <a:buNone/>
-            </a:pPr>
-            <a:r>
-              <a:rPr lang="en-US" sz="1100" b="1" kern="0" spc="200" dirty="0">
+            <a:pPr indent="0" marL="0">
+              <a:buNone/>
+            </a:pPr>
+            <a:r>
+              <a:rPr lang="en-US" sz="1100" b="1" spc="200" kern="0" dirty="0">
                 <a:solidFill>
                   <a:srgbClr val="AEAEC2"/>
                 </a:solidFill>
@@ -5089,7 +5461,7 @@
           <a:bodyPr wrap="square" lIns="0" tIns="0" rIns="0" bIns="0" rtlCol="0" anchor="ctr"/>
           <a:lstStyle/>
           <a:p>
-            <a:pPr marL="0" indent="0">
+            <a:pPr indent="0" marL="0">
               <a:buNone/>
             </a:pPr>
             <a:r>
@@ -5128,7 +5500,7 @@
           <a:bodyPr wrap="square" lIns="0" tIns="0" rIns="0" bIns="0" rtlCol="0" anchor="ctr"/>
           <a:lstStyle/>
           <a:p>
-            <a:pPr marL="0" indent="0">
+            <a:pPr indent="0" marL="0">
               <a:buNone/>
             </a:pPr>
             <a:r>
@@ -5167,7 +5539,7 @@
           <a:bodyPr wrap="square" lIns="0" tIns="0" rIns="0" bIns="0" rtlCol="0" anchor="ctr"/>
           <a:lstStyle/>
           <a:p>
-            <a:pPr marL="0" indent="0">
+            <a:pPr indent="0" marL="0">
               <a:buNone/>
             </a:pPr>
             <a:r>
@@ -5206,7 +5578,7 @@
           <a:bodyPr wrap="square" lIns="0" tIns="0" rIns="0" bIns="0" rtlCol="0" anchor="ctr"/>
           <a:lstStyle/>
           <a:p>
-            <a:pPr marL="0" indent="0" algn="r">
+            <a:pPr algn="r" indent="0" marL="0">
               <a:buNone/>
             </a:pPr>
             <a:r>
@@ -5265,7 +5637,7 @@
           <a:bodyPr wrap="square" lIns="0" tIns="0" rIns="0" bIns="0" rtlCol="0" anchor="ctr"/>
           <a:lstStyle/>
           <a:p>
-            <a:pPr marL="0" indent="0">
+            <a:pPr indent="0" marL="0">
               <a:buNone/>
             </a:pPr>
             <a:r>
@@ -5304,7 +5676,7 @@
           <a:bodyPr wrap="square" lIns="0" tIns="0" rIns="0" bIns="0" rtlCol="0" anchor="ctr"/>
           <a:lstStyle/>
           <a:p>
-            <a:pPr marL="0" indent="0" algn="r">
+            <a:pPr algn="r" indent="0" marL="0">
               <a:buNone/>
             </a:pPr>
             <a:r>
@@ -5363,7 +5735,7 @@
           <a:bodyPr wrap="square" lIns="0" tIns="0" rIns="0" bIns="0" rtlCol="0" anchor="ctr"/>
           <a:lstStyle/>
           <a:p>
-            <a:pPr marL="0" indent="0">
+            <a:pPr indent="0" marL="0">
               <a:buNone/>
             </a:pPr>
             <a:r>
@@ -5402,7 +5774,7 @@
           <a:bodyPr wrap="square" lIns="0" tIns="0" rIns="0" bIns="0" rtlCol="0" anchor="ctr"/>
           <a:lstStyle/>
           <a:p>
-            <a:pPr marL="0" indent="0" algn="r">
+            <a:pPr algn="r" indent="0" marL="0">
               <a:buNone/>
             </a:pPr>
             <a:r>
@@ -5466,7 +5838,7 @@
             <a:prstDash val="solid"/>
           </a:ln>
           <a:effectLst>
-            <a:outerShdw blurRad="177800" dist="63500" dir="5400000" algn="bl" rotWithShape="0">
+            <a:outerShdw sx="100000" sy="100000" kx="0" ky="0" algn="bl" rotWithShape="0" blurRad="177800" dist="63500" dir="5400000">
               <a:srgbClr val="3E00DB">
                 <a:alpha val="55000"/>
               </a:srgbClr>
@@ -5517,11 +5889,11 @@
           <a:bodyPr wrap="square" lIns="0" tIns="0" rIns="0" bIns="0" rtlCol="0" anchor="ctr"/>
           <a:lstStyle/>
           <a:p>
-            <a:pPr marL="0" indent="0" algn="ctr">
-              <a:buNone/>
-            </a:pPr>
-            <a:r>
-              <a:rPr lang="en-US" sz="900" b="1" kern="0" spc="100" dirty="0">
+            <a:pPr algn="ctr" indent="0" marL="0">
+              <a:buNone/>
+            </a:pPr>
+            <a:r>
+              <a:rPr lang="en-US" sz="900" b="1" spc="100" kern="0" dirty="0">
                 <a:solidFill>
                   <a:srgbClr val="0A0A0F"/>
                 </a:solidFill>
@@ -5556,11 +5928,11 @@
           <a:bodyPr wrap="square" lIns="0" tIns="0" rIns="0" bIns="0" rtlCol="0" anchor="ctr"/>
           <a:lstStyle/>
           <a:p>
-            <a:pPr marL="0" indent="0">
-              <a:buNone/>
-            </a:pPr>
-            <a:r>
-              <a:rPr lang="en-US" sz="1100" b="1" kern="0" spc="200" dirty="0">
+            <a:pPr indent="0" marL="0">
+              <a:buNone/>
+            </a:pPr>
+            <a:r>
+              <a:rPr lang="en-US" sz="1100" b="1" spc="200" kern="0" dirty="0">
                 <a:solidFill>
                   <a:srgbClr val="B6C800"/>
                 </a:solidFill>
@@ -5595,7 +5967,7 @@
           <a:bodyPr wrap="square" lIns="0" tIns="0" rIns="0" bIns="0" rtlCol="0" anchor="ctr"/>
           <a:lstStyle/>
           <a:p>
-            <a:pPr marL="0" indent="0">
+            <a:pPr indent="0" marL="0">
               <a:buNone/>
             </a:pPr>
             <a:r>
@@ -5634,7 +6006,7 @@
           <a:bodyPr wrap="square" lIns="0" tIns="0" rIns="0" bIns="0" rtlCol="0" anchor="ctr"/>
           <a:lstStyle/>
           <a:p>
-            <a:pPr marL="0" indent="0">
+            <a:pPr indent="0" marL="0">
               <a:buNone/>
             </a:pPr>
             <a:r>
@@ -5673,7 +6045,7 @@
           <a:bodyPr wrap="square" lIns="0" tIns="0" rIns="0" bIns="0" rtlCol="0" anchor="ctr"/>
           <a:lstStyle/>
           <a:p>
-            <a:pPr marL="0" indent="0">
+            <a:pPr indent="0" marL="0">
               <a:buNone/>
             </a:pPr>
             <a:r>
@@ -5712,7 +6084,7 @@
           <a:bodyPr wrap="square" lIns="0" tIns="0" rIns="0" bIns="0" rtlCol="0" anchor="ctr"/>
           <a:lstStyle/>
           <a:p>
-            <a:pPr marL="0" indent="0" algn="r">
+            <a:pPr algn="r" indent="0" marL="0">
               <a:buNone/>
             </a:pPr>
             <a:r>
@@ -5771,7 +6143,7 @@
           <a:bodyPr wrap="square" lIns="0" tIns="0" rIns="0" bIns="0" rtlCol="0" anchor="ctr"/>
           <a:lstStyle/>
           <a:p>
-            <a:pPr marL="0" indent="0">
+            <a:pPr indent="0" marL="0">
               <a:buNone/>
             </a:pPr>
             <a:r>
@@ -5810,7 +6182,7 @@
           <a:bodyPr wrap="square" lIns="0" tIns="0" rIns="0" bIns="0" rtlCol="0" anchor="ctr"/>
           <a:lstStyle/>
           <a:p>
-            <a:pPr marL="0" indent="0" algn="r">
+            <a:pPr algn="r" indent="0" marL="0">
               <a:buNone/>
             </a:pPr>
             <a:r>
@@ -5869,7 +6241,7 @@
           <a:bodyPr wrap="square" lIns="0" tIns="0" rIns="0" bIns="0" rtlCol="0" anchor="ctr"/>
           <a:lstStyle/>
           <a:p>
-            <a:pPr marL="0" indent="0">
+            <a:pPr indent="0" marL="0">
               <a:buNone/>
             </a:pPr>
             <a:r>
@@ -5908,7 +6280,7 @@
           <a:bodyPr wrap="square" lIns="0" tIns="0" rIns="0" bIns="0" rtlCol="0" anchor="ctr"/>
           <a:lstStyle/>
           <a:p>
-            <a:pPr marL="0" indent="0" algn="r">
+            <a:pPr algn="r" indent="0" marL="0">
               <a:buNone/>
             </a:pPr>
             <a:r>
@@ -5972,7 +6344,7 @@
             <a:prstDash val="solid"/>
           </a:ln>
           <a:effectLst>
-            <a:outerShdw blurRad="177800" dist="63500" dir="5400000" algn="bl" rotWithShape="0">
+            <a:outerShdw sx="100000" sy="100000" kx="0" ky="0" algn="bl" rotWithShape="0" blurRad="177800" dist="63500" dir="5400000">
               <a:srgbClr val="3E00DB">
                 <a:alpha val="55000"/>
               </a:srgbClr>
@@ -6001,11 +6373,11 @@
           <a:bodyPr wrap="square" lIns="0" tIns="0" rIns="0" bIns="0" rtlCol="0" anchor="ctr"/>
           <a:lstStyle/>
           <a:p>
-            <a:pPr marL="0" indent="0">
-              <a:buNone/>
-            </a:pPr>
-            <a:r>
-              <a:rPr lang="en-US" sz="1100" b="1" kern="0" spc="200" dirty="0">
+            <a:pPr indent="0" marL="0">
+              <a:buNone/>
+            </a:pPr>
+            <a:r>
+              <a:rPr lang="en-US" sz="1100" b="1" spc="200" kern="0" dirty="0">
                 <a:solidFill>
                   <a:srgbClr val="AEAEC2"/>
                 </a:solidFill>
@@ -6040,7 +6412,7 @@
           <a:bodyPr wrap="square" lIns="0" tIns="0" rIns="0" bIns="0" rtlCol="0" anchor="ctr"/>
           <a:lstStyle/>
           <a:p>
-            <a:pPr marL="0" indent="0">
+            <a:pPr indent="0" marL="0">
               <a:buNone/>
             </a:pPr>
             <a:r>
@@ -6079,7 +6451,7 @@
           <a:bodyPr wrap="square" lIns="0" tIns="0" rIns="0" bIns="0" rtlCol="0" anchor="ctr"/>
           <a:lstStyle/>
           <a:p>
-            <a:pPr marL="0" indent="0">
+            <a:pPr indent="0" marL="0">
               <a:buNone/>
             </a:pPr>
             <a:r>
@@ -6118,7 +6490,7 @@
           <a:bodyPr wrap="square" lIns="0" tIns="0" rIns="0" bIns="0" rtlCol="0" anchor="ctr"/>
           <a:lstStyle/>
           <a:p>
-            <a:pPr marL="0" indent="0">
+            <a:pPr indent="0" marL="0">
               <a:buNone/>
             </a:pPr>
             <a:r>
@@ -6157,7 +6529,7 @@
           <a:bodyPr wrap="square" lIns="0" tIns="0" rIns="0" bIns="0" rtlCol="0" anchor="ctr"/>
           <a:lstStyle/>
           <a:p>
-            <a:pPr marL="0" indent="0" algn="r">
+            <a:pPr algn="r" indent="0" marL="0">
               <a:buNone/>
             </a:pPr>
             <a:r>
@@ -6216,7 +6588,7 @@
           <a:bodyPr wrap="square" lIns="0" tIns="0" rIns="0" bIns="0" rtlCol="0" anchor="ctr"/>
           <a:lstStyle/>
           <a:p>
-            <a:pPr marL="0" indent="0">
+            <a:pPr indent="0" marL="0">
               <a:buNone/>
             </a:pPr>
             <a:r>
@@ -6255,7 +6627,7 @@
           <a:bodyPr wrap="square" lIns="0" tIns="0" rIns="0" bIns="0" rtlCol="0" anchor="ctr"/>
           <a:lstStyle/>
           <a:p>
-            <a:pPr marL="0" indent="0" algn="r">
+            <a:pPr algn="r" indent="0" marL="0">
               <a:buNone/>
             </a:pPr>
             <a:r>
@@ -6314,7 +6686,7 @@
           <a:bodyPr wrap="square" lIns="0" tIns="0" rIns="0" bIns="0" rtlCol="0" anchor="ctr"/>
           <a:lstStyle/>
           <a:p>
-            <a:pPr marL="0" indent="0">
+            <a:pPr indent="0" marL="0">
               <a:buNone/>
             </a:pPr>
             <a:r>
@@ -6353,7 +6725,7 @@
           <a:bodyPr wrap="square" lIns="0" tIns="0" rIns="0" bIns="0" rtlCol="0" anchor="ctr"/>
           <a:lstStyle/>
           <a:p>
-            <a:pPr marL="0" indent="0" algn="r">
+            <a:pPr algn="r" indent="0" marL="0">
               <a:buNone/>
             </a:pPr>
             <a:r>
@@ -6412,11 +6784,11 @@
           <a:bodyPr wrap="square" lIns="0" tIns="0" rIns="0" bIns="0" rtlCol="0" anchor="ctr"/>
           <a:lstStyle/>
           <a:p>
-            <a:pPr marL="0" indent="0">
-              <a:buNone/>
-            </a:pPr>
-            <a:r>
-              <a:rPr lang="en-US" sz="850" kern="0" spc="100" dirty="0">
+            <a:pPr indent="0" marL="0">
+              <a:buNone/>
+            </a:pPr>
+            <a:r>
+              <a:rPr lang="en-US" sz="850" spc="100" kern="0" dirty="0">
                 <a:solidFill>
                   <a:srgbClr val="5A5570"/>
                 </a:solidFill>
@@ -6451,7 +6823,7 @@
           <a:bodyPr wrap="square" lIns="0" tIns="0" rIns="0" bIns="0" rtlCol="0" anchor="ctr"/>
           <a:lstStyle/>
           <a:p>
-            <a:pPr marL="0" indent="0" algn="r">
+            <a:pPr algn="r" indent="0" marL="0">
               <a:buNone/>
             </a:pPr>
             <a:r>
@@ -6490,7 +6862,7 @@
           <a:bodyPr wrap="square" lIns="0" tIns="0" rIns="0" bIns="0" rtlCol="0" anchor="ctr"/>
           <a:lstStyle/>
           <a:p>
-            <a:pPr marL="0" indent="0" algn="r">
+            <a:pPr algn="r" indent="0" marL="0">
               <a:buNone/>
             </a:pPr>
             <a:r>
@@ -6524,7 +6896,6 @@
         <a:solidFill>
           <a:srgbClr val="0A0A0F"/>
         </a:solidFill>
-        <a:effectLst/>
       </p:bgPr>
     </p:bg>
     <p:spTree>
@@ -6626,11 +6997,11 @@
           <a:bodyPr wrap="square" lIns="0" tIns="0" rIns="0" bIns="0" rtlCol="0" anchor="ctr"/>
           <a:lstStyle/>
           <a:p>
-            <a:pPr marL="0" indent="0" algn="l">
-              <a:buNone/>
-            </a:pPr>
-            <a:r>
-              <a:rPr lang="en-US" sz="1100" b="1" kern="0" spc="300" dirty="0">
+            <a:pPr algn="l" indent="0" marL="0">
+              <a:buNone/>
+            </a:pPr>
+            <a:r>
+              <a:rPr lang="en-US" sz="1100" b="1" spc="300" kern="0" dirty="0">
                 <a:solidFill>
                   <a:srgbClr val="B6C800"/>
                 </a:solidFill>
@@ -6665,7 +7036,7 @@
           <a:bodyPr wrap="square" lIns="0" tIns="0" rIns="0" bIns="0" rtlCol="0" anchor="t"/>
           <a:lstStyle/>
           <a:p>
-            <a:pPr marL="0" indent="0" algn="l">
+            <a:pPr algn="l" indent="0" marL="0">
               <a:lnSpc>
                 <a:spcPct val="100000"/>
               </a:lnSpc>
@@ -6752,7 +7123,7 @@
           <a:bodyPr wrap="square" lIns="0" tIns="0" rIns="0" bIns="0" rtlCol="0" anchor="ctr"/>
           <a:lstStyle/>
           <a:p>
-            <a:pPr marL="0" indent="0">
+            <a:pPr indent="0" marL="0">
               <a:buNone/>
             </a:pPr>
             <a:r>
@@ -6791,7 +7162,7 @@
           <a:bodyPr wrap="square" lIns="0" tIns="0" rIns="0" bIns="0" rtlCol="0" anchor="t"/>
           <a:lstStyle/>
           <a:p>
-            <a:pPr marL="0" indent="0">
+            <a:pPr indent="0" marL="0">
               <a:buNone/>
             </a:pPr>
             <a:r>
@@ -6830,7 +7201,7 @@
           <a:bodyPr wrap="square" lIns="0" tIns="0" rIns="0" bIns="0" rtlCol="0" anchor="t"/>
           <a:lstStyle/>
           <a:p>
-            <a:pPr marL="0" indent="0">
+            <a:pPr indent="0" marL="0">
               <a:lnSpc>
                 <a:spcPct val="105000"/>
               </a:lnSpc>
@@ -6897,7 +7268,7 @@
           <a:bodyPr wrap="square" lIns="0" tIns="0" rIns="0" bIns="0" rtlCol="0" anchor="ctr"/>
           <a:lstStyle/>
           <a:p>
-            <a:pPr marL="0" indent="0">
+            <a:pPr indent="0" marL="0">
               <a:buNone/>
             </a:pPr>
             <a:r>
@@ -6936,7 +7307,7 @@
           <a:bodyPr wrap="square" lIns="0" tIns="0" rIns="0" bIns="0" rtlCol="0" anchor="t"/>
           <a:lstStyle/>
           <a:p>
-            <a:pPr marL="0" indent="0">
+            <a:pPr indent="0" marL="0">
               <a:buNone/>
             </a:pPr>
             <a:r>
@@ -6975,7 +7346,7 @@
           <a:bodyPr wrap="square" lIns="0" tIns="0" rIns="0" bIns="0" rtlCol="0" anchor="t"/>
           <a:lstStyle/>
           <a:p>
-            <a:pPr marL="0" indent="0">
+            <a:pPr indent="0" marL="0">
               <a:lnSpc>
                 <a:spcPct val="105000"/>
               </a:lnSpc>
@@ -7042,7 +7413,7 @@
           <a:bodyPr wrap="square" lIns="0" tIns="0" rIns="0" bIns="0" rtlCol="0" anchor="ctr"/>
           <a:lstStyle/>
           <a:p>
-            <a:pPr marL="0" indent="0">
+            <a:pPr indent="0" marL="0">
               <a:buNone/>
             </a:pPr>
             <a:r>
@@ -7081,7 +7452,7 @@
           <a:bodyPr wrap="square" lIns="0" tIns="0" rIns="0" bIns="0" rtlCol="0" anchor="t"/>
           <a:lstStyle/>
           <a:p>
-            <a:pPr marL="0" indent="0">
+            <a:pPr indent="0" marL="0">
               <a:buNone/>
             </a:pPr>
             <a:r>
@@ -7120,7 +7491,7 @@
           <a:bodyPr wrap="square" lIns="0" tIns="0" rIns="0" bIns="0" rtlCol="0" anchor="t"/>
           <a:lstStyle/>
           <a:p>
-            <a:pPr marL="0" indent="0">
+            <a:pPr indent="0" marL="0">
               <a:lnSpc>
                 <a:spcPct val="105000"/>
               </a:lnSpc>
@@ -7187,7 +7558,7 @@
           <a:bodyPr wrap="square" lIns="0" tIns="0" rIns="0" bIns="0" rtlCol="0" anchor="ctr"/>
           <a:lstStyle/>
           <a:p>
-            <a:pPr marL="0" indent="0">
+            <a:pPr indent="0" marL="0">
               <a:buNone/>
             </a:pPr>
             <a:r>
@@ -7226,7 +7597,7 @@
           <a:bodyPr wrap="square" lIns="0" tIns="0" rIns="0" bIns="0" rtlCol="0" anchor="t"/>
           <a:lstStyle/>
           <a:p>
-            <a:pPr marL="0" indent="0">
+            <a:pPr indent="0" marL="0">
               <a:buNone/>
             </a:pPr>
             <a:r>
@@ -7265,7 +7636,7 @@
           <a:bodyPr wrap="square" lIns="0" tIns="0" rIns="0" bIns="0" rtlCol="0" anchor="t"/>
           <a:lstStyle/>
           <a:p>
-            <a:pPr marL="0" indent="0">
+            <a:pPr indent="0" marL="0">
               <a:lnSpc>
                 <a:spcPct val="105000"/>
               </a:lnSpc>
@@ -7332,7 +7703,7 @@
           <a:bodyPr wrap="square" lIns="0" tIns="0" rIns="0" bIns="0" rtlCol="0" anchor="ctr"/>
           <a:lstStyle/>
           <a:p>
-            <a:pPr marL="0" indent="0">
+            <a:pPr indent="0" marL="0">
               <a:buNone/>
             </a:pPr>
             <a:r>
@@ -7371,7 +7742,7 @@
           <a:bodyPr wrap="square" lIns="0" tIns="0" rIns="0" bIns="0" rtlCol="0" anchor="t"/>
           <a:lstStyle/>
           <a:p>
-            <a:pPr marL="0" indent="0">
+            <a:pPr indent="0" marL="0">
               <a:buNone/>
             </a:pPr>
             <a:r>
@@ -7410,7 +7781,7 @@
           <a:bodyPr wrap="square" lIns="0" tIns="0" rIns="0" bIns="0" rtlCol="0" anchor="t"/>
           <a:lstStyle/>
           <a:p>
-            <a:pPr marL="0" indent="0">
+            <a:pPr indent="0" marL="0">
               <a:lnSpc>
                 <a:spcPct val="105000"/>
               </a:lnSpc>
@@ -7452,11 +7823,11 @@
           <a:bodyPr wrap="square" lIns="0" tIns="0" rIns="0" bIns="0" rtlCol="0" anchor="ctr"/>
           <a:lstStyle/>
           <a:p>
-            <a:pPr marL="0" indent="0">
-              <a:buNone/>
-            </a:pPr>
-            <a:r>
-              <a:rPr lang="en-US" sz="850" kern="0" spc="100" dirty="0">
+            <a:pPr indent="0" marL="0">
+              <a:buNone/>
+            </a:pPr>
+            <a:r>
+              <a:rPr lang="en-US" sz="850" spc="100" kern="0" dirty="0">
                 <a:solidFill>
                   <a:srgbClr val="5A5570"/>
                 </a:solidFill>
@@ -7491,7 +7862,7 @@
           <a:bodyPr wrap="square" lIns="0" tIns="0" rIns="0" bIns="0" rtlCol="0" anchor="ctr"/>
           <a:lstStyle/>
           <a:p>
-            <a:pPr marL="0" indent="0" algn="r">
+            <a:pPr algn="r" indent="0" marL="0">
               <a:buNone/>
             </a:pPr>
             <a:r>
@@ -7530,7 +7901,7 @@
           <a:bodyPr wrap="square" lIns="0" tIns="0" rIns="0" bIns="0" rtlCol="0" anchor="ctr"/>
           <a:lstStyle/>
           <a:p>
-            <a:pPr marL="0" indent="0" algn="r">
+            <a:pPr algn="r" indent="0" marL="0">
               <a:buNone/>
             </a:pPr>
             <a:r>
@@ -7564,7 +7935,6 @@
         <a:solidFill>
           <a:srgbClr val="0A0A0F"/>
         </a:solidFill>
-        <a:effectLst/>
       </p:bgPr>
     </p:bg>
     <p:spTree>
@@ -7666,11 +8036,11 @@
           <a:bodyPr wrap="square" lIns="0" tIns="0" rIns="0" bIns="0" rtlCol="0" anchor="ctr"/>
           <a:lstStyle/>
           <a:p>
-            <a:pPr marL="0" indent="0" algn="l">
-              <a:buNone/>
-            </a:pPr>
-            <a:r>
-              <a:rPr lang="en-US" sz="1100" b="1" kern="0" spc="300" dirty="0">
+            <a:pPr algn="l" indent="0" marL="0">
+              <a:buNone/>
+            </a:pPr>
+            <a:r>
+              <a:rPr lang="en-US" sz="1100" b="1" spc="300" kern="0" dirty="0">
                 <a:solidFill>
                   <a:srgbClr val="B6C800"/>
                 </a:solidFill>
@@ -7705,7 +8075,7 @@
           <a:bodyPr wrap="square" lIns="0" tIns="0" rIns="0" bIns="0" rtlCol="0" anchor="t"/>
           <a:lstStyle/>
           <a:p>
-            <a:pPr marL="0" indent="0" algn="l">
+            <a:pPr algn="l" indent="0" marL="0">
               <a:lnSpc>
                 <a:spcPct val="100000"/>
               </a:lnSpc>
@@ -7752,7 +8122,7 @@
             <a:prstDash val="solid"/>
           </a:ln>
           <a:effectLst>
-            <a:outerShdw blurRad="177800" dist="63500" dir="5400000" algn="bl" rotWithShape="0">
+            <a:outerShdw sx="100000" sy="100000" kx="0" ky="0" algn="bl" rotWithShape="0" blurRad="177800" dist="63500" dir="5400000">
               <a:srgbClr val="3E00DB">
                 <a:alpha val="55000"/>
               </a:srgbClr>
@@ -7801,7 +8171,7 @@
           <a:bodyPr wrap="square" lIns="0" tIns="0" rIns="0" bIns="0" rtlCol="0" anchor="t"/>
           <a:lstStyle/>
           <a:p>
-            <a:pPr marL="0" indent="0">
+            <a:pPr indent="0" marL="0">
               <a:buNone/>
             </a:pPr>
             <a:r>
@@ -7840,7 +8210,7 @@
           <a:bodyPr wrap="square" lIns="0" tIns="0" rIns="0" bIns="0" rtlCol="0" anchor="t"/>
           <a:lstStyle/>
           <a:p>
-            <a:pPr marL="0" indent="0">
+            <a:pPr indent="0" marL="0">
               <a:lnSpc>
                 <a:spcPct val="100000"/>
               </a:lnSpc>
@@ -7887,7 +8257,7 @@
             <a:prstDash val="solid"/>
           </a:ln>
           <a:effectLst>
-            <a:outerShdw blurRad="177800" dist="63500" dir="5400000" algn="bl" rotWithShape="0">
+            <a:outerShdw sx="100000" sy="100000" kx="0" ky="0" algn="bl" rotWithShape="0" blurRad="177800" dist="63500" dir="5400000">
               <a:srgbClr val="3E00DB">
                 <a:alpha val="55000"/>
               </a:srgbClr>
@@ -7936,7 +8306,7 @@
           <a:bodyPr wrap="square" lIns="0" tIns="0" rIns="0" bIns="0" rtlCol="0" anchor="t"/>
           <a:lstStyle/>
           <a:p>
-            <a:pPr marL="0" indent="0">
+            <a:pPr indent="0" marL="0">
               <a:buNone/>
             </a:pPr>
             <a:r>
@@ -7975,7 +8345,7 @@
           <a:bodyPr wrap="square" lIns="0" tIns="0" rIns="0" bIns="0" rtlCol="0" anchor="t"/>
           <a:lstStyle/>
           <a:p>
-            <a:pPr marL="0" indent="0">
+            <a:pPr indent="0" marL="0">
               <a:lnSpc>
                 <a:spcPct val="100000"/>
               </a:lnSpc>
@@ -8022,7 +8392,7 @@
             <a:prstDash val="solid"/>
           </a:ln>
           <a:effectLst>
-            <a:outerShdw blurRad="177800" dist="63500" dir="5400000" algn="bl" rotWithShape="0">
+            <a:outerShdw sx="100000" sy="100000" kx="0" ky="0" algn="bl" rotWithShape="0" blurRad="177800" dist="63500" dir="5400000">
               <a:srgbClr val="3E00DB">
                 <a:alpha val="55000"/>
               </a:srgbClr>
@@ -8071,7 +8441,7 @@
           <a:bodyPr wrap="square" lIns="0" tIns="0" rIns="0" bIns="0" rtlCol="0" anchor="t"/>
           <a:lstStyle/>
           <a:p>
-            <a:pPr marL="0" indent="0">
+            <a:pPr indent="0" marL="0">
               <a:buNone/>
             </a:pPr>
             <a:r>
@@ -8110,7 +8480,7 @@
           <a:bodyPr wrap="square" lIns="0" tIns="0" rIns="0" bIns="0" rtlCol="0" anchor="t"/>
           <a:lstStyle/>
           <a:p>
-            <a:pPr marL="0" indent="0">
+            <a:pPr indent="0" marL="0">
               <a:lnSpc>
                 <a:spcPct val="100000"/>
               </a:lnSpc>
@@ -8157,7 +8527,7 @@
             <a:prstDash val="solid"/>
           </a:ln>
           <a:effectLst>
-            <a:outerShdw blurRad="177800" dist="63500" dir="5400000" algn="bl" rotWithShape="0">
+            <a:outerShdw sx="100000" sy="100000" kx="0" ky="0" algn="bl" rotWithShape="0" blurRad="177800" dist="63500" dir="5400000">
               <a:srgbClr val="3E00DB">
                 <a:alpha val="55000"/>
               </a:srgbClr>
@@ -8206,7 +8576,7 @@
           <a:bodyPr wrap="square" lIns="0" tIns="0" rIns="0" bIns="0" rtlCol="0" anchor="t"/>
           <a:lstStyle/>
           <a:p>
-            <a:pPr marL="0" indent="0">
+            <a:pPr indent="0" marL="0">
               <a:buNone/>
             </a:pPr>
             <a:r>
@@ -8245,7 +8615,7 @@
           <a:bodyPr wrap="square" lIns="0" tIns="0" rIns="0" bIns="0" rtlCol="0" anchor="t"/>
           <a:lstStyle/>
           <a:p>
-            <a:pPr marL="0" indent="0">
+            <a:pPr indent="0" marL="0">
               <a:lnSpc>
                 <a:spcPct val="100000"/>
               </a:lnSpc>
@@ -8292,7 +8662,7 @@
             <a:prstDash val="solid"/>
           </a:ln>
           <a:effectLst>
-            <a:outerShdw blurRad="177800" dist="63500" dir="5400000" algn="bl" rotWithShape="0">
+            <a:outerShdw sx="100000" sy="100000" kx="0" ky="0" algn="bl" rotWithShape="0" blurRad="177800" dist="63500" dir="5400000">
               <a:srgbClr val="3E00DB">
                 <a:alpha val="55000"/>
               </a:srgbClr>
@@ -8341,7 +8711,7 @@
           <a:bodyPr wrap="square" lIns="0" tIns="0" rIns="0" bIns="0" rtlCol="0" anchor="t"/>
           <a:lstStyle/>
           <a:p>
-            <a:pPr marL="0" indent="0">
+            <a:pPr indent="0" marL="0">
               <a:buNone/>
             </a:pPr>
             <a:r>
@@ -8380,7 +8750,7 @@
           <a:bodyPr wrap="square" lIns="0" tIns="0" rIns="0" bIns="0" rtlCol="0" anchor="t"/>
           <a:lstStyle/>
           <a:p>
-            <a:pPr marL="0" indent="0">
+            <a:pPr indent="0" marL="0">
               <a:lnSpc>
                 <a:spcPct val="100000"/>
               </a:lnSpc>
@@ -8427,7 +8797,7 @@
             <a:prstDash val="solid"/>
           </a:ln>
           <a:effectLst>
-            <a:outerShdw blurRad="177800" dist="63500" dir="5400000" algn="bl" rotWithShape="0">
+            <a:outerShdw sx="100000" sy="100000" kx="0" ky="0" algn="bl" rotWithShape="0" blurRad="177800" dist="63500" dir="5400000">
               <a:srgbClr val="3E00DB">
                 <a:alpha val="55000"/>
               </a:srgbClr>
@@ -8476,7 +8846,7 @@
           <a:bodyPr wrap="square" lIns="0" tIns="0" rIns="0" bIns="0" rtlCol="0" anchor="t"/>
           <a:lstStyle/>
           <a:p>
-            <a:pPr marL="0" indent="0">
+            <a:pPr indent="0" marL="0">
               <a:buNone/>
             </a:pPr>
             <a:r>
@@ -8515,7 +8885,7 @@
           <a:bodyPr wrap="square" lIns="0" tIns="0" rIns="0" bIns="0" rtlCol="0" anchor="t"/>
           <a:lstStyle/>
           <a:p>
-            <a:pPr marL="0" indent="0">
+            <a:pPr indent="0" marL="0">
               <a:lnSpc>
                 <a:spcPct val="100000"/>
               </a:lnSpc>
@@ -8562,7 +8932,7 @@
             <a:prstDash val="solid"/>
           </a:ln>
           <a:effectLst>
-            <a:outerShdw blurRad="177800" dist="63500" dir="5400000" algn="bl" rotWithShape="0">
+            <a:outerShdw sx="100000" sy="100000" kx="0" ky="0" algn="bl" rotWithShape="0" blurRad="177800" dist="63500" dir="5400000">
               <a:srgbClr val="3E00DB">
                 <a:alpha val="55000"/>
               </a:srgbClr>
@@ -8611,7 +8981,7 @@
           <a:bodyPr wrap="square" lIns="0" tIns="0" rIns="0" bIns="0" rtlCol="0" anchor="t"/>
           <a:lstStyle/>
           <a:p>
-            <a:pPr marL="0" indent="0">
+            <a:pPr indent="0" marL="0">
               <a:buNone/>
             </a:pPr>
             <a:r>
@@ -8650,7 +9020,7 @@
           <a:bodyPr wrap="square" lIns="0" tIns="0" rIns="0" bIns="0" rtlCol="0" anchor="t"/>
           <a:lstStyle/>
           <a:p>
-            <a:pPr marL="0" indent="0">
+            <a:pPr indent="0" marL="0">
               <a:lnSpc>
                 <a:spcPct val="100000"/>
               </a:lnSpc>
@@ -8697,7 +9067,7 @@
             <a:prstDash val="solid"/>
           </a:ln>
           <a:effectLst>
-            <a:outerShdw blurRad="177800" dist="63500" dir="5400000" algn="bl" rotWithShape="0">
+            <a:outerShdw sx="100000" sy="100000" kx="0" ky="0" algn="bl" rotWithShape="0" blurRad="177800" dist="63500" dir="5400000">
               <a:srgbClr val="3E00DB">
                 <a:alpha val="55000"/>
               </a:srgbClr>
@@ -8746,7 +9116,7 @@
           <a:bodyPr wrap="square" lIns="0" tIns="0" rIns="0" bIns="0" rtlCol="0" anchor="t"/>
           <a:lstStyle/>
           <a:p>
-            <a:pPr marL="0" indent="0">
+            <a:pPr indent="0" marL="0">
               <a:buNone/>
             </a:pPr>
             <a:r>
@@ -8785,7 +9155,7 @@
           <a:bodyPr wrap="square" lIns="0" tIns="0" rIns="0" bIns="0" rtlCol="0" anchor="t"/>
           <a:lstStyle/>
           <a:p>
-            <a:pPr marL="0" indent="0">
+            <a:pPr indent="0" marL="0">
               <a:lnSpc>
                 <a:spcPct val="100000"/>
               </a:lnSpc>
@@ -8827,11 +9197,11 @@
           <a:bodyPr wrap="square" lIns="0" tIns="0" rIns="0" bIns="0" rtlCol="0" anchor="ctr"/>
           <a:lstStyle/>
           <a:p>
-            <a:pPr marL="0" indent="0">
-              <a:buNone/>
-            </a:pPr>
-            <a:r>
-              <a:rPr lang="en-US" sz="850" kern="0" spc="100" dirty="0">
+            <a:pPr indent="0" marL="0">
+              <a:buNone/>
+            </a:pPr>
+            <a:r>
+              <a:rPr lang="en-US" sz="850" spc="100" kern="0" dirty="0">
                 <a:solidFill>
                   <a:srgbClr val="5A5570"/>
                 </a:solidFill>
@@ -8866,7 +9236,7 @@
           <a:bodyPr wrap="square" lIns="0" tIns="0" rIns="0" bIns="0" rtlCol="0" anchor="ctr"/>
           <a:lstStyle/>
           <a:p>
-            <a:pPr marL="0" indent="0" algn="r">
+            <a:pPr algn="r" indent="0" marL="0">
               <a:buNone/>
             </a:pPr>
             <a:r>
@@ -8905,7 +9275,7 @@
           <a:bodyPr wrap="square" lIns="0" tIns="0" rIns="0" bIns="0" rtlCol="0" anchor="ctr"/>
           <a:lstStyle/>
           <a:p>
-            <a:pPr marL="0" indent="0" algn="r">
+            <a:pPr algn="r" indent="0" marL="0">
               <a:buNone/>
             </a:pPr>
             <a:r>
@@ -8939,7 +9309,6 @@
         <a:solidFill>
           <a:srgbClr val="0A0A0F"/>
         </a:solidFill>
-        <a:effectLst/>
       </p:bgPr>
     </p:bg>
     <p:spTree>
@@ -9041,11 +9410,11 @@
           <a:bodyPr wrap="square" lIns="0" tIns="0" rIns="0" bIns="0" rtlCol="0" anchor="ctr"/>
           <a:lstStyle/>
           <a:p>
-            <a:pPr marL="0" indent="0" algn="l">
-              <a:buNone/>
-            </a:pPr>
-            <a:r>
-              <a:rPr lang="en-US" sz="1100" b="1" kern="0" spc="300" dirty="0">
+            <a:pPr algn="l" indent="0" marL="0">
+              <a:buNone/>
+            </a:pPr>
+            <a:r>
+              <a:rPr lang="en-US" sz="1100" b="1" spc="300" kern="0" dirty="0">
                 <a:solidFill>
                   <a:srgbClr val="B6C800"/>
                 </a:solidFill>
@@ -9085,7 +9454,7 @@
             <a:prstDash val="solid"/>
           </a:ln>
           <a:effectLst>
-            <a:outerShdw blurRad="177800" dist="63500" dir="5400000" algn="bl" rotWithShape="0">
+            <a:outerShdw sx="100000" sy="100000" kx="0" ky="0" algn="bl" rotWithShape="0" blurRad="177800" dist="63500" dir="5400000">
               <a:srgbClr val="3E00DB">
                 <a:alpha val="55000"/>
               </a:srgbClr>
@@ -9114,11 +9483,11 @@
           <a:bodyPr wrap="square" lIns="0" tIns="0" rIns="0" bIns="0" rtlCol="0" anchor="ctr"/>
           <a:lstStyle/>
           <a:p>
-            <a:pPr marL="0" indent="0">
-              <a:buNone/>
-            </a:pPr>
-            <a:r>
-              <a:rPr lang="en-US" sz="1200" b="1" kern="0" spc="300" dirty="0">
+            <a:pPr indent="0" marL="0">
+              <a:buNone/>
+            </a:pPr>
+            <a:r>
+              <a:rPr lang="en-US" sz="1200" b="1" spc="300" kern="0" dirty="0">
                 <a:solidFill>
                   <a:srgbClr val="B6C800"/>
                 </a:solidFill>
@@ -9153,7 +9522,7 @@
           <a:bodyPr wrap="square" lIns="0" tIns="0" rIns="0" bIns="0" rtlCol="0" anchor="ctr"/>
           <a:lstStyle/>
           <a:p>
-            <a:pPr marL="0" indent="0">
+            <a:pPr indent="0" marL="0">
               <a:buNone/>
             </a:pPr>
             <a:r>
@@ -9192,7 +9561,7 @@
           <a:bodyPr wrap="square" lIns="0" tIns="0" rIns="0" bIns="0" rtlCol="0" anchor="t"/>
           <a:lstStyle/>
           <a:p>
-            <a:pPr marL="0" indent="0">
+            <a:pPr indent="0" marL="0">
               <a:lnSpc>
                 <a:spcPct val="105000"/>
               </a:lnSpc>
@@ -9254,11 +9623,11 @@
           <a:bodyPr wrap="square" lIns="0" tIns="0" rIns="0" bIns="0" rtlCol="0" anchor="ctr"/>
           <a:lstStyle/>
           <a:p>
-            <a:pPr marL="0" indent="0">
-              <a:buNone/>
-            </a:pPr>
-            <a:r>
-              <a:rPr lang="en-US" sz="950" b="1" kern="0" spc="150" dirty="0">
+            <a:pPr indent="0" marL="0">
+              <a:buNone/>
+            </a:pPr>
+            <a:r>
+              <a:rPr lang="en-US" sz="950" b="1" spc="150" kern="0" dirty="0">
                 <a:solidFill>
                   <a:srgbClr val="AEAEC2"/>
                 </a:solidFill>
@@ -9293,7 +9662,7 @@
           <a:bodyPr wrap="square" lIns="0" tIns="0" rIns="0" bIns="0" rtlCol="0" anchor="t"/>
           <a:lstStyle/>
           <a:p>
-            <a:pPr marL="0" indent="0">
+            <a:pPr indent="0" marL="0">
               <a:buNone/>
             </a:pPr>
             <a:r>
@@ -9332,11 +9701,11 @@
           <a:bodyPr wrap="square" lIns="0" tIns="0" rIns="0" bIns="0" rtlCol="0" anchor="ctr"/>
           <a:lstStyle/>
           <a:p>
-            <a:pPr marL="0" indent="0">
-              <a:buNone/>
-            </a:pPr>
-            <a:r>
-              <a:rPr lang="en-US" sz="950" b="1" kern="0" spc="150" dirty="0">
+            <a:pPr indent="0" marL="0">
+              <a:buNone/>
+            </a:pPr>
+            <a:r>
+              <a:rPr lang="en-US" sz="950" b="1" spc="150" kern="0" dirty="0">
                 <a:solidFill>
                   <a:srgbClr val="AEAEC2"/>
                 </a:solidFill>
@@ -9371,7 +9740,7 @@
           <a:bodyPr wrap="square" lIns="0" tIns="0" rIns="0" bIns="0" rtlCol="0" anchor="t"/>
           <a:lstStyle/>
           <a:p>
-            <a:pPr marL="0" indent="0">
+            <a:pPr indent="0" marL="0">
               <a:buNone/>
             </a:pPr>
             <a:r>
@@ -9410,11 +9779,11 @@
           <a:bodyPr wrap="square" lIns="0" tIns="0" rIns="0" bIns="0" rtlCol="0" anchor="ctr"/>
           <a:lstStyle/>
           <a:p>
-            <a:pPr marL="0" indent="0">
-              <a:buNone/>
-            </a:pPr>
-            <a:r>
-              <a:rPr lang="en-US" sz="950" b="1" kern="0" spc="150" dirty="0">
+            <a:pPr indent="0" marL="0">
+              <a:buNone/>
+            </a:pPr>
+            <a:r>
+              <a:rPr lang="en-US" sz="950" b="1" spc="150" kern="0" dirty="0">
                 <a:solidFill>
                   <a:srgbClr val="AEAEC2"/>
                 </a:solidFill>
@@ -9449,7 +9818,7 @@
           <a:bodyPr wrap="square" lIns="0" tIns="0" rIns="0" bIns="0" rtlCol="0" anchor="t"/>
           <a:lstStyle/>
           <a:p>
-            <a:pPr marL="0" indent="0">
+            <a:pPr indent="0" marL="0">
               <a:buNone/>
             </a:pPr>
             <a:r>
@@ -9488,7 +9857,7 @@
           <a:bodyPr wrap="square" lIns="0" tIns="0" rIns="0" bIns="0" rtlCol="0" anchor="ctr"/>
           <a:lstStyle/>
           <a:p>
-            <a:pPr marL="0" indent="0">
+            <a:pPr indent="0" marL="0">
               <a:buNone/>
             </a:pPr>
             <a:r>
@@ -9547,11 +9916,11 @@
           <a:bodyPr wrap="square" lIns="0" tIns="0" rIns="0" bIns="0" rtlCol="0" anchor="ctr"/>
           <a:lstStyle/>
           <a:p>
-            <a:pPr marL="0" indent="0" algn="l">
-              <a:buNone/>
-            </a:pPr>
-            <a:r>
-              <a:rPr lang="en-US" sz="1100" b="1" kern="0" spc="300" dirty="0">
+            <a:pPr algn="l" indent="0" marL="0">
+              <a:buNone/>
+            </a:pPr>
+            <a:r>
+              <a:rPr lang="en-US" sz="1100" b="1" spc="300" kern="0" dirty="0">
                 <a:solidFill>
                   <a:srgbClr val="B6C800"/>
                 </a:solidFill>
@@ -9613,7 +9982,7 @@
           <a:bodyPr wrap="square" lIns="0" tIns="0" rIns="0" bIns="0" rtlCol="0" anchor="ctr"/>
           <a:lstStyle/>
           <a:p>
-            <a:pPr marL="0" indent="0">
+            <a:pPr indent="0" marL="0">
               <a:buNone/>
             </a:pPr>
             <a:r>
@@ -9652,7 +10021,7 @@
           <a:bodyPr wrap="square" lIns="0" tIns="0" rIns="0" bIns="0" rtlCol="0" anchor="ctr"/>
           <a:lstStyle/>
           <a:p>
-            <a:pPr marL="0" indent="0" algn="r">
+            <a:pPr algn="r" indent="0" marL="0">
               <a:buNone/>
             </a:pPr>
             <a:r>
@@ -9718,7 +10087,7 @@
           <a:bodyPr wrap="square" lIns="0" tIns="0" rIns="0" bIns="0" rtlCol="0" anchor="ctr"/>
           <a:lstStyle/>
           <a:p>
-            <a:pPr marL="0" indent="0">
+            <a:pPr indent="0" marL="0">
               <a:buNone/>
             </a:pPr>
             <a:r>
@@ -9757,7 +10126,7 @@
           <a:bodyPr wrap="square" lIns="0" tIns="0" rIns="0" bIns="0" rtlCol="0" anchor="ctr"/>
           <a:lstStyle/>
           <a:p>
-            <a:pPr marL="0" indent="0" algn="r">
+            <a:pPr algn="r" indent="0" marL="0">
               <a:buNone/>
             </a:pPr>
             <a:r>
@@ -9823,7 +10192,7 @@
           <a:bodyPr wrap="square" lIns="0" tIns="0" rIns="0" bIns="0" rtlCol="0" anchor="ctr"/>
           <a:lstStyle/>
           <a:p>
-            <a:pPr marL="0" indent="0">
+            <a:pPr indent="0" marL="0">
               <a:buNone/>
             </a:pPr>
             <a:r>
@@ -9862,7 +10231,7 @@
           <a:bodyPr wrap="square" lIns="0" tIns="0" rIns="0" bIns="0" rtlCol="0" anchor="ctr"/>
           <a:lstStyle/>
           <a:p>
-            <a:pPr marL="0" indent="0" algn="r">
+            <a:pPr algn="r" indent="0" marL="0">
               <a:buNone/>
             </a:pPr>
             <a:r>
@@ -9928,7 +10297,7 @@
           <a:bodyPr wrap="square" lIns="0" tIns="0" rIns="0" bIns="0" rtlCol="0" anchor="ctr"/>
           <a:lstStyle/>
           <a:p>
-            <a:pPr marL="0" indent="0">
+            <a:pPr indent="0" marL="0">
               <a:buNone/>
             </a:pPr>
             <a:r>
@@ -9967,7 +10336,7 @@
           <a:bodyPr wrap="square" lIns="0" tIns="0" rIns="0" bIns="0" rtlCol="0" anchor="ctr"/>
           <a:lstStyle/>
           <a:p>
-            <a:pPr marL="0" indent="0" algn="r">
+            <a:pPr algn="r" indent="0" marL="0">
               <a:buNone/>
             </a:pPr>
             <a:r>
@@ -10033,7 +10402,7 @@
           <a:bodyPr wrap="square" lIns="0" tIns="0" rIns="0" bIns="0" rtlCol="0" anchor="ctr"/>
           <a:lstStyle/>
           <a:p>
-            <a:pPr marL="0" indent="0">
+            <a:pPr indent="0" marL="0">
               <a:buNone/>
             </a:pPr>
             <a:r>
@@ -10072,7 +10441,7 @@
           <a:bodyPr wrap="square" lIns="0" tIns="0" rIns="0" bIns="0" rtlCol="0" anchor="ctr"/>
           <a:lstStyle/>
           <a:p>
-            <a:pPr marL="0" indent="0" algn="r">
+            <a:pPr algn="r" indent="0" marL="0">
               <a:buNone/>
             </a:pPr>
             <a:r>
@@ -10138,11 +10507,11 @@
           <a:bodyPr wrap="square" lIns="0" tIns="0" rIns="0" bIns="0" rtlCol="0" anchor="ctr"/>
           <a:lstStyle/>
           <a:p>
-            <a:pPr marL="0" indent="0">
-              <a:buNone/>
-            </a:pPr>
-            <a:r>
-              <a:rPr lang="en-US" sz="1100" b="1" kern="0" spc="100" dirty="0">
+            <a:pPr indent="0" marL="0">
+              <a:buNone/>
+            </a:pPr>
+            <a:r>
+              <a:rPr lang="en-US" sz="1100" b="1" spc="100" kern="0" dirty="0">
                 <a:solidFill>
                   <a:srgbClr val="FFFFFF"/>
                 </a:solidFill>
@@ -10177,7 +10546,7 @@
           <a:bodyPr wrap="square" lIns="0" tIns="0" rIns="0" bIns="0" rtlCol="0" anchor="ctr"/>
           <a:lstStyle/>
           <a:p>
-            <a:pPr marL="0" indent="0" algn="r">
+            <a:pPr algn="r" indent="0" marL="0">
               <a:buNone/>
             </a:pPr>
             <a:r>
@@ -10216,11 +10585,11 @@
           <a:bodyPr wrap="square" lIns="0" tIns="0" rIns="0" bIns="0" rtlCol="0" anchor="ctr"/>
           <a:lstStyle/>
           <a:p>
-            <a:pPr marL="0" indent="0">
-              <a:buNone/>
-            </a:pPr>
-            <a:r>
-              <a:rPr lang="en-US" sz="850" kern="0" spc="100" dirty="0">
+            <a:pPr indent="0" marL="0">
+              <a:buNone/>
+            </a:pPr>
+            <a:r>
+              <a:rPr lang="en-US" sz="850" spc="100" kern="0" dirty="0">
                 <a:solidFill>
                   <a:srgbClr val="5A5570"/>
                 </a:solidFill>
@@ -10255,7 +10624,7 @@
           <a:bodyPr wrap="square" lIns="0" tIns="0" rIns="0" bIns="0" rtlCol="0" anchor="ctr"/>
           <a:lstStyle/>
           <a:p>
-            <a:pPr marL="0" indent="0" algn="r">
+            <a:pPr algn="r" indent="0" marL="0">
               <a:buNone/>
             </a:pPr>
             <a:r>
@@ -10294,7 +10663,7 @@
           <a:bodyPr wrap="square" lIns="0" tIns="0" rIns="0" bIns="0" rtlCol="0" anchor="ctr"/>
           <a:lstStyle/>
           <a:p>
-            <a:pPr marL="0" indent="0" algn="r">
+            <a:pPr algn="r" indent="0" marL="0">
               <a:buNone/>
             </a:pPr>
             <a:r>
@@ -10328,7 +10697,6 @@
         <a:solidFill>
           <a:srgbClr val="0A0A0F"/>
         </a:solidFill>
-        <a:effectLst/>
       </p:bgPr>
     </p:bg>
     <p:spTree>
@@ -10430,11 +10798,11 @@
           <a:bodyPr wrap="square" lIns="0" tIns="0" rIns="0" bIns="0" rtlCol="0" anchor="ctr"/>
           <a:lstStyle/>
           <a:p>
-            <a:pPr marL="0" indent="0" algn="l">
-              <a:buNone/>
-            </a:pPr>
-            <a:r>
-              <a:rPr lang="en-US" sz="1100" b="1" kern="0" spc="300" dirty="0">
+            <a:pPr algn="l" indent="0" marL="0">
+              <a:buNone/>
+            </a:pPr>
+            <a:r>
+              <a:rPr lang="en-US" sz="1100" b="1" spc="300" kern="0" dirty="0">
                 <a:solidFill>
                   <a:srgbClr val="B6C800"/>
                 </a:solidFill>
@@ -10469,7 +10837,7 @@
           <a:bodyPr wrap="square" lIns="0" tIns="0" rIns="0" bIns="0" rtlCol="0" anchor="t"/>
           <a:lstStyle/>
           <a:p>
-            <a:pPr marL="0" indent="0" algn="l">
+            <a:pPr algn="l" indent="0" marL="0">
               <a:lnSpc>
                 <a:spcPct val="100000"/>
               </a:lnSpc>
@@ -10511,7 +10879,7 @@
           <a:bodyPr wrap="square" lIns="0" tIns="0" rIns="0" bIns="0" rtlCol="0" anchor="ctr"/>
           <a:lstStyle/>
           <a:p>
-            <a:pPr marL="0" indent="0">
+            <a:pPr indent="0" marL="0">
               <a:lnSpc>
                 <a:spcPct val="105000"/>
               </a:lnSpc>
@@ -10558,7 +10926,7 @@
             <a:prstDash val="solid"/>
           </a:ln>
           <a:effectLst>
-            <a:outerShdw blurRad="177800" dist="63500" dir="5400000" algn="bl" rotWithShape="0">
+            <a:outerShdw sx="100000" sy="100000" kx="0" ky="0" algn="bl" rotWithShape="0" blurRad="177800" dist="63500" dir="5400000">
               <a:srgbClr val="3E00DB">
                 <a:alpha val="55000"/>
               </a:srgbClr>
@@ -10607,7 +10975,7 @@
           <a:bodyPr wrap="square" lIns="0" tIns="0" rIns="0" bIns="0" rtlCol="0" anchor="ctr"/>
           <a:lstStyle/>
           <a:p>
-            <a:pPr marL="0" indent="0">
+            <a:pPr indent="0" marL="0">
               <a:buNone/>
             </a:pPr>
             <a:r>
@@ -10646,7 +11014,7 @@
           <a:bodyPr wrap="square" lIns="0" tIns="0" rIns="0" bIns="0" rtlCol="0" anchor="t"/>
           <a:lstStyle/>
           <a:p>
-            <a:pPr marL="0" indent="0">
+            <a:pPr indent="0" marL="0">
               <a:lnSpc>
                 <a:spcPct val="105000"/>
               </a:lnSpc>
@@ -10693,7 +11061,7 @@
             <a:prstDash val="solid"/>
           </a:ln>
           <a:effectLst>
-            <a:outerShdw blurRad="177800" dist="63500" dir="5400000" algn="bl" rotWithShape="0">
+            <a:outerShdw sx="100000" sy="100000" kx="0" ky="0" algn="bl" rotWithShape="0" blurRad="177800" dist="63500" dir="5400000">
               <a:srgbClr val="3E00DB">
                 <a:alpha val="55000"/>
               </a:srgbClr>
@@ -10742,7 +11110,7 @@
           <a:bodyPr wrap="square" lIns="0" tIns="0" rIns="0" bIns="0" rtlCol="0" anchor="ctr"/>
           <a:lstStyle/>
           <a:p>
-            <a:pPr marL="0" indent="0">
+            <a:pPr indent="0" marL="0">
               <a:buNone/>
             </a:pPr>
             <a:r>
@@ -10781,7 +11149,7 @@
           <a:bodyPr wrap="square" lIns="0" tIns="0" rIns="0" bIns="0" rtlCol="0" anchor="t"/>
           <a:lstStyle/>
           <a:p>
-            <a:pPr marL="0" indent="0">
+            <a:pPr indent="0" marL="0">
               <a:lnSpc>
                 <a:spcPct val="105000"/>
               </a:lnSpc>
@@ -10828,7 +11196,7 @@
             <a:prstDash val="solid"/>
           </a:ln>
           <a:effectLst>
-            <a:outerShdw blurRad="177800" dist="63500" dir="5400000" algn="bl" rotWithShape="0">
+            <a:outerShdw sx="100000" sy="100000" kx="0" ky="0" algn="bl" rotWithShape="0" blurRad="177800" dist="63500" dir="5400000">
               <a:srgbClr val="3E00DB">
                 <a:alpha val="55000"/>
               </a:srgbClr>
@@ -10857,7 +11225,7 @@
           <a:bodyPr wrap="square" lIns="0" tIns="0" rIns="0" bIns="0" rtlCol="0" anchor="t"/>
           <a:lstStyle/>
           <a:p>
-            <a:pPr marL="0" indent="0">
+            <a:pPr indent="0" marL="0">
               <a:buNone/>
             </a:pPr>
             <a:r>
@@ -10896,7 +11264,7 @@
           <a:bodyPr wrap="square" lIns="0" tIns="0" rIns="0" bIns="0" rtlCol="0" anchor="t"/>
           <a:lstStyle/>
           <a:p>
-            <a:pPr marL="0" indent="0">
+            <a:pPr indent="0" marL="0">
               <a:lnSpc>
                 <a:spcPct val="100000"/>
               </a:lnSpc>
@@ -10943,7 +11311,7 @@
             <a:prstDash val="solid"/>
           </a:ln>
           <a:effectLst>
-            <a:outerShdw blurRad="177800" dist="63500" dir="5400000" algn="bl" rotWithShape="0">
+            <a:outerShdw sx="100000" sy="100000" kx="0" ky="0" algn="bl" rotWithShape="0" blurRad="177800" dist="63500" dir="5400000">
               <a:srgbClr val="3E00DB">
                 <a:alpha val="55000"/>
               </a:srgbClr>
@@ -10972,7 +11340,7 @@
           <a:bodyPr wrap="square" lIns="0" tIns="0" rIns="0" bIns="0" rtlCol="0" anchor="t"/>
           <a:lstStyle/>
           <a:p>
-            <a:pPr marL="0" indent="0">
+            <a:pPr indent="0" marL="0">
               <a:buNone/>
             </a:pPr>
             <a:r>
@@ -11011,7 +11379,7 @@
           <a:bodyPr wrap="square" lIns="0" tIns="0" rIns="0" bIns="0" rtlCol="0" anchor="t"/>
           <a:lstStyle/>
           <a:p>
-            <a:pPr marL="0" indent="0">
+            <a:pPr indent="0" marL="0">
               <a:lnSpc>
                 <a:spcPct val="100000"/>
               </a:lnSpc>
@@ -11058,7 +11426,7 @@
             <a:prstDash val="solid"/>
           </a:ln>
           <a:effectLst>
-            <a:outerShdw blurRad="177800" dist="63500" dir="5400000" algn="bl" rotWithShape="0">
+            <a:outerShdw sx="100000" sy="100000" kx="0" ky="0" algn="bl" rotWithShape="0" blurRad="177800" dist="63500" dir="5400000">
               <a:srgbClr val="3E00DB">
                 <a:alpha val="55000"/>
               </a:srgbClr>
@@ -11087,7 +11455,7 @@
           <a:bodyPr wrap="square" lIns="0" tIns="0" rIns="0" bIns="0" rtlCol="0" anchor="t"/>
           <a:lstStyle/>
           <a:p>
-            <a:pPr marL="0" indent="0">
+            <a:pPr indent="0" marL="0">
               <a:buNone/>
             </a:pPr>
             <a:r>
@@ -11126,7 +11494,7 @@
           <a:bodyPr wrap="square" lIns="0" tIns="0" rIns="0" bIns="0" rtlCol="0" anchor="t"/>
           <a:lstStyle/>
           <a:p>
-            <a:pPr marL="0" indent="0">
+            <a:pPr indent="0" marL="0">
               <a:lnSpc>
                 <a:spcPct val="100000"/>
               </a:lnSpc>
@@ -11168,7 +11536,7 @@
           <a:bodyPr wrap="square" lIns="0" tIns="0" rIns="0" bIns="0" rtlCol="0" anchor="ctr"/>
           <a:lstStyle/>
           <a:p>
-            <a:pPr marL="0" indent="0">
+            <a:pPr indent="0" marL="0">
               <a:buNone/>
             </a:pPr>
             <a:r>
@@ -11207,11 +11575,11 @@
           <a:bodyPr wrap="square" lIns="0" tIns="0" rIns="0" bIns="0" rtlCol="0" anchor="ctr"/>
           <a:lstStyle/>
           <a:p>
-            <a:pPr marL="0" indent="0">
-              <a:buNone/>
-            </a:pPr>
-            <a:r>
-              <a:rPr lang="en-US" sz="850" kern="0" spc="100" dirty="0">
+            <a:pPr indent="0" marL="0">
+              <a:buNone/>
+            </a:pPr>
+            <a:r>
+              <a:rPr lang="en-US" sz="850" spc="100" kern="0" dirty="0">
                 <a:solidFill>
                   <a:srgbClr val="5A5570"/>
                 </a:solidFill>
@@ -11246,7 +11614,7 @@
           <a:bodyPr wrap="square" lIns="0" tIns="0" rIns="0" bIns="0" rtlCol="0" anchor="ctr"/>
           <a:lstStyle/>
           <a:p>
-            <a:pPr marL="0" indent="0" algn="r">
+            <a:pPr algn="r" indent="0" marL="0">
               <a:buNone/>
             </a:pPr>
             <a:r>
@@ -11285,7 +11653,7 @@
           <a:bodyPr wrap="square" lIns="0" tIns="0" rIns="0" bIns="0" rtlCol="0" anchor="ctr"/>
           <a:lstStyle/>
           <a:p>
-            <a:pPr marL="0" indent="0" algn="r">
+            <a:pPr algn="r" indent="0" marL="0">
               <a:buNone/>
             </a:pPr>
             <a:r>
@@ -11319,7 +11687,6 @@
         <a:solidFill>
           <a:srgbClr val="0A0A0F"/>
         </a:solidFill>
-        <a:effectLst/>
       </p:bgPr>
     </p:bg>
     <p:spTree>
@@ -11421,11 +11788,11 @@
           <a:bodyPr wrap="square" lIns="0" tIns="0" rIns="0" bIns="0" rtlCol="0" anchor="ctr"/>
           <a:lstStyle/>
           <a:p>
-            <a:pPr marL="0" indent="0" algn="l">
-              <a:buNone/>
-            </a:pPr>
-            <a:r>
-              <a:rPr lang="en-US" sz="1100" b="1" kern="0" spc="300" dirty="0">
+            <a:pPr algn="l" indent="0" marL="0">
+              <a:buNone/>
+            </a:pPr>
+            <a:r>
+              <a:rPr lang="en-US" sz="1100" b="1" spc="300" kern="0" dirty="0">
                 <a:solidFill>
                   <a:srgbClr val="B6C800"/>
                 </a:solidFill>
@@ -11460,7 +11827,7 @@
           <a:bodyPr wrap="square" lIns="0" tIns="0" rIns="0" bIns="0" rtlCol="0" anchor="t"/>
           <a:lstStyle/>
           <a:p>
-            <a:pPr marL="0" indent="0" algn="l">
+            <a:pPr algn="l" indent="0" marL="0">
               <a:lnSpc>
                 <a:spcPct val="100000"/>
               </a:lnSpc>
@@ -11502,7 +11869,7 @@
           <a:bodyPr wrap="square" lIns="0" tIns="0" rIns="0" bIns="0" rtlCol="0" anchor="ctr"/>
           <a:lstStyle/>
           <a:p>
-            <a:pPr marL="0" indent="0">
+            <a:pPr indent="0" marL="0">
               <a:lnSpc>
                 <a:spcPct val="105000"/>
               </a:lnSpc>
@@ -11549,7 +11916,7 @@
             <a:prstDash val="solid"/>
           </a:ln>
           <a:effectLst>
-            <a:outerShdw blurRad="177800" dist="63500" dir="5400000" algn="bl" rotWithShape="0">
+            <a:outerShdw sx="100000" sy="100000" kx="0" ky="0" algn="bl" rotWithShape="0" blurRad="177800" dist="63500" dir="5400000">
               <a:srgbClr val="3E00DB">
                 <a:alpha val="55000"/>
               </a:srgbClr>
@@ -11598,11 +11965,11 @@
           <a:bodyPr wrap="square" lIns="0" tIns="0" rIns="0" bIns="0" rtlCol="0" anchor="ctr"/>
           <a:lstStyle/>
           <a:p>
-            <a:pPr marL="0" indent="0">
-              <a:buNone/>
-            </a:pPr>
-            <a:r>
-              <a:rPr lang="en-US" sz="900" b="1" kern="0" spc="150" dirty="0">
+            <a:pPr indent="0" marL="0">
+              <a:buNone/>
+            </a:pPr>
+            <a:r>
+              <a:rPr lang="en-US" sz="900" b="1" spc="150" kern="0" dirty="0">
                 <a:solidFill>
                   <a:srgbClr val="AEAEC2"/>
                 </a:solidFill>
@@ -11637,7 +12004,7 @@
           <a:bodyPr wrap="square" lIns="0" tIns="0" rIns="0" bIns="0" rtlCol="0" anchor="t"/>
           <a:lstStyle/>
           <a:p>
-            <a:pPr marL="0" indent="0">
+            <a:pPr indent="0" marL="0">
               <a:buNone/>
             </a:pPr>
             <a:r>
@@ -11676,7 +12043,7 @@
           <a:bodyPr wrap="square" lIns="0" tIns="0" rIns="0" bIns="0" rtlCol="0" anchor="t"/>
           <a:lstStyle/>
           <a:p>
-            <a:pPr marL="0" indent="0">
+            <a:pPr indent="0" marL="0">
               <a:lnSpc>
                 <a:spcPct val="100000"/>
               </a:lnSpc>
@@ -11723,7 +12090,7 @@
             <a:prstDash val="solid"/>
           </a:ln>
           <a:effectLst>
-            <a:outerShdw blurRad="177800" dist="63500" dir="5400000" algn="bl" rotWithShape="0">
+            <a:outerShdw sx="100000" sy="100000" kx="0" ky="0" algn="bl" rotWithShape="0" blurRad="177800" dist="63500" dir="5400000">
               <a:srgbClr val="3E00DB">
                 <a:alpha val="55000"/>
               </a:srgbClr>
@@ -11772,11 +12139,11 @@
           <a:bodyPr wrap="square" lIns="0" tIns="0" rIns="0" bIns="0" rtlCol="0" anchor="ctr"/>
           <a:lstStyle/>
           <a:p>
-            <a:pPr marL="0" indent="0">
-              <a:buNone/>
-            </a:pPr>
-            <a:r>
-              <a:rPr lang="en-US" sz="900" b="1" kern="0" spc="150" dirty="0">
+            <a:pPr indent="0" marL="0">
+              <a:buNone/>
+            </a:pPr>
+            <a:r>
+              <a:rPr lang="en-US" sz="900" b="1" spc="150" kern="0" dirty="0">
                 <a:solidFill>
                   <a:srgbClr val="CDD6FF"/>
                 </a:solidFill>
@@ -11811,7 +12178,7 @@
           <a:bodyPr wrap="square" lIns="0" tIns="0" rIns="0" bIns="0" rtlCol="0" anchor="t"/>
           <a:lstStyle/>
           <a:p>
-            <a:pPr marL="0" indent="0">
+            <a:pPr indent="0" marL="0">
               <a:buNone/>
             </a:pPr>
             <a:r>
@@ -11850,7 +12217,7 @@
           <a:bodyPr wrap="square" lIns="0" tIns="0" rIns="0" bIns="0" rtlCol="0" anchor="t"/>
           <a:lstStyle/>
           <a:p>
-            <a:pPr marL="0" indent="0">
+            <a:pPr indent="0" marL="0">
               <a:lnSpc>
                 <a:spcPct val="100000"/>
               </a:lnSpc>
@@ -11897,7 +12264,7 @@
             <a:prstDash val="solid"/>
           </a:ln>
           <a:effectLst>
-            <a:outerShdw blurRad="177800" dist="63500" dir="5400000" algn="bl" rotWithShape="0">
+            <a:outerShdw sx="100000" sy="100000" kx="0" ky="0" algn="bl" rotWithShape="0" blurRad="177800" dist="63500" dir="5400000">
               <a:srgbClr val="3E00DB">
                 <a:alpha val="55000"/>
               </a:srgbClr>
@@ -11946,11 +12313,11 @@
           <a:bodyPr wrap="square" lIns="0" tIns="0" rIns="0" bIns="0" rtlCol="0" anchor="ctr"/>
           <a:lstStyle/>
           <a:p>
-            <a:pPr marL="0" indent="0">
-              <a:buNone/>
-            </a:pPr>
-            <a:r>
-              <a:rPr lang="en-US" sz="900" b="1" kern="0" spc="150" dirty="0">
+            <a:pPr indent="0" marL="0">
+              <a:buNone/>
+            </a:pPr>
+            <a:r>
+              <a:rPr lang="en-US" sz="900" b="1" spc="150" kern="0" dirty="0">
                 <a:solidFill>
                   <a:srgbClr val="AEAEC2"/>
                 </a:solidFill>
@@ -11985,7 +12352,7 @@
           <a:bodyPr wrap="square" lIns="0" tIns="0" rIns="0" bIns="0" rtlCol="0" anchor="t"/>
           <a:lstStyle/>
           <a:p>
-            <a:pPr marL="0" indent="0">
+            <a:pPr indent="0" marL="0">
               <a:buNone/>
             </a:pPr>
             <a:r>
@@ -12024,7 +12391,7 @@
           <a:bodyPr wrap="square" lIns="0" tIns="0" rIns="0" bIns="0" rtlCol="0" anchor="t"/>
           <a:lstStyle/>
           <a:p>
-            <a:pPr marL="0" indent="0">
+            <a:pPr indent="0" marL="0">
               <a:lnSpc>
                 <a:spcPct val="100000"/>
               </a:lnSpc>
@@ -12071,7 +12438,7 @@
             <a:prstDash val="solid"/>
           </a:ln>
           <a:effectLst>
-            <a:outerShdw blurRad="177800" dist="63500" dir="5400000" algn="bl" rotWithShape="0">
+            <a:outerShdw sx="100000" sy="100000" kx="0" ky="0" algn="bl" rotWithShape="0" blurRad="177800" dist="63500" dir="5400000">
               <a:srgbClr val="3E00DB">
                 <a:alpha val="55000"/>
               </a:srgbClr>
@@ -12120,11 +12487,11 @@
           <a:bodyPr wrap="square" lIns="0" tIns="0" rIns="0" bIns="0" rtlCol="0" anchor="ctr"/>
           <a:lstStyle/>
           <a:p>
-            <a:pPr marL="0" indent="0">
-              <a:buNone/>
-            </a:pPr>
-            <a:r>
-              <a:rPr lang="en-US" sz="900" b="1" kern="0" spc="150" dirty="0">
+            <a:pPr indent="0" marL="0">
+              <a:buNone/>
+            </a:pPr>
+            <a:r>
+              <a:rPr lang="en-US" sz="900" b="1" spc="150" kern="0" dirty="0">
                 <a:solidFill>
                   <a:srgbClr val="CDD6FF"/>
                 </a:solidFill>
@@ -12159,7 +12526,7 @@
           <a:bodyPr wrap="square" lIns="0" tIns="0" rIns="0" bIns="0" rtlCol="0" anchor="t"/>
           <a:lstStyle/>
           <a:p>
-            <a:pPr marL="0" indent="0">
+            <a:pPr indent="0" marL="0">
               <a:buNone/>
             </a:pPr>
             <a:r>
@@ -12198,7 +12565,7 @@
           <a:bodyPr wrap="square" lIns="0" tIns="0" rIns="0" bIns="0" rtlCol="0" anchor="t"/>
           <a:lstStyle/>
           <a:p>
-            <a:pPr marL="0" indent="0">
+            <a:pPr indent="0" marL="0">
               <a:lnSpc>
                 <a:spcPct val="100000"/>
               </a:lnSpc>
@@ -12245,7 +12612,7 @@
             <a:prstDash val="solid"/>
           </a:ln>
           <a:effectLst>
-            <a:outerShdw blurRad="177800" dist="63500" dir="5400000" algn="bl" rotWithShape="0">
+            <a:outerShdw sx="100000" sy="100000" kx="0" ky="0" algn="bl" rotWithShape="0" blurRad="177800" dist="63500" dir="5400000">
               <a:srgbClr val="3E00DB">
                 <a:alpha val="55000"/>
               </a:srgbClr>
@@ -12294,11 +12661,11 @@
           <a:bodyPr wrap="square" lIns="0" tIns="0" rIns="0" bIns="0" rtlCol="0" anchor="ctr"/>
           <a:lstStyle/>
           <a:p>
-            <a:pPr marL="0" indent="0">
-              <a:buNone/>
-            </a:pPr>
-            <a:r>
-              <a:rPr lang="en-US" sz="900" b="1" kern="0" spc="150" dirty="0">
+            <a:pPr indent="0" marL="0">
+              <a:buNone/>
+            </a:pPr>
+            <a:r>
+              <a:rPr lang="en-US" sz="900" b="1" spc="150" kern="0" dirty="0">
                 <a:solidFill>
                   <a:srgbClr val="AEAEC2"/>
                 </a:solidFill>
@@ -12333,7 +12700,7 @@
           <a:bodyPr wrap="square" lIns="0" tIns="0" rIns="0" bIns="0" rtlCol="0" anchor="t"/>
           <a:lstStyle/>
           <a:p>
-            <a:pPr marL="0" indent="0">
+            <a:pPr indent="0" marL="0">
               <a:buNone/>
             </a:pPr>
             <a:r>
@@ -12372,7 +12739,7 @@
           <a:bodyPr wrap="square" lIns="0" tIns="0" rIns="0" bIns="0" rtlCol="0" anchor="t"/>
           <a:lstStyle/>
           <a:p>
-            <a:pPr marL="0" indent="0">
+            <a:pPr indent="0" marL="0">
               <a:lnSpc>
                 <a:spcPct val="100000"/>
               </a:lnSpc>
@@ -12419,7 +12786,7 @@
             <a:prstDash val="solid"/>
           </a:ln>
           <a:effectLst>
-            <a:outerShdw blurRad="177800" dist="63500" dir="5400000" algn="bl" rotWithShape="0">
+            <a:outerShdw sx="100000" sy="100000" kx="0" ky="0" algn="bl" rotWithShape="0" blurRad="177800" dist="63500" dir="5400000">
               <a:srgbClr val="3E00DB">
                 <a:alpha val="55000"/>
               </a:srgbClr>
@@ -12468,11 +12835,11 @@
           <a:bodyPr wrap="square" lIns="0" tIns="0" rIns="0" bIns="0" rtlCol="0" anchor="ctr"/>
           <a:lstStyle/>
           <a:p>
-            <a:pPr marL="0" indent="0">
-              <a:buNone/>
-            </a:pPr>
-            <a:r>
-              <a:rPr lang="en-US" sz="900" b="1" kern="0" spc="150" dirty="0">
+            <a:pPr indent="0" marL="0">
+              <a:buNone/>
+            </a:pPr>
+            <a:r>
+              <a:rPr lang="en-US" sz="900" b="1" spc="150" kern="0" dirty="0">
                 <a:solidFill>
                   <a:srgbClr val="CDD6FF"/>
                 </a:solidFill>
@@ -12507,7 +12874,7 @@
           <a:bodyPr wrap="square" lIns="0" tIns="0" rIns="0" bIns="0" rtlCol="0" anchor="t"/>
           <a:lstStyle/>
           <a:p>
-            <a:pPr marL="0" indent="0">
+            <a:pPr indent="0" marL="0">
               <a:buNone/>
             </a:pPr>
             <a:r>
@@ -12546,7 +12913,7 @@
           <a:bodyPr wrap="square" lIns="0" tIns="0" rIns="0" bIns="0" rtlCol="0" anchor="t"/>
           <a:lstStyle/>
           <a:p>
-            <a:pPr marL="0" indent="0">
+            <a:pPr indent="0" marL="0">
               <a:lnSpc>
                 <a:spcPct val="100000"/>
               </a:lnSpc>
@@ -12588,11 +12955,11 @@
           <a:bodyPr wrap="square" lIns="0" tIns="0" rIns="0" bIns="0" rtlCol="0" anchor="ctr"/>
           <a:lstStyle/>
           <a:p>
-            <a:pPr marL="0" indent="0">
-              <a:buNone/>
-            </a:pPr>
-            <a:r>
-              <a:rPr lang="en-US" sz="850" kern="0" spc="100" dirty="0">
+            <a:pPr indent="0" marL="0">
+              <a:buNone/>
+            </a:pPr>
+            <a:r>
+              <a:rPr lang="en-US" sz="850" spc="100" kern="0" dirty="0">
                 <a:solidFill>
                   <a:srgbClr val="5A5570"/>
                 </a:solidFill>
@@ -12627,7 +12994,7 @@
           <a:bodyPr wrap="square" lIns="0" tIns="0" rIns="0" bIns="0" rtlCol="0" anchor="ctr"/>
           <a:lstStyle/>
           <a:p>
-            <a:pPr marL="0" indent="0" algn="r">
+            <a:pPr algn="r" indent="0" marL="0">
               <a:buNone/>
             </a:pPr>
             <a:r>
@@ -12666,7 +13033,7 @@
           <a:bodyPr wrap="square" lIns="0" tIns="0" rIns="0" bIns="0" rtlCol="0" anchor="ctr"/>
           <a:lstStyle/>
           <a:p>
-            <a:pPr marL="0" indent="0" algn="r">
+            <a:pPr algn="r" indent="0" marL="0">
               <a:buNone/>
             </a:pPr>
             <a:r>
@@ -12700,7 +13067,6 @@
         <a:solidFill>
           <a:srgbClr val="0A0A0F"/>
         </a:solidFill>
-        <a:effectLst/>
       </p:bgPr>
     </p:bg>
     <p:spTree>
@@ -12802,11 +13168,11 @@
           <a:bodyPr wrap="square" lIns="0" tIns="0" rIns="0" bIns="0" rtlCol="0" anchor="ctr"/>
           <a:lstStyle/>
           <a:p>
-            <a:pPr marL="0" indent="0" algn="l">
-              <a:buNone/>
-            </a:pPr>
-            <a:r>
-              <a:rPr lang="en-US" sz="1100" b="1" kern="0" spc="300" dirty="0">
+            <a:pPr algn="l" indent="0" marL="0">
+              <a:buNone/>
+            </a:pPr>
+            <a:r>
+              <a:rPr lang="en-US" sz="1100" b="1" spc="300" kern="0" dirty="0">
                 <a:solidFill>
                   <a:srgbClr val="B6C800"/>
                 </a:solidFill>
@@ -12841,7 +13207,7 @@
           <a:bodyPr wrap="square" lIns="0" tIns="0" rIns="0" bIns="0" rtlCol="0" anchor="t"/>
           <a:lstStyle/>
           <a:p>
-            <a:pPr marL="0" indent="0" algn="l">
+            <a:pPr algn="l" indent="0" marL="0">
               <a:lnSpc>
                 <a:spcPct val="100000"/>
               </a:lnSpc>
@@ -12910,7 +13276,7 @@
           <a:bodyPr wrap="square" lIns="0" tIns="0" rIns="0" bIns="0" rtlCol="0" anchor="ctr"/>
           <a:lstStyle/>
           <a:p>
-            <a:pPr marL="0" indent="0">
+            <a:pPr indent="0" marL="0">
               <a:buNone/>
             </a:pPr>
             <a:r>
@@ -12971,11 +13337,11 @@
           <a:bodyPr wrap="square" lIns="0" tIns="0" rIns="0" bIns="0" rtlCol="0" anchor="ctr"/>
           <a:lstStyle/>
           <a:p>
-            <a:pPr marL="0" indent="0" algn="ctr">
-              <a:buNone/>
-            </a:pPr>
-            <a:r>
-              <a:rPr lang="en-US" sz="900" b="1" kern="0" spc="100" dirty="0">
+            <a:pPr algn="ctr" indent="0" marL="0">
+              <a:buNone/>
+            </a:pPr>
+            <a:r>
+              <a:rPr lang="en-US" sz="900" b="1" spc="100" kern="0" dirty="0">
                 <a:solidFill>
                   <a:srgbClr val="0A0A0F"/>
                 </a:solidFill>
@@ -13037,7 +13403,7 @@
           <a:bodyPr wrap="square" lIns="0" tIns="0" rIns="0" bIns="0" rtlCol="0" anchor="ctr"/>
           <a:lstStyle/>
           <a:p>
-            <a:pPr marL="0" indent="0">
+            <a:pPr indent="0" marL="0">
               <a:buNone/>
             </a:pPr>
             <a:r>
@@ -13098,11 +13464,11 @@
           <a:bodyPr wrap="square" lIns="0" tIns="0" rIns="0" bIns="0" rtlCol="0" anchor="ctr"/>
           <a:lstStyle/>
           <a:p>
-            <a:pPr marL="0" indent="0" algn="ctr">
-              <a:buNone/>
-            </a:pPr>
-            <a:r>
-              <a:rPr lang="en-US" sz="900" b="1" kern="0" spc="100" dirty="0">
+            <a:pPr algn="ctr" indent="0" marL="0">
+              <a:buNone/>
+            </a:pPr>
+            <a:r>
+              <a:rPr lang="en-US" sz="900" b="1" spc="100" kern="0" dirty="0">
                 <a:solidFill>
                   <a:srgbClr val="FFFFFF"/>
                 </a:solidFill>
@@ -13164,7 +13530,7 @@
           <a:bodyPr wrap="square" lIns="0" tIns="0" rIns="0" bIns="0" rtlCol="0" anchor="ctr"/>
           <a:lstStyle/>
           <a:p>
-            <a:pPr marL="0" indent="0">
+            <a:pPr indent="0" marL="0">
               <a:buNone/>
             </a:pPr>
             <a:r>
@@ -13225,11 +13591,11 @@
           <a:bodyPr wrap="square" lIns="0" tIns="0" rIns="0" bIns="0" rtlCol="0" anchor="ctr"/>
           <a:lstStyle/>
           <a:p>
-            <a:pPr marL="0" indent="0" algn="ctr">
-              <a:buNone/>
-            </a:pPr>
-            <a:r>
-              <a:rPr lang="en-US" sz="900" b="1" kern="0" spc="100" dirty="0">
+            <a:pPr algn="ctr" indent="0" marL="0">
+              <a:buNone/>
+            </a:pPr>
+            <a:r>
+              <a:rPr lang="en-US" sz="900" b="1" spc="100" kern="0" dirty="0">
                 <a:solidFill>
                   <a:srgbClr val="FFFFFF"/>
                 </a:solidFill>
@@ -13291,7 +13657,7 @@
           <a:bodyPr wrap="square" lIns="0" tIns="0" rIns="0" bIns="0" rtlCol="0" anchor="ctr"/>
           <a:lstStyle/>
           <a:p>
-            <a:pPr marL="0" indent="0">
+            <a:pPr indent="0" marL="0">
               <a:buNone/>
             </a:pPr>
             <a:r>
@@ -13352,11 +13718,11 @@
           <a:bodyPr wrap="square" lIns="0" tIns="0" rIns="0" bIns="0" rtlCol="0" anchor="ctr"/>
           <a:lstStyle/>
           <a:p>
-            <a:pPr marL="0" indent="0" algn="ctr">
-              <a:buNone/>
-            </a:pPr>
-            <a:r>
-              <a:rPr lang="en-US" sz="900" b="1" kern="0" spc="100" dirty="0">
+            <a:pPr algn="ctr" indent="0" marL="0">
+              <a:buNone/>
+            </a:pPr>
+            <a:r>
+              <a:rPr lang="en-US" sz="900" b="1" spc="100" kern="0" dirty="0">
                 <a:solidFill>
                   <a:srgbClr val="FFFFFF"/>
                 </a:solidFill>
@@ -13418,7 +13784,7 @@
           <a:bodyPr wrap="square" lIns="0" tIns="0" rIns="0" bIns="0" rtlCol="0" anchor="ctr"/>
           <a:lstStyle/>
           <a:p>
-            <a:pPr marL="0" indent="0">
+            <a:pPr indent="0" marL="0">
               <a:buNone/>
             </a:pPr>
             <a:r>
@@ -13479,11 +13845,11 @@
           <a:bodyPr wrap="square" lIns="0" tIns="0" rIns="0" bIns="0" rtlCol="0" anchor="ctr"/>
           <a:lstStyle/>
           <a:p>
-            <a:pPr marL="0" indent="0" algn="ctr">
-              <a:buNone/>
-            </a:pPr>
-            <a:r>
-              <a:rPr lang="en-US" sz="900" b="1" kern="0" spc="100" dirty="0">
+            <a:pPr algn="ctr" indent="0" marL="0">
+              <a:buNone/>
+            </a:pPr>
+            <a:r>
+              <a:rPr lang="en-US" sz="900" b="1" spc="100" kern="0" dirty="0">
                 <a:solidFill>
                   <a:srgbClr val="FFFFFF"/>
                 </a:solidFill>
@@ -13545,7 +13911,7 @@
           <a:bodyPr wrap="square" lIns="0" tIns="0" rIns="0" bIns="0" rtlCol="0" anchor="ctr"/>
           <a:lstStyle/>
           <a:p>
-            <a:pPr marL="0" indent="0">
+            <a:pPr indent="0" marL="0">
               <a:buNone/>
             </a:pPr>
             <a:r>
@@ -13606,11 +13972,11 @@
           <a:bodyPr wrap="square" lIns="0" tIns="0" rIns="0" bIns="0" rtlCol="0" anchor="ctr"/>
           <a:lstStyle/>
           <a:p>
-            <a:pPr marL="0" indent="0" algn="ctr">
-              <a:buNone/>
-            </a:pPr>
-            <a:r>
-              <a:rPr lang="en-US" sz="900" b="1" kern="0" spc="100" dirty="0">
+            <a:pPr algn="ctr" indent="0" marL="0">
+              <a:buNone/>
+            </a:pPr>
+            <a:r>
+              <a:rPr lang="en-US" sz="900" b="1" spc="100" kern="0" dirty="0">
                 <a:solidFill>
                   <a:srgbClr val="FFFFFF"/>
                 </a:solidFill>
@@ -13672,7 +14038,7 @@
           <a:bodyPr wrap="square" lIns="0" tIns="0" rIns="0" bIns="0" rtlCol="0" anchor="ctr"/>
           <a:lstStyle/>
           <a:p>
-            <a:pPr marL="0" indent="0">
+            <a:pPr indent="0" marL="0">
               <a:buNone/>
             </a:pPr>
             <a:r>
@@ -13733,11 +14099,11 @@
           <a:bodyPr wrap="square" lIns="0" tIns="0" rIns="0" bIns="0" rtlCol="0" anchor="ctr"/>
           <a:lstStyle/>
           <a:p>
-            <a:pPr marL="0" indent="0" algn="ctr">
-              <a:buNone/>
-            </a:pPr>
-            <a:r>
-              <a:rPr lang="en-US" sz="900" b="1" kern="0" spc="100" dirty="0">
+            <a:pPr algn="ctr" indent="0" marL="0">
+              <a:buNone/>
+            </a:pPr>
+            <a:r>
+              <a:rPr lang="en-US" sz="900" b="1" spc="100" kern="0" dirty="0">
                 <a:solidFill>
                   <a:srgbClr val="AEAEC2"/>
                 </a:solidFill>
@@ -13792,11 +14158,11 @@
           <a:bodyPr wrap="square" lIns="0" tIns="0" rIns="0" bIns="0" rtlCol="0" anchor="ctr"/>
           <a:lstStyle/>
           <a:p>
-            <a:pPr marL="0" indent="0" algn="l">
-              <a:buNone/>
-            </a:pPr>
-            <a:r>
-              <a:rPr lang="en-US" sz="1100" b="1" kern="0" spc="300" dirty="0">
+            <a:pPr algn="l" indent="0" marL="0">
+              <a:buNone/>
+            </a:pPr>
+            <a:r>
+              <a:rPr lang="en-US" sz="1100" b="1" spc="300" kern="0" dirty="0">
                 <a:solidFill>
                   <a:srgbClr val="B6C800"/>
                 </a:solidFill>
@@ -13831,7 +14197,7 @@
           <a:bodyPr wrap="square" lIns="0" tIns="0" rIns="0" bIns="0" rtlCol="0" anchor="ctr"/>
           <a:lstStyle/>
           <a:p>
-            <a:pPr marL="0" indent="0">
+            <a:pPr indent="0" marL="0">
               <a:buNone/>
             </a:pPr>
             <a:r>
@@ -13870,7 +14236,7 @@
           <a:bodyPr wrap="square" lIns="0" tIns="0" rIns="0" bIns="0" rtlCol="0" anchor="ctr"/>
           <a:lstStyle/>
           <a:p>
-            <a:pPr marL="0" indent="0">
+            <a:pPr indent="0" marL="0">
               <a:buNone/>
             </a:pPr>
             <a:r>
@@ -13909,7 +14275,7 @@
           <a:bodyPr wrap="square" lIns="0" tIns="0" rIns="0" bIns="0" rtlCol="0" anchor="ctr"/>
           <a:lstStyle/>
           <a:p>
-            <a:pPr marL="0" indent="0">
+            <a:pPr indent="0" marL="0">
               <a:buNone/>
             </a:pPr>
             <a:r>
@@ -13948,7 +14314,7 @@
           <a:bodyPr wrap="square" lIns="0" tIns="0" rIns="0" bIns="0" rtlCol="0" anchor="ctr"/>
           <a:lstStyle/>
           <a:p>
-            <a:pPr marL="0" indent="0">
+            <a:pPr indent="0" marL="0">
               <a:buNone/>
             </a:pPr>
             <a:r>
@@ -13987,7 +14353,7 @@
           <a:bodyPr wrap="square" lIns="0" tIns="0" rIns="0" bIns="0" rtlCol="0" anchor="ctr"/>
           <a:lstStyle/>
           <a:p>
-            <a:pPr marL="0" indent="0">
+            <a:pPr indent="0" marL="0">
               <a:buNone/>
             </a:pPr>
             <a:r>
@@ -14026,7 +14392,7 @@
           <a:bodyPr wrap="square" lIns="0" tIns="0" rIns="0" bIns="0" rtlCol="0" anchor="ctr"/>
           <a:lstStyle/>
           <a:p>
-            <a:pPr marL="0" indent="0">
+            <a:pPr indent="0" marL="0">
               <a:buNone/>
             </a:pPr>
             <a:r>
@@ -14065,7 +14431,7 @@
           <a:bodyPr wrap="square" lIns="0" tIns="0" rIns="0" bIns="0" rtlCol="0" anchor="ctr"/>
           <a:lstStyle/>
           <a:p>
-            <a:pPr marL="0" indent="0">
+            <a:pPr indent="0" marL="0">
               <a:buNone/>
             </a:pPr>
             <a:r>
@@ -14104,7 +14470,7 @@
           <a:bodyPr wrap="square" lIns="0" tIns="0" rIns="0" bIns="0" rtlCol="0" anchor="ctr"/>
           <a:lstStyle/>
           <a:p>
-            <a:pPr marL="0" indent="0">
+            <a:pPr indent="0" marL="0">
               <a:buNone/>
             </a:pPr>
             <a:r>
@@ -14143,7 +14509,7 @@
           <a:bodyPr wrap="square" lIns="0" tIns="0" rIns="0" bIns="0" rtlCol="0" anchor="ctr"/>
           <a:lstStyle/>
           <a:p>
-            <a:pPr marL="0" indent="0">
+            <a:pPr indent="0" marL="0">
               <a:buNone/>
             </a:pPr>
             <a:r>
@@ -14182,7 +14548,7 @@
           <a:bodyPr wrap="square" lIns="0" tIns="0" rIns="0" bIns="0" rtlCol="0" anchor="ctr"/>
           <a:lstStyle/>
           <a:p>
-            <a:pPr marL="0" indent="0">
+            <a:pPr indent="0" marL="0">
               <a:buNone/>
             </a:pPr>
             <a:r>
@@ -14221,7 +14587,7 @@
           <a:bodyPr wrap="square" lIns="0" tIns="0" rIns="0" bIns="0" rtlCol="0" anchor="ctr"/>
           <a:lstStyle/>
           <a:p>
-            <a:pPr marL="0" indent="0">
+            <a:pPr indent="0" marL="0">
               <a:buNone/>
             </a:pPr>
             <a:r>
@@ -14260,7 +14626,7 @@
           <a:bodyPr wrap="square" lIns="0" tIns="0" rIns="0" bIns="0" rtlCol="0" anchor="ctr"/>
           <a:lstStyle/>
           <a:p>
-            <a:pPr marL="0" indent="0">
+            <a:pPr indent="0" marL="0">
               <a:buNone/>
             </a:pPr>
             <a:r>
@@ -14299,7 +14665,7 @@
           <a:bodyPr wrap="square" lIns="0" tIns="0" rIns="0" bIns="0" rtlCol="0" anchor="ctr"/>
           <a:lstStyle/>
           <a:p>
-            <a:pPr marL="0" indent="0">
+            <a:pPr indent="0" marL="0">
               <a:buNone/>
             </a:pPr>
             <a:r>
@@ -14338,7 +14704,7 @@
           <a:bodyPr wrap="square" lIns="0" tIns="0" rIns="0" bIns="0" rtlCol="0" anchor="ctr"/>
           <a:lstStyle/>
           <a:p>
-            <a:pPr marL="0" indent="0">
+            <a:pPr indent="0" marL="0">
               <a:buNone/>
             </a:pPr>
             <a:r>
@@ -14377,7 +14743,7 @@
           <a:bodyPr wrap="square" lIns="0" tIns="0" rIns="0" bIns="0" rtlCol="0" anchor="ctr"/>
           <a:lstStyle/>
           <a:p>
-            <a:pPr marL="0" indent="0">
+            <a:pPr indent="0" marL="0">
               <a:buNone/>
             </a:pPr>
             <a:r>
@@ -14416,7 +14782,7 @@
           <a:bodyPr wrap="square" lIns="0" tIns="0" rIns="0" bIns="0" rtlCol="0" anchor="ctr"/>
           <a:lstStyle/>
           <a:p>
-            <a:pPr marL="0" indent="0">
+            <a:pPr indent="0" marL="0">
               <a:buNone/>
             </a:pPr>
             <a:r>
@@ -14460,7 +14826,7 @@
             <a:prstDash val="solid"/>
           </a:ln>
           <a:effectLst>
-            <a:outerShdw blurRad="177800" dist="63500" dir="5400000" algn="bl" rotWithShape="0">
+            <a:outerShdw sx="100000" sy="100000" kx="0" ky="0" algn="bl" rotWithShape="0" blurRad="177800" dist="63500" dir="5400000">
               <a:srgbClr val="3E00DB">
                 <a:alpha val="55000"/>
               </a:srgbClr>
@@ -14489,7 +14855,7 @@
           <a:bodyPr wrap="square" lIns="0" tIns="0" rIns="0" bIns="0" rtlCol="0" anchor="ctr"/>
           <a:lstStyle/>
           <a:p>
-            <a:pPr marL="0" indent="0">
+            <a:pPr indent="0" marL="0">
               <a:buNone/>
             </a:pPr>
             <a:r>
@@ -14528,7 +14894,7 @@
           <a:bodyPr wrap="square" lIns="0" tIns="0" rIns="0" bIns="0" rtlCol="0" anchor="ctr"/>
           <a:lstStyle/>
           <a:p>
-            <a:pPr marL="0" indent="0">
+            <a:pPr indent="0" marL="0">
               <a:buNone/>
             </a:pPr>
             <a:r>
@@ -14589,7 +14955,7 @@
           <a:bodyPr wrap="square" lIns="0" tIns="0" rIns="0" bIns="0" rtlCol="0" anchor="ctr"/>
           <a:lstStyle/>
           <a:p>
-            <a:pPr marL="0" indent="0" algn="ctr">
+            <a:pPr algn="ctr" indent="0" marL="0">
               <a:buNone/>
             </a:pPr>
             <a:r>
@@ -14628,11 +14994,11 @@
           <a:bodyPr wrap="square" lIns="0" tIns="0" rIns="0" bIns="0" rtlCol="0" anchor="ctr"/>
           <a:lstStyle/>
           <a:p>
-            <a:pPr marL="0" indent="0">
-              <a:buNone/>
-            </a:pPr>
-            <a:r>
-              <a:rPr lang="en-US" sz="850" kern="0" spc="100" dirty="0">
+            <a:pPr indent="0" marL="0">
+              <a:buNone/>
+            </a:pPr>
+            <a:r>
+              <a:rPr lang="en-US" sz="850" spc="100" kern="0" dirty="0">
                 <a:solidFill>
                   <a:srgbClr val="5A5570"/>
                 </a:solidFill>
@@ -14667,7 +15033,7 @@
           <a:bodyPr wrap="square" lIns="0" tIns="0" rIns="0" bIns="0" rtlCol="0" anchor="ctr"/>
           <a:lstStyle/>
           <a:p>
-            <a:pPr marL="0" indent="0" algn="r">
+            <a:pPr algn="r" indent="0" marL="0">
               <a:buNone/>
             </a:pPr>
             <a:r>
@@ -14706,7 +15072,7 @@
           <a:bodyPr wrap="square" lIns="0" tIns="0" rIns="0" bIns="0" rtlCol="0" anchor="ctr"/>
           <a:lstStyle/>
           <a:p>
-            <a:pPr marL="0" indent="0" algn="r">
+            <a:pPr algn="r" indent="0" marL="0">
               <a:buNone/>
             </a:pPr>
             <a:r>
@@ -14740,7 +15106,6 @@
         <a:solidFill>
           <a:srgbClr val="0A0A0F"/>
         </a:solidFill>
-        <a:effectLst/>
       </p:bgPr>
     </p:bg>
     <p:spTree>
@@ -14842,11 +15207,11 @@
           <a:bodyPr wrap="square" lIns="0" tIns="0" rIns="0" bIns="0" rtlCol="0" anchor="ctr"/>
           <a:lstStyle/>
           <a:p>
-            <a:pPr marL="0" indent="0" algn="l">
-              <a:buNone/>
-            </a:pPr>
-            <a:r>
-              <a:rPr lang="en-US" sz="1100" b="1" kern="0" spc="300" dirty="0">
+            <a:pPr algn="l" indent="0" marL="0">
+              <a:buNone/>
+            </a:pPr>
+            <a:r>
+              <a:rPr lang="en-US" sz="1100" b="1" spc="300" kern="0" dirty="0">
                 <a:solidFill>
                   <a:srgbClr val="B6C800"/>
                 </a:solidFill>
@@ -14881,7 +15246,7 @@
           <a:bodyPr wrap="square" lIns="0" tIns="0" rIns="0" bIns="0" rtlCol="0" anchor="t"/>
           <a:lstStyle/>
           <a:p>
-            <a:pPr marL="0" indent="0" algn="l">
+            <a:pPr algn="l" indent="0" marL="0">
               <a:lnSpc>
                 <a:spcPct val="100000"/>
               </a:lnSpc>
@@ -14928,7 +15293,7 @@
             <a:prstDash val="solid"/>
           </a:ln>
           <a:effectLst>
-            <a:outerShdw blurRad="177800" dist="63500" dir="5400000" algn="bl" rotWithShape="0">
+            <a:outerShdw sx="100000" sy="100000" kx="0" ky="0" algn="bl" rotWithShape="0" blurRad="177800" dist="63500" dir="5400000">
               <a:srgbClr val="3E00DB">
                 <a:alpha val="55000"/>
               </a:srgbClr>
@@ -14957,7 +15322,7 @@
           <a:bodyPr wrap="square" lIns="0" tIns="0" rIns="0" bIns="0" rtlCol="0" anchor="ctr"/>
           <a:lstStyle/>
           <a:p>
-            <a:pPr marL="0" indent="0">
+            <a:pPr indent="0" marL="0">
               <a:buNone/>
             </a:pPr>
             <a:r>
@@ -14996,7 +15361,7 @@
           <a:bodyPr wrap="square" lIns="0" tIns="0" rIns="0" bIns="0" rtlCol="0" anchor="t"/>
           <a:lstStyle/>
           <a:p>
-            <a:pPr marL="0" indent="0">
+            <a:pPr indent="0" marL="0">
               <a:buNone/>
             </a:pPr>
             <a:r>
@@ -15040,7 +15405,7 @@
             <a:prstDash val="solid"/>
           </a:ln>
           <a:effectLst>
-            <a:outerShdw blurRad="177800" dist="63500" dir="5400000" algn="bl" rotWithShape="0">
+            <a:outerShdw sx="100000" sy="100000" kx="0" ky="0" algn="bl" rotWithShape="0" blurRad="177800" dist="63500" dir="5400000">
               <a:srgbClr val="3E00DB">
                 <a:alpha val="55000"/>
               </a:srgbClr>
@@ -15069,7 +15434,7 @@
           <a:bodyPr wrap="square" lIns="0" tIns="0" rIns="0" bIns="0" rtlCol="0" anchor="ctr"/>
           <a:lstStyle/>
           <a:p>
-            <a:pPr marL="0" indent="0">
+            <a:pPr indent="0" marL="0">
               <a:buNone/>
             </a:pPr>
             <a:r>
@@ -15108,7 +15473,7 @@
           <a:bodyPr wrap="square" lIns="0" tIns="0" rIns="0" bIns="0" rtlCol="0" anchor="t"/>
           <a:lstStyle/>
           <a:p>
-            <a:pPr marL="0" indent="0">
+            <a:pPr indent="0" marL="0">
               <a:buNone/>
             </a:pPr>
             <a:r>
@@ -15152,7 +15517,7 @@
             <a:prstDash val="solid"/>
           </a:ln>
           <a:effectLst>
-            <a:outerShdw blurRad="177800" dist="63500" dir="5400000" algn="bl" rotWithShape="0">
+            <a:outerShdw sx="100000" sy="100000" kx="0" ky="0" algn="bl" rotWithShape="0" blurRad="177800" dist="63500" dir="5400000">
               <a:srgbClr val="3E00DB">
                 <a:alpha val="55000"/>
               </a:srgbClr>
@@ -15181,7 +15546,7 @@
           <a:bodyPr wrap="square" lIns="0" tIns="0" rIns="0" bIns="0" rtlCol="0" anchor="ctr"/>
           <a:lstStyle/>
           <a:p>
-            <a:pPr marL="0" indent="0">
+            <a:pPr indent="0" marL="0">
               <a:buNone/>
             </a:pPr>
             <a:r>
@@ -15220,7 +15585,7 @@
           <a:bodyPr wrap="square" lIns="0" tIns="0" rIns="0" bIns="0" rtlCol="0" anchor="t"/>
           <a:lstStyle/>
           <a:p>
-            <a:pPr marL="0" indent="0">
+            <a:pPr indent="0" marL="0">
               <a:buNone/>
             </a:pPr>
             <a:r>
@@ -15259,11 +15624,11 @@
           <a:bodyPr wrap="square" lIns="0" tIns="0" rIns="0" bIns="0" rtlCol="0" anchor="ctr"/>
           <a:lstStyle/>
           <a:p>
-            <a:pPr marL="0" indent="0">
-              <a:buNone/>
-            </a:pPr>
-            <a:r>
-              <a:rPr lang="en-US" sz="850" kern="0" spc="100" dirty="0">
+            <a:pPr indent="0" marL="0">
+              <a:buNone/>
+            </a:pPr>
+            <a:r>
+              <a:rPr lang="en-US" sz="850" spc="100" kern="0" dirty="0">
                 <a:solidFill>
                   <a:srgbClr val="5A5570"/>
                 </a:solidFill>
@@ -15298,7 +15663,7 @@
           <a:bodyPr wrap="square" lIns="0" tIns="0" rIns="0" bIns="0" rtlCol="0" anchor="ctr"/>
           <a:lstStyle/>
           <a:p>
-            <a:pPr marL="0" indent="0" algn="r">
+            <a:pPr algn="r" indent="0" marL="0">
               <a:buNone/>
             </a:pPr>
             <a:r>
@@ -15337,7 +15702,7 @@
           <a:bodyPr wrap="square" lIns="0" tIns="0" rIns="0" bIns="0" rtlCol="0" anchor="ctr"/>
           <a:lstStyle/>
           <a:p>
-            <a:pPr marL="0" indent="0" algn="r">
+            <a:pPr algn="r" indent="0" marL="0">
               <a:buNone/>
             </a:pPr>
             <a:r>
@@ -15371,7 +15736,6 @@
         <a:solidFill>
           <a:srgbClr val="0A0A0F"/>
         </a:solidFill>
-        <a:effectLst/>
       </p:bgPr>
     </p:bg>
     <p:spTree>
@@ -15473,11 +15837,11 @@
           <a:bodyPr wrap="square" lIns="0" tIns="0" rIns="0" bIns="0" rtlCol="0" anchor="ctr"/>
           <a:lstStyle/>
           <a:p>
-            <a:pPr marL="0" indent="0" algn="l">
-              <a:buNone/>
-            </a:pPr>
-            <a:r>
-              <a:rPr lang="en-US" sz="1100" b="1" kern="0" spc="300" dirty="0">
+            <a:pPr algn="l" indent="0" marL="0">
+              <a:buNone/>
+            </a:pPr>
+            <a:r>
+              <a:rPr lang="en-US" sz="1100" b="1" spc="300" kern="0" dirty="0">
                 <a:solidFill>
                   <a:srgbClr val="B6C800"/>
                 </a:solidFill>
@@ -15512,7 +15876,7 @@
           <a:bodyPr wrap="square" lIns="0" tIns="0" rIns="0" bIns="0" rtlCol="0" anchor="t"/>
           <a:lstStyle/>
           <a:p>
-            <a:pPr marL="0" indent="0" algn="l">
+            <a:pPr algn="l" indent="0" marL="0">
               <a:lnSpc>
                 <a:spcPct val="100000"/>
               </a:lnSpc>
@@ -15559,7 +15923,7 @@
             <a:prstDash val="solid"/>
           </a:ln>
           <a:effectLst>
-            <a:outerShdw blurRad="177800" dist="63500" dir="5400000" algn="bl" rotWithShape="0">
+            <a:outerShdw sx="100000" sy="100000" kx="0" ky="0" algn="bl" rotWithShape="0" blurRad="177800" dist="63500" dir="5400000">
               <a:srgbClr val="3E00DB">
                 <a:alpha val="55000"/>
               </a:srgbClr>
@@ -15608,7 +15972,7 @@
           <a:bodyPr wrap="square" lIns="0" tIns="0" rIns="0" bIns="0" rtlCol="0" anchor="ctr"/>
           <a:lstStyle/>
           <a:p>
-            <a:pPr marL="0" indent="0">
+            <a:pPr indent="0" marL="0">
               <a:buNone/>
             </a:pPr>
             <a:r>
@@ -15647,7 +16011,7 @@
           <a:bodyPr wrap="square" lIns="0" tIns="0" rIns="0" bIns="0" rtlCol="0" anchor="t"/>
           <a:lstStyle/>
           <a:p>
-            <a:pPr marL="0" indent="0">
+            <a:pPr indent="0" marL="0">
               <a:lnSpc>
                 <a:spcPct val="105000"/>
               </a:lnSpc>
@@ -15694,7 +16058,7 @@
             <a:prstDash val="solid"/>
           </a:ln>
           <a:effectLst>
-            <a:outerShdw blurRad="177800" dist="63500" dir="5400000" algn="bl" rotWithShape="0">
+            <a:outerShdw sx="100000" sy="100000" kx="0" ky="0" algn="bl" rotWithShape="0" blurRad="177800" dist="63500" dir="5400000">
               <a:srgbClr val="3E00DB">
                 <a:alpha val="55000"/>
               </a:srgbClr>
@@ -15743,7 +16107,7 @@
           <a:bodyPr wrap="square" lIns="0" tIns="0" rIns="0" bIns="0" rtlCol="0" anchor="ctr"/>
           <a:lstStyle/>
           <a:p>
-            <a:pPr marL="0" indent="0">
+            <a:pPr indent="0" marL="0">
               <a:buNone/>
             </a:pPr>
             <a:r>
@@ -15782,7 +16146,7 @@
           <a:bodyPr wrap="square" lIns="0" tIns="0" rIns="0" bIns="0" rtlCol="0" anchor="t"/>
           <a:lstStyle/>
           <a:p>
-            <a:pPr marL="0" indent="0">
+            <a:pPr indent="0" marL="0">
               <a:lnSpc>
                 <a:spcPct val="105000"/>
               </a:lnSpc>
@@ -15829,7 +16193,7 @@
             <a:prstDash val="solid"/>
           </a:ln>
           <a:effectLst>
-            <a:outerShdw blurRad="177800" dist="63500" dir="5400000" algn="bl" rotWithShape="0">
+            <a:outerShdw sx="100000" sy="100000" kx="0" ky="0" algn="bl" rotWithShape="0" blurRad="177800" dist="63500" dir="5400000">
               <a:srgbClr val="3E00DB">
                 <a:alpha val="55000"/>
               </a:srgbClr>
@@ -15878,7 +16242,7 @@
           <a:bodyPr wrap="square" lIns="0" tIns="0" rIns="0" bIns="0" rtlCol="0" anchor="ctr"/>
           <a:lstStyle/>
           <a:p>
-            <a:pPr marL="0" indent="0">
+            <a:pPr indent="0" marL="0">
               <a:buNone/>
             </a:pPr>
             <a:r>
@@ -15917,7 +16281,7 @@
           <a:bodyPr wrap="square" lIns="0" tIns="0" rIns="0" bIns="0" rtlCol="0" anchor="t"/>
           <a:lstStyle/>
           <a:p>
-            <a:pPr marL="0" indent="0">
+            <a:pPr indent="0" marL="0">
               <a:lnSpc>
                 <a:spcPct val="105000"/>
               </a:lnSpc>
@@ -15959,11 +16323,11 @@
           <a:bodyPr wrap="square" lIns="0" tIns="0" rIns="0" bIns="0" rtlCol="0" anchor="ctr"/>
           <a:lstStyle/>
           <a:p>
-            <a:pPr marL="0" indent="0">
-              <a:buNone/>
-            </a:pPr>
-            <a:r>
-              <a:rPr lang="en-US" sz="850" kern="0" spc="100" dirty="0">
+            <a:pPr indent="0" marL="0">
+              <a:buNone/>
+            </a:pPr>
+            <a:r>
+              <a:rPr lang="en-US" sz="850" spc="100" kern="0" dirty="0">
                 <a:solidFill>
                   <a:srgbClr val="5A5570"/>
                 </a:solidFill>
@@ -15998,7 +16362,7 @@
           <a:bodyPr wrap="square" lIns="0" tIns="0" rIns="0" bIns="0" rtlCol="0" anchor="ctr"/>
           <a:lstStyle/>
           <a:p>
-            <a:pPr marL="0" indent="0" algn="r">
+            <a:pPr algn="r" indent="0" marL="0">
               <a:buNone/>
             </a:pPr>
             <a:r>
@@ -16037,7 +16401,7 @@
           <a:bodyPr wrap="square" lIns="0" tIns="0" rIns="0" bIns="0" rtlCol="0" anchor="ctr"/>
           <a:lstStyle/>
           <a:p>
-            <a:pPr marL="0" indent="0" algn="r">
+            <a:pPr algn="r" indent="0" marL="0">
               <a:buNone/>
             </a:pPr>
             <a:r>
@@ -16071,7 +16435,6 @@
         <a:solidFill>
           <a:srgbClr val="0A0A0F"/>
         </a:solidFill>
-        <a:effectLst/>
       </p:bgPr>
     </p:bg>
     <p:spTree>
@@ -16173,11 +16536,11 @@
           <a:bodyPr wrap="square" lIns="0" tIns="0" rIns="0" bIns="0" rtlCol="0" anchor="ctr"/>
           <a:lstStyle/>
           <a:p>
-            <a:pPr marL="0" indent="0" algn="l">
-              <a:buNone/>
-            </a:pPr>
-            <a:r>
-              <a:rPr lang="en-US" sz="1100" b="1" kern="0" spc="300" dirty="0">
+            <a:pPr algn="l" indent="0" marL="0">
+              <a:buNone/>
+            </a:pPr>
+            <a:r>
+              <a:rPr lang="en-US" sz="1100" b="1" spc="300" kern="0" dirty="0">
                 <a:solidFill>
                   <a:srgbClr val="B6C800"/>
                 </a:solidFill>
@@ -16212,7 +16575,7 @@
           <a:bodyPr wrap="square" lIns="0" tIns="0" rIns="0" bIns="0" rtlCol="0" anchor="t"/>
           <a:lstStyle/>
           <a:p>
-            <a:pPr marL="0" indent="0" algn="l">
+            <a:pPr algn="l" indent="0" marL="0">
               <a:lnSpc>
                 <a:spcPct val="100000"/>
               </a:lnSpc>
@@ -16259,7 +16622,7 @@
             <a:prstDash val="solid"/>
           </a:ln>
           <a:effectLst>
-            <a:outerShdw blurRad="177800" dist="63500" dir="5400000" algn="bl" rotWithShape="0">
+            <a:outerShdw sx="100000" sy="100000" kx="0" ky="0" algn="bl" rotWithShape="0" blurRad="177800" dist="63500" dir="5400000">
               <a:srgbClr val="3E00DB">
                 <a:alpha val="55000"/>
               </a:srgbClr>
@@ -16308,7 +16671,7 @@
           <a:bodyPr wrap="square" lIns="0" tIns="0" rIns="0" bIns="0" rtlCol="0" anchor="ctr"/>
           <a:lstStyle/>
           <a:p>
-            <a:pPr marL="0" indent="0">
+            <a:pPr indent="0" marL="0">
               <a:buNone/>
             </a:pPr>
             <a:r>
@@ -16347,7 +16710,7 @@
           <a:bodyPr wrap="square" lIns="0" tIns="0" rIns="0" bIns="0" rtlCol="0" anchor="t"/>
           <a:lstStyle/>
           <a:p>
-            <a:pPr marL="0" indent="0">
+            <a:pPr indent="0" marL="0">
               <a:lnSpc>
                 <a:spcPct val="105000"/>
               </a:lnSpc>
@@ -16394,7 +16757,7 @@
             <a:prstDash val="solid"/>
           </a:ln>
           <a:effectLst>
-            <a:outerShdw blurRad="177800" dist="63500" dir="5400000" algn="bl" rotWithShape="0">
+            <a:outerShdw sx="100000" sy="100000" kx="0" ky="0" algn="bl" rotWithShape="0" blurRad="177800" dist="63500" dir="5400000">
               <a:srgbClr val="3E00DB">
                 <a:alpha val="55000"/>
               </a:srgbClr>
@@ -16443,7 +16806,7 @@
           <a:bodyPr wrap="square" lIns="0" tIns="0" rIns="0" bIns="0" rtlCol="0" anchor="ctr"/>
           <a:lstStyle/>
           <a:p>
-            <a:pPr marL="0" indent="0">
+            <a:pPr indent="0" marL="0">
               <a:buNone/>
             </a:pPr>
             <a:r>
@@ -16482,7 +16845,7 @@
           <a:bodyPr wrap="square" lIns="0" tIns="0" rIns="0" bIns="0" rtlCol="0" anchor="t"/>
           <a:lstStyle/>
           <a:p>
-            <a:pPr marL="0" indent="0">
+            <a:pPr indent="0" marL="0">
               <a:lnSpc>
                 <a:spcPct val="105000"/>
               </a:lnSpc>
@@ -16529,7 +16892,7 @@
             <a:prstDash val="solid"/>
           </a:ln>
           <a:effectLst>
-            <a:outerShdw blurRad="177800" dist="63500" dir="5400000" algn="bl" rotWithShape="0">
+            <a:outerShdw sx="100000" sy="100000" kx="0" ky="0" algn="bl" rotWithShape="0" blurRad="177800" dist="63500" dir="5400000">
               <a:srgbClr val="3E00DB">
                 <a:alpha val="55000"/>
               </a:srgbClr>
@@ -16578,7 +16941,7 @@
           <a:bodyPr wrap="square" lIns="0" tIns="0" rIns="0" bIns="0" rtlCol="0" anchor="ctr"/>
           <a:lstStyle/>
           <a:p>
-            <a:pPr marL="0" indent="0">
+            <a:pPr indent="0" marL="0">
               <a:buNone/>
             </a:pPr>
             <a:r>
@@ -16617,7 +16980,7 @@
           <a:bodyPr wrap="square" lIns="0" tIns="0" rIns="0" bIns="0" rtlCol="0" anchor="t"/>
           <a:lstStyle/>
           <a:p>
-            <a:pPr marL="0" indent="0">
+            <a:pPr indent="0" marL="0">
               <a:lnSpc>
                 <a:spcPct val="105000"/>
               </a:lnSpc>
@@ -16679,11 +17042,11 @@
           <a:bodyPr wrap="square" lIns="0" tIns="0" rIns="0" bIns="0" rtlCol="0" anchor="ctr"/>
           <a:lstStyle/>
           <a:p>
-            <a:pPr marL="0" indent="0" algn="l">
-              <a:buNone/>
-            </a:pPr>
-            <a:r>
-              <a:rPr lang="en-US" sz="1100" b="1" kern="0" spc="300" dirty="0">
+            <a:pPr algn="l" indent="0" marL="0">
+              <a:buNone/>
+            </a:pPr>
+            <a:r>
+              <a:rPr lang="en-US" sz="1100" b="1" spc="300" kern="0" dirty="0">
                 <a:solidFill>
                   <a:srgbClr val="B6C800"/>
                 </a:solidFill>
@@ -16745,7 +17108,7 @@
           <a:bodyPr wrap="square" lIns="0" tIns="0" rIns="0" bIns="0" rtlCol="0" anchor="ctr"/>
           <a:lstStyle/>
           <a:p>
-            <a:pPr marL="0" indent="0" algn="ctr">
+            <a:pPr algn="ctr" indent="0" marL="0">
               <a:buNone/>
             </a:pPr>
             <a:r>
@@ -16811,7 +17174,7 @@
           <a:bodyPr wrap="square" lIns="0" tIns="0" rIns="0" bIns="0" rtlCol="0" anchor="ctr"/>
           <a:lstStyle/>
           <a:p>
-            <a:pPr marL="0" indent="0" algn="ctr">
+            <a:pPr algn="ctr" indent="0" marL="0">
               <a:buNone/>
             </a:pPr>
             <a:r>
@@ -16877,7 +17240,7 @@
           <a:bodyPr wrap="square" lIns="0" tIns="0" rIns="0" bIns="0" rtlCol="0" anchor="ctr"/>
           <a:lstStyle/>
           <a:p>
-            <a:pPr marL="0" indent="0" algn="ctr">
+            <a:pPr algn="ctr" indent="0" marL="0">
               <a:buNone/>
             </a:pPr>
             <a:r>
@@ -16943,7 +17306,7 @@
           <a:bodyPr wrap="square" lIns="0" tIns="0" rIns="0" bIns="0" rtlCol="0" anchor="ctr"/>
           <a:lstStyle/>
           <a:p>
-            <a:pPr marL="0" indent="0" algn="ctr">
+            <a:pPr algn="ctr" indent="0" marL="0">
               <a:buNone/>
             </a:pPr>
             <a:r>
@@ -16982,11 +17345,11 @@
           <a:bodyPr wrap="square" lIns="0" tIns="0" rIns="0" bIns="0" rtlCol="0" anchor="ctr"/>
           <a:lstStyle/>
           <a:p>
-            <a:pPr marL="0" indent="0">
-              <a:buNone/>
-            </a:pPr>
-            <a:r>
-              <a:rPr lang="en-US" sz="850" kern="0" spc="100" dirty="0">
+            <a:pPr indent="0" marL="0">
+              <a:buNone/>
+            </a:pPr>
+            <a:r>
+              <a:rPr lang="en-US" sz="850" spc="100" kern="0" dirty="0">
                 <a:solidFill>
                   <a:srgbClr val="5A5570"/>
                 </a:solidFill>
@@ -17021,7 +17384,7 @@
           <a:bodyPr wrap="square" lIns="0" tIns="0" rIns="0" bIns="0" rtlCol="0" anchor="ctr"/>
           <a:lstStyle/>
           <a:p>
-            <a:pPr marL="0" indent="0" algn="r">
+            <a:pPr algn="r" indent="0" marL="0">
               <a:buNone/>
             </a:pPr>
             <a:r>
@@ -17060,7 +17423,7 @@
           <a:bodyPr wrap="square" lIns="0" tIns="0" rIns="0" bIns="0" rtlCol="0" anchor="ctr"/>
           <a:lstStyle/>
           <a:p>
-            <a:pPr marL="0" indent="0" algn="r">
+            <a:pPr algn="r" indent="0" marL="0">
               <a:buNone/>
             </a:pPr>
             <a:r>
@@ -17094,7 +17457,6 @@
         <a:solidFill>
           <a:srgbClr val="0A0A0F"/>
         </a:solidFill>
-        <a:effectLst/>
       </p:bgPr>
     </p:bg>
     <p:spTree>
@@ -17196,11 +17558,11 @@
           <a:bodyPr wrap="square" lIns="0" tIns="0" rIns="0" bIns="0" rtlCol="0" anchor="ctr"/>
           <a:lstStyle/>
           <a:p>
-            <a:pPr marL="0" indent="0" algn="l">
-              <a:buNone/>
-            </a:pPr>
-            <a:r>
-              <a:rPr lang="en-US" sz="1100" b="1" kern="0" spc="300" dirty="0">
+            <a:pPr algn="l" indent="0" marL="0">
+              <a:buNone/>
+            </a:pPr>
+            <a:r>
+              <a:rPr lang="en-US" sz="1100" b="1" spc="300" kern="0" dirty="0">
                 <a:solidFill>
                   <a:srgbClr val="B6C800"/>
                 </a:solidFill>
@@ -17235,7 +17597,7 @@
           <a:bodyPr wrap="square" lIns="0" tIns="0" rIns="0" bIns="0" rtlCol="0" anchor="t"/>
           <a:lstStyle/>
           <a:p>
-            <a:pPr marL="0" indent="0" algn="l">
+            <a:pPr algn="l" indent="0" marL="0">
               <a:lnSpc>
                 <a:spcPct val="100000"/>
               </a:lnSpc>
@@ -17277,7 +17639,7 @@
           <a:bodyPr wrap="square" lIns="0" tIns="0" rIns="0" bIns="0" rtlCol="0" anchor="ctr"/>
           <a:lstStyle/>
           <a:p>
-            <a:pPr marL="0" indent="0">
+            <a:pPr indent="0" marL="0">
               <a:buNone/>
             </a:pPr>
             <a:r>
@@ -17321,7 +17683,7 @@
             <a:prstDash val="solid"/>
           </a:ln>
           <a:effectLst>
-            <a:outerShdw blurRad="177800" dist="63500" dir="5400000" algn="bl" rotWithShape="0">
+            <a:outerShdw sx="100000" sy="100000" kx="0" ky="0" algn="bl" rotWithShape="0" blurRad="177800" dist="63500" dir="5400000">
               <a:srgbClr val="3E00DB">
                 <a:alpha val="55000"/>
               </a:srgbClr>
@@ -17372,11 +17734,11 @@
           <a:bodyPr wrap="square" lIns="0" tIns="0" rIns="0" bIns="0" rtlCol="0" anchor="ctr"/>
           <a:lstStyle/>
           <a:p>
-            <a:pPr marL="0" indent="0" algn="ctr">
-              <a:buNone/>
-            </a:pPr>
-            <a:r>
-              <a:rPr lang="en-US" sz="900" b="1" kern="0" spc="100" dirty="0">
+            <a:pPr algn="ctr" indent="0" marL="0">
+              <a:buNone/>
+            </a:pPr>
+            <a:r>
+              <a:rPr lang="en-US" sz="900" b="1" spc="100" kern="0" dirty="0">
                 <a:solidFill>
                   <a:srgbClr val="0A0A0F"/>
                 </a:solidFill>
@@ -17411,7 +17773,7 @@
           <a:bodyPr wrap="square" lIns="0" tIns="0" rIns="0" bIns="0" rtlCol="0" anchor="ctr"/>
           <a:lstStyle/>
           <a:p>
-            <a:pPr marL="0" indent="0">
+            <a:pPr indent="0" marL="0">
               <a:buNone/>
             </a:pPr>
             <a:r>
@@ -17450,7 +17812,7 @@
           <a:bodyPr wrap="square" lIns="0" tIns="0" rIns="0" bIns="0" rtlCol="0" anchor="ctr"/>
           <a:lstStyle/>
           <a:p>
-            <a:pPr marL="0" indent="0">
+            <a:pPr indent="0" marL="0">
               <a:buNone/>
             </a:pPr>
             <a:r>
@@ -17489,7 +17851,7 @@
           <a:bodyPr wrap="square" lIns="0" tIns="0" rIns="0" bIns="0" rtlCol="0" anchor="t"/>
           <a:lstStyle/>
           <a:p>
-            <a:pPr marL="0" indent="0">
+            <a:pPr indent="0" marL="0">
               <a:buNone/>
             </a:pPr>
             <a:r>
@@ -17533,7 +17895,7 @@
             <a:prstDash val="solid"/>
           </a:ln>
           <a:effectLst>
-            <a:outerShdw blurRad="177800" dist="63500" dir="5400000" algn="bl" rotWithShape="0">
+            <a:outerShdw sx="100000" sy="100000" kx="0" ky="0" algn="bl" rotWithShape="0" blurRad="177800" dist="63500" dir="5400000">
               <a:srgbClr val="3E00DB">
                 <a:alpha val="55000"/>
               </a:srgbClr>
@@ -17584,11 +17946,11 @@
           <a:bodyPr wrap="square" lIns="0" tIns="0" rIns="0" bIns="0" rtlCol="0" anchor="ctr"/>
           <a:lstStyle/>
           <a:p>
-            <a:pPr marL="0" indent="0" algn="ctr">
-              <a:buNone/>
-            </a:pPr>
-            <a:r>
-              <a:rPr lang="en-US" sz="900" b="1" kern="0" spc="100" dirty="0">
+            <a:pPr algn="ctr" indent="0" marL="0">
+              <a:buNone/>
+            </a:pPr>
+            <a:r>
+              <a:rPr lang="en-US" sz="900" b="1" spc="100" kern="0" dirty="0">
                 <a:solidFill>
                   <a:srgbClr val="FFFFFF"/>
                 </a:solidFill>
@@ -17623,7 +17985,7 @@
           <a:bodyPr wrap="square" lIns="0" tIns="0" rIns="0" bIns="0" rtlCol="0" anchor="ctr"/>
           <a:lstStyle/>
           <a:p>
-            <a:pPr marL="0" indent="0">
+            <a:pPr indent="0" marL="0">
               <a:buNone/>
             </a:pPr>
             <a:r>
@@ -17662,7 +18024,7 @@
           <a:bodyPr wrap="square" lIns="0" tIns="0" rIns="0" bIns="0" rtlCol="0" anchor="ctr"/>
           <a:lstStyle/>
           <a:p>
-            <a:pPr marL="0" indent="0">
+            <a:pPr indent="0" marL="0">
               <a:buNone/>
             </a:pPr>
             <a:r>
@@ -17701,7 +18063,7 @@
           <a:bodyPr wrap="square" lIns="0" tIns="0" rIns="0" bIns="0" rtlCol="0" anchor="t"/>
           <a:lstStyle/>
           <a:p>
-            <a:pPr marL="0" indent="0">
+            <a:pPr indent="0" marL="0">
               <a:buNone/>
             </a:pPr>
             <a:r>
@@ -17745,7 +18107,7 @@
             <a:prstDash val="solid"/>
           </a:ln>
           <a:effectLst>
-            <a:outerShdw blurRad="177800" dist="63500" dir="5400000" algn="bl" rotWithShape="0">
+            <a:outerShdw sx="100000" sy="100000" kx="0" ky="0" algn="bl" rotWithShape="0" blurRad="177800" dist="63500" dir="5400000">
               <a:srgbClr val="3E00DB">
                 <a:alpha val="55000"/>
               </a:srgbClr>
@@ -17796,11 +18158,11 @@
           <a:bodyPr wrap="square" lIns="0" tIns="0" rIns="0" bIns="0" rtlCol="0" anchor="ctr"/>
           <a:lstStyle/>
           <a:p>
-            <a:pPr marL="0" indent="0" algn="ctr">
-              <a:buNone/>
-            </a:pPr>
-            <a:r>
-              <a:rPr lang="en-US" sz="900" b="1" kern="0" spc="100" dirty="0">
+            <a:pPr algn="ctr" indent="0" marL="0">
+              <a:buNone/>
+            </a:pPr>
+            <a:r>
+              <a:rPr lang="en-US" sz="900" b="1" spc="100" kern="0" dirty="0">
                 <a:solidFill>
                   <a:srgbClr val="0A0A0F"/>
                 </a:solidFill>
@@ -17835,7 +18197,7 @@
           <a:bodyPr wrap="square" lIns="0" tIns="0" rIns="0" bIns="0" rtlCol="0" anchor="ctr"/>
           <a:lstStyle/>
           <a:p>
-            <a:pPr marL="0" indent="0">
+            <a:pPr indent="0" marL="0">
               <a:buNone/>
             </a:pPr>
             <a:r>
@@ -17874,7 +18236,7 @@
           <a:bodyPr wrap="square" lIns="0" tIns="0" rIns="0" bIns="0" rtlCol="0" anchor="ctr"/>
           <a:lstStyle/>
           <a:p>
-            <a:pPr marL="0" indent="0">
+            <a:pPr indent="0" marL="0">
               <a:buNone/>
             </a:pPr>
             <a:r>
@@ -17913,7 +18275,7 @@
           <a:bodyPr wrap="square" lIns="0" tIns="0" rIns="0" bIns="0" rtlCol="0" anchor="t"/>
           <a:lstStyle/>
           <a:p>
-            <a:pPr marL="0" indent="0">
+            <a:pPr indent="0" marL="0">
               <a:buNone/>
             </a:pPr>
             <a:r>
@@ -17952,11 +18314,11 @@
           <a:bodyPr wrap="square" lIns="0" tIns="0" rIns="0" bIns="0" rtlCol="0" anchor="ctr"/>
           <a:lstStyle/>
           <a:p>
-            <a:pPr marL="0" indent="0">
-              <a:buNone/>
-            </a:pPr>
-            <a:r>
-              <a:rPr lang="en-US" sz="850" kern="0" spc="100" dirty="0">
+            <a:pPr indent="0" marL="0">
+              <a:buNone/>
+            </a:pPr>
+            <a:r>
+              <a:rPr lang="en-US" sz="850" spc="100" kern="0" dirty="0">
                 <a:solidFill>
                   <a:srgbClr val="5A5570"/>
                 </a:solidFill>
@@ -17991,7 +18353,7 @@
           <a:bodyPr wrap="square" lIns="0" tIns="0" rIns="0" bIns="0" rtlCol="0" anchor="ctr"/>
           <a:lstStyle/>
           <a:p>
-            <a:pPr marL="0" indent="0" algn="r">
+            <a:pPr algn="r" indent="0" marL="0">
               <a:buNone/>
             </a:pPr>
             <a:r>
@@ -18030,7 +18392,7 @@
           <a:bodyPr wrap="square" lIns="0" tIns="0" rIns="0" bIns="0" rtlCol="0" anchor="ctr"/>
           <a:lstStyle/>
           <a:p>
-            <a:pPr marL="0" indent="0" algn="r">
+            <a:pPr algn="r" indent="0" marL="0">
               <a:buNone/>
             </a:pPr>
             <a:r>
@@ -18064,7 +18426,6 @@
         <a:solidFill>
           <a:srgbClr val="0A0A0F"/>
         </a:solidFill>
-        <a:effectLst/>
       </p:bgPr>
     </p:bg>
     <p:spTree>
@@ -18166,11 +18527,11 @@
           <a:bodyPr wrap="square" lIns="0" tIns="0" rIns="0" bIns="0" rtlCol="0" anchor="ctr"/>
           <a:lstStyle/>
           <a:p>
-            <a:pPr marL="0" indent="0" algn="l">
-              <a:buNone/>
-            </a:pPr>
-            <a:r>
-              <a:rPr lang="en-US" sz="1100" b="1" kern="0" spc="300" dirty="0">
+            <a:pPr algn="l" indent="0" marL="0">
+              <a:buNone/>
+            </a:pPr>
+            <a:r>
+              <a:rPr lang="en-US" sz="1100" b="1" spc="300" kern="0" dirty="0">
                 <a:solidFill>
                   <a:srgbClr val="B6C800"/>
                 </a:solidFill>
@@ -18205,7 +18566,7 @@
           <a:bodyPr wrap="square" lIns="0" tIns="0" rIns="0" bIns="0" rtlCol="0" anchor="t"/>
           <a:lstStyle/>
           <a:p>
-            <a:pPr marL="0" indent="0" algn="l">
+            <a:pPr algn="l" indent="0" marL="0">
               <a:lnSpc>
                 <a:spcPct val="100000"/>
               </a:lnSpc>
@@ -18252,7 +18613,7 @@
             <a:prstDash val="solid"/>
           </a:ln>
           <a:effectLst>
-            <a:outerShdw blurRad="177800" dist="63500" dir="5400000" algn="bl" rotWithShape="0">
+            <a:outerShdw sx="100000" sy="100000" kx="0" ky="0" algn="bl" rotWithShape="0" blurRad="177800" dist="63500" dir="5400000">
               <a:srgbClr val="3E00DB">
                 <a:alpha val="55000"/>
               </a:srgbClr>
@@ -18281,11 +18642,11 @@
           <a:bodyPr wrap="square" lIns="0" tIns="0" rIns="0" bIns="0" rtlCol="0" anchor="ctr"/>
           <a:lstStyle/>
           <a:p>
-            <a:pPr marL="0" indent="0">
-              <a:buNone/>
-            </a:pPr>
-            <a:r>
-              <a:rPr lang="en-US" sz="950" b="1" kern="0" spc="200" dirty="0">
+            <a:pPr indent="0" marL="0">
+              <a:buNone/>
+            </a:pPr>
+            <a:r>
+              <a:rPr lang="en-US" sz="950" b="1" spc="200" kern="0" dirty="0">
                 <a:solidFill>
                   <a:srgbClr val="AEAEC2"/>
                 </a:solidFill>
@@ -18320,7 +18681,7 @@
           <a:bodyPr wrap="square" lIns="0" tIns="0" rIns="0" bIns="0" rtlCol="0" anchor="ctr"/>
           <a:lstStyle/>
           <a:p>
-            <a:pPr marL="0" indent="0">
+            <a:pPr indent="0" marL="0">
               <a:buNone/>
             </a:pPr>
             <a:r>
@@ -18359,7 +18720,7 @@
           <a:bodyPr wrap="square" lIns="0" tIns="0" rIns="0" bIns="0" rtlCol="0" anchor="t"/>
           <a:lstStyle/>
           <a:p>
-            <a:pPr marL="0" indent="0">
+            <a:pPr indent="0" marL="0">
               <a:lnSpc>
                 <a:spcPct val="100000"/>
               </a:lnSpc>
@@ -18401,7 +18762,7 @@
           <a:bodyPr wrap="square" lIns="0" tIns="0" rIns="0" bIns="0" rtlCol="0" anchor="ctr"/>
           <a:lstStyle/>
           <a:p>
-            <a:pPr marL="0" indent="0">
+            <a:pPr indent="0" marL="0">
               <a:buNone/>
             </a:pPr>
             <a:r>
@@ -18445,7 +18806,7 @@
             <a:prstDash val="solid"/>
           </a:ln>
           <a:effectLst>
-            <a:outerShdw blurRad="177800" dist="63500" dir="5400000" algn="bl" rotWithShape="0">
+            <a:outerShdw sx="100000" sy="100000" kx="0" ky="0" algn="bl" rotWithShape="0" blurRad="177800" dist="63500" dir="5400000">
               <a:srgbClr val="3E00DB">
                 <a:alpha val="55000"/>
               </a:srgbClr>
@@ -18474,11 +18835,11 @@
           <a:bodyPr wrap="square" lIns="0" tIns="0" rIns="0" bIns="0" rtlCol="0" anchor="ctr"/>
           <a:lstStyle/>
           <a:p>
-            <a:pPr marL="0" indent="0">
-              <a:buNone/>
-            </a:pPr>
-            <a:r>
-              <a:rPr lang="en-US" sz="950" b="1" kern="0" spc="200" dirty="0">
+            <a:pPr indent="0" marL="0">
+              <a:buNone/>
+            </a:pPr>
+            <a:r>
+              <a:rPr lang="en-US" sz="950" b="1" spc="200" kern="0" dirty="0">
                 <a:solidFill>
                   <a:srgbClr val="AEAEC2"/>
                 </a:solidFill>
@@ -18513,7 +18874,7 @@
           <a:bodyPr wrap="square" lIns="0" tIns="0" rIns="0" bIns="0" rtlCol="0" anchor="ctr"/>
           <a:lstStyle/>
           <a:p>
-            <a:pPr marL="0" indent="0">
+            <a:pPr indent="0" marL="0">
               <a:buNone/>
             </a:pPr>
             <a:r>
@@ -18552,7 +18913,7 @@
           <a:bodyPr wrap="square" lIns="0" tIns="0" rIns="0" bIns="0" rtlCol="0" anchor="t"/>
           <a:lstStyle/>
           <a:p>
-            <a:pPr marL="0" indent="0">
+            <a:pPr indent="0" marL="0">
               <a:lnSpc>
                 <a:spcPct val="100000"/>
               </a:lnSpc>
@@ -18594,7 +18955,7 @@
           <a:bodyPr wrap="square" lIns="0" tIns="0" rIns="0" bIns="0" rtlCol="0" anchor="ctr"/>
           <a:lstStyle/>
           <a:p>
-            <a:pPr marL="0" indent="0">
+            <a:pPr indent="0" marL="0">
               <a:buNone/>
             </a:pPr>
             <a:r>
@@ -18638,7 +18999,7 @@
             <a:prstDash val="solid"/>
           </a:ln>
           <a:effectLst>
-            <a:outerShdw blurRad="177800" dist="63500" dir="5400000" algn="bl" rotWithShape="0">
+            <a:outerShdw sx="100000" sy="100000" kx="0" ky="0" algn="bl" rotWithShape="0" blurRad="177800" dist="63500" dir="5400000">
               <a:srgbClr val="3E00DB">
                 <a:alpha val="55000"/>
               </a:srgbClr>
@@ -18667,11 +19028,11 @@
           <a:bodyPr wrap="square" lIns="0" tIns="0" rIns="0" bIns="0" rtlCol="0" anchor="ctr"/>
           <a:lstStyle/>
           <a:p>
-            <a:pPr marL="0" indent="0">
-              <a:buNone/>
-            </a:pPr>
-            <a:r>
-              <a:rPr lang="en-US" sz="950" b="1" kern="0" spc="200" dirty="0">
+            <a:pPr indent="0" marL="0">
+              <a:buNone/>
+            </a:pPr>
+            <a:r>
+              <a:rPr lang="en-US" sz="950" b="1" spc="200" kern="0" dirty="0">
                 <a:solidFill>
                   <a:srgbClr val="AEAEC2"/>
                 </a:solidFill>
@@ -18706,7 +19067,7 @@
           <a:bodyPr wrap="square" lIns="0" tIns="0" rIns="0" bIns="0" rtlCol="0" anchor="ctr"/>
           <a:lstStyle/>
           <a:p>
-            <a:pPr marL="0" indent="0">
+            <a:pPr indent="0" marL="0">
               <a:buNone/>
             </a:pPr>
             <a:r>
@@ -18745,7 +19106,7 @@
           <a:bodyPr wrap="square" lIns="0" tIns="0" rIns="0" bIns="0" rtlCol="0" anchor="t"/>
           <a:lstStyle/>
           <a:p>
-            <a:pPr marL="0" indent="0">
+            <a:pPr indent="0" marL="0">
               <a:lnSpc>
                 <a:spcPct val="100000"/>
               </a:lnSpc>
@@ -18787,7 +19148,7 @@
           <a:bodyPr wrap="square" lIns="0" tIns="0" rIns="0" bIns="0" rtlCol="0" anchor="ctr"/>
           <a:lstStyle/>
           <a:p>
-            <a:pPr marL="0" indent="0">
+            <a:pPr indent="0" marL="0">
               <a:buNone/>
             </a:pPr>
             <a:r>
@@ -18831,7 +19192,7 @@
             <a:prstDash val="solid"/>
           </a:ln>
           <a:effectLst>
-            <a:outerShdw blurRad="177800" dist="63500" dir="5400000" algn="bl" rotWithShape="0">
+            <a:outerShdw sx="100000" sy="100000" kx="0" ky="0" algn="bl" rotWithShape="0" blurRad="177800" dist="63500" dir="5400000">
               <a:srgbClr val="3E00DB">
                 <a:alpha val="55000"/>
               </a:srgbClr>
@@ -18860,11 +19221,11 @@
           <a:bodyPr wrap="square" lIns="0" tIns="0" rIns="0" bIns="0" rtlCol="0" anchor="ctr"/>
           <a:lstStyle/>
           <a:p>
-            <a:pPr marL="0" indent="0">
-              <a:buNone/>
-            </a:pPr>
-            <a:r>
-              <a:rPr lang="en-US" sz="950" b="1" kern="0" spc="200" dirty="0">
+            <a:pPr indent="0" marL="0">
+              <a:buNone/>
+            </a:pPr>
+            <a:r>
+              <a:rPr lang="en-US" sz="950" b="1" spc="200" kern="0" dirty="0">
                 <a:solidFill>
                   <a:srgbClr val="AEAEC2"/>
                 </a:solidFill>
@@ -18899,7 +19260,7 @@
           <a:bodyPr wrap="square" lIns="0" tIns="0" rIns="0" bIns="0" rtlCol="0" anchor="ctr"/>
           <a:lstStyle/>
           <a:p>
-            <a:pPr marL="0" indent="0">
+            <a:pPr indent="0" marL="0">
               <a:buNone/>
             </a:pPr>
             <a:r>
@@ -18938,7 +19299,7 @@
           <a:bodyPr wrap="square" lIns="0" tIns="0" rIns="0" bIns="0" rtlCol="0" anchor="t"/>
           <a:lstStyle/>
           <a:p>
-            <a:pPr marL="0" indent="0">
+            <a:pPr indent="0" marL="0">
               <a:lnSpc>
                 <a:spcPct val="100000"/>
               </a:lnSpc>
@@ -18980,7 +19341,7 @@
           <a:bodyPr wrap="square" lIns="0" tIns="0" rIns="0" bIns="0" rtlCol="0" anchor="ctr"/>
           <a:lstStyle/>
           <a:p>
-            <a:pPr marL="0" indent="0">
+            <a:pPr indent="0" marL="0">
               <a:buNone/>
             </a:pPr>
             <a:r>
@@ -19024,7 +19385,7 @@
             <a:prstDash val="solid"/>
           </a:ln>
           <a:effectLst>
-            <a:outerShdw blurRad="177800" dist="63500" dir="5400000" algn="bl" rotWithShape="0">
+            <a:outerShdw sx="100000" sy="100000" kx="0" ky="0" algn="bl" rotWithShape="0" blurRad="177800" dist="63500" dir="5400000">
               <a:srgbClr val="3E00DB">
                 <a:alpha val="55000"/>
               </a:srgbClr>
@@ -19053,11 +19414,11 @@
           <a:bodyPr wrap="square" lIns="0" tIns="0" rIns="0" bIns="0" rtlCol="0" anchor="ctr"/>
           <a:lstStyle/>
           <a:p>
-            <a:pPr marL="0" indent="0">
-              <a:buNone/>
-            </a:pPr>
-            <a:r>
-              <a:rPr lang="en-US" sz="950" b="1" kern="0" spc="200" dirty="0">
+            <a:pPr indent="0" marL="0">
+              <a:buNone/>
+            </a:pPr>
+            <a:r>
+              <a:rPr lang="en-US" sz="950" b="1" spc="200" kern="0" dirty="0">
                 <a:solidFill>
                   <a:srgbClr val="AEAEC2"/>
                 </a:solidFill>
@@ -19092,7 +19453,7 @@
           <a:bodyPr wrap="square" lIns="0" tIns="0" rIns="0" bIns="0" rtlCol="0" anchor="ctr"/>
           <a:lstStyle/>
           <a:p>
-            <a:pPr marL="0" indent="0">
+            <a:pPr indent="0" marL="0">
               <a:buNone/>
             </a:pPr>
             <a:r>
@@ -19131,7 +19492,7 @@
           <a:bodyPr wrap="square" lIns="0" tIns="0" rIns="0" bIns="0" rtlCol="0" anchor="t"/>
           <a:lstStyle/>
           <a:p>
-            <a:pPr marL="0" indent="0">
+            <a:pPr indent="0" marL="0">
               <a:lnSpc>
                 <a:spcPct val="100000"/>
               </a:lnSpc>
@@ -19173,7 +19534,7 @@
           <a:bodyPr wrap="square" lIns="0" tIns="0" rIns="0" bIns="0" rtlCol="0" anchor="ctr"/>
           <a:lstStyle/>
           <a:p>
-            <a:pPr marL="0" indent="0">
+            <a:pPr indent="0" marL="0">
               <a:buNone/>
             </a:pPr>
             <a:r>
@@ -19217,7 +19578,7 @@
             <a:prstDash val="solid"/>
           </a:ln>
           <a:effectLst>
-            <a:outerShdw blurRad="177800" dist="63500" dir="5400000" algn="bl" rotWithShape="0">
+            <a:outerShdw sx="100000" sy="100000" kx="0" ky="0" algn="bl" rotWithShape="0" blurRad="177800" dist="63500" dir="5400000">
               <a:srgbClr val="3E00DB">
                 <a:alpha val="55000"/>
               </a:srgbClr>
@@ -19246,11 +19607,11 @@
           <a:bodyPr wrap="square" lIns="0" tIns="0" rIns="0" bIns="0" rtlCol="0" anchor="ctr"/>
           <a:lstStyle/>
           <a:p>
-            <a:pPr marL="0" indent="0">
-              <a:buNone/>
-            </a:pPr>
-            <a:r>
-              <a:rPr lang="en-US" sz="950" b="1" kern="0" spc="200" dirty="0">
+            <a:pPr indent="0" marL="0">
+              <a:buNone/>
+            </a:pPr>
+            <a:r>
+              <a:rPr lang="en-US" sz="950" b="1" spc="200" kern="0" dirty="0">
                 <a:solidFill>
                   <a:srgbClr val="CDD6FF"/>
                 </a:solidFill>
@@ -19285,7 +19646,7 @@
           <a:bodyPr wrap="square" lIns="0" tIns="0" rIns="0" bIns="0" rtlCol="0" anchor="ctr"/>
           <a:lstStyle/>
           <a:p>
-            <a:pPr marL="0" indent="0">
+            <a:pPr indent="0" marL="0">
               <a:buNone/>
             </a:pPr>
             <a:r>
@@ -19324,7 +19685,7 @@
           <a:bodyPr wrap="square" lIns="0" tIns="0" rIns="0" bIns="0" rtlCol="0" anchor="t"/>
           <a:lstStyle/>
           <a:p>
-            <a:pPr marL="0" indent="0">
+            <a:pPr indent="0" marL="0">
               <a:lnSpc>
                 <a:spcPct val="100000"/>
               </a:lnSpc>
@@ -19366,7 +19727,7 @@
           <a:bodyPr wrap="square" lIns="0" tIns="0" rIns="0" bIns="0" rtlCol="0" anchor="ctr"/>
           <a:lstStyle/>
           <a:p>
-            <a:pPr marL="0" indent="0">
+            <a:pPr indent="0" marL="0">
               <a:buNone/>
             </a:pPr>
             <a:r>
@@ -19405,11 +19766,11 @@
           <a:bodyPr wrap="square" lIns="0" tIns="0" rIns="0" bIns="0" rtlCol="0" anchor="ctr"/>
           <a:lstStyle/>
           <a:p>
-            <a:pPr marL="0" indent="0">
-              <a:buNone/>
-            </a:pPr>
-            <a:r>
-              <a:rPr lang="en-US" sz="850" kern="0" spc="100" dirty="0">
+            <a:pPr indent="0" marL="0">
+              <a:buNone/>
+            </a:pPr>
+            <a:r>
+              <a:rPr lang="en-US" sz="850" spc="100" kern="0" dirty="0">
                 <a:solidFill>
                   <a:srgbClr val="5A5570"/>
                 </a:solidFill>
@@ -19444,7 +19805,7 @@
           <a:bodyPr wrap="square" lIns="0" tIns="0" rIns="0" bIns="0" rtlCol="0" anchor="ctr"/>
           <a:lstStyle/>
           <a:p>
-            <a:pPr marL="0" indent="0" algn="r">
+            <a:pPr algn="r" indent="0" marL="0">
               <a:buNone/>
             </a:pPr>
             <a:r>
@@ -19483,7 +19844,7 @@
           <a:bodyPr wrap="square" lIns="0" tIns="0" rIns="0" bIns="0" rtlCol="0" anchor="ctr"/>
           <a:lstStyle/>
           <a:p>
-            <a:pPr marL="0" indent="0" algn="r">
+            <a:pPr algn="r" indent="0" marL="0">
               <a:buNone/>
             </a:pPr>
             <a:r>
@@ -19517,7 +19878,6 @@
         <a:solidFill>
           <a:srgbClr val="0A0A0F"/>
         </a:solidFill>
-        <a:effectLst/>
       </p:bgPr>
     </p:bg>
     <p:spTree>
@@ -19619,11 +19979,11 @@
           <a:bodyPr wrap="square" lIns="0" tIns="0" rIns="0" bIns="0" rtlCol="0" anchor="ctr"/>
           <a:lstStyle/>
           <a:p>
-            <a:pPr marL="0" indent="0" algn="l">
-              <a:buNone/>
-            </a:pPr>
-            <a:r>
-              <a:rPr lang="en-US" sz="1100" b="1" kern="0" spc="300" dirty="0">
+            <a:pPr algn="l" indent="0" marL="0">
+              <a:buNone/>
+            </a:pPr>
+            <a:r>
+              <a:rPr lang="en-US" sz="1100" b="1" spc="300" kern="0" dirty="0">
                 <a:solidFill>
                   <a:srgbClr val="B6C800"/>
                 </a:solidFill>
@@ -19658,7 +20018,7 @@
           <a:bodyPr wrap="square" lIns="0" tIns="0" rIns="0" bIns="0" rtlCol="0" anchor="t"/>
           <a:lstStyle/>
           <a:p>
-            <a:pPr marL="0" indent="0" algn="l">
+            <a:pPr algn="l" indent="0" marL="0">
               <a:lnSpc>
                 <a:spcPct val="100000"/>
               </a:lnSpc>
@@ -19700,7 +20060,7 @@
           <a:bodyPr wrap="square" lIns="0" tIns="0" rIns="0" bIns="0" rtlCol="0" anchor="ctr"/>
           <a:lstStyle/>
           <a:p>
-            <a:pPr marL="0" indent="0">
+            <a:pPr indent="0" marL="0">
               <a:buNone/>
             </a:pPr>
             <a:r>
@@ -19734,41 +20094,17 @@
         </p:nvGraphicFramePr>
         <p:xfrm>
           <a:off x="548640" y="1874520"/>
-          <a:ext cx="5394960" cy="4197096"/>
+          <a:ext cx="5394960" cy="914400"/>
         </p:xfrm>
         <a:graphic>
           <a:graphicData uri="http://schemas.openxmlformats.org/drawingml/2006/table">
             <a:tbl>
               <a:tblPr/>
               <a:tblGrid>
-                <a:gridCol w="2377440">
-                  <a:extLst>
-                    <a:ext uri="{9D8B030D-6E8A-4147-A177-3AD203B41FA5}">
-                      <a16:colId xmlns:a16="http://schemas.microsoft.com/office/drawing/2014/main" val="20000"/>
-                    </a:ext>
-                  </a:extLst>
-                </a:gridCol>
-                <a:gridCol w="777240">
-                  <a:extLst>
-                    <a:ext uri="{9D8B030D-6E8A-4147-A177-3AD203B41FA5}">
-                      <a16:colId xmlns:a16="http://schemas.microsoft.com/office/drawing/2014/main" val="20001"/>
-                    </a:ext>
-                  </a:extLst>
-                </a:gridCol>
-                <a:gridCol w="914400">
-                  <a:extLst>
-                    <a:ext uri="{9D8B030D-6E8A-4147-A177-3AD203B41FA5}">
-                      <a16:colId xmlns:a16="http://schemas.microsoft.com/office/drawing/2014/main" val="20002"/>
-                    </a:ext>
-                  </a:extLst>
-                </a:gridCol>
-                <a:gridCol w="1325880">
-                  <a:extLst>
-                    <a:ext uri="{9D8B030D-6E8A-4147-A177-3AD203B41FA5}">
-                      <a16:colId xmlns:a16="http://schemas.microsoft.com/office/drawing/2014/main" val="20003"/>
-                    </a:ext>
-                  </a:extLst>
-                </a:gridCol>
+                <a:gridCol w="2377440"/>
+                <a:gridCol w="777240"/>
+                <a:gridCol w="914400"/>
+                <a:gridCol w="1325880"/>
               </a:tblGrid>
               <a:tr h="233172">
                 <a:tc>
@@ -19776,7 +20112,7 @@
                     <a:bodyPr/>
                     <a:lstStyle/>
                     <a:p>
-                      <a:pPr marL="0" indent="0" algn="l">
+                      <a:pPr algn="l" indent="0" marL="0">
                         <a:buNone/>
                       </a:pPr>
                       <a:r>
@@ -19844,7 +20180,7 @@
                     <a:bodyPr/>
                     <a:lstStyle/>
                     <a:p>
-                      <a:pPr marL="0" indent="0" algn="r">
+                      <a:pPr algn="r" indent="0" marL="0">
                         <a:buNone/>
                       </a:pPr>
                       <a:r>
@@ -19912,7 +20248,7 @@
                     <a:bodyPr/>
                     <a:lstStyle/>
                     <a:p>
-                      <a:pPr marL="0" indent="0" algn="r">
+                      <a:pPr algn="r" indent="0" marL="0">
                         <a:buNone/>
                       </a:pPr>
                       <a:r>
@@ -19980,7 +20316,7 @@
                     <a:bodyPr/>
                     <a:lstStyle/>
                     <a:p>
-                      <a:pPr marL="0" indent="0" algn="r">
+                      <a:pPr algn="r" indent="0" marL="0">
                         <a:buNone/>
                       </a:pPr>
                       <a:r>
@@ -20043,11 +20379,6 @@
                     </a:solidFill>
                   </a:tcPr>
                 </a:tc>
-                <a:extLst>
-                  <a:ext uri="{0D108BD9-81ED-4DB2-BD59-A6C34878D82A}">
-                    <a16:rowId xmlns:a16="http://schemas.microsoft.com/office/drawing/2014/main" val="10000"/>
-                  </a:ext>
-                </a:extLst>
               </a:tr>
               <a:tr h="233172">
                 <a:tc gridSpan="4">
@@ -20055,11 +20386,11 @@
                     <a:bodyPr/>
                     <a:lstStyle/>
                     <a:p>
-                      <a:pPr marL="0" indent="0" algn="l">
+                      <a:pPr algn="l" indent="0" marL="0">
                         <a:buNone/>
                       </a:pPr>
                       <a:r>
-                        <a:rPr lang="en-US" sz="850" b="1" kern="0" spc="100" dirty="0">
+                        <a:rPr lang="en-US" sz="850" b="1" spc="100" kern="0" dirty="0">
                           <a:solidFill>
                             <a:srgbClr val="CDD6FF"/>
                           </a:solidFill>
@@ -20119,40 +20450,14 @@
                   </a:tcPr>
                 </a:tc>
                 <a:tc hMerge="1">
-                  <a:txBody>
-                    <a:bodyPr/>
-                    <a:lstStyle/>
-                    <a:p>
-                      <a:endParaRPr lang="en-US"/>
-                    </a:p>
-                  </a:txBody>
                   <a:tcPr/>
                 </a:tc>
                 <a:tc hMerge="1">
-                  <a:txBody>
-                    <a:bodyPr/>
-                    <a:lstStyle/>
-                    <a:p>
-                      <a:endParaRPr lang="en-US"/>
-                    </a:p>
-                  </a:txBody>
                   <a:tcPr/>
                 </a:tc>
                 <a:tc hMerge="1">
-                  <a:txBody>
-                    <a:bodyPr/>
-                    <a:lstStyle/>
-                    <a:p>
-                      <a:endParaRPr lang="en-US"/>
-                    </a:p>
-                  </a:txBody>
                   <a:tcPr/>
                 </a:tc>
-                <a:extLst>
-                  <a:ext uri="{0D108BD9-81ED-4DB2-BD59-A6C34878D82A}">
-                    <a16:rowId xmlns:a16="http://schemas.microsoft.com/office/drawing/2014/main" val="10001"/>
-                  </a:ext>
-                </a:extLst>
               </a:tr>
               <a:tr h="233172">
                 <a:tc>
@@ -20160,7 +20465,7 @@
                     <a:bodyPr/>
                     <a:lstStyle/>
                     <a:p>
-                      <a:pPr marL="0" indent="0" algn="l">
+                      <a:pPr algn="l" indent="0" marL="0">
                         <a:buNone/>
                       </a:pPr>
                       <a:r>
@@ -20225,7 +20530,7 @@
                     <a:bodyPr/>
                     <a:lstStyle/>
                     <a:p>
-                      <a:pPr marL="0" indent="0" algn="r">
+                      <a:pPr algn="r" indent="0" marL="0">
                         <a:buNone/>
                       </a:pPr>
                       <a:r>
@@ -20290,7 +20595,7 @@
                     <a:bodyPr/>
                     <a:lstStyle/>
                     <a:p>
-                      <a:pPr marL="0" indent="0" algn="r">
+                      <a:pPr algn="r" indent="0" marL="0">
                         <a:buNone/>
                       </a:pPr>
                       <a:r>
@@ -20355,7 +20660,7 @@
                     <a:bodyPr/>
                     <a:lstStyle/>
                     <a:p>
-                      <a:pPr marL="0" indent="0" algn="r">
+                      <a:pPr algn="r" indent="0" marL="0">
                         <a:buNone/>
                       </a:pPr>
                       <a:r>
@@ -20415,11 +20720,6 @@
                     </a:lnB>
                   </a:tcPr>
                 </a:tc>
-                <a:extLst>
-                  <a:ext uri="{0D108BD9-81ED-4DB2-BD59-A6C34878D82A}">
-                    <a16:rowId xmlns:a16="http://schemas.microsoft.com/office/drawing/2014/main" val="10002"/>
-                  </a:ext>
-                </a:extLst>
               </a:tr>
               <a:tr h="233172">
                 <a:tc>
@@ -20427,7 +20727,7 @@
                     <a:bodyPr/>
                     <a:lstStyle/>
                     <a:p>
-                      <a:pPr marL="0" indent="0" algn="l">
+                      <a:pPr algn="l" indent="0" marL="0">
                         <a:buNone/>
                       </a:pPr>
                       <a:r>
@@ -20492,7 +20792,7 @@
                     <a:bodyPr/>
                     <a:lstStyle/>
                     <a:p>
-                      <a:pPr marL="0" indent="0" algn="r">
+                      <a:pPr algn="r" indent="0" marL="0">
                         <a:buNone/>
                       </a:pPr>
                       <a:r>
@@ -20557,7 +20857,7 @@
                     <a:bodyPr/>
                     <a:lstStyle/>
                     <a:p>
-                      <a:pPr marL="0" indent="0" algn="r">
+                      <a:pPr algn="r" indent="0" marL="0">
                         <a:buNone/>
                       </a:pPr>
                       <a:r>
@@ -20622,7 +20922,7 @@
                     <a:bodyPr/>
                     <a:lstStyle/>
                     <a:p>
-                      <a:pPr marL="0" indent="0" algn="r">
+                      <a:pPr algn="r" indent="0" marL="0">
                         <a:buNone/>
                       </a:pPr>
                       <a:r>
@@ -20682,11 +20982,6 @@
                     </a:lnB>
                   </a:tcPr>
                 </a:tc>
-                <a:extLst>
-                  <a:ext uri="{0D108BD9-81ED-4DB2-BD59-A6C34878D82A}">
-                    <a16:rowId xmlns:a16="http://schemas.microsoft.com/office/drawing/2014/main" val="10003"/>
-                  </a:ext>
-                </a:extLst>
               </a:tr>
               <a:tr h="233172">
                 <a:tc>
@@ -20694,7 +20989,7 @@
                     <a:bodyPr/>
                     <a:lstStyle/>
                     <a:p>
-                      <a:pPr marL="0" indent="0" algn="l">
+                      <a:pPr algn="l" indent="0" marL="0">
                         <a:buNone/>
                       </a:pPr>
                       <a:r>
@@ -20759,7 +21054,7 @@
                     <a:bodyPr/>
                     <a:lstStyle/>
                     <a:p>
-                      <a:pPr marL="0" indent="0" algn="r">
+                      <a:pPr algn="r" indent="0" marL="0">
                         <a:buNone/>
                       </a:pPr>
                       <a:r>
@@ -20824,7 +21119,7 @@
                     <a:bodyPr/>
                     <a:lstStyle/>
                     <a:p>
-                      <a:pPr marL="0" indent="0" algn="r">
+                      <a:pPr algn="r" indent="0" marL="0">
                         <a:buNone/>
                       </a:pPr>
                       <a:r>
@@ -20889,7 +21184,7 @@
                     <a:bodyPr/>
                     <a:lstStyle/>
                     <a:p>
-                      <a:pPr marL="0" indent="0" algn="r">
+                      <a:pPr algn="r" indent="0" marL="0">
                         <a:buNone/>
                       </a:pPr>
                       <a:r>
@@ -20949,11 +21244,6 @@
                     </a:lnB>
                   </a:tcPr>
                 </a:tc>
-                <a:extLst>
-                  <a:ext uri="{0D108BD9-81ED-4DB2-BD59-A6C34878D82A}">
-                    <a16:rowId xmlns:a16="http://schemas.microsoft.com/office/drawing/2014/main" val="10004"/>
-                  </a:ext>
-                </a:extLst>
               </a:tr>
               <a:tr h="233172">
                 <a:tc>
@@ -20961,7 +21251,7 @@
                     <a:bodyPr/>
                     <a:lstStyle/>
                     <a:p>
-                      <a:pPr marL="0" indent="0" algn="l">
+                      <a:pPr algn="l" indent="0" marL="0">
                         <a:buNone/>
                       </a:pPr>
                       <a:r>
@@ -21026,7 +21316,7 @@
                     <a:bodyPr/>
                     <a:lstStyle/>
                     <a:p>
-                      <a:pPr marL="0" indent="0" algn="r">
+                      <a:pPr algn="r" indent="0" marL="0">
                         <a:buNone/>
                       </a:pPr>
                       <a:r>
@@ -21091,7 +21381,7 @@
                     <a:bodyPr/>
                     <a:lstStyle/>
                     <a:p>
-                      <a:pPr marL="0" indent="0" algn="r">
+                      <a:pPr algn="r" indent="0" marL="0">
                         <a:buNone/>
                       </a:pPr>
                       <a:r>
@@ -21156,7 +21446,7 @@
                     <a:bodyPr/>
                     <a:lstStyle/>
                     <a:p>
-                      <a:pPr marL="0" indent="0" algn="r">
+                      <a:pPr algn="r" indent="0" marL="0">
                         <a:buNone/>
                       </a:pPr>
                       <a:r>
@@ -21216,11 +21506,6 @@
                     </a:lnB>
                   </a:tcPr>
                 </a:tc>
-                <a:extLst>
-                  <a:ext uri="{0D108BD9-81ED-4DB2-BD59-A6C34878D82A}">
-                    <a16:rowId xmlns:a16="http://schemas.microsoft.com/office/drawing/2014/main" val="10005"/>
-                  </a:ext>
-                </a:extLst>
               </a:tr>
               <a:tr h="233172">
                 <a:tc gridSpan="4">
@@ -21228,11 +21513,11 @@
                     <a:bodyPr/>
                     <a:lstStyle/>
                     <a:p>
-                      <a:pPr marL="0" indent="0" algn="l">
+                      <a:pPr algn="l" indent="0" marL="0">
                         <a:buNone/>
                       </a:pPr>
                       <a:r>
-                        <a:rPr lang="en-US" sz="850" b="1" kern="0" spc="100" dirty="0">
+                        <a:rPr lang="en-US" sz="850" b="1" spc="100" kern="0" dirty="0">
                           <a:solidFill>
                             <a:srgbClr val="CDD6FF"/>
                           </a:solidFill>
@@ -21292,40 +21577,14 @@
                   </a:tcPr>
                 </a:tc>
                 <a:tc hMerge="1">
-                  <a:txBody>
-                    <a:bodyPr/>
-                    <a:lstStyle/>
-                    <a:p>
-                      <a:endParaRPr lang="en-US"/>
-                    </a:p>
-                  </a:txBody>
                   <a:tcPr/>
                 </a:tc>
                 <a:tc hMerge="1">
-                  <a:txBody>
-                    <a:bodyPr/>
-                    <a:lstStyle/>
-                    <a:p>
-                      <a:endParaRPr lang="en-US"/>
-                    </a:p>
-                  </a:txBody>
                   <a:tcPr/>
                 </a:tc>
                 <a:tc hMerge="1">
-                  <a:txBody>
-                    <a:bodyPr/>
-                    <a:lstStyle/>
-                    <a:p>
-                      <a:endParaRPr lang="en-US"/>
-                    </a:p>
-                  </a:txBody>
                   <a:tcPr/>
                 </a:tc>
-                <a:extLst>
-                  <a:ext uri="{0D108BD9-81ED-4DB2-BD59-A6C34878D82A}">
-                    <a16:rowId xmlns:a16="http://schemas.microsoft.com/office/drawing/2014/main" val="10006"/>
-                  </a:ext>
-                </a:extLst>
               </a:tr>
               <a:tr h="233172">
                 <a:tc>
@@ -21333,7 +21592,7 @@
                     <a:bodyPr/>
                     <a:lstStyle/>
                     <a:p>
-                      <a:pPr marL="0" indent="0" algn="l">
+                      <a:pPr algn="l" indent="0" marL="0">
                         <a:buNone/>
                       </a:pPr>
                       <a:r>
@@ -21398,7 +21657,7 @@
                     <a:bodyPr/>
                     <a:lstStyle/>
                     <a:p>
-                      <a:pPr marL="0" indent="0" algn="r">
+                      <a:pPr algn="r" indent="0" marL="0">
                         <a:buNone/>
                       </a:pPr>
                       <a:r>
@@ -21463,7 +21722,7 @@
                     <a:bodyPr/>
                     <a:lstStyle/>
                     <a:p>
-                      <a:pPr marL="0" indent="0" algn="r">
+                      <a:pPr algn="r" indent="0" marL="0">
                         <a:buNone/>
                       </a:pPr>
                       <a:r>
@@ -21528,7 +21787,7 @@
                     <a:bodyPr/>
                     <a:lstStyle/>
                     <a:p>
-                      <a:pPr marL="0" indent="0" algn="r">
+                      <a:pPr algn="r" indent="0" marL="0">
                         <a:buNone/>
                       </a:pPr>
                       <a:r>
@@ -21588,11 +21847,6 @@
                     </a:lnB>
                   </a:tcPr>
                 </a:tc>
-                <a:extLst>
-                  <a:ext uri="{0D108BD9-81ED-4DB2-BD59-A6C34878D82A}">
-                    <a16:rowId xmlns:a16="http://schemas.microsoft.com/office/drawing/2014/main" val="10007"/>
-                  </a:ext>
-                </a:extLst>
               </a:tr>
               <a:tr h="233172">
                 <a:tc gridSpan="4">
@@ -21600,11 +21854,11 @@
                     <a:bodyPr/>
                     <a:lstStyle/>
                     <a:p>
-                      <a:pPr marL="0" indent="0" algn="l">
+                      <a:pPr algn="l" indent="0" marL="0">
                         <a:buNone/>
                       </a:pPr>
                       <a:r>
-                        <a:rPr lang="en-US" sz="850" b="1" kern="0" spc="100" dirty="0">
+                        <a:rPr lang="en-US" sz="850" b="1" spc="100" kern="0" dirty="0">
                           <a:solidFill>
                             <a:srgbClr val="CDD6FF"/>
                           </a:solidFill>
@@ -21664,40 +21918,14 @@
                   </a:tcPr>
                 </a:tc>
                 <a:tc hMerge="1">
-                  <a:txBody>
-                    <a:bodyPr/>
-                    <a:lstStyle/>
-                    <a:p>
-                      <a:endParaRPr lang="en-US"/>
-                    </a:p>
-                  </a:txBody>
                   <a:tcPr/>
                 </a:tc>
                 <a:tc hMerge="1">
-                  <a:txBody>
-                    <a:bodyPr/>
-                    <a:lstStyle/>
-                    <a:p>
-                      <a:endParaRPr lang="en-US"/>
-                    </a:p>
-                  </a:txBody>
                   <a:tcPr/>
                 </a:tc>
                 <a:tc hMerge="1">
-                  <a:txBody>
-                    <a:bodyPr/>
-                    <a:lstStyle/>
-                    <a:p>
-                      <a:endParaRPr lang="en-US"/>
-                    </a:p>
-                  </a:txBody>
                   <a:tcPr/>
                 </a:tc>
-                <a:extLst>
-                  <a:ext uri="{0D108BD9-81ED-4DB2-BD59-A6C34878D82A}">
-                    <a16:rowId xmlns:a16="http://schemas.microsoft.com/office/drawing/2014/main" val="10008"/>
-                  </a:ext>
-                </a:extLst>
               </a:tr>
               <a:tr h="233172">
                 <a:tc>
@@ -21705,7 +21933,7 @@
                     <a:bodyPr/>
                     <a:lstStyle/>
                     <a:p>
-                      <a:pPr marL="0" indent="0" algn="l">
+                      <a:pPr algn="l" indent="0" marL="0">
                         <a:buNone/>
                       </a:pPr>
                       <a:r>
@@ -21770,7 +21998,7 @@
                     <a:bodyPr/>
                     <a:lstStyle/>
                     <a:p>
-                      <a:pPr marL="0" indent="0" algn="r">
+                      <a:pPr algn="r" indent="0" marL="0">
                         <a:buNone/>
                       </a:pPr>
                       <a:r>
@@ -21835,7 +22063,7 @@
                     <a:bodyPr/>
                     <a:lstStyle/>
                     <a:p>
-                      <a:pPr marL="0" indent="0" algn="r">
+                      <a:pPr algn="r" indent="0" marL="0">
                         <a:buNone/>
                       </a:pPr>
                       <a:r>
@@ -21900,7 +22128,7 @@
                     <a:bodyPr/>
                     <a:lstStyle/>
                     <a:p>
-                      <a:pPr marL="0" indent="0" algn="r">
+                      <a:pPr algn="r" indent="0" marL="0">
                         <a:buNone/>
                       </a:pPr>
                       <a:r>
@@ -21960,11 +22188,6 @@
                     </a:lnB>
                   </a:tcPr>
                 </a:tc>
-                <a:extLst>
-                  <a:ext uri="{0D108BD9-81ED-4DB2-BD59-A6C34878D82A}">
-                    <a16:rowId xmlns:a16="http://schemas.microsoft.com/office/drawing/2014/main" val="10009"/>
-                  </a:ext>
-                </a:extLst>
               </a:tr>
               <a:tr h="233172">
                 <a:tc>
@@ -21972,7 +22195,7 @@
                     <a:bodyPr/>
                     <a:lstStyle/>
                     <a:p>
-                      <a:pPr marL="0" indent="0" algn="l">
+                      <a:pPr algn="l" indent="0" marL="0">
                         <a:buNone/>
                       </a:pPr>
                       <a:r>
@@ -22037,7 +22260,7 @@
                     <a:bodyPr/>
                     <a:lstStyle/>
                     <a:p>
-                      <a:pPr marL="0" indent="0" algn="r">
+                      <a:pPr algn="r" indent="0" marL="0">
                         <a:buNone/>
                       </a:pPr>
                       <a:r>
@@ -22102,7 +22325,7 @@
                     <a:bodyPr/>
                     <a:lstStyle/>
                     <a:p>
-                      <a:pPr marL="0" indent="0" algn="r">
+                      <a:pPr algn="r" indent="0" marL="0">
                         <a:buNone/>
                       </a:pPr>
                       <a:r>
@@ -22167,7 +22390,7 @@
                     <a:bodyPr/>
                     <a:lstStyle/>
                     <a:p>
-                      <a:pPr marL="0" indent="0" algn="r">
+                      <a:pPr algn="r" indent="0" marL="0">
                         <a:buNone/>
                       </a:pPr>
                       <a:r>
@@ -22227,11 +22450,6 @@
                     </a:lnB>
                   </a:tcPr>
                 </a:tc>
-                <a:extLst>
-                  <a:ext uri="{0D108BD9-81ED-4DB2-BD59-A6C34878D82A}">
-                    <a16:rowId xmlns:a16="http://schemas.microsoft.com/office/drawing/2014/main" val="10010"/>
-                  </a:ext>
-                </a:extLst>
               </a:tr>
               <a:tr h="233172">
                 <a:tc>
@@ -22239,7 +22457,7 @@
                     <a:bodyPr/>
                     <a:lstStyle/>
                     <a:p>
-                      <a:pPr marL="0" indent="0" algn="l">
+                      <a:pPr algn="l" indent="0" marL="0">
                         <a:buNone/>
                       </a:pPr>
                       <a:r>
@@ -22304,7 +22522,7 @@
                     <a:bodyPr/>
                     <a:lstStyle/>
                     <a:p>
-                      <a:pPr marL="0" indent="0" algn="r">
+                      <a:pPr algn="r" indent="0" marL="0">
                         <a:buNone/>
                       </a:pPr>
                       <a:r>
@@ -22369,7 +22587,7 @@
                     <a:bodyPr/>
                     <a:lstStyle/>
                     <a:p>
-                      <a:pPr marL="0" indent="0" algn="r">
+                      <a:pPr algn="r" indent="0" marL="0">
                         <a:buNone/>
                       </a:pPr>
                       <a:r>
@@ -22434,7 +22652,7 @@
                     <a:bodyPr/>
                     <a:lstStyle/>
                     <a:p>
-                      <a:pPr marL="0" indent="0" algn="r">
+                      <a:pPr algn="r" indent="0" marL="0">
                         <a:buNone/>
                       </a:pPr>
                       <a:r>
@@ -22494,11 +22712,6 @@
                     </a:lnB>
                   </a:tcPr>
                 </a:tc>
-                <a:extLst>
-                  <a:ext uri="{0D108BD9-81ED-4DB2-BD59-A6C34878D82A}">
-                    <a16:rowId xmlns:a16="http://schemas.microsoft.com/office/drawing/2014/main" val="10011"/>
-                  </a:ext>
-                </a:extLst>
               </a:tr>
               <a:tr h="233172">
                 <a:tc gridSpan="4">
@@ -22506,11 +22719,11 @@
                     <a:bodyPr/>
                     <a:lstStyle/>
                     <a:p>
-                      <a:pPr marL="0" indent="0" algn="l">
+                      <a:pPr algn="l" indent="0" marL="0">
                         <a:buNone/>
                       </a:pPr>
                       <a:r>
-                        <a:rPr lang="en-US" sz="850" b="1" kern="0" spc="100" dirty="0">
+                        <a:rPr lang="en-US" sz="850" b="1" spc="100" kern="0" dirty="0">
                           <a:solidFill>
                             <a:srgbClr val="CDD6FF"/>
                           </a:solidFill>
@@ -22570,40 +22783,14 @@
                   </a:tcPr>
                 </a:tc>
                 <a:tc hMerge="1">
-                  <a:txBody>
-                    <a:bodyPr/>
-                    <a:lstStyle/>
-                    <a:p>
-                      <a:endParaRPr lang="en-US"/>
-                    </a:p>
-                  </a:txBody>
                   <a:tcPr/>
                 </a:tc>
                 <a:tc hMerge="1">
-                  <a:txBody>
-                    <a:bodyPr/>
-                    <a:lstStyle/>
-                    <a:p>
-                      <a:endParaRPr lang="en-US"/>
-                    </a:p>
-                  </a:txBody>
                   <a:tcPr/>
                 </a:tc>
                 <a:tc hMerge="1">
-                  <a:txBody>
-                    <a:bodyPr/>
-                    <a:lstStyle/>
-                    <a:p>
-                      <a:endParaRPr lang="en-US"/>
-                    </a:p>
-                  </a:txBody>
                   <a:tcPr/>
                 </a:tc>
-                <a:extLst>
-                  <a:ext uri="{0D108BD9-81ED-4DB2-BD59-A6C34878D82A}">
-                    <a16:rowId xmlns:a16="http://schemas.microsoft.com/office/drawing/2014/main" val="10012"/>
-                  </a:ext>
-                </a:extLst>
               </a:tr>
               <a:tr h="233172">
                 <a:tc>
@@ -22611,7 +22798,7 @@
                     <a:bodyPr/>
                     <a:lstStyle/>
                     <a:p>
-                      <a:pPr marL="0" indent="0" algn="l">
+                      <a:pPr algn="l" indent="0" marL="0">
                         <a:buNone/>
                       </a:pPr>
                       <a:r>
@@ -22676,7 +22863,7 @@
                     <a:bodyPr/>
                     <a:lstStyle/>
                     <a:p>
-                      <a:pPr marL="0" indent="0" algn="r">
+                      <a:pPr algn="r" indent="0" marL="0">
                         <a:buNone/>
                       </a:pPr>
                       <a:r>
@@ -22741,7 +22928,7 @@
                     <a:bodyPr/>
                     <a:lstStyle/>
                     <a:p>
-                      <a:pPr marL="0" indent="0" algn="r">
+                      <a:pPr algn="r" indent="0" marL="0">
                         <a:buNone/>
                       </a:pPr>
                       <a:r>
@@ -22806,7 +22993,7 @@
                     <a:bodyPr/>
                     <a:lstStyle/>
                     <a:p>
-                      <a:pPr marL="0" indent="0" algn="r">
+                      <a:pPr algn="r" indent="0" marL="0">
                         <a:buNone/>
                       </a:pPr>
                       <a:r>
@@ -22866,11 +23053,6 @@
                     </a:lnB>
                   </a:tcPr>
                 </a:tc>
-                <a:extLst>
-                  <a:ext uri="{0D108BD9-81ED-4DB2-BD59-A6C34878D82A}">
-                    <a16:rowId xmlns:a16="http://schemas.microsoft.com/office/drawing/2014/main" val="10013"/>
-                  </a:ext>
-                </a:extLst>
               </a:tr>
               <a:tr h="233172">
                 <a:tc>
@@ -22878,7 +23060,7 @@
                     <a:bodyPr/>
                     <a:lstStyle/>
                     <a:p>
-                      <a:pPr marL="0" indent="0" algn="l">
+                      <a:pPr algn="l" indent="0" marL="0">
                         <a:buNone/>
                       </a:pPr>
                       <a:r>
@@ -22943,7 +23125,7 @@
                     <a:bodyPr/>
                     <a:lstStyle/>
                     <a:p>
-                      <a:pPr marL="0" indent="0" algn="r">
+                      <a:pPr algn="r" indent="0" marL="0">
                         <a:buNone/>
                       </a:pPr>
                       <a:r>
@@ -23008,7 +23190,7 @@
                     <a:bodyPr/>
                     <a:lstStyle/>
                     <a:p>
-                      <a:pPr marL="0" indent="0" algn="r">
+                      <a:pPr algn="r" indent="0" marL="0">
                         <a:buNone/>
                       </a:pPr>
                       <a:r>
@@ -23073,7 +23255,7 @@
                     <a:bodyPr/>
                     <a:lstStyle/>
                     <a:p>
-                      <a:pPr marL="0" indent="0" algn="r">
+                      <a:pPr algn="r" indent="0" marL="0">
                         <a:buNone/>
                       </a:pPr>
                       <a:r>
@@ -23133,11 +23315,6 @@
                     </a:lnB>
                   </a:tcPr>
                 </a:tc>
-                <a:extLst>
-                  <a:ext uri="{0D108BD9-81ED-4DB2-BD59-A6C34878D82A}">
-                    <a16:rowId xmlns:a16="http://schemas.microsoft.com/office/drawing/2014/main" val="10014"/>
-                  </a:ext>
-                </a:extLst>
               </a:tr>
               <a:tr h="233172">
                 <a:tc>
@@ -23145,7 +23322,7 @@
                     <a:bodyPr/>
                     <a:lstStyle/>
                     <a:p>
-                      <a:pPr marL="0" indent="0" algn="l">
+                      <a:pPr algn="l" indent="0" marL="0">
                         <a:buNone/>
                       </a:pPr>
                       <a:r>
@@ -23210,7 +23387,7 @@
                     <a:bodyPr/>
                     <a:lstStyle/>
                     <a:p>
-                      <a:pPr marL="0" indent="0" algn="r">
+                      <a:pPr algn="r" indent="0" marL="0">
                         <a:buNone/>
                       </a:pPr>
                       <a:r>
@@ -23275,7 +23452,7 @@
                     <a:bodyPr/>
                     <a:lstStyle/>
                     <a:p>
-                      <a:pPr marL="0" indent="0" algn="r">
+                      <a:pPr algn="r" indent="0" marL="0">
                         <a:buNone/>
                       </a:pPr>
                       <a:r>
@@ -23340,7 +23517,7 @@
                     <a:bodyPr/>
                     <a:lstStyle/>
                     <a:p>
-                      <a:pPr marL="0" indent="0" algn="r">
+                      <a:pPr algn="r" indent="0" marL="0">
                         <a:buNone/>
                       </a:pPr>
                       <a:r>
@@ -23400,11 +23577,6 @@
                     </a:lnB>
                   </a:tcPr>
                 </a:tc>
-                <a:extLst>
-                  <a:ext uri="{0D108BD9-81ED-4DB2-BD59-A6C34878D82A}">
-                    <a16:rowId xmlns:a16="http://schemas.microsoft.com/office/drawing/2014/main" val="10015"/>
-                  </a:ext>
-                </a:extLst>
               </a:tr>
               <a:tr h="233172">
                 <a:tc>
@@ -23412,7 +23584,7 @@
                     <a:bodyPr/>
                     <a:lstStyle/>
                     <a:p>
-                      <a:pPr marL="0" indent="0" algn="l">
+                      <a:pPr algn="l" indent="0" marL="0">
                         <a:buNone/>
                       </a:pPr>
                       <a:r>
@@ -23477,7 +23649,7 @@
                     <a:bodyPr/>
                     <a:lstStyle/>
                     <a:p>
-                      <a:pPr marL="0" indent="0" algn="r">
+                      <a:pPr algn="r" indent="0" marL="0">
                         <a:buNone/>
                       </a:pPr>
                       <a:r>
@@ -23542,7 +23714,7 @@
                     <a:bodyPr/>
                     <a:lstStyle/>
                     <a:p>
-                      <a:pPr marL="0" indent="0" algn="r">
+                      <a:pPr algn="r" indent="0" marL="0">
                         <a:buNone/>
                       </a:pPr>
                       <a:r>
@@ -23607,7 +23779,7 @@
                     <a:bodyPr/>
                     <a:lstStyle/>
                     <a:p>
-                      <a:pPr marL="0" indent="0" algn="r">
+                      <a:pPr algn="r" indent="0" marL="0">
                         <a:buNone/>
                       </a:pPr>
                       <a:r>
@@ -23667,11 +23839,6 @@
                     </a:lnB>
                   </a:tcPr>
                 </a:tc>
-                <a:extLst>
-                  <a:ext uri="{0D108BD9-81ED-4DB2-BD59-A6C34878D82A}">
-                    <a16:rowId xmlns:a16="http://schemas.microsoft.com/office/drawing/2014/main" val="10016"/>
-                  </a:ext>
-                </a:extLst>
               </a:tr>
               <a:tr h="233172">
                 <a:tc>
@@ -23679,7 +23846,7 @@
                     <a:bodyPr/>
                     <a:lstStyle/>
                     <a:p>
-                      <a:pPr marL="0" indent="0" algn="l">
+                      <a:pPr algn="l" indent="0" marL="0">
                         <a:buNone/>
                       </a:pPr>
                       <a:r>
@@ -23744,7 +23911,7 @@
                     <a:bodyPr/>
                     <a:lstStyle/>
                     <a:p>
-                      <a:pPr marL="0" indent="0" algn="r">
+                      <a:pPr algn="r" indent="0" marL="0">
                         <a:buNone/>
                       </a:pPr>
                       <a:r>
@@ -23809,7 +23976,7 @@
                     <a:bodyPr/>
                     <a:lstStyle/>
                     <a:p>
-                      <a:pPr marL="0" indent="0" algn="r">
+                      <a:pPr algn="r" indent="0" marL="0">
                         <a:buNone/>
                       </a:pPr>
                       <a:r>
@@ -23874,7 +24041,7 @@
                     <a:bodyPr/>
                     <a:lstStyle/>
                     <a:p>
-                      <a:pPr marL="0" indent="0" algn="r">
+                      <a:pPr algn="r" indent="0" marL="0">
                         <a:buNone/>
                       </a:pPr>
                       <a:r>
@@ -23934,11 +24101,6 @@
                     </a:lnB>
                   </a:tcPr>
                 </a:tc>
-                <a:extLst>
-                  <a:ext uri="{0D108BD9-81ED-4DB2-BD59-A6C34878D82A}">
-                    <a16:rowId xmlns:a16="http://schemas.microsoft.com/office/drawing/2014/main" val="10017"/>
-                  </a:ext>
-                </a:extLst>
               </a:tr>
             </a:tbl>
           </a:graphicData>
@@ -23960,41 +24122,17 @@
         </p:nvGraphicFramePr>
         <p:xfrm>
           <a:off x="6217920" y="1874520"/>
-          <a:ext cx="5394960" cy="2798064"/>
+          <a:ext cx="5394960" cy="914400"/>
         </p:xfrm>
         <a:graphic>
           <a:graphicData uri="http://schemas.openxmlformats.org/drawingml/2006/table">
             <a:tbl>
               <a:tblPr/>
               <a:tblGrid>
-                <a:gridCol w="2377440">
-                  <a:extLst>
-                    <a:ext uri="{9D8B030D-6E8A-4147-A177-3AD203B41FA5}">
-                      <a16:colId xmlns:a16="http://schemas.microsoft.com/office/drawing/2014/main" val="20000"/>
-                    </a:ext>
-                  </a:extLst>
-                </a:gridCol>
-                <a:gridCol w="777240">
-                  <a:extLst>
-                    <a:ext uri="{9D8B030D-6E8A-4147-A177-3AD203B41FA5}">
-                      <a16:colId xmlns:a16="http://schemas.microsoft.com/office/drawing/2014/main" val="20001"/>
-                    </a:ext>
-                  </a:extLst>
-                </a:gridCol>
-                <a:gridCol w="914400">
-                  <a:extLst>
-                    <a:ext uri="{9D8B030D-6E8A-4147-A177-3AD203B41FA5}">
-                      <a16:colId xmlns:a16="http://schemas.microsoft.com/office/drawing/2014/main" val="20002"/>
-                    </a:ext>
-                  </a:extLst>
-                </a:gridCol>
-                <a:gridCol w="1325880">
-                  <a:extLst>
-                    <a:ext uri="{9D8B030D-6E8A-4147-A177-3AD203B41FA5}">
-                      <a16:colId xmlns:a16="http://schemas.microsoft.com/office/drawing/2014/main" val="20003"/>
-                    </a:ext>
-                  </a:extLst>
-                </a:gridCol>
+                <a:gridCol w="2377440"/>
+                <a:gridCol w="777240"/>
+                <a:gridCol w="914400"/>
+                <a:gridCol w="1325880"/>
               </a:tblGrid>
               <a:tr h="233172">
                 <a:tc>
@@ -24002,7 +24140,7 @@
                     <a:bodyPr/>
                     <a:lstStyle/>
                     <a:p>
-                      <a:pPr marL="0" indent="0" algn="l">
+                      <a:pPr algn="l" indent="0" marL="0">
                         <a:buNone/>
                       </a:pPr>
                       <a:r>
@@ -24070,7 +24208,7 @@
                     <a:bodyPr/>
                     <a:lstStyle/>
                     <a:p>
-                      <a:pPr marL="0" indent="0" algn="r">
+                      <a:pPr algn="r" indent="0" marL="0">
                         <a:buNone/>
                       </a:pPr>
                       <a:r>
@@ -24138,7 +24276,7 @@
                     <a:bodyPr/>
                     <a:lstStyle/>
                     <a:p>
-                      <a:pPr marL="0" indent="0" algn="r">
+                      <a:pPr algn="r" indent="0" marL="0">
                         <a:buNone/>
                       </a:pPr>
                       <a:r>
@@ -24206,7 +24344,7 @@
                     <a:bodyPr/>
                     <a:lstStyle/>
                     <a:p>
-                      <a:pPr marL="0" indent="0" algn="r">
+                      <a:pPr algn="r" indent="0" marL="0">
                         <a:buNone/>
                       </a:pPr>
                       <a:r>
@@ -24269,11 +24407,6 @@
                     </a:solidFill>
                   </a:tcPr>
                 </a:tc>
-                <a:extLst>
-                  <a:ext uri="{0D108BD9-81ED-4DB2-BD59-A6C34878D82A}">
-                    <a16:rowId xmlns:a16="http://schemas.microsoft.com/office/drawing/2014/main" val="10000"/>
-                  </a:ext>
-                </a:extLst>
               </a:tr>
               <a:tr h="233172">
                 <a:tc gridSpan="4">
@@ -24281,11 +24414,11 @@
                     <a:bodyPr/>
                     <a:lstStyle/>
                     <a:p>
-                      <a:pPr marL="0" indent="0" algn="l">
+                      <a:pPr algn="l" indent="0" marL="0">
                         <a:buNone/>
                       </a:pPr>
                       <a:r>
-                        <a:rPr lang="en-US" sz="850" b="1" kern="0" spc="100" dirty="0">
+                        <a:rPr lang="en-US" sz="850" b="1" spc="100" kern="0" dirty="0">
                           <a:solidFill>
                             <a:srgbClr val="CDD6FF"/>
                           </a:solidFill>
@@ -24345,40 +24478,14 @@
                   </a:tcPr>
                 </a:tc>
                 <a:tc hMerge="1">
-                  <a:txBody>
-                    <a:bodyPr/>
-                    <a:lstStyle/>
-                    <a:p>
-                      <a:endParaRPr lang="en-US"/>
-                    </a:p>
-                  </a:txBody>
                   <a:tcPr/>
                 </a:tc>
                 <a:tc hMerge="1">
-                  <a:txBody>
-                    <a:bodyPr/>
-                    <a:lstStyle/>
-                    <a:p>
-                      <a:endParaRPr lang="en-US"/>
-                    </a:p>
-                  </a:txBody>
                   <a:tcPr/>
                 </a:tc>
                 <a:tc hMerge="1">
-                  <a:txBody>
-                    <a:bodyPr/>
-                    <a:lstStyle/>
-                    <a:p>
-                      <a:endParaRPr lang="en-US"/>
-                    </a:p>
-                  </a:txBody>
                   <a:tcPr/>
                 </a:tc>
-                <a:extLst>
-                  <a:ext uri="{0D108BD9-81ED-4DB2-BD59-A6C34878D82A}">
-                    <a16:rowId xmlns:a16="http://schemas.microsoft.com/office/drawing/2014/main" val="10001"/>
-                  </a:ext>
-                </a:extLst>
               </a:tr>
               <a:tr h="233172">
                 <a:tc>
@@ -24386,7 +24493,7 @@
                     <a:bodyPr/>
                     <a:lstStyle/>
                     <a:p>
-                      <a:pPr marL="0" indent="0" algn="l">
+                      <a:pPr algn="l" indent="0" marL="0">
                         <a:buNone/>
                       </a:pPr>
                       <a:r>
@@ -24451,7 +24558,7 @@
                     <a:bodyPr/>
                     <a:lstStyle/>
                     <a:p>
-                      <a:pPr marL="0" indent="0" algn="r">
+                      <a:pPr algn="r" indent="0" marL="0">
                         <a:buNone/>
                       </a:pPr>
                       <a:r>
@@ -24516,7 +24623,7 @@
                     <a:bodyPr/>
                     <a:lstStyle/>
                     <a:p>
-                      <a:pPr marL="0" indent="0" algn="r">
+                      <a:pPr algn="r" indent="0" marL="0">
                         <a:buNone/>
                       </a:pPr>
                       <a:r>
@@ -24581,7 +24688,7 @@
                     <a:bodyPr/>
                     <a:lstStyle/>
                     <a:p>
-                      <a:pPr marL="0" indent="0" algn="r">
+                      <a:pPr algn="r" indent="0" marL="0">
                         <a:buNone/>
                       </a:pPr>
                       <a:r>
@@ -24641,11 +24748,6 @@
                     </a:lnB>
                   </a:tcPr>
                 </a:tc>
-                <a:extLst>
-                  <a:ext uri="{0D108BD9-81ED-4DB2-BD59-A6C34878D82A}">
-                    <a16:rowId xmlns:a16="http://schemas.microsoft.com/office/drawing/2014/main" val="10002"/>
-                  </a:ext>
-                </a:extLst>
               </a:tr>
               <a:tr h="233172">
                 <a:tc>
@@ -24653,7 +24755,7 @@
                     <a:bodyPr/>
                     <a:lstStyle/>
                     <a:p>
-                      <a:pPr marL="0" indent="0" algn="l">
+                      <a:pPr algn="l" indent="0" marL="0">
                         <a:buNone/>
                       </a:pPr>
                       <a:r>
@@ -24718,7 +24820,7 @@
                     <a:bodyPr/>
                     <a:lstStyle/>
                     <a:p>
-                      <a:pPr marL="0" indent="0" algn="r">
+                      <a:pPr algn="r" indent="0" marL="0">
                         <a:buNone/>
                       </a:pPr>
                       <a:r>
@@ -24783,7 +24885,7 @@
                     <a:bodyPr/>
                     <a:lstStyle/>
                     <a:p>
-                      <a:pPr marL="0" indent="0" algn="r">
+                      <a:pPr algn="r" indent="0" marL="0">
                         <a:buNone/>
                       </a:pPr>
                       <a:r>
@@ -24848,7 +24950,7 @@
                     <a:bodyPr/>
                     <a:lstStyle/>
                     <a:p>
-                      <a:pPr marL="0" indent="0" algn="r">
+                      <a:pPr algn="r" indent="0" marL="0">
                         <a:buNone/>
                       </a:pPr>
                       <a:r>
@@ -24908,11 +25010,6 @@
                     </a:lnB>
                   </a:tcPr>
                 </a:tc>
-                <a:extLst>
-                  <a:ext uri="{0D108BD9-81ED-4DB2-BD59-A6C34878D82A}">
-                    <a16:rowId xmlns:a16="http://schemas.microsoft.com/office/drawing/2014/main" val="10003"/>
-                  </a:ext>
-                </a:extLst>
               </a:tr>
               <a:tr h="233172">
                 <a:tc>
@@ -24920,7 +25017,7 @@
                     <a:bodyPr/>
                     <a:lstStyle/>
                     <a:p>
-                      <a:pPr marL="0" indent="0" algn="l">
+                      <a:pPr algn="l" indent="0" marL="0">
                         <a:buNone/>
                       </a:pPr>
                       <a:r>
@@ -24985,7 +25082,7 @@
                     <a:bodyPr/>
                     <a:lstStyle/>
                     <a:p>
-                      <a:pPr marL="0" indent="0" algn="r">
+                      <a:pPr algn="r" indent="0" marL="0">
                         <a:buNone/>
                       </a:pPr>
                       <a:r>
@@ -25050,7 +25147,7 @@
                     <a:bodyPr/>
                     <a:lstStyle/>
                     <a:p>
-                      <a:pPr marL="0" indent="0" algn="r">
+                      <a:pPr algn="r" indent="0" marL="0">
                         <a:buNone/>
                       </a:pPr>
                       <a:r>
@@ -25115,7 +25212,7 @@
                     <a:bodyPr/>
                     <a:lstStyle/>
                     <a:p>
-                      <a:pPr marL="0" indent="0" algn="r">
+                      <a:pPr algn="r" indent="0" marL="0">
                         <a:buNone/>
                       </a:pPr>
                       <a:r>
@@ -25175,11 +25272,6 @@
                     </a:lnB>
                   </a:tcPr>
                 </a:tc>
-                <a:extLst>
-                  <a:ext uri="{0D108BD9-81ED-4DB2-BD59-A6C34878D82A}">
-                    <a16:rowId xmlns:a16="http://schemas.microsoft.com/office/drawing/2014/main" val="10004"/>
-                  </a:ext>
-                </a:extLst>
               </a:tr>
               <a:tr h="233172">
                 <a:tc>
@@ -25187,7 +25279,7 @@
                     <a:bodyPr/>
                     <a:lstStyle/>
                     <a:p>
-                      <a:pPr marL="0" indent="0" algn="l">
+                      <a:pPr algn="l" indent="0" marL="0">
                         <a:buNone/>
                       </a:pPr>
                       <a:r>
@@ -25252,7 +25344,7 @@
                     <a:bodyPr/>
                     <a:lstStyle/>
                     <a:p>
-                      <a:pPr marL="0" indent="0" algn="r">
+                      <a:pPr algn="r" indent="0" marL="0">
                         <a:buNone/>
                       </a:pPr>
                       <a:r>
@@ -25317,7 +25409,7 @@
                     <a:bodyPr/>
                     <a:lstStyle/>
                     <a:p>
-                      <a:pPr marL="0" indent="0" algn="r">
+                      <a:pPr algn="r" indent="0" marL="0">
                         <a:buNone/>
                       </a:pPr>
                       <a:r>
@@ -25382,7 +25474,7 @@
                     <a:bodyPr/>
                     <a:lstStyle/>
                     <a:p>
-                      <a:pPr marL="0" indent="0" algn="r">
+                      <a:pPr algn="r" indent="0" marL="0">
                         <a:buNone/>
                       </a:pPr>
                       <a:r>
@@ -25442,11 +25534,6 @@
                     </a:lnB>
                   </a:tcPr>
                 </a:tc>
-                <a:extLst>
-                  <a:ext uri="{0D108BD9-81ED-4DB2-BD59-A6C34878D82A}">
-                    <a16:rowId xmlns:a16="http://schemas.microsoft.com/office/drawing/2014/main" val="10005"/>
-                  </a:ext>
-                </a:extLst>
               </a:tr>
               <a:tr h="233172">
                 <a:tc gridSpan="4">
@@ -25454,11 +25541,11 @@
                     <a:bodyPr/>
                     <a:lstStyle/>
                     <a:p>
-                      <a:pPr marL="0" indent="0" algn="l">
+                      <a:pPr algn="l" indent="0" marL="0">
                         <a:buNone/>
                       </a:pPr>
                       <a:r>
-                        <a:rPr lang="en-US" sz="850" b="1" kern="0" spc="100" dirty="0">
+                        <a:rPr lang="en-US" sz="850" b="1" spc="100" kern="0" dirty="0">
                           <a:solidFill>
                             <a:srgbClr val="CDD6FF"/>
                           </a:solidFill>
@@ -25518,40 +25605,14 @@
                   </a:tcPr>
                 </a:tc>
                 <a:tc hMerge="1">
-                  <a:txBody>
-                    <a:bodyPr/>
-                    <a:lstStyle/>
-                    <a:p>
-                      <a:endParaRPr lang="en-US"/>
-                    </a:p>
-                  </a:txBody>
                   <a:tcPr/>
                 </a:tc>
                 <a:tc hMerge="1">
-                  <a:txBody>
-                    <a:bodyPr/>
-                    <a:lstStyle/>
-                    <a:p>
-                      <a:endParaRPr lang="en-US"/>
-                    </a:p>
-                  </a:txBody>
                   <a:tcPr/>
                 </a:tc>
                 <a:tc hMerge="1">
-                  <a:txBody>
-                    <a:bodyPr/>
-                    <a:lstStyle/>
-                    <a:p>
-                      <a:endParaRPr lang="en-US"/>
-                    </a:p>
-                  </a:txBody>
                   <a:tcPr/>
                 </a:tc>
-                <a:extLst>
-                  <a:ext uri="{0D108BD9-81ED-4DB2-BD59-A6C34878D82A}">
-                    <a16:rowId xmlns:a16="http://schemas.microsoft.com/office/drawing/2014/main" val="10006"/>
-                  </a:ext>
-                </a:extLst>
               </a:tr>
               <a:tr h="233172">
                 <a:tc>
@@ -25559,7 +25620,7 @@
                     <a:bodyPr/>
                     <a:lstStyle/>
                     <a:p>
-                      <a:pPr marL="0" indent="0" algn="l">
+                      <a:pPr algn="l" indent="0" marL="0">
                         <a:buNone/>
                       </a:pPr>
                       <a:r>
@@ -25624,7 +25685,7 @@
                     <a:bodyPr/>
                     <a:lstStyle/>
                     <a:p>
-                      <a:pPr marL="0" indent="0" algn="r">
+                      <a:pPr algn="r" indent="0" marL="0">
                         <a:buNone/>
                       </a:pPr>
                       <a:r>
@@ -25689,7 +25750,7 @@
                     <a:bodyPr/>
                     <a:lstStyle/>
                     <a:p>
-                      <a:pPr marL="0" indent="0" algn="r">
+                      <a:pPr algn="r" indent="0" marL="0">
                         <a:buNone/>
                       </a:pPr>
                       <a:r>
@@ -25754,7 +25815,7 @@
                     <a:bodyPr/>
                     <a:lstStyle/>
                     <a:p>
-                      <a:pPr marL="0" indent="0" algn="r">
+                      <a:pPr algn="r" indent="0" marL="0">
                         <a:buNone/>
                       </a:pPr>
                       <a:r>
@@ -25814,11 +25875,6 @@
                     </a:lnB>
                   </a:tcPr>
                 </a:tc>
-                <a:extLst>
-                  <a:ext uri="{0D108BD9-81ED-4DB2-BD59-A6C34878D82A}">
-                    <a16:rowId xmlns:a16="http://schemas.microsoft.com/office/drawing/2014/main" val="10007"/>
-                  </a:ext>
-                </a:extLst>
               </a:tr>
               <a:tr h="233172">
                 <a:tc>
@@ -25826,7 +25882,7 @@
                     <a:bodyPr/>
                     <a:lstStyle/>
                     <a:p>
-                      <a:pPr marL="0" indent="0" algn="l">
+                      <a:pPr algn="l" indent="0" marL="0">
                         <a:buNone/>
                       </a:pPr>
                       <a:r>
@@ -25891,7 +25947,7 @@
                     <a:bodyPr/>
                     <a:lstStyle/>
                     <a:p>
-                      <a:pPr marL="0" indent="0" algn="r">
+                      <a:pPr algn="r" indent="0" marL="0">
                         <a:buNone/>
                       </a:pPr>
                       <a:r>
@@ -25956,7 +26012,7 @@
                     <a:bodyPr/>
                     <a:lstStyle/>
                     <a:p>
-                      <a:pPr marL="0" indent="0" algn="r">
+                      <a:pPr algn="r" indent="0" marL="0">
                         <a:buNone/>
                       </a:pPr>
                       <a:r>
@@ -26021,7 +26077,7 @@
                     <a:bodyPr/>
                     <a:lstStyle/>
                     <a:p>
-                      <a:pPr marL="0" indent="0" algn="r">
+                      <a:pPr algn="r" indent="0" marL="0">
                         <a:buNone/>
                       </a:pPr>
                       <a:r>
@@ -26081,11 +26137,6 @@
                     </a:lnB>
                   </a:tcPr>
                 </a:tc>
-                <a:extLst>
-                  <a:ext uri="{0D108BD9-81ED-4DB2-BD59-A6C34878D82A}">
-                    <a16:rowId xmlns:a16="http://schemas.microsoft.com/office/drawing/2014/main" val="10008"/>
-                  </a:ext>
-                </a:extLst>
               </a:tr>
               <a:tr h="233172">
                 <a:tc>
@@ -26093,7 +26144,7 @@
                     <a:bodyPr/>
                     <a:lstStyle/>
                     <a:p>
-                      <a:pPr marL="0" indent="0" algn="l">
+                      <a:pPr algn="l" indent="0" marL="0">
                         <a:buNone/>
                       </a:pPr>
                       <a:r>
@@ -26158,7 +26209,7 @@
                     <a:bodyPr/>
                     <a:lstStyle/>
                     <a:p>
-                      <a:pPr marL="0" indent="0" algn="r">
+                      <a:pPr algn="r" indent="0" marL="0">
                         <a:buNone/>
                       </a:pPr>
                       <a:r>
@@ -26223,7 +26274,7 @@
                     <a:bodyPr/>
                     <a:lstStyle/>
                     <a:p>
-                      <a:pPr marL="0" indent="0" algn="r">
+                      <a:pPr algn="r" indent="0" marL="0">
                         <a:buNone/>
                       </a:pPr>
                       <a:r>
@@ -26288,7 +26339,7 @@
                     <a:bodyPr/>
                     <a:lstStyle/>
                     <a:p>
-                      <a:pPr marL="0" indent="0" algn="r">
+                      <a:pPr algn="r" indent="0" marL="0">
                         <a:buNone/>
                       </a:pPr>
                       <a:r>
@@ -26348,11 +26399,6 @@
                     </a:lnB>
                   </a:tcPr>
                 </a:tc>
-                <a:extLst>
-                  <a:ext uri="{0D108BD9-81ED-4DB2-BD59-A6C34878D82A}">
-                    <a16:rowId xmlns:a16="http://schemas.microsoft.com/office/drawing/2014/main" val="10009"/>
-                  </a:ext>
-                </a:extLst>
               </a:tr>
               <a:tr h="233172">
                 <a:tc>
@@ -26360,7 +26406,7 @@
                     <a:bodyPr/>
                     <a:lstStyle/>
                     <a:p>
-                      <a:pPr marL="0" indent="0" algn="l">
+                      <a:pPr algn="l" indent="0" marL="0">
                         <a:buNone/>
                       </a:pPr>
                       <a:r>
@@ -26425,7 +26471,7 @@
                     <a:bodyPr/>
                     <a:lstStyle/>
                     <a:p>
-                      <a:pPr marL="0" indent="0" algn="r">
+                      <a:pPr algn="r" indent="0" marL="0">
                         <a:buNone/>
                       </a:pPr>
                       <a:r>
@@ -26490,7 +26536,7 @@
                     <a:bodyPr/>
                     <a:lstStyle/>
                     <a:p>
-                      <a:pPr marL="0" indent="0" algn="r">
+                      <a:pPr algn="r" indent="0" marL="0">
                         <a:buNone/>
                       </a:pPr>
                       <a:r>
@@ -26555,7 +26601,7 @@
                     <a:bodyPr/>
                     <a:lstStyle/>
                     <a:p>
-                      <a:pPr marL="0" indent="0" algn="r">
+                      <a:pPr algn="r" indent="0" marL="0">
                         <a:buNone/>
                       </a:pPr>
                       <a:r>
@@ -26615,11 +26661,6 @@
                     </a:lnB>
                   </a:tcPr>
                 </a:tc>
-                <a:extLst>
-                  <a:ext uri="{0D108BD9-81ED-4DB2-BD59-A6C34878D82A}">
-                    <a16:rowId xmlns:a16="http://schemas.microsoft.com/office/drawing/2014/main" val="10010"/>
-                  </a:ext>
-                </a:extLst>
               </a:tr>
               <a:tr h="233172">
                 <a:tc>
@@ -26627,7 +26668,7 @@
                     <a:bodyPr/>
                     <a:lstStyle/>
                     <a:p>
-                      <a:pPr marL="0" indent="0" algn="l">
+                      <a:pPr algn="l" indent="0" marL="0">
                         <a:buNone/>
                       </a:pPr>
                       <a:r>
@@ -26695,7 +26736,7 @@
                     <a:bodyPr/>
                     <a:lstStyle/>
                     <a:p>
-                      <a:pPr marL="0" indent="0" algn="r">
+                      <a:pPr algn="r" indent="0" marL="0">
                         <a:buNone/>
                       </a:pPr>
                       <a:r>
@@ -26763,7 +26804,7 @@
                     <a:bodyPr/>
                     <a:lstStyle/>
                     <a:p>
-                      <a:pPr marL="0" indent="0" algn="r">
+                      <a:pPr algn="r" indent="0" marL="0">
                         <a:buNone/>
                       </a:pPr>
                       <a:r>
@@ -26831,7 +26872,7 @@
                     <a:bodyPr/>
                     <a:lstStyle/>
                     <a:p>
-                      <a:pPr marL="0" indent="0" algn="r">
+                      <a:pPr algn="r" indent="0" marL="0">
                         <a:buNone/>
                       </a:pPr>
                       <a:r>
@@ -26894,11 +26935,6 @@
                     </a:solidFill>
                   </a:tcPr>
                 </a:tc>
-                <a:extLst>
-                  <a:ext uri="{0D108BD9-81ED-4DB2-BD59-A6C34878D82A}">
-                    <a16:rowId xmlns:a16="http://schemas.microsoft.com/office/drawing/2014/main" val="10011"/>
-                  </a:ext>
-                </a:extLst>
               </a:tr>
             </a:tbl>
           </a:graphicData>
@@ -26930,7 +26966,7 @@
             <a:prstDash val="solid"/>
           </a:ln>
           <a:effectLst>
-            <a:outerShdw blurRad="177800" dist="63500" dir="5400000" algn="bl" rotWithShape="0">
+            <a:outerShdw sx="100000" sy="100000" kx="0" ky="0" algn="bl" rotWithShape="0" blurRad="177800" dist="63500" dir="5400000">
               <a:srgbClr val="3E00DB">
                 <a:alpha val="55000"/>
               </a:srgbClr>
@@ -26959,11 +26995,11 @@
           <a:bodyPr wrap="square" lIns="0" tIns="0" rIns="0" bIns="0" rtlCol="0" anchor="ctr"/>
           <a:lstStyle/>
           <a:p>
-            <a:pPr marL="0" indent="0">
-              <a:buNone/>
-            </a:pPr>
-            <a:r>
-              <a:rPr lang="en-US" sz="900" b="1" kern="0" spc="200" dirty="0">
+            <a:pPr indent="0" marL="0">
+              <a:buNone/>
+            </a:pPr>
+            <a:r>
+              <a:rPr lang="en-US" sz="900" b="1" spc="200" kern="0" dirty="0">
                 <a:solidFill>
                   <a:srgbClr val="CDD6FF"/>
                 </a:solidFill>
@@ -26998,7 +27034,7 @@
           <a:bodyPr wrap="square" lIns="0" tIns="0" rIns="0" bIns="0" rtlCol="0" anchor="ctr"/>
           <a:lstStyle/>
           <a:p>
-            <a:pPr marL="0" indent="0">
+            <a:pPr indent="0" marL="0">
               <a:buNone/>
             </a:pPr>
             <a:r>
@@ -27012,6 +27048,9 @@
               </a:rPr>
               <a:t>Phase 1 (clinic): </a:t>
             </a:r>
+            <a:pPr indent="0" marL="0">
+              <a:buNone/>
+            </a:pPr>
             <a:r>
               <a:rPr lang="en-US" sz="1250" b="1" dirty="0">
                 <a:solidFill>
@@ -27023,6 +27062,9 @@
               </a:rPr>
               <a:t>$419,175/mo</a:t>
             </a:r>
+            <a:pPr indent="0" marL="0">
+              <a:buNone/>
+            </a:pPr>
             <a:r>
               <a:rPr lang="en-US" sz="1250" dirty="0">
                 <a:solidFill>
@@ -27034,6 +27076,9 @@
               </a:rPr>
               <a:t>    ·    Phase 2 (surgical): </a:t>
             </a:r>
+            <a:pPr indent="0" marL="0">
+              <a:buNone/>
+            </a:pPr>
             <a:r>
               <a:rPr lang="en-US" sz="1250" b="1" dirty="0">
                 <a:solidFill>
@@ -27070,11 +27115,11 @@
           <a:bodyPr wrap="square" lIns="0" tIns="0" rIns="0" bIns="0" rtlCol="0" anchor="ctr"/>
           <a:lstStyle/>
           <a:p>
-            <a:pPr marL="0" indent="0">
-              <a:buNone/>
-            </a:pPr>
-            <a:r>
-              <a:rPr lang="en-US" sz="850" kern="0" spc="100" dirty="0">
+            <a:pPr indent="0" marL="0">
+              <a:buNone/>
+            </a:pPr>
+            <a:r>
+              <a:rPr lang="en-US" sz="850" spc="100" kern="0" dirty="0">
                 <a:solidFill>
                   <a:srgbClr val="5A5570"/>
                 </a:solidFill>
@@ -27109,7 +27154,7 @@
           <a:bodyPr wrap="square" lIns="0" tIns="0" rIns="0" bIns="0" rtlCol="0" anchor="ctr"/>
           <a:lstStyle/>
           <a:p>
-            <a:pPr marL="0" indent="0" algn="r">
+            <a:pPr algn="r" indent="0" marL="0">
               <a:buNone/>
             </a:pPr>
             <a:r>
@@ -27129,7 +27174,7 @@
       </p:sp>
       <p:sp>
         <p:nvSpPr>
-          <p:cNvPr id="9" name="Text 11"/>
+          <p:cNvPr id="15" name="Text 11"/>
           <p:cNvSpPr/>
           <p:nvPr/>
         </p:nvSpPr>
@@ -27148,7 +27193,7 @@
           <a:bodyPr wrap="square" lIns="0" tIns="0" rIns="0" bIns="0" rtlCol="0" anchor="ctr"/>
           <a:lstStyle/>
           <a:p>
-            <a:pPr marL="0" indent="0" algn="r">
+            <a:pPr algn="r" indent="0" marL="0">
               <a:buNone/>
             </a:pPr>
             <a:r>
@@ -27182,7 +27227,6 @@
         <a:solidFill>
           <a:srgbClr val="0A0A0F"/>
         </a:solidFill>
-        <a:effectLst/>
       </p:bgPr>
     </p:bg>
     <p:spTree>
@@ -27284,11 +27328,11 @@
           <a:bodyPr wrap="square" lIns="0" tIns="0" rIns="0" bIns="0" rtlCol="0" anchor="ctr"/>
           <a:lstStyle/>
           <a:p>
-            <a:pPr marL="0" indent="0" algn="l">
-              <a:buNone/>
-            </a:pPr>
-            <a:r>
-              <a:rPr lang="en-US" sz="1100" b="1" kern="0" spc="300" dirty="0">
+            <a:pPr algn="l" indent="0" marL="0">
+              <a:buNone/>
+            </a:pPr>
+            <a:r>
+              <a:rPr lang="en-US" sz="1100" b="1" spc="300" kern="0" dirty="0">
                 <a:solidFill>
                   <a:srgbClr val="B6C800"/>
                 </a:solidFill>
@@ -27323,7 +27367,7 @@
           <a:bodyPr wrap="square" lIns="0" tIns="0" rIns="0" bIns="0" rtlCol="0" anchor="t"/>
           <a:lstStyle/>
           <a:p>
-            <a:pPr marL="0" indent="0" algn="l">
+            <a:pPr algn="l" indent="0" marL="0">
               <a:lnSpc>
                 <a:spcPct val="100000"/>
               </a:lnSpc>
@@ -27365,7 +27409,7 @@
           <a:bodyPr wrap="square" lIns="0" tIns="0" rIns="0" bIns="0" rtlCol="0" anchor="ctr"/>
           <a:lstStyle/>
           <a:p>
-            <a:pPr marL="0" indent="0">
+            <a:pPr indent="0" marL="0">
               <a:buNone/>
             </a:pPr>
             <a:r>
@@ -27399,48 +27443,18 @@
         </p:nvGraphicFramePr>
         <p:xfrm>
           <a:off x="548640" y="2148840"/>
-          <a:ext cx="11064240" cy="3200400"/>
+          <a:ext cx="11064240" cy="914400"/>
         </p:xfrm>
         <a:graphic>
           <a:graphicData uri="http://schemas.openxmlformats.org/drawingml/2006/table">
             <a:tbl>
               <a:tblPr/>
               <a:tblGrid>
-                <a:gridCol w="2743200">
-                  <a:extLst>
-                    <a:ext uri="{9D8B030D-6E8A-4147-A177-3AD203B41FA5}">
-                      <a16:colId xmlns:a16="http://schemas.microsoft.com/office/drawing/2014/main" val="20000"/>
-                    </a:ext>
-                  </a:extLst>
-                </a:gridCol>
-                <a:gridCol w="2080260">
-                  <a:extLst>
-                    <a:ext uri="{9D8B030D-6E8A-4147-A177-3AD203B41FA5}">
-                      <a16:colId xmlns:a16="http://schemas.microsoft.com/office/drawing/2014/main" val="20001"/>
-                    </a:ext>
-                  </a:extLst>
-                </a:gridCol>
-                <a:gridCol w="2080260">
-                  <a:extLst>
-                    <a:ext uri="{9D8B030D-6E8A-4147-A177-3AD203B41FA5}">
-                      <a16:colId xmlns:a16="http://schemas.microsoft.com/office/drawing/2014/main" val="20002"/>
-                    </a:ext>
-                  </a:extLst>
-                </a:gridCol>
-                <a:gridCol w="2080260">
-                  <a:extLst>
-                    <a:ext uri="{9D8B030D-6E8A-4147-A177-3AD203B41FA5}">
-                      <a16:colId xmlns:a16="http://schemas.microsoft.com/office/drawing/2014/main" val="20003"/>
-                    </a:ext>
-                  </a:extLst>
-                </a:gridCol>
-                <a:gridCol w="2080260">
-                  <a:extLst>
-                    <a:ext uri="{9D8B030D-6E8A-4147-A177-3AD203B41FA5}">
-                      <a16:colId xmlns:a16="http://schemas.microsoft.com/office/drawing/2014/main" val="20004"/>
-                    </a:ext>
-                  </a:extLst>
-                </a:gridCol>
+                <a:gridCol w="2743200"/>
+                <a:gridCol w="2080260"/>
+                <a:gridCol w="2080260"/>
+                <a:gridCol w="2080260"/>
+                <a:gridCol w="2080260"/>
               </a:tblGrid>
               <a:tr h="457200">
                 <a:tc>
@@ -27448,7 +27462,7 @@
                     <a:bodyPr/>
                     <a:lstStyle/>
                     <a:p>
-                      <a:pPr marL="0" indent="0" algn="l">
+                      <a:pPr algn="l" indent="0" marL="0">
                         <a:buNone/>
                       </a:pPr>
                       <a:r>
@@ -27516,7 +27530,7 @@
                     <a:bodyPr/>
                     <a:lstStyle/>
                     <a:p>
-                      <a:pPr marL="0" indent="0" algn="r">
+                      <a:pPr algn="r" indent="0" marL="0">
                         <a:buNone/>
                       </a:pPr>
                       <a:r>
@@ -27584,7 +27598,7 @@
                     <a:bodyPr/>
                     <a:lstStyle/>
                     <a:p>
-                      <a:pPr marL="0" indent="0" algn="r">
+                      <a:pPr algn="r" indent="0" marL="0">
                         <a:buNone/>
                       </a:pPr>
                       <a:r>
@@ -27652,7 +27666,7 @@
                     <a:bodyPr/>
                     <a:lstStyle/>
                     <a:p>
-                      <a:pPr marL="0" indent="0" algn="r">
+                      <a:pPr algn="r" indent="0" marL="0">
                         <a:buNone/>
                       </a:pPr>
                       <a:r>
@@ -27720,7 +27734,7 @@
                     <a:bodyPr/>
                     <a:lstStyle/>
                     <a:p>
-                      <a:pPr marL="0" indent="0" algn="r">
+                      <a:pPr algn="r" indent="0" marL="0">
                         <a:buNone/>
                       </a:pPr>
                       <a:r>
@@ -27783,11 +27797,6 @@
                     </a:solidFill>
                   </a:tcPr>
                 </a:tc>
-                <a:extLst>
-                  <a:ext uri="{0D108BD9-81ED-4DB2-BD59-A6C34878D82A}">
-                    <a16:rowId xmlns:a16="http://schemas.microsoft.com/office/drawing/2014/main" val="10000"/>
-                  </a:ext>
-                </a:extLst>
               </a:tr>
               <a:tr h="457200">
                 <a:tc>
@@ -27795,7 +27804,7 @@
                     <a:bodyPr/>
                     <a:lstStyle/>
                     <a:p>
-                      <a:pPr marL="0" indent="0" algn="l">
+                      <a:pPr algn="l" indent="0" marL="0">
                         <a:buNone/>
                       </a:pPr>
                       <a:r>
@@ -27863,7 +27872,7 @@
                     <a:bodyPr/>
                     <a:lstStyle/>
                     <a:p>
-                      <a:pPr marL="0" indent="0" algn="r">
+                      <a:pPr algn="r" indent="0" marL="0">
                         <a:buNone/>
                       </a:pPr>
                       <a:r>
@@ -27931,7 +27940,7 @@
                     <a:bodyPr/>
                     <a:lstStyle/>
                     <a:p>
-                      <a:pPr marL="0" indent="0" algn="r">
+                      <a:pPr algn="r" indent="0" marL="0">
                         <a:buNone/>
                       </a:pPr>
                       <a:r>
@@ -27999,7 +28008,7 @@
                     <a:bodyPr/>
                     <a:lstStyle/>
                     <a:p>
-                      <a:pPr marL="0" indent="0" algn="r">
+                      <a:pPr algn="r" indent="0" marL="0">
                         <a:buNone/>
                       </a:pPr>
                       <a:r>
@@ -28067,7 +28076,7 @@
                     <a:bodyPr/>
                     <a:lstStyle/>
                     <a:p>
-                      <a:pPr marL="0" indent="0" algn="r">
+                      <a:pPr algn="r" indent="0" marL="0">
                         <a:buNone/>
                       </a:pPr>
                       <a:r>
@@ -28130,11 +28139,6 @@
                     </a:solidFill>
                   </a:tcPr>
                 </a:tc>
-                <a:extLst>
-                  <a:ext uri="{0D108BD9-81ED-4DB2-BD59-A6C34878D82A}">
-                    <a16:rowId xmlns:a16="http://schemas.microsoft.com/office/drawing/2014/main" val="10001"/>
-                  </a:ext>
-                </a:extLst>
               </a:tr>
               <a:tr h="457200">
                 <a:tc>
@@ -28142,7 +28146,7 @@
                     <a:bodyPr/>
                     <a:lstStyle/>
                     <a:p>
-                      <a:pPr marL="0" indent="0" algn="l">
+                      <a:pPr algn="l" indent="0" marL="0">
                         <a:buNone/>
                       </a:pPr>
                       <a:r>
@@ -28210,7 +28214,7 @@
                     <a:bodyPr/>
                     <a:lstStyle/>
                     <a:p>
-                      <a:pPr marL="0" indent="0" algn="r">
+                      <a:pPr algn="r" indent="0" marL="0">
                         <a:buNone/>
                       </a:pPr>
                       <a:r>
@@ -28278,7 +28282,7 @@
                     <a:bodyPr/>
                     <a:lstStyle/>
                     <a:p>
-                      <a:pPr marL="0" indent="0" algn="r">
+                      <a:pPr algn="r" indent="0" marL="0">
                         <a:buNone/>
                       </a:pPr>
                       <a:r>
@@ -28346,7 +28350,7 @@
                     <a:bodyPr/>
                     <a:lstStyle/>
                     <a:p>
-                      <a:pPr marL="0" indent="0" algn="r">
+                      <a:pPr algn="r" indent="0" marL="0">
                         <a:buNone/>
                       </a:pPr>
                       <a:r>
@@ -28414,7 +28418,7 @@
                     <a:bodyPr/>
                     <a:lstStyle/>
                     <a:p>
-                      <a:pPr marL="0" indent="0" algn="r">
+                      <a:pPr algn="r" indent="0" marL="0">
                         <a:buNone/>
                       </a:pPr>
                       <a:r>
@@ -28477,11 +28481,6 @@
                     </a:solidFill>
                   </a:tcPr>
                 </a:tc>
-                <a:extLst>
-                  <a:ext uri="{0D108BD9-81ED-4DB2-BD59-A6C34878D82A}">
-                    <a16:rowId xmlns:a16="http://schemas.microsoft.com/office/drawing/2014/main" val="10002"/>
-                  </a:ext>
-                </a:extLst>
               </a:tr>
               <a:tr h="457200">
                 <a:tc>
@@ -28489,7 +28488,7 @@
                     <a:bodyPr/>
                     <a:lstStyle/>
                     <a:p>
-                      <a:pPr marL="0" indent="0" algn="l">
+                      <a:pPr algn="l" indent="0" marL="0">
                         <a:buNone/>
                       </a:pPr>
                       <a:r>
@@ -28557,7 +28556,7 @@
                     <a:bodyPr/>
                     <a:lstStyle/>
                     <a:p>
-                      <a:pPr marL="0" indent="0" algn="r">
+                      <a:pPr algn="r" indent="0" marL="0">
                         <a:buNone/>
                       </a:pPr>
                       <a:r>
@@ -28625,7 +28624,7 @@
                     <a:bodyPr/>
                     <a:lstStyle/>
                     <a:p>
-                      <a:pPr marL="0" indent="0" algn="r">
+                      <a:pPr algn="r" indent="0" marL="0">
                         <a:buNone/>
                       </a:pPr>
                       <a:r>
@@ -28693,7 +28692,7 @@
                     <a:bodyPr/>
                     <a:lstStyle/>
                     <a:p>
-                      <a:pPr marL="0" indent="0" algn="r">
+                      <a:pPr algn="r" indent="0" marL="0">
                         <a:buNone/>
                       </a:pPr>
                       <a:r>
@@ -28761,7 +28760,7 @@
                     <a:bodyPr/>
                     <a:lstStyle/>
                     <a:p>
-                      <a:pPr marL="0" indent="0" algn="r">
+                      <a:pPr algn="r" indent="0" marL="0">
                         <a:buNone/>
                       </a:pPr>
                       <a:r>
@@ -28824,11 +28823,6 @@
                     </a:solidFill>
                   </a:tcPr>
                 </a:tc>
-                <a:extLst>
-                  <a:ext uri="{0D108BD9-81ED-4DB2-BD59-A6C34878D82A}">
-                    <a16:rowId xmlns:a16="http://schemas.microsoft.com/office/drawing/2014/main" val="10003"/>
-                  </a:ext>
-                </a:extLst>
               </a:tr>
               <a:tr h="457200">
                 <a:tc>
@@ -28836,7 +28830,7 @@
                     <a:bodyPr/>
                     <a:lstStyle/>
                     <a:p>
-                      <a:pPr marL="0" indent="0" algn="l">
+                      <a:pPr algn="l" indent="0" marL="0">
                         <a:buNone/>
                       </a:pPr>
                       <a:r>
@@ -28904,7 +28898,7 @@
                     <a:bodyPr/>
                     <a:lstStyle/>
                     <a:p>
-                      <a:pPr marL="0" indent="0" algn="r">
+                      <a:pPr algn="r" indent="0" marL="0">
                         <a:buNone/>
                       </a:pPr>
                       <a:r>
@@ -28972,7 +28966,7 @@
                     <a:bodyPr/>
                     <a:lstStyle/>
                     <a:p>
-                      <a:pPr marL="0" indent="0" algn="r">
+                      <a:pPr algn="r" indent="0" marL="0">
                         <a:buNone/>
                       </a:pPr>
                       <a:r>
@@ -29040,7 +29034,7 @@
                     <a:bodyPr/>
                     <a:lstStyle/>
                     <a:p>
-                      <a:pPr marL="0" indent="0" algn="r">
+                      <a:pPr algn="r" indent="0" marL="0">
                         <a:buNone/>
                       </a:pPr>
                       <a:r>
@@ -29108,7 +29102,7 @@
                     <a:bodyPr/>
                     <a:lstStyle/>
                     <a:p>
-                      <a:pPr marL="0" indent="0" algn="r">
+                      <a:pPr algn="r" indent="0" marL="0">
                         <a:buNone/>
                       </a:pPr>
                       <a:r>
@@ -29171,11 +29165,6 @@
                     </a:solidFill>
                   </a:tcPr>
                 </a:tc>
-                <a:extLst>
-                  <a:ext uri="{0D108BD9-81ED-4DB2-BD59-A6C34878D82A}">
-                    <a16:rowId xmlns:a16="http://schemas.microsoft.com/office/drawing/2014/main" val="10004"/>
-                  </a:ext>
-                </a:extLst>
               </a:tr>
               <a:tr h="457200">
                 <a:tc>
@@ -29183,7 +29172,7 @@
                     <a:bodyPr/>
                     <a:lstStyle/>
                     <a:p>
-                      <a:pPr marL="0" indent="0" algn="l">
+                      <a:pPr algn="l" indent="0" marL="0">
                         <a:buNone/>
                       </a:pPr>
                       <a:r>
@@ -29251,7 +29240,7 @@
                     <a:bodyPr/>
                     <a:lstStyle/>
                     <a:p>
-                      <a:pPr marL="0" indent="0" algn="r">
+                      <a:pPr algn="r" indent="0" marL="0">
                         <a:buNone/>
                       </a:pPr>
                       <a:r>
@@ -29319,7 +29308,7 @@
                     <a:bodyPr/>
                     <a:lstStyle/>
                     <a:p>
-                      <a:pPr marL="0" indent="0" algn="r">
+                      <a:pPr algn="r" indent="0" marL="0">
                         <a:buNone/>
                       </a:pPr>
                       <a:r>
@@ -29387,7 +29376,7 @@
                     <a:bodyPr/>
                     <a:lstStyle/>
                     <a:p>
-                      <a:pPr marL="0" indent="0" algn="r">
+                      <a:pPr algn="r" indent="0" marL="0">
                         <a:buNone/>
                       </a:pPr>
                       <a:r>
@@ -29455,7 +29444,7 @@
                     <a:bodyPr/>
                     <a:lstStyle/>
                     <a:p>
-                      <a:pPr marL="0" indent="0" algn="r">
+                      <a:pPr algn="r" indent="0" marL="0">
                         <a:buNone/>
                       </a:pPr>
                       <a:r>
@@ -29518,11 +29507,6 @@
                     </a:solidFill>
                   </a:tcPr>
                 </a:tc>
-                <a:extLst>
-                  <a:ext uri="{0D108BD9-81ED-4DB2-BD59-A6C34878D82A}">
-                    <a16:rowId xmlns:a16="http://schemas.microsoft.com/office/drawing/2014/main" val="10005"/>
-                  </a:ext>
-                </a:extLst>
               </a:tr>
               <a:tr h="457200">
                 <a:tc>
@@ -29530,7 +29514,7 @@
                     <a:bodyPr/>
                     <a:lstStyle/>
                     <a:p>
-                      <a:pPr marL="0" indent="0" algn="l">
+                      <a:pPr algn="l" indent="0" marL="0">
                         <a:buNone/>
                       </a:pPr>
                       <a:r>
@@ -29598,7 +29582,7 @@
                     <a:bodyPr/>
                     <a:lstStyle/>
                     <a:p>
-                      <a:pPr marL="0" indent="0" algn="r">
+                      <a:pPr algn="r" indent="0" marL="0">
                         <a:buNone/>
                       </a:pPr>
                       <a:r>
@@ -29666,7 +29650,7 @@
                     <a:bodyPr/>
                     <a:lstStyle/>
                     <a:p>
-                      <a:pPr marL="0" indent="0" algn="r">
+                      <a:pPr algn="r" indent="0" marL="0">
                         <a:buNone/>
                       </a:pPr>
                       <a:r>
@@ -29734,7 +29718,7 @@
                     <a:bodyPr/>
                     <a:lstStyle/>
                     <a:p>
-                      <a:pPr marL="0" indent="0" algn="r">
+                      <a:pPr algn="r" indent="0" marL="0">
                         <a:buNone/>
                       </a:pPr>
                       <a:r>
@@ -29802,7 +29786,7 @@
                     <a:bodyPr/>
                     <a:lstStyle/>
                     <a:p>
-                      <a:pPr marL="0" indent="0" algn="r">
+                      <a:pPr algn="r" indent="0" marL="0">
                         <a:buNone/>
                       </a:pPr>
                       <a:r>
@@ -29865,11 +29849,6 @@
                     </a:solidFill>
                   </a:tcPr>
                 </a:tc>
-                <a:extLst>
-                  <a:ext uri="{0D108BD9-81ED-4DB2-BD59-A6C34878D82A}">
-                    <a16:rowId xmlns:a16="http://schemas.microsoft.com/office/drawing/2014/main" val="10006"/>
-                  </a:ext>
-                </a:extLst>
               </a:tr>
             </a:tbl>
           </a:graphicData>
@@ -29877,7 +29856,7 @@
       </p:graphicFrame>
       <p:sp>
         <p:nvSpPr>
-          <p:cNvPr id="8" name="Text 6"/>
+          <p:cNvPr id="9" name="Text 6"/>
           <p:cNvSpPr/>
           <p:nvPr/>
         </p:nvSpPr>
@@ -29896,11 +29875,11 @@
           <a:bodyPr wrap="square" lIns="0" tIns="0" rIns="0" bIns="0" rtlCol="0" anchor="ctr"/>
           <a:lstStyle/>
           <a:p>
-            <a:pPr marL="0" indent="0">
-              <a:buNone/>
-            </a:pPr>
-            <a:r>
-              <a:rPr lang="en-US" sz="850" kern="0" spc="100" dirty="0">
+            <a:pPr indent="0" marL="0">
+              <a:buNone/>
+            </a:pPr>
+            <a:r>
+              <a:rPr lang="en-US" sz="850" spc="100" kern="0" dirty="0">
                 <a:solidFill>
                   <a:srgbClr val="5A5570"/>
                 </a:solidFill>
@@ -29935,7 +29914,7 @@
           <a:bodyPr wrap="square" lIns="0" tIns="0" rIns="0" bIns="0" rtlCol="0" anchor="ctr"/>
           <a:lstStyle/>
           <a:p>
-            <a:pPr marL="0" indent="0" algn="r">
+            <a:pPr algn="r" indent="0" marL="0">
               <a:buNone/>
             </a:pPr>
             <a:r>
@@ -29974,7 +29953,7 @@
           <a:bodyPr wrap="square" lIns="0" tIns="0" rIns="0" bIns="0" rtlCol="0" anchor="ctr"/>
           <a:lstStyle/>
           <a:p>
-            <a:pPr marL="0" indent="0" algn="r">
+            <a:pPr algn="r" indent="0" marL="0">
               <a:buNone/>
             </a:pPr>
             <a:r>
@@ -30008,7 +29987,6 @@
         <a:solidFill>
           <a:srgbClr val="0A0A0F"/>
         </a:solidFill>
-        <a:effectLst/>
       </p:bgPr>
     </p:bg>
     <p:spTree>
@@ -30110,11 +30088,11 @@
           <a:bodyPr wrap="square" lIns="0" tIns="0" rIns="0" bIns="0" rtlCol="0" anchor="ctr"/>
           <a:lstStyle/>
           <a:p>
-            <a:pPr marL="0" indent="0" algn="l">
-              <a:buNone/>
-            </a:pPr>
-            <a:r>
-              <a:rPr lang="en-US" sz="1100" b="1" kern="0" spc="300" dirty="0">
+            <a:pPr algn="l" indent="0" marL="0">
+              <a:buNone/>
+            </a:pPr>
+            <a:r>
+              <a:rPr lang="en-US" sz="1100" b="1" spc="300" kern="0" dirty="0">
                 <a:solidFill>
                   <a:srgbClr val="B6C800"/>
                 </a:solidFill>
@@ -30149,7 +30127,7 @@
           <a:bodyPr wrap="square" lIns="0" tIns="0" rIns="0" bIns="0" rtlCol="0" anchor="t"/>
           <a:lstStyle/>
           <a:p>
-            <a:pPr marL="0" indent="0" algn="l">
+            <a:pPr algn="l" indent="0" marL="0">
               <a:lnSpc>
                 <a:spcPct val="100000"/>
               </a:lnSpc>
@@ -30172,7 +30150,7 @@
       </p:sp>
       <p:graphicFrame>
         <p:nvGraphicFramePr>
-          <p:cNvPr id="7" name="Chart 0"/>
+          <p:cNvPr id="7" name="Chart 0" descr=""/>
           <p:cNvGraphicFramePr/>
           <p:nvPr/>
         </p:nvGraphicFramePr>
@@ -30180,9 +30158,9 @@
           <a:off x="548640" y="1920240"/>
           <a:ext cx="11064240" cy="3383280"/>
         </p:xfrm>
-        <a:graphic>
+        <a:graphic xmlns:a="http://schemas.openxmlformats.org/drawingml/2006/main">
           <a:graphicData uri="http://schemas.openxmlformats.org/drawingml/2006/chart">
-            <c:chart xmlns:c="http://schemas.openxmlformats.org/drawingml/2006/chart" xmlns:r="http://schemas.openxmlformats.org/officeDocument/2006/relationships" r:id="rId3"/>
+            <c:chart xmlns:c="http://schemas.openxmlformats.org/drawingml/2006/chart" r:id="rId1"/>
           </a:graphicData>
         </a:graphic>
       </p:graphicFrame>
@@ -30207,7 +30185,7 @@
           <a:bodyPr wrap="square" lIns="0" tIns="0" rIns="0" bIns="0" rtlCol="0" anchor="ctr"/>
           <a:lstStyle/>
           <a:p>
-            <a:pPr marL="0" indent="0" algn="ctr">
+            <a:pPr algn="ctr" indent="0" marL="0">
               <a:buNone/>
             </a:pPr>
             <a:r>
@@ -30221,6 +30199,9 @@
               </a:rPr>
               <a:t>Breakeven Month ~14</a:t>
             </a:r>
+            <a:pPr algn="ctr" indent="0" marL="0">
+              <a:buNone/>
+            </a:pPr>
             <a:r>
               <a:rPr lang="en-US" sz="1350" dirty="0">
                 <a:solidFill>
@@ -30257,11 +30238,11 @@
           <a:bodyPr wrap="square" lIns="0" tIns="0" rIns="0" bIns="0" rtlCol="0" anchor="ctr"/>
           <a:lstStyle/>
           <a:p>
-            <a:pPr marL="0" indent="0">
-              <a:buNone/>
-            </a:pPr>
-            <a:r>
-              <a:rPr lang="en-US" sz="850" kern="0" spc="100" dirty="0">
+            <a:pPr indent="0" marL="0">
+              <a:buNone/>
+            </a:pPr>
+            <a:r>
+              <a:rPr lang="en-US" sz="850" spc="100" kern="0" dirty="0">
                 <a:solidFill>
                   <a:srgbClr val="5A5570"/>
                 </a:solidFill>
@@ -30296,7 +30277,7 @@
           <a:bodyPr wrap="square" lIns="0" tIns="0" rIns="0" bIns="0" rtlCol="0" anchor="ctr"/>
           <a:lstStyle/>
           <a:p>
-            <a:pPr marL="0" indent="0" algn="r">
+            <a:pPr algn="r" indent="0" marL="0">
               <a:buNone/>
             </a:pPr>
             <a:r>
@@ -30335,7 +30316,7 @@
           <a:bodyPr wrap="square" lIns="0" tIns="0" rIns="0" bIns="0" rtlCol="0" anchor="ctr"/>
           <a:lstStyle/>
           <a:p>
-            <a:pPr marL="0" indent="0" algn="r">
+            <a:pPr algn="r" indent="0" marL="0">
               <a:buNone/>
             </a:pPr>
             <a:r>
@@ -30654,319 +30635,4 @@
     </a:ext>
   </a:extLst>
 </a:theme>
-</file>
-
-<file path=ppt/theme/theme2.xml><?xml version="1.0" encoding="utf-8"?>
-<a:theme xmlns:a="http://schemas.openxmlformats.org/drawingml/2006/main" name="Office Theme">
-  <a:themeElements>
-    <a:clrScheme name="Office">
-      <a:dk1>
-        <a:sysClr val="windowText" lastClr="000000"/>
-      </a:dk1>
-      <a:lt1>
-        <a:sysClr val="window" lastClr="FFFFFF"/>
-      </a:lt1>
-      <a:dk2>
-        <a:srgbClr val="0E2841"/>
-      </a:dk2>
-      <a:lt2>
-        <a:srgbClr val="E8E8E8"/>
-      </a:lt2>
-      <a:accent1>
-        <a:srgbClr val="156082"/>
-      </a:accent1>
-      <a:accent2>
-        <a:srgbClr val="E97132"/>
-      </a:accent2>
-      <a:accent3>
-        <a:srgbClr val="196B24"/>
-      </a:accent3>
-      <a:accent4>
-        <a:srgbClr val="0F9ED5"/>
-      </a:accent4>
-      <a:accent5>
-        <a:srgbClr val="A02B93"/>
-      </a:accent5>
-      <a:accent6>
-        <a:srgbClr val="4EA72E"/>
-      </a:accent6>
-      <a:hlink>
-        <a:srgbClr val="467886"/>
-      </a:hlink>
-      <a:folHlink>
-        <a:srgbClr val="96607D"/>
-      </a:folHlink>
-    </a:clrScheme>
-    <a:fontScheme name="Office">
-      <a:majorFont>
-        <a:latin typeface="Aptos Display" panose="02110004020202020204"/>
-        <a:ea typeface=""/>
-        <a:cs typeface=""/>
-        <a:font script="Jpan" typeface="游ゴシック Light"/>
-        <a:font script="Hang" typeface="맑은 고딕"/>
-        <a:font script="Hans" typeface="等线 Light"/>
-        <a:font script="Hant" typeface="新細明體"/>
-        <a:font script="Arab" typeface="Times New Roman"/>
-        <a:font script="Hebr" typeface="Times New Roman"/>
-        <a:font script="Thai" typeface="Angsana New"/>
-        <a:font script="Ethi" typeface="Nyala"/>
-        <a:font script="Beng" typeface="Vrinda"/>
-        <a:font script="Gujr" typeface="Shruti"/>
-        <a:font script="Khmr" typeface="MoolBoran"/>
-        <a:font script="Knda" typeface="Tunga"/>
-        <a:font script="Guru" typeface="Raavi"/>
-        <a:font script="Cans" typeface="Euphemia"/>
-        <a:font script="Cher" typeface="Plantagenet Cherokee"/>
-        <a:font script="Yiii" typeface="Microsoft Yi Baiti"/>
-        <a:font script="Tibt" typeface="Microsoft Himalaya"/>
-        <a:font script="Thaa" typeface="MV Boli"/>
-        <a:font script="Deva" typeface="Mangal"/>
-        <a:font script="Telu" typeface="Gautami"/>
-        <a:font script="Taml" typeface="Latha"/>
-        <a:font script="Syrc" typeface="Estrangelo Edessa"/>
-        <a:font script="Orya" typeface="Kalinga"/>
-        <a:font script="Mlym" typeface="Kartika"/>
-        <a:font script="Laoo" typeface="DokChampa"/>
-        <a:font script="Sinh" typeface="Iskoola Pota"/>
-        <a:font script="Mong" typeface="Mongolian Baiti"/>
-        <a:font script="Viet" typeface="Times New Roman"/>
-        <a:font script="Uigh" typeface="Microsoft Uighur"/>
-        <a:font script="Geor" typeface="Sylfaen"/>
-        <a:font script="Armn" typeface="Arial"/>
-        <a:font script="Bugi" typeface="Leelawadee UI"/>
-        <a:font script="Bopo" typeface="Microsoft JhengHei"/>
-        <a:font script="Java" typeface="Javanese Text"/>
-        <a:font script="Lisu" typeface="Segoe UI"/>
-        <a:font script="Mymr" typeface="Myanmar Text"/>
-        <a:font script="Nkoo" typeface="Ebrima"/>
-        <a:font script="Olck" typeface="Nirmala UI"/>
-        <a:font script="Osma" typeface="Ebrima"/>
-        <a:font script="Phag" typeface="Phagspa"/>
-        <a:font script="Syrn" typeface="Estrangelo Edessa"/>
-        <a:font script="Syrj" typeface="Estrangelo Edessa"/>
-        <a:font script="Syre" typeface="Estrangelo Edessa"/>
-        <a:font script="Sora" typeface="Nirmala UI"/>
-        <a:font script="Tale" typeface="Microsoft Tai Le"/>
-        <a:font script="Talu" typeface="Microsoft New Tai Lue"/>
-        <a:font script="Tfng" typeface="Ebrima"/>
-      </a:majorFont>
-      <a:minorFont>
-        <a:latin typeface="Aptos" panose="02110004020202020204"/>
-        <a:ea typeface=""/>
-        <a:cs typeface=""/>
-        <a:font script="Jpan" typeface="游ゴシック"/>
-        <a:font script="Hang" typeface="맑은 고딕"/>
-        <a:font script="Hans" typeface="等线"/>
-        <a:font script="Hant" typeface="新細明體"/>
-        <a:font script="Arab" typeface="Arial"/>
-        <a:font script="Hebr" typeface="Arial"/>
-        <a:font script="Thai" typeface="Cordia New"/>
-        <a:font script="Ethi" typeface="Nyala"/>
-        <a:font script="Beng" typeface="Vrinda"/>
-        <a:font script="Gujr" typeface="Shruti"/>
-        <a:font script="Khmr" typeface="DaunPenh"/>
-        <a:font script="Knda" typeface="Tunga"/>
-        <a:font script="Guru" typeface="Raavi"/>
-        <a:font script="Cans" typeface="Euphemia"/>
-        <a:font script="Cher" typeface="Plantagenet Cherokee"/>
-        <a:font script="Yiii" typeface="Microsoft Yi Baiti"/>
-        <a:font script="Tibt" typeface="Microsoft Himalaya"/>
-        <a:font script="Thaa" typeface="MV Boli"/>
-        <a:font script="Deva" typeface="Mangal"/>
-        <a:font script="Telu" typeface="Gautami"/>
-        <a:font script="Taml" typeface="Latha"/>
-        <a:font script="Syrc" typeface="Estrangelo Edessa"/>
-        <a:font script="Orya" typeface="Kalinga"/>
-        <a:font script="Mlym" typeface="Kartika"/>
-        <a:font script="Laoo" typeface="DokChampa"/>
-        <a:font script="Sinh" typeface="Iskoola Pota"/>
-        <a:font script="Mong" typeface="Mongolian Baiti"/>
-        <a:font script="Viet" typeface="Arial"/>
-        <a:font script="Uigh" typeface="Microsoft Uighur"/>
-        <a:font script="Geor" typeface="Sylfaen"/>
-        <a:font script="Armn" typeface="Arial"/>
-        <a:font script="Bugi" typeface="Leelawadee UI"/>
-        <a:font script="Bopo" typeface="Microsoft JhengHei"/>
-        <a:font script="Java" typeface="Javanese Text"/>
-        <a:font script="Lisu" typeface="Segoe UI"/>
-        <a:font script="Mymr" typeface="Myanmar Text"/>
-        <a:font script="Nkoo" typeface="Ebrima"/>
-        <a:font script="Olck" typeface="Nirmala UI"/>
-        <a:font script="Osma" typeface="Ebrima"/>
-        <a:font script="Phag" typeface="Phagspa"/>
-        <a:font script="Syrn" typeface="Estrangelo Edessa"/>
-        <a:font script="Syrj" typeface="Estrangelo Edessa"/>
-        <a:font script="Syre" typeface="Estrangelo Edessa"/>
-        <a:font script="Sora" typeface="Nirmala UI"/>
-        <a:font script="Tale" typeface="Microsoft Tai Le"/>
-        <a:font script="Talu" typeface="Microsoft New Tai Lue"/>
-        <a:font script="Tfng" typeface="Ebrima"/>
-      </a:minorFont>
-    </a:fontScheme>
-    <a:fmtScheme name="Office">
-      <a:fillStyleLst>
-        <a:solidFill>
-          <a:schemeClr val="phClr"/>
-        </a:solidFill>
-        <a:gradFill rotWithShape="1">
-          <a:gsLst>
-            <a:gs pos="0">
-              <a:schemeClr val="phClr">
-                <a:lumMod val="110000"/>
-                <a:satMod val="105000"/>
-                <a:tint val="67000"/>
-              </a:schemeClr>
-            </a:gs>
-            <a:gs pos="50000">
-              <a:schemeClr val="phClr">
-                <a:lumMod val="105000"/>
-                <a:satMod val="103000"/>
-                <a:tint val="73000"/>
-              </a:schemeClr>
-            </a:gs>
-            <a:gs pos="100000">
-              <a:schemeClr val="phClr">
-                <a:lumMod val="105000"/>
-                <a:satMod val="109000"/>
-                <a:tint val="81000"/>
-              </a:schemeClr>
-            </a:gs>
-          </a:gsLst>
-          <a:lin ang="5400000" scaled="0"/>
-        </a:gradFill>
-        <a:gradFill rotWithShape="1">
-          <a:gsLst>
-            <a:gs pos="0">
-              <a:schemeClr val="phClr">
-                <a:satMod val="103000"/>
-                <a:lumMod val="102000"/>
-                <a:tint val="94000"/>
-              </a:schemeClr>
-            </a:gs>
-            <a:gs pos="50000">
-              <a:schemeClr val="phClr">
-                <a:satMod val="110000"/>
-                <a:lumMod val="100000"/>
-                <a:shade val="100000"/>
-              </a:schemeClr>
-            </a:gs>
-            <a:gs pos="100000">
-              <a:schemeClr val="phClr">
-                <a:lumMod val="99000"/>
-                <a:satMod val="120000"/>
-                <a:shade val="78000"/>
-              </a:schemeClr>
-            </a:gs>
-          </a:gsLst>
-          <a:lin ang="5400000" scaled="0"/>
-        </a:gradFill>
-      </a:fillStyleLst>
-      <a:lnStyleLst>
-        <a:ln w="12700" cap="flat" cmpd="sng" algn="ctr">
-          <a:solidFill>
-            <a:schemeClr val="phClr"/>
-          </a:solidFill>
-          <a:prstDash val="solid"/>
-          <a:miter lim="800000"/>
-        </a:ln>
-        <a:ln w="19050" cap="flat" cmpd="sng" algn="ctr">
-          <a:solidFill>
-            <a:schemeClr val="phClr"/>
-          </a:solidFill>
-          <a:prstDash val="solid"/>
-          <a:miter lim="800000"/>
-        </a:ln>
-        <a:ln w="25400" cap="flat" cmpd="sng" algn="ctr">
-          <a:solidFill>
-            <a:schemeClr val="phClr"/>
-          </a:solidFill>
-          <a:prstDash val="solid"/>
-          <a:miter lim="800000"/>
-        </a:ln>
-      </a:lnStyleLst>
-      <a:effectStyleLst>
-        <a:effectStyle>
-          <a:effectLst/>
-        </a:effectStyle>
-        <a:effectStyle>
-          <a:effectLst/>
-        </a:effectStyle>
-        <a:effectStyle>
-          <a:effectLst>
-            <a:outerShdw blurRad="57150" dist="19050" dir="5400000" algn="ctr" rotWithShape="0">
-              <a:srgbClr val="000000">
-                <a:alpha val="63000"/>
-              </a:srgbClr>
-            </a:outerShdw>
-          </a:effectLst>
-        </a:effectStyle>
-      </a:effectStyleLst>
-      <a:bgFillStyleLst>
-        <a:solidFill>
-          <a:schemeClr val="phClr"/>
-        </a:solidFill>
-        <a:solidFill>
-          <a:schemeClr val="phClr">
-            <a:tint val="95000"/>
-            <a:satMod val="170000"/>
-          </a:schemeClr>
-        </a:solidFill>
-        <a:gradFill rotWithShape="1">
-          <a:gsLst>
-            <a:gs pos="0">
-              <a:schemeClr val="phClr">
-                <a:tint val="93000"/>
-                <a:satMod val="150000"/>
-                <a:shade val="98000"/>
-                <a:lumMod val="102000"/>
-              </a:schemeClr>
-            </a:gs>
-            <a:gs pos="50000">
-              <a:schemeClr val="phClr">
-                <a:tint val="98000"/>
-                <a:satMod val="130000"/>
-                <a:shade val="90000"/>
-                <a:lumMod val="103000"/>
-              </a:schemeClr>
-            </a:gs>
-            <a:gs pos="100000">
-              <a:schemeClr val="phClr">
-                <a:shade val="63000"/>
-                <a:satMod val="120000"/>
-              </a:schemeClr>
-            </a:gs>
-          </a:gsLst>
-          <a:lin ang="5400000" scaled="0"/>
-        </a:gradFill>
-      </a:bgFillStyleLst>
-    </a:fmtScheme>
-  </a:themeElements>
-  <a:objectDefaults>
-    <a:lnDef>
-      <a:spPr/>
-      <a:bodyPr/>
-      <a:lstStyle/>
-      <a:style>
-        <a:lnRef idx="2">
-          <a:schemeClr val="accent1"/>
-        </a:lnRef>
-        <a:fillRef idx="0">
-          <a:schemeClr val="accent1"/>
-        </a:fillRef>
-        <a:effectRef idx="1">
-          <a:schemeClr val="accent1"/>
-        </a:effectRef>
-        <a:fontRef idx="minor">
-          <a:schemeClr val="tx1"/>
-        </a:fontRef>
-      </a:style>
-    </a:lnDef>
-  </a:objectDefaults>
-  <a:extraClrSchemeLst/>
-  <a:extLst>
-    <a:ext uri="{05A4C25C-085E-4340-85A3-A5531E510DB2}">
-      <thm15:themeFamily xmlns:thm15="http://schemas.microsoft.com/office/thememl/2012/main" name="Office Theme" id="{2E142A2C-CD16-42D6-873A-C26D2A0506FA}" vid="{1BDDFF52-6CD6-40A5-AB3C-68EB2F1E4D0A}"/>
-    </a:ext>
-  </a:extLst>
-</a:theme>
 </file>
--- a/Playa-Vista-ASC-Investor-Deck.pptx
+++ b/Playa-Vista-ASC-Investor-Deck.pptx
@@ -3534,8 +3534,8 @@
         </p:nvSpPr>
         <p:spPr>
           <a:xfrm>
-            <a:off x="868680" y="2039112"/>
-            <a:ext cx="4114800" cy="278892"/>
+            <a:off x="868680" y="2020824"/>
+            <a:ext cx="4114800" cy="246888"/>
           </a:xfrm>
           <a:prstGeom prst="rect">
             <a:avLst/>
@@ -3573,8 +3573,8 @@
         </p:nvSpPr>
         <p:spPr>
           <a:xfrm>
-            <a:off x="4892040" y="2039112"/>
-            <a:ext cx="1463040" cy="278892"/>
+            <a:off x="4892040" y="2020824"/>
+            <a:ext cx="1463040" cy="246888"/>
           </a:xfrm>
           <a:prstGeom prst="rect">
             <a:avLst/>
@@ -3612,8 +3612,8 @@
         </p:nvSpPr>
         <p:spPr>
           <a:xfrm>
-            <a:off x="6400800" y="2039112"/>
-            <a:ext cx="457200" cy="278892"/>
+            <a:off x="6400800" y="2020824"/>
+            <a:ext cx="457200" cy="246888"/>
           </a:xfrm>
           <a:prstGeom prst="rect">
             <a:avLst/>
@@ -3651,8 +3651,8 @@
         </p:nvSpPr>
         <p:spPr>
           <a:xfrm>
-            <a:off x="868680" y="2359152"/>
-            <a:ext cx="4114800" cy="278892"/>
+            <a:off x="868680" y="2301545"/>
+            <a:ext cx="4114800" cy="246888"/>
           </a:xfrm>
           <a:prstGeom prst="rect">
             <a:avLst/>
@@ -3690,8 +3690,8 @@
         </p:nvSpPr>
         <p:spPr>
           <a:xfrm>
-            <a:off x="4892040" y="2359152"/>
-            <a:ext cx="1463040" cy="278892"/>
+            <a:off x="4892040" y="2301545"/>
+            <a:ext cx="1463040" cy="246888"/>
           </a:xfrm>
           <a:prstGeom prst="rect">
             <a:avLst/>
@@ -3729,8 +3729,8 @@
         </p:nvSpPr>
         <p:spPr>
           <a:xfrm>
-            <a:off x="548640" y="2660904"/>
-            <a:ext cx="6492240" cy="315468"/>
+            <a:off x="548640" y="2563978"/>
+            <a:ext cx="6492240" cy="283464"/>
           </a:xfrm>
           <a:prstGeom prst="rect">
             <a:avLst/>
@@ -3749,8 +3749,8 @@
         </p:nvSpPr>
         <p:spPr>
           <a:xfrm>
-            <a:off x="868680" y="2679192"/>
-            <a:ext cx="4114800" cy="278892"/>
+            <a:off x="868680" y="2582266"/>
+            <a:ext cx="4114800" cy="246888"/>
           </a:xfrm>
           <a:prstGeom prst="rect">
             <a:avLst/>
@@ -3788,8 +3788,8 @@
         </p:nvSpPr>
         <p:spPr>
           <a:xfrm>
-            <a:off x="4892040" y="2679192"/>
-            <a:ext cx="1463040" cy="278892"/>
+            <a:off x="4892040" y="2582266"/>
+            <a:ext cx="1463040" cy="246888"/>
           </a:xfrm>
           <a:prstGeom prst="rect">
             <a:avLst/>
@@ -3827,8 +3827,8 @@
         </p:nvSpPr>
         <p:spPr>
           <a:xfrm>
-            <a:off x="6400800" y="2679192"/>
-            <a:ext cx="457200" cy="278892"/>
+            <a:off x="6400800" y="2582266"/>
+            <a:ext cx="457200" cy="246888"/>
           </a:xfrm>
           <a:prstGeom prst="rect">
             <a:avLst/>
@@ -3866,8 +3866,8 @@
         </p:nvSpPr>
         <p:spPr>
           <a:xfrm>
-            <a:off x="868680" y="2999232"/>
-            <a:ext cx="4114800" cy="278892"/>
+            <a:off x="868680" y="2862986"/>
+            <a:ext cx="4114800" cy="246888"/>
           </a:xfrm>
           <a:prstGeom prst="rect">
             <a:avLst/>
@@ -3905,8 +3905,8 @@
         </p:nvSpPr>
         <p:spPr>
           <a:xfrm>
-            <a:off x="4892040" y="2999232"/>
-            <a:ext cx="1463040" cy="278892"/>
+            <a:off x="4892040" y="2862986"/>
+            <a:ext cx="1463040" cy="246888"/>
           </a:xfrm>
           <a:prstGeom prst="rect">
             <a:avLst/>
@@ -3944,8 +3944,8 @@
         </p:nvSpPr>
         <p:spPr>
           <a:xfrm>
-            <a:off x="868680" y="3319272"/>
-            <a:ext cx="4114800" cy="278892"/>
+            <a:off x="868680" y="3143707"/>
+            <a:ext cx="4114800" cy="246888"/>
           </a:xfrm>
           <a:prstGeom prst="rect">
             <a:avLst/>
@@ -3983,8 +3983,8 @@
         </p:nvSpPr>
         <p:spPr>
           <a:xfrm>
-            <a:off x="4892040" y="3319272"/>
-            <a:ext cx="1463040" cy="278892"/>
+            <a:off x="4892040" y="3143707"/>
+            <a:ext cx="1463040" cy="246888"/>
           </a:xfrm>
           <a:prstGeom prst="rect">
             <a:avLst/>
@@ -4022,8 +4022,8 @@
         </p:nvSpPr>
         <p:spPr>
           <a:xfrm>
-            <a:off x="868680" y="3639312"/>
-            <a:ext cx="4114800" cy="278892"/>
+            <a:off x="868680" y="3424428"/>
+            <a:ext cx="4114800" cy="246888"/>
           </a:xfrm>
           <a:prstGeom prst="rect">
             <a:avLst/>
@@ -4061,8 +4061,8 @@
         </p:nvSpPr>
         <p:spPr>
           <a:xfrm>
-            <a:off x="4892040" y="3639312"/>
-            <a:ext cx="1463040" cy="278892"/>
+            <a:off x="4892040" y="3424428"/>
+            <a:ext cx="1463040" cy="246888"/>
           </a:xfrm>
           <a:prstGeom prst="rect">
             <a:avLst/>
@@ -4100,8 +4100,8 @@
         </p:nvSpPr>
         <p:spPr>
           <a:xfrm>
-            <a:off x="868680" y="3959352"/>
-            <a:ext cx="4114800" cy="278892"/>
+            <a:off x="868680" y="3705149"/>
+            <a:ext cx="4114800" cy="246888"/>
           </a:xfrm>
           <a:prstGeom prst="rect">
             <a:avLst/>
@@ -4139,8 +4139,8 @@
         </p:nvSpPr>
         <p:spPr>
           <a:xfrm>
-            <a:off x="4892040" y="3959352"/>
-            <a:ext cx="1463040" cy="278892"/>
+            <a:off x="4892040" y="3705149"/>
+            <a:ext cx="1463040" cy="246888"/>
           </a:xfrm>
           <a:prstGeom prst="rect">
             <a:avLst/>
@@ -4178,8 +4178,8 @@
         </p:nvSpPr>
         <p:spPr>
           <a:xfrm>
-            <a:off x="868680" y="4279392"/>
-            <a:ext cx="4114800" cy="278892"/>
+            <a:off x="868680" y="3985870"/>
+            <a:ext cx="4114800" cy="246888"/>
           </a:xfrm>
           <a:prstGeom prst="rect">
             <a:avLst/>
@@ -4217,8 +4217,8 @@
         </p:nvSpPr>
         <p:spPr>
           <a:xfrm>
-            <a:off x="4892040" y="4279392"/>
-            <a:ext cx="1463040" cy="278892"/>
+            <a:off x="4892040" y="3985870"/>
+            <a:ext cx="1463040" cy="246888"/>
           </a:xfrm>
           <a:prstGeom prst="rect">
             <a:avLst/>
@@ -4256,8 +4256,8 @@
         </p:nvSpPr>
         <p:spPr>
           <a:xfrm>
-            <a:off x="868680" y="4599432"/>
-            <a:ext cx="4114800" cy="278892"/>
+            <a:off x="868680" y="4266590"/>
+            <a:ext cx="4114800" cy="246888"/>
           </a:xfrm>
           <a:prstGeom prst="rect">
             <a:avLst/>
@@ -4295,8 +4295,8 @@
         </p:nvSpPr>
         <p:spPr>
           <a:xfrm>
-            <a:off x="4892040" y="4599432"/>
-            <a:ext cx="1463040" cy="278892"/>
+            <a:off x="4892040" y="4266590"/>
+            <a:ext cx="1463040" cy="246888"/>
           </a:xfrm>
           <a:prstGeom prst="rect">
             <a:avLst/>
@@ -4334,8 +4334,8 @@
         </p:nvSpPr>
         <p:spPr>
           <a:xfrm>
-            <a:off x="868680" y="4919472"/>
-            <a:ext cx="4114800" cy="278892"/>
+            <a:off x="868680" y="4547311"/>
+            <a:ext cx="4114800" cy="246888"/>
           </a:xfrm>
           <a:prstGeom prst="rect">
             <a:avLst/>
@@ -4373,8 +4373,8 @@
         </p:nvSpPr>
         <p:spPr>
           <a:xfrm>
-            <a:off x="4892040" y="4919472"/>
-            <a:ext cx="1463040" cy="278892"/>
+            <a:off x="4892040" y="4547311"/>
+            <a:ext cx="1463040" cy="246888"/>
           </a:xfrm>
           <a:prstGeom prst="rect">
             <a:avLst/>
@@ -4412,8 +4412,8 @@
         </p:nvSpPr>
         <p:spPr>
           <a:xfrm>
-            <a:off x="868680" y="5239512"/>
-            <a:ext cx="4114800" cy="278892"/>
+            <a:off x="868680" y="4828032"/>
+            <a:ext cx="4114800" cy="246888"/>
           </a:xfrm>
           <a:prstGeom prst="rect">
             <a:avLst/>
@@ -4451,8 +4451,8 @@
         </p:nvSpPr>
         <p:spPr>
           <a:xfrm>
-            <a:off x="4892040" y="5239512"/>
-            <a:ext cx="1463040" cy="278892"/>
+            <a:off x="4892040" y="4828032"/>
+            <a:ext cx="1463040" cy="246888"/>
           </a:xfrm>
           <a:prstGeom prst="rect">
             <a:avLst/>
@@ -4490,8 +4490,8 @@
         </p:nvSpPr>
         <p:spPr>
           <a:xfrm>
-            <a:off x="548640" y="5541264"/>
-            <a:ext cx="6492240" cy="315468"/>
+            <a:off x="548640" y="5090465"/>
+            <a:ext cx="6492240" cy="283464"/>
           </a:xfrm>
           <a:prstGeom prst="rect">
             <a:avLst/>
@@ -4510,8 +4510,8 @@
         </p:nvSpPr>
         <p:spPr>
           <a:xfrm>
-            <a:off x="868680" y="5559552"/>
-            <a:ext cx="4114800" cy="278892"/>
+            <a:off x="868680" y="5108753"/>
+            <a:ext cx="4114800" cy="246888"/>
           </a:xfrm>
           <a:prstGeom prst="rect">
             <a:avLst/>
@@ -4549,8 +4549,8 @@
         </p:nvSpPr>
         <p:spPr>
           <a:xfrm>
-            <a:off x="4892040" y="5559552"/>
-            <a:ext cx="1463040" cy="278892"/>
+            <a:off x="4892040" y="5108753"/>
+            <a:ext cx="1463040" cy="246888"/>
           </a:xfrm>
           <a:prstGeom prst="rect">
             <a:avLst/>
@@ -4588,8 +4588,8 @@
         </p:nvSpPr>
         <p:spPr>
           <a:xfrm>
-            <a:off x="6400800" y="5559552"/>
-            <a:ext cx="457200" cy="278892"/>
+            <a:off x="6400800" y="5108753"/>
+            <a:ext cx="457200" cy="246888"/>
           </a:xfrm>
           <a:prstGeom prst="rect">
             <a:avLst/>
@@ -4627,7 +4627,7 @@
         </p:nvSpPr>
         <p:spPr>
           <a:xfrm>
-            <a:off x="548640" y="5925312"/>
+            <a:off x="548640" y="5435194"/>
             <a:ext cx="6492240" cy="18288"/>
           </a:xfrm>
           <a:prstGeom prst="rect">
@@ -4647,7 +4647,7 @@
         </p:nvSpPr>
         <p:spPr>
           <a:xfrm>
-            <a:off x="868680" y="6025896"/>
+            <a:off x="868680" y="5535778"/>
             <a:ext cx="4297680" cy="384048"/>
           </a:xfrm>
           <a:prstGeom prst="rect">
@@ -4700,7 +4700,7 @@
         </p:nvSpPr>
         <p:spPr>
           <a:xfrm>
-            <a:off x="4892040" y="6025896"/>
+            <a:off x="4892040" y="5535778"/>
             <a:ext cx="1463040" cy="384048"/>
           </a:xfrm>
           <a:prstGeom prst="rect">
@@ -4739,7 +4739,7 @@
         </p:nvSpPr>
         <p:spPr>
           <a:xfrm>
-            <a:off x="6400800" y="6025896"/>
+            <a:off x="6400800" y="5535778"/>
             <a:ext cx="457200" cy="384048"/>
           </a:xfrm>
           <a:prstGeom prst="rect">
